--- a/PanNET_Pipeline_Presentation.pptx
+++ b/PanNET_Pipeline_Presentation.pptx
@@ -9500,6 +9500,7 @@
               </a:defRPr>
             </a:pPr>
             <a:r>
+              <a:rPr dirty="0"/>
               <a:t>KEY INSIGHT</a:t>
             </a:r>
           </a:p>
@@ -9512,6 +9513,7 @@
               </a:defRPr>
             </a:pPr>
             <a:r>
+              <a:rPr dirty="0"/>
               <a:t>Infiltration is a SPATIAL property — it depends on HOW tumor interacts with surrounding tissue (NNP), not just what tumor cells look like individually. This is why GNNs are needed: they model spatial relationships between tissue patches.</a:t>
             </a:r>
           </a:p>
@@ -9559,7 +9561,7 @@
         <p:spPr>
           <a:xfrm>
             <a:off x="457200" y="274320"/>
-            <a:ext cx="10972800" cy="548640"/>
+            <a:ext cx="10972800" cy="523220"/>
           </a:xfrm>
           <a:prstGeom prst="rect">
             <a:avLst/>
@@ -9581,7 +9583,8 @@
               </a:defRPr>
             </a:pPr>
             <a:r>
-              <a:t>End-to-End Pipeline Overview</a:t>
+              <a:rPr dirty="0"/>
+              <a:t>Pipeline Overview</a:t>
             </a:r>
           </a:p>
         </p:txBody>
@@ -9753,10 +9756,14 @@
               </a:defRPr>
             </a:pPr>
             <a:r>
+              <a:rPr dirty="0"/>
               <a:t>Tissue</a:t>
             </a:r>
-            <a:br/>
-            <a:r>
+            <a:br>
+              <a:rPr dirty="0"/>
+            </a:br>
+            <a:r>
+              <a:rPr dirty="0"/>
               <a:t>Segmentation</a:t>
             </a:r>
           </a:p>
@@ -9769,10 +9776,14 @@
               </a:defRPr>
             </a:pPr>
             <a:r>
+              <a:rPr dirty="0" err="1"/>
               <a:t>GrandQC</a:t>
             </a:r>
-            <a:br/>
-            <a:r>
+            <a:br>
+              <a:rPr dirty="0"/>
+            </a:br>
+            <a:r>
+              <a:rPr dirty="0"/>
               <a:t>≥60% tissue</a:t>
             </a:r>
           </a:p>
@@ -9871,10 +9882,14 @@
               </a:defRPr>
             </a:pPr>
             <a:r>
+              <a:rPr dirty="0"/>
               <a:t>Patch</a:t>
             </a:r>
-            <a:br/>
-            <a:r>
+            <a:br>
+              <a:rPr dirty="0"/>
+            </a:br>
+            <a:r>
+              <a:rPr dirty="0"/>
               <a:t>Extraction</a:t>
             </a:r>
           </a:p>
@@ -9887,10 +9902,18 @@
               </a:defRPr>
             </a:pPr>
             <a:r>
-              <a:t>1024×1024 px</a:t>
-            </a:r>
-            <a:br/>
-            <a:r>
+              <a:rPr dirty="0"/>
+              <a:t>1024×1024 </a:t>
+            </a:r>
+            <a:r>
+              <a:rPr dirty="0" err="1"/>
+              <a:t>px</a:t>
+            </a:r>
+            <a:br>
+              <a:rPr dirty="0"/>
+            </a:br>
+            <a:r>
+              <a:rPr dirty="0"/>
               <a:t>@ 40x mag</a:t>
             </a:r>
           </a:p>
@@ -9989,10 +10012,14 @@
               </a:defRPr>
             </a:pPr>
             <a:r>
+              <a:rPr dirty="0"/>
               <a:t>VirChow2</a:t>
             </a:r>
-            <a:br/>
-            <a:r>
+            <a:br>
+              <a:rPr dirty="0"/>
+            </a:br>
+            <a:r>
+              <a:rPr dirty="0"/>
               <a:t>Encoder</a:t>
             </a:r>
           </a:p>
@@ -10005,10 +10032,14 @@
               </a:defRPr>
             </a:pPr>
             <a:r>
+              <a:rPr dirty="0"/>
               <a:t>Foundation model</a:t>
             </a:r>
-            <a:br/>
-            <a:r>
+            <a:br>
+              <a:rPr dirty="0"/>
+            </a:br>
+            <a:r>
+              <a:rPr dirty="0"/>
               <a:t>→ 1280-d vector</a:t>
             </a:r>
           </a:p>
@@ -10107,10 +10138,14 @@
               </a:defRPr>
             </a:pPr>
             <a:r>
+              <a:rPr dirty="0"/>
               <a:t>H5 File</a:t>
             </a:r>
-            <a:br/>
-            <a:r>
+            <a:br>
+              <a:rPr dirty="0"/>
+            </a:br>
+            <a:r>
+              <a:rPr dirty="0"/>
               <a:t>Output</a:t>
             </a:r>
           </a:p>
@@ -10123,10 +10158,14 @@
               </a:defRPr>
             </a:pPr>
             <a:r>
+              <a:rPr dirty="0"/>
               <a:t>features (N,1280)</a:t>
             </a:r>
-            <a:br/>
-            <a:r>
+            <a:br>
+              <a:rPr dirty="0"/>
+            </a:br>
+            <a:r>
+              <a:rPr dirty="0"/>
               <a:t>coords (N,2)</a:t>
             </a:r>
           </a:p>
@@ -10297,27 +10336,15 @@
               </a:defRPr>
             </a:pPr>
             <a:r>
+              <a:rPr dirty="0" err="1"/>
               <a:t>AutoEncoder</a:t>
             </a:r>
-            <a:br/>
-            <a:r>
+            <a:br>
+              <a:rPr dirty="0"/>
+            </a:br>
+            <a:r>
+              <a:rPr dirty="0"/>
               <a:t>(frozen)</a:t>
-            </a:r>
-          </a:p>
-          <a:p>
-            <a:pPr algn="ctr">
-              <a:defRPr sz="1100">
-                <a:solidFill>
-                  <a:srgbClr val="555566"/>
-                </a:solidFill>
-              </a:defRPr>
-            </a:pPr>
-            <a:r>
-              <a:t>1280 → 768 → 512</a:t>
-            </a:r>
-            <a:br/>
-            <a:r>
-              <a:t>→ 256-d latent</a:t>
             </a:r>
           </a:p>
         </p:txBody>
@@ -10415,10 +10442,14 @@
               </a:defRPr>
             </a:pPr>
             <a:r>
+              <a:rPr dirty="0"/>
               <a:t>Patch</a:t>
             </a:r>
-            <a:br/>
-            <a:r>
+            <a:br>
+              <a:rPr dirty="0"/>
+            </a:br>
+            <a:r>
+              <a:rPr dirty="0"/>
               <a:t>Classifier</a:t>
             </a:r>
           </a:p>
@@ -10431,11 +10462,23 @@
               </a:defRPr>
             </a:pPr>
             <a:r>
+              <a:rPr dirty="0"/>
               <a:t>3-class MLP</a:t>
             </a:r>
-            <a:br/>
-            <a:r>
-              <a:t>Stroma/PanNET/Normal</a:t>
+            <a:br>
+              <a:rPr dirty="0"/>
+            </a:br>
+            <a:r>
+              <a:rPr dirty="0"/>
+              <a:t>Stroma/</a:t>
+            </a:r>
+            <a:r>
+              <a:rPr dirty="0" err="1"/>
+              <a:t>PanNET</a:t>
+            </a:r>
+            <a:r>
+              <a:rPr dirty="0"/>
+              <a:t>/Normal</a:t>
             </a:r>
           </a:p>
         </p:txBody>
@@ -10533,10 +10576,14 @@
               </a:defRPr>
             </a:pPr>
             <a:r>
+              <a:rPr dirty="0"/>
               <a:t>Border</a:t>
             </a:r>
-            <a:br/>
-            <a:r>
+            <a:br>
+              <a:rPr dirty="0"/>
+            </a:br>
+            <a:r>
+              <a:rPr dirty="0"/>
               <a:t>Detection</a:t>
             </a:r>
           </a:p>
@@ -10549,10 +10596,14 @@
               </a:defRPr>
             </a:pPr>
             <a:r>
+              <a:rPr dirty="0"/>
               <a:t>8-connected check</a:t>
             </a:r>
-            <a:br/>
-            <a:r>
+            <a:br>
+              <a:rPr dirty="0"/>
+            </a:br>
+            <a:r>
+              <a:rPr dirty="0"/>
               <a:t>+ NNP neighbors</a:t>
             </a:r>
           </a:p>
@@ -11461,8 +11512,8 @@
         </p:nvSpPr>
         <p:spPr>
           <a:xfrm>
-            <a:off x="457200" y="274320"/>
-            <a:ext cx="4572000" cy="548640"/>
+            <a:off x="457199" y="274320"/>
+            <a:ext cx="6205993" cy="523220"/>
           </a:xfrm>
           <a:prstGeom prst="rect">
             <a:avLst/>
@@ -11484,7 +11535,16 @@
               </a:defRPr>
             </a:pPr>
             <a:r>
-              <a:t>Stage 1: WSI → Feature Extraction</a:t>
+              <a:rPr dirty="0"/>
+              <a:t>Stage 1: </a:t>
+            </a:r>
+            <a:r>
+              <a:rPr lang="tr-TR" dirty="0" err="1"/>
+              <a:t>Patch</a:t>
+            </a:r>
+            <a:r>
+              <a:rPr dirty="0"/>
+              <a:t> → Feature Extraction</a:t>
             </a:r>
           </a:p>
         </p:txBody>
@@ -11497,7 +11557,7 @@
         </p:nvSpPr>
         <p:spPr>
           <a:xfrm>
-            <a:off x="457200" y="1188720"/>
+            <a:off x="457199" y="1663698"/>
             <a:ext cx="3200400" cy="2286000"/>
           </a:xfrm>
           <a:prstGeom prst="roundRect">
@@ -11551,7 +11611,7 @@
         </p:nvSpPr>
         <p:spPr>
           <a:xfrm>
-            <a:off x="640080" y="1828800"/>
+            <a:off x="768095" y="2235200"/>
             <a:ext cx="457200" cy="292608"/>
           </a:xfrm>
           <a:prstGeom prst="roundRect">
@@ -11595,7 +11655,7 @@
         </p:nvSpPr>
         <p:spPr>
           <a:xfrm>
-            <a:off x="1170432" y="1828800"/>
+            <a:off x="1298447" y="2235200"/>
             <a:ext cx="457200" cy="292608"/>
           </a:xfrm>
           <a:prstGeom prst="roundRect">
@@ -11639,7 +11699,7 @@
         </p:nvSpPr>
         <p:spPr>
           <a:xfrm>
-            <a:off x="1700784" y="1828800"/>
+            <a:off x="1828799" y="2235200"/>
             <a:ext cx="457200" cy="292608"/>
           </a:xfrm>
           <a:prstGeom prst="roundRect">
@@ -11683,7 +11743,7 @@
         </p:nvSpPr>
         <p:spPr>
           <a:xfrm>
-            <a:off x="2231136" y="1828800"/>
+            <a:off x="2359151" y="2235200"/>
             <a:ext cx="457200" cy="292608"/>
           </a:xfrm>
           <a:prstGeom prst="roundRect">
@@ -11727,7 +11787,7 @@
         </p:nvSpPr>
         <p:spPr>
           <a:xfrm>
-            <a:off x="2761488" y="1828800"/>
+            <a:off x="2889503" y="2235200"/>
             <a:ext cx="457200" cy="292608"/>
           </a:xfrm>
           <a:prstGeom prst="roundRect">
@@ -11771,7 +11831,7 @@
         </p:nvSpPr>
         <p:spPr>
           <a:xfrm>
-            <a:off x="640080" y="2194560"/>
+            <a:off x="768095" y="2600960"/>
             <a:ext cx="457200" cy="292608"/>
           </a:xfrm>
           <a:prstGeom prst="roundRect">
@@ -11815,7 +11875,7 @@
         </p:nvSpPr>
         <p:spPr>
           <a:xfrm>
-            <a:off x="1170432" y="2194560"/>
+            <a:off x="1298447" y="2600960"/>
             <a:ext cx="457200" cy="292608"/>
           </a:xfrm>
           <a:prstGeom prst="roundRect">
@@ -11859,7 +11919,7 @@
         </p:nvSpPr>
         <p:spPr>
           <a:xfrm>
-            <a:off x="1700784" y="2194560"/>
+            <a:off x="1828799" y="2600960"/>
             <a:ext cx="457200" cy="292608"/>
           </a:xfrm>
           <a:prstGeom prst="roundRect">
@@ -11903,7 +11963,7 @@
         </p:nvSpPr>
         <p:spPr>
           <a:xfrm>
-            <a:off x="2231136" y="2194560"/>
+            <a:off x="2359151" y="2600960"/>
             <a:ext cx="457200" cy="292608"/>
           </a:xfrm>
           <a:prstGeom prst="roundRect">
@@ -11947,7 +12007,7 @@
         </p:nvSpPr>
         <p:spPr>
           <a:xfrm>
-            <a:off x="2761488" y="2194560"/>
+            <a:off x="2889503" y="2600960"/>
             <a:ext cx="457200" cy="292608"/>
           </a:xfrm>
           <a:prstGeom prst="roundRect">
@@ -11991,7 +12051,7 @@
         </p:nvSpPr>
         <p:spPr>
           <a:xfrm>
-            <a:off x="640080" y="2560320"/>
+            <a:off x="768095" y="2966720"/>
             <a:ext cx="457200" cy="292608"/>
           </a:xfrm>
           <a:prstGeom prst="roundRect">
@@ -12035,7 +12095,7 @@
         </p:nvSpPr>
         <p:spPr>
           <a:xfrm>
-            <a:off x="1170432" y="2560320"/>
+            <a:off x="1298447" y="2966720"/>
             <a:ext cx="457200" cy="292608"/>
           </a:xfrm>
           <a:prstGeom prst="roundRect">
@@ -12079,7 +12139,7 @@
         </p:nvSpPr>
         <p:spPr>
           <a:xfrm>
-            <a:off x="1700784" y="2560320"/>
+            <a:off x="1828799" y="2966720"/>
             <a:ext cx="457200" cy="292608"/>
           </a:xfrm>
           <a:prstGeom prst="roundRect">
@@ -12123,7 +12183,7 @@
         </p:nvSpPr>
         <p:spPr>
           <a:xfrm>
-            <a:off x="2231136" y="2560320"/>
+            <a:off x="2359151" y="2966720"/>
             <a:ext cx="457200" cy="292608"/>
           </a:xfrm>
           <a:prstGeom prst="roundRect">
@@ -12167,7 +12227,7 @@
         </p:nvSpPr>
         <p:spPr>
           <a:xfrm>
-            <a:off x="2761488" y="2560320"/>
+            <a:off x="2889503" y="2966720"/>
             <a:ext cx="457200" cy="292608"/>
           </a:xfrm>
           <a:prstGeom prst="roundRect">
@@ -12211,7 +12271,7 @@
         </p:nvSpPr>
         <p:spPr>
           <a:xfrm>
-            <a:off x="640080" y="2926080"/>
+            <a:off x="768095" y="3332480"/>
             <a:ext cx="457200" cy="292608"/>
           </a:xfrm>
           <a:prstGeom prst="roundRect">
@@ -12255,7 +12315,7 @@
         </p:nvSpPr>
         <p:spPr>
           <a:xfrm>
-            <a:off x="1170432" y="2926080"/>
+            <a:off x="1298447" y="3332480"/>
             <a:ext cx="457200" cy="292608"/>
           </a:xfrm>
           <a:prstGeom prst="roundRect">
@@ -12299,7 +12359,7 @@
         </p:nvSpPr>
         <p:spPr>
           <a:xfrm>
-            <a:off x="1700784" y="2926080"/>
+            <a:off x="1828799" y="3332480"/>
             <a:ext cx="457200" cy="292608"/>
           </a:xfrm>
           <a:prstGeom prst="roundRect">
@@ -12343,7 +12403,7 @@
         </p:nvSpPr>
         <p:spPr>
           <a:xfrm>
-            <a:off x="2231136" y="2926080"/>
+            <a:off x="2359151" y="3332480"/>
             <a:ext cx="457200" cy="292608"/>
           </a:xfrm>
           <a:prstGeom prst="roundRect">
@@ -12387,7 +12447,7 @@
         </p:nvSpPr>
         <p:spPr>
           <a:xfrm>
-            <a:off x="2761488" y="2926080"/>
+            <a:off x="2889503" y="3332480"/>
             <a:ext cx="457200" cy="292608"/>
           </a:xfrm>
           <a:prstGeom prst="roundRect">
@@ -12431,7 +12491,7 @@
         </p:nvSpPr>
         <p:spPr>
           <a:xfrm>
-            <a:off x="457200" y="3749039"/>
+            <a:off x="585215" y="4155439"/>
             <a:ext cx="228600" cy="228600"/>
           </a:xfrm>
           <a:prstGeom prst="ellipse">
@@ -12475,7 +12535,7 @@
         </p:nvSpPr>
         <p:spPr>
           <a:xfrm>
-            <a:off x="731520" y="3749039"/>
+            <a:off x="859535" y="4155439"/>
             <a:ext cx="914400" cy="274320"/>
           </a:xfrm>
           <a:prstGeom prst="rect">
@@ -12511,7 +12571,7 @@
         </p:nvSpPr>
         <p:spPr>
           <a:xfrm>
-            <a:off x="1554480" y="3749039"/>
+            <a:off x="1682495" y="4155439"/>
             <a:ext cx="228600" cy="228600"/>
           </a:xfrm>
           <a:prstGeom prst="ellipse">
@@ -12555,7 +12615,7 @@
         </p:nvSpPr>
         <p:spPr>
           <a:xfrm>
-            <a:off x="1828800" y="3749039"/>
+            <a:off x="1956815" y="4155439"/>
             <a:ext cx="914400" cy="274320"/>
           </a:xfrm>
           <a:prstGeom prst="rect">
@@ -12591,7 +12651,7 @@
         </p:nvSpPr>
         <p:spPr>
           <a:xfrm>
-            <a:off x="2560320" y="3749039"/>
+            <a:off x="2688335" y="4155439"/>
             <a:ext cx="228600" cy="228600"/>
           </a:xfrm>
           <a:prstGeom prst="ellipse">
@@ -12635,7 +12695,7 @@
         </p:nvSpPr>
         <p:spPr>
           <a:xfrm>
-            <a:off x="2834640" y="3749039"/>
+            <a:off x="2962655" y="4155439"/>
             <a:ext cx="914400" cy="274320"/>
           </a:xfrm>
           <a:prstGeom prst="rect">
@@ -12671,7 +12731,7 @@
         </p:nvSpPr>
         <p:spPr>
           <a:xfrm>
-            <a:off x="3840480" y="2103120"/>
+            <a:off x="3968495" y="2509520"/>
             <a:ext cx="640080" cy="365760"/>
           </a:xfrm>
           <a:prstGeom prst="rightArrow">
@@ -12715,7 +12775,7 @@
         </p:nvSpPr>
         <p:spPr>
           <a:xfrm>
-            <a:off x="4663440" y="1188720"/>
+            <a:off x="4791455" y="1595120"/>
             <a:ext cx="2926080" cy="2743200"/>
           </a:xfrm>
           <a:prstGeom prst="roundRect">
@@ -12756,6 +12816,7 @@
               </a:defRPr>
             </a:pPr>
             <a:r>
+              <a:rPr dirty="0"/>
               <a:t>VirChow2</a:t>
             </a:r>
           </a:p>
@@ -12768,6 +12829,7 @@
               </a:defRPr>
             </a:pPr>
             <a:r>
+              <a:rPr dirty="0"/>
               <a:t>Foundation Model</a:t>
             </a:r>
           </a:p>
@@ -12775,61 +12837,60 @@
             <a:pPr algn="ctr">
               <a:defRPr sz="1100">
                 <a:solidFill>
-                  <a:srgbClr val="555566"/>
-                </a:solidFill>
-              </a:defRPr>
-            </a:pPr>
-            <a:r>
-              <a:t>Pre-trained on millions</a:t>
-            </a:r>
-            <a:br/>
-            <a:r>
-              <a:t>of pathology images</a:t>
-            </a:r>
+                  <a:srgbClr val="1A1A1A"/>
+                </a:solidFill>
+              </a:defRPr>
+            </a:pPr>
+            <a:endParaRPr dirty="0"/>
           </a:p>
           <a:p>
             <a:pPr algn="ctr">
               <a:defRPr sz="1100">
                 <a:solidFill>
-                  <a:srgbClr val="1A1A1A"/>
-                </a:solidFill>
-              </a:defRPr>
-            </a:pPr>
-            <a:endParaRPr/>
+                  <a:srgbClr val="555566"/>
+                </a:solidFill>
+              </a:defRPr>
+            </a:pPr>
+            <a:r>
+              <a:rPr dirty="0"/>
+              <a:t>Input: 1024×1024×3 patch</a:t>
+            </a:r>
           </a:p>
           <a:p>
             <a:pPr algn="ctr">
               <a:defRPr sz="1100">
                 <a:solidFill>
-                  <a:srgbClr val="555566"/>
-                </a:solidFill>
-              </a:defRPr>
-            </a:pPr>
-            <a:r>
-              <a:t>Input: 1024×1024×3 patch</a:t>
+                  <a:srgbClr val="27AE60"/>
+                </a:solidFill>
+              </a:defRPr>
+            </a:pPr>
+            <a:r>
+              <a:rPr dirty="0"/>
+              <a:t>Output: 1280-d vector</a:t>
             </a:r>
           </a:p>
           <a:p>
             <a:pPr algn="ctr">
               <a:defRPr sz="1100">
                 <a:solidFill>
-                  <a:srgbClr val="27AE60"/>
-                </a:solidFill>
-              </a:defRPr>
-            </a:pPr>
-            <a:r>
-              <a:t>Output: 1280-d vector</a:t>
-            </a:r>
+                  <a:srgbClr val="1A1A1A"/>
+                </a:solidFill>
+              </a:defRPr>
+            </a:pPr>
+            <a:endParaRPr dirty="0"/>
           </a:p>
           <a:p>
             <a:pPr algn="ctr">
               <a:defRPr sz="1100">
                 <a:solidFill>
-                  <a:srgbClr val="1A1A1A"/>
-                </a:solidFill>
-              </a:defRPr>
-            </a:pPr>
-            <a:endParaRPr/>
+                  <a:srgbClr val="555566"/>
+                </a:solidFill>
+              </a:defRPr>
+            </a:pPr>
+            <a:r>
+              <a:rPr dirty="0"/>
+              <a:t>Captures: cell morphology,</a:t>
+            </a:r>
           </a:p>
           <a:p>
             <a:pPr algn="ctr">
@@ -12840,18 +12901,7 @@
               </a:defRPr>
             </a:pPr>
             <a:r>
-              <a:t>Captures: cell morphology,</a:t>
-            </a:r>
-          </a:p>
-          <a:p>
-            <a:pPr algn="ctr">
-              <a:defRPr sz="1100">
-                <a:solidFill>
-                  <a:srgbClr val="555566"/>
-                </a:solidFill>
-              </a:defRPr>
-            </a:pPr>
-            <a:r>
+              <a:rPr dirty="0"/>
               <a:t>tissue structure, staining</a:t>
             </a:r>
           </a:p>
@@ -12865,7 +12915,7 @@
         </p:nvSpPr>
         <p:spPr>
           <a:xfrm>
-            <a:off x="7772400" y="2103120"/>
+            <a:off x="7900415" y="2509520"/>
             <a:ext cx="640080" cy="365760"/>
           </a:xfrm>
           <a:prstGeom prst="rightArrow">
@@ -12909,7 +12959,7 @@
         </p:nvSpPr>
         <p:spPr>
           <a:xfrm>
-            <a:off x="8595360" y="1188720"/>
+            <a:off x="8723375" y="1595120"/>
             <a:ext cx="3108960" cy="2743200"/>
           </a:xfrm>
           <a:prstGeom prst="roundRect">
@@ -12950,6 +13000,7 @@
               </a:defRPr>
             </a:pPr>
             <a:r>
+              <a:rPr dirty="0"/>
               <a:t>H5 File (per slide)</a:t>
             </a:r>
           </a:p>
@@ -12963,6 +13014,7 @@
               </a:defRPr>
             </a:pPr>
             <a:r>
+              <a:rPr dirty="0"/>
               <a:t>features     (N, 1280)</a:t>
             </a:r>
           </a:p>
@@ -12976,6 +13028,7 @@
               </a:defRPr>
             </a:pPr>
             <a:r>
+              <a:rPr dirty="0"/>
               <a:t>coords       (N, 2)</a:t>
             </a:r>
           </a:p>
@@ -12989,7 +13042,12 @@
               </a:defRPr>
             </a:pPr>
             <a:r>
-              <a:t>patch_classes (N,)</a:t>
+              <a:rPr dirty="0" err="1"/>
+              <a:t>patch_classes</a:t>
+            </a:r>
+            <a:r>
+              <a:rPr dirty="0"/>
+              <a:t> (N,)</a:t>
             </a:r>
           </a:p>
           <a:p>
@@ -13002,7 +13060,12 @@
               </a:defRPr>
             </a:pPr>
             <a:r>
-              <a:t>tissue_id    (N,)</a:t>
+              <a:rPr dirty="0" err="1"/>
+              <a:t>tissue_id</a:t>
+            </a:r>
+            <a:r>
+              <a:rPr dirty="0"/>
+              <a:t>    (N,)</a:t>
             </a:r>
           </a:p>
           <a:p>
@@ -13015,7 +13078,12 @@
               </a:defRPr>
             </a:pPr>
             <a:r>
-              <a:t>slide_width  scalar</a:t>
+              <a:rPr dirty="0" err="1"/>
+              <a:t>slide_width</a:t>
+            </a:r>
+            <a:r>
+              <a:rPr dirty="0"/>
+              <a:t>  scalar</a:t>
             </a:r>
           </a:p>
           <a:p>
@@ -13028,7 +13096,12 @@
               </a:defRPr>
             </a:pPr>
             <a:r>
-              <a:t>slide_height scalar</a:t>
+              <a:rPr dirty="0" err="1"/>
+              <a:t>slide_height</a:t>
+            </a:r>
+            <a:r>
+              <a:rPr dirty="0"/>
+              <a:t> scalar</a:t>
             </a:r>
           </a:p>
           <a:p>
@@ -13040,7 +13113,7 @@
                 <a:latin typeface="Consolas"/>
               </a:defRPr>
             </a:pPr>
-            <a:endParaRPr/>
+            <a:endParaRPr dirty="0"/>
           </a:p>
           <a:p>
             <a:pPr algn="l">
@@ -13052,6 +13125,7 @@
               </a:defRPr>
             </a:pPr>
             <a:r>
+              <a:rPr dirty="0"/>
               <a:t>252 slides → 252 H5 files</a:t>
             </a:r>
           </a:p>
@@ -13065,8 +13139,8 @@
         </p:nvSpPr>
         <p:spPr>
           <a:xfrm>
-            <a:off x="457200" y="4297680"/>
-            <a:ext cx="10972800" cy="2286000"/>
+            <a:off x="737615" y="4795521"/>
+            <a:ext cx="10972800" cy="556563"/>
           </a:xfrm>
           <a:prstGeom prst="rect">
             <a:avLst/>
@@ -13091,7 +13165,24 @@
               </a:defRPr>
             </a:pPr>
             <a:r>
-              <a:t>• 40x magnification  |  1024×1024 px patches  |  ≥60% tissue threshold  |  GrandQC segmentation</a:t>
+              <a:rPr dirty="0"/>
+              <a:t>• 40x magnification  |  1024×1024 </a:t>
+            </a:r>
+            <a:r>
+              <a:rPr dirty="0" err="1"/>
+              <a:t>px</a:t>
+            </a:r>
+            <a:r>
+              <a:rPr dirty="0"/>
+              <a:t> patches  |  ≥60% tissue threshold  |  </a:t>
+            </a:r>
+            <a:r>
+              <a:rPr dirty="0" err="1"/>
+              <a:t>GrandQC</a:t>
+            </a:r>
+            <a:r>
+              <a:rPr dirty="0"/>
+              <a:t> segmentation</a:t>
             </a:r>
           </a:p>
           <a:p>
@@ -13107,23 +13198,16 @@
               </a:defRPr>
             </a:pPr>
             <a:r>
-              <a:t>• Patch classifier: MLP (2560→256→128→3)  —  F1: PanNET 97.2%, Normal 96.2%, Stroma 90.9%</a:t>
-            </a:r>
-          </a:p>
-          <a:p>
-            <a:pPr>
-              <a:spcAft>
-                <a:spcPts val="459"/>
-              </a:spcAft>
-              <a:defRPr sz="1300" b="0">
-                <a:solidFill>
-                  <a:srgbClr val="555566"/>
-                </a:solidFill>
-                <a:latin typeface="Calibri"/>
-              </a:defRPr>
-            </a:pPr>
-            <a:r>
-              <a:t>• 3 = RGB color channels (Red, Green, Blue per pixel)</a:t>
+              <a:rPr dirty="0"/>
+              <a:t>• Patch classifier: MLP (2560→256→128→3)  —  F1: </a:t>
+            </a:r>
+            <a:r>
+              <a:rPr dirty="0" err="1"/>
+              <a:t>PanNET</a:t>
+            </a:r>
+            <a:r>
+              <a:rPr dirty="0"/>
+              <a:t> 97.2%, Normal 96.2%, Stroma 90.9%</a:t>
             </a:r>
           </a:p>
         </p:txBody>
@@ -13228,6 +13312,7 @@
               </a:defRPr>
             </a:pPr>
             <a:r>
+              <a:rPr dirty="0"/>
               <a:t>Why? 1280-d features → overfitting on small dataset (73 patients). Compress to 256-d.</a:t>
             </a:r>
           </a:p>
@@ -13241,7 +13326,7 @@
         </p:nvSpPr>
         <p:spPr>
           <a:xfrm>
-            <a:off x="731520" y="2788920"/>
+            <a:off x="2839720" y="2354580"/>
             <a:ext cx="1188720" cy="1371600"/>
           </a:xfrm>
           <a:prstGeom prst="roundRect">
@@ -13295,8 +13380,8 @@
         </p:nvSpPr>
         <p:spPr>
           <a:xfrm>
-            <a:off x="731520" y="2331720"/>
-            <a:ext cx="1188720" cy="457200"/>
+            <a:off x="2839720" y="1897380"/>
+            <a:ext cx="1188720" cy="400110"/>
           </a:xfrm>
           <a:prstGeom prst="rect">
             <a:avLst/>
@@ -13335,7 +13420,7 @@
         </p:nvSpPr>
         <p:spPr>
           <a:xfrm>
-            <a:off x="1920240" y="3383280"/>
+            <a:off x="4028440" y="2948940"/>
             <a:ext cx="137160" cy="182880"/>
           </a:xfrm>
           <a:prstGeom prst="rightArrow">
@@ -13379,7 +13464,7 @@
         </p:nvSpPr>
         <p:spPr>
           <a:xfrm>
-            <a:off x="2057400" y="2926080"/>
+            <a:off x="4165600" y="2491740"/>
             <a:ext cx="1188720" cy="1097280"/>
           </a:xfrm>
           <a:prstGeom prst="roundRect">
@@ -13433,7 +13518,7 @@
         </p:nvSpPr>
         <p:spPr>
           <a:xfrm>
-            <a:off x="3246120" y="3383280"/>
+            <a:off x="5354320" y="2948940"/>
             <a:ext cx="137160" cy="182880"/>
           </a:xfrm>
           <a:prstGeom prst="rightArrow">
@@ -13477,7 +13562,7 @@
         </p:nvSpPr>
         <p:spPr>
           <a:xfrm>
-            <a:off x="3383280" y="3063240"/>
+            <a:off x="5491480" y="2628900"/>
             <a:ext cx="1188720" cy="822960"/>
           </a:xfrm>
           <a:prstGeom prst="roundRect">
@@ -13531,7 +13616,7 @@
         </p:nvSpPr>
         <p:spPr>
           <a:xfrm>
-            <a:off x="4572000" y="3383280"/>
+            <a:off x="6680200" y="2948940"/>
             <a:ext cx="137160" cy="182880"/>
           </a:xfrm>
           <a:prstGeom prst="rightArrow">
@@ -13575,7 +13660,7 @@
         </p:nvSpPr>
         <p:spPr>
           <a:xfrm>
-            <a:off x="4709160" y="3154680"/>
+            <a:off x="6817360" y="2720340"/>
             <a:ext cx="1188720" cy="640080"/>
           </a:xfrm>
           <a:prstGeom prst="roundRect">
@@ -13629,8 +13714,8 @@
         </p:nvSpPr>
         <p:spPr>
           <a:xfrm>
-            <a:off x="4709160" y="2697480"/>
-            <a:ext cx="1188720" cy="457200"/>
+            <a:off x="6817360" y="2263140"/>
+            <a:ext cx="1188720" cy="400110"/>
           </a:xfrm>
           <a:prstGeom prst="rect">
             <a:avLst/>
@@ -13669,7 +13754,7 @@
         </p:nvSpPr>
         <p:spPr>
           <a:xfrm>
-            <a:off x="5897880" y="3383280"/>
+            <a:off x="8006080" y="2948940"/>
             <a:ext cx="137160" cy="182880"/>
           </a:xfrm>
           <a:prstGeom prst="rightArrow">
@@ -13713,7 +13798,7 @@
         </p:nvSpPr>
         <p:spPr>
           <a:xfrm>
-            <a:off x="6035040" y="3063240"/>
+            <a:off x="8143240" y="2628900"/>
             <a:ext cx="1188720" cy="822960"/>
           </a:xfrm>
           <a:prstGeom prst="roundRect">
@@ -13767,7 +13852,7 @@
         </p:nvSpPr>
         <p:spPr>
           <a:xfrm>
-            <a:off x="7223760" y="3383280"/>
+            <a:off x="9331960" y="2948940"/>
             <a:ext cx="137160" cy="182880"/>
           </a:xfrm>
           <a:prstGeom prst="rightArrow">
@@ -13811,7 +13896,7 @@
         </p:nvSpPr>
         <p:spPr>
           <a:xfrm>
-            <a:off x="7360920" y="2926080"/>
+            <a:off x="9469120" y="2491740"/>
             <a:ext cx="1188720" cy="1097280"/>
           </a:xfrm>
           <a:prstGeom prst="roundRect">
@@ -13865,7 +13950,7 @@
         </p:nvSpPr>
         <p:spPr>
           <a:xfrm>
-            <a:off x="8549640" y="3383280"/>
+            <a:off x="10657840" y="2948940"/>
             <a:ext cx="137160" cy="182880"/>
           </a:xfrm>
           <a:prstGeom prst="rightArrow">
@@ -13909,7 +13994,7 @@
         </p:nvSpPr>
         <p:spPr>
           <a:xfrm>
-            <a:off x="8686800" y="2788920"/>
+            <a:off x="10795000" y="2354580"/>
             <a:ext cx="1188720" cy="1371600"/>
           </a:xfrm>
           <a:prstGeom prst="roundRect">
@@ -13963,8 +14048,8 @@
         </p:nvSpPr>
         <p:spPr>
           <a:xfrm>
-            <a:off x="8686800" y="2331720"/>
-            <a:ext cx="1188720" cy="457200"/>
+            <a:off x="10795000" y="1897380"/>
+            <a:ext cx="1188720" cy="246221"/>
           </a:xfrm>
           <a:prstGeom prst="rect">
             <a:avLst/>
@@ -13999,8 +14084,8 @@
         </p:nvSpPr>
         <p:spPr>
           <a:xfrm>
-            <a:off x="731520" y="5029200"/>
-            <a:ext cx="4572000" cy="365760"/>
+            <a:off x="2839720" y="4594860"/>
+            <a:ext cx="4572000" cy="307777"/>
           </a:xfrm>
           <a:prstGeom prst="rect">
             <a:avLst/>
@@ -14035,7 +14120,7 @@
         </p:nvSpPr>
         <p:spPr>
           <a:xfrm>
-            <a:off x="5943600" y="5029200"/>
+            <a:off x="8051800" y="4594860"/>
             <a:ext cx="4572000" cy="365760"/>
           </a:xfrm>
           <a:prstGeom prst="rect">
@@ -14065,50 +14150,14 @@
       </p:sp>
       <p:sp>
         <p:nvSpPr>
-          <p:cNvPr id="22" name="TextBox 21"/>
-          <p:cNvSpPr txBox="1"/>
-          <p:nvPr/>
-        </p:nvSpPr>
-        <p:spPr>
-          <a:xfrm>
-            <a:off x="8686800" y="1371600"/>
-            <a:ext cx="3200400" cy="365760"/>
-          </a:xfrm>
-          <a:prstGeom prst="rect">
-            <a:avLst/>
-          </a:prstGeom>
-          <a:noFill/>
-        </p:spPr>
-        <p:txBody>
-          <a:bodyPr wrap="square">
-            <a:spAutoFit/>
-          </a:bodyPr>
-          <a:lstStyle/>
-          <a:p>
-            <a:pPr algn="l">
-              <a:defRPr sz="1800" b="1">
-                <a:solidFill>
-                  <a:srgbClr val="1A1A1A"/>
-                </a:solidFill>
-                <a:latin typeface="Calibri"/>
-              </a:defRPr>
-            </a:pPr>
-            <a:r>
-              <a:t>Training Details</a:t>
-            </a:r>
-          </a:p>
-        </p:txBody>
-      </p:sp>
-      <p:sp>
-        <p:nvSpPr>
           <p:cNvPr id="23" name="TextBox 22"/>
           <p:cNvSpPr txBox="1"/>
           <p:nvPr/>
         </p:nvSpPr>
         <p:spPr>
           <a:xfrm>
-            <a:off x="8686800" y="1920240"/>
-            <a:ext cx="3200400" cy="3657600"/>
+            <a:off x="393700" y="1897380"/>
+            <a:ext cx="2377440" cy="3857466"/>
           </a:xfrm>
           <a:prstGeom prst="rect">
             <a:avLst/>
@@ -14133,7 +14182,8 @@
               </a:defRPr>
             </a:pPr>
             <a:r>
-              <a:t>Loss: MSE + variance reg</a:t>
+              <a:rPr lang="en-US" sz="1600" b="1" dirty="0"/>
+              <a:t>Training Details</a:t>
             </a:r>
           </a:p>
           <a:p>
@@ -14148,9 +14198,7 @@
                 <a:latin typeface="Calibri"/>
               </a:defRPr>
             </a:pPr>
-            <a:r>
-              <a:t>Optimizer: AdamW</a:t>
-            </a:r>
+            <a:endParaRPr lang="tr-TR" dirty="0"/>
           </a:p>
           <a:p>
             <a:pPr>
@@ -14165,7 +14213,8 @@
               </a:defRPr>
             </a:pPr>
             <a:r>
-              <a:t>LR: 1e-3, WD: 1e-4</a:t>
+              <a:rPr dirty="0"/>
+              <a:t>Loss: MSE + variance reg</a:t>
             </a:r>
           </a:p>
           <a:p>
@@ -14181,8 +14230,14 @@
               </a:defRPr>
             </a:pPr>
             <a:r>
-              <a:t>Batch size: 4096</a:t>
-            </a:r>
+              <a:rPr dirty="0"/>
+              <a:t>Optimizer: </a:t>
+            </a:r>
+            <a:r>
+              <a:rPr dirty="0" err="1"/>
+              <a:t>AdamW</a:t>
+            </a:r>
+            <a:endParaRPr dirty="0"/>
           </a:p>
           <a:p>
             <a:pPr>
@@ -14197,7 +14252,8 @@
               </a:defRPr>
             </a:pPr>
             <a:r>
-              <a:t>Epochs: 50</a:t>
+              <a:rPr dirty="0"/>
+              <a:t>LR: 1e-3, WD: 1e-4</a:t>
             </a:r>
           </a:p>
           <a:p>
@@ -14213,7 +14269,8 @@
               </a:defRPr>
             </a:pPr>
             <a:r>
-              <a:t>Early stopping: patience 10</a:t>
+              <a:rPr dirty="0"/>
+              <a:t>Batch size: 4096</a:t>
             </a:r>
           </a:p>
           <a:p>
@@ -14229,7 +14286,8 @@
               </a:defRPr>
             </a:pPr>
             <a:r>
-              <a:t>Split: 90/10 by H5 file</a:t>
+              <a:rPr dirty="0"/>
+              <a:t>Epochs: 50</a:t>
             </a:r>
           </a:p>
           <a:p>
@@ -14244,7 +14302,10 @@
                 <a:latin typeface="Calibri"/>
               </a:defRPr>
             </a:pPr>
-            <a:endParaRPr/>
+            <a:r>
+              <a:rPr dirty="0"/>
+              <a:t>Early stopping: patience 10</a:t>
+            </a:r>
           </a:p>
           <a:p>
             <a:pPr>
@@ -14259,7 +14320,8 @@
               </a:defRPr>
             </a:pPr>
             <a:r>
-              <a:t>Each layer:</a:t>
+              <a:rPr dirty="0"/>
+              <a:t>Split: 90/10 by H5 file</a:t>
             </a:r>
           </a:p>
           <a:p>
@@ -14274,9 +14336,7 @@
                 <a:latin typeface="Calibri"/>
               </a:defRPr>
             </a:pPr>
-            <a:r>
-              <a:t>  Linear → RMSNorm → GELU</a:t>
-            </a:r>
+            <a:endParaRPr dirty="0"/>
           </a:p>
           <a:p>
             <a:pPr>
@@ -14291,7 +14351,8 @@
               </a:defRPr>
             </a:pPr>
             <a:r>
-              <a:t>  + Dropout(0.2) in encoder</a:t>
+              <a:rPr dirty="0"/>
+              <a:t>Each layer:</a:t>
             </a:r>
           </a:p>
           <a:p>
@@ -14306,7 +14367,18 @@
                 <a:latin typeface="Calibri"/>
               </a:defRPr>
             </a:pPr>
-            <a:endParaRPr/>
+            <a:r>
+              <a:rPr dirty="0"/>
+              <a:t>  Linear → </a:t>
+            </a:r>
+            <a:r>
+              <a:rPr dirty="0" err="1"/>
+              <a:t>RMSNorm</a:t>
+            </a:r>
+            <a:r>
+              <a:rPr dirty="0"/>
+              <a:t> → GELU</a:t>
+            </a:r>
           </a:p>
           <a:p>
             <a:pPr>
@@ -14321,7 +14393,8 @@
               </a:defRPr>
             </a:pPr>
             <a:r>
-              <a:t>After training: FREEZE encoder</a:t>
+              <a:rPr dirty="0"/>
+              <a:t>  + Dropout(0.2) in encoder</a:t>
             </a:r>
           </a:p>
           <a:p>
@@ -14336,7 +14409,39 @@
                 <a:latin typeface="Calibri"/>
               </a:defRPr>
             </a:pPr>
-            <a:r>
+            <a:endParaRPr dirty="0"/>
+          </a:p>
+          <a:p>
+            <a:pPr>
+              <a:spcAft>
+                <a:spcPts val="439"/>
+              </a:spcAft>
+              <a:defRPr sz="1200" b="0">
+                <a:solidFill>
+                  <a:srgbClr val="555566"/>
+                </a:solidFill>
+                <a:latin typeface="Calibri"/>
+              </a:defRPr>
+            </a:pPr>
+            <a:r>
+              <a:rPr dirty="0"/>
+              <a:t>After training: FREEZE encoder</a:t>
+            </a:r>
+          </a:p>
+          <a:p>
+            <a:pPr>
+              <a:spcAft>
+                <a:spcPts val="439"/>
+              </a:spcAft>
+              <a:defRPr sz="1200" b="0">
+                <a:solidFill>
+                  <a:srgbClr val="555566"/>
+                </a:solidFill>
+                <a:latin typeface="Calibri"/>
+              </a:defRPr>
+            </a:pPr>
+            <a:r>
+              <a:rPr dirty="0"/>
               <a:t>Use as fixed projector in GNN</a:t>
             </a:r>
           </a:p>
@@ -14384,7 +14489,7 @@
         <p:spPr>
           <a:xfrm>
             <a:off x="457200" y="274320"/>
-            <a:ext cx="10972800" cy="548640"/>
+            <a:ext cx="10972800" cy="523220"/>
           </a:xfrm>
           <a:prstGeom prst="rect">
             <a:avLst/>
@@ -14397,7 +14502,7 @@
           </a:bodyPr>
           <a:lstStyle/>
           <a:p>
-            <a:pPr algn="l">
+            <a:pPr>
               <a:defRPr sz="2800" b="1">
                 <a:solidFill>
                   <a:srgbClr val="1A1A1A"/>
@@ -14406,44 +14511,18 @@
               </a:defRPr>
             </a:pPr>
             <a:r>
-              <a:t>Stage 3: Bipartite Graph Construction</a:t>
-            </a:r>
-          </a:p>
-        </p:txBody>
-      </p:sp>
-      <p:sp>
-        <p:nvSpPr>
-          <p:cNvPr id="3" name="TextBox 2"/>
-          <p:cNvSpPr txBox="1"/>
-          <p:nvPr/>
-        </p:nvSpPr>
-        <p:spPr>
-          <a:xfrm>
-            <a:off x="457200" y="822960"/>
-            <a:ext cx="10972800" cy="365760"/>
-          </a:xfrm>
-          <a:prstGeom prst="rect">
-            <a:avLst/>
-          </a:prstGeom>
-          <a:noFill/>
-        </p:spPr>
-        <p:txBody>
-          <a:bodyPr wrap="square">
-            <a:spAutoFit/>
-          </a:bodyPr>
-          <a:lstStyle/>
-          <a:p>
-            <a:pPr algn="l">
-              <a:defRPr sz="1400" b="0">
-                <a:solidFill>
-                  <a:srgbClr val="555566"/>
-                </a:solidFill>
-                <a:latin typeface="Calibri"/>
-              </a:defRPr>
-            </a:pPr>
-            <a:r>
-              <a:t>The core innovation: restrict edges to the tumor–NNP interface</a:t>
-            </a:r>
+              <a:rPr dirty="0"/>
+              <a:t>Stage 3: Graph Construction</a:t>
+            </a:r>
+            <a:r>
+              <a:rPr lang="tr-TR" dirty="0"/>
+              <a:t> (</a:t>
+            </a:r>
+            <a:r>
+              <a:rPr lang="en-US" dirty="0"/>
+              <a:t>Bipartite)</a:t>
+            </a:r>
+            <a:endParaRPr dirty="0"/>
           </a:p>
         </p:txBody>
       </p:sp>
@@ -14455,7 +14534,7 @@
         </p:nvSpPr>
         <p:spPr>
           <a:xfrm>
-            <a:off x="365760" y="1463040"/>
+            <a:off x="555765" y="2151809"/>
             <a:ext cx="2011680" cy="1645920"/>
           </a:xfrm>
           <a:prstGeom prst="roundRect">
@@ -14496,6 +14575,7 @@
               </a:defRPr>
             </a:pPr>
             <a:r>
+              <a:rPr dirty="0"/>
               <a:t>1. Hole Filling</a:t>
             </a:r>
           </a:p>
@@ -14508,14 +14588,21 @@
               </a:defRPr>
             </a:pPr>
             <a:r>
+              <a:rPr dirty="0"/>
               <a:t>Fill gaps inside</a:t>
             </a:r>
-            <a:br/>
-            <a:r>
+            <a:br>
+              <a:rPr dirty="0"/>
+            </a:br>
+            <a:r>
+              <a:rPr dirty="0"/>
               <a:t>tumor regions</a:t>
             </a:r>
-            <a:br/>
-            <a:r>
+            <a:br>
+              <a:rPr dirty="0"/>
+            </a:br>
+            <a:r>
+              <a:rPr dirty="0"/>
               <a:t>(morphological)</a:t>
             </a:r>
           </a:p>
@@ -14529,7 +14616,7 @@
         </p:nvSpPr>
         <p:spPr>
           <a:xfrm>
-            <a:off x="2377440" y="2011680"/>
+            <a:off x="2567445" y="2700449"/>
             <a:ext cx="228600" cy="228600"/>
           </a:xfrm>
           <a:prstGeom prst="rightArrow">
@@ -14573,7 +14660,7 @@
         </p:nvSpPr>
         <p:spPr>
           <a:xfrm>
-            <a:off x="2606040" y="1463040"/>
+            <a:off x="2796045" y="2151809"/>
             <a:ext cx="2011680" cy="1645920"/>
           </a:xfrm>
           <a:prstGeom prst="roundRect">
@@ -14614,6 +14701,7 @@
               </a:defRPr>
             </a:pPr>
             <a:r>
+              <a:rPr dirty="0"/>
               <a:t>2. Border Detection</a:t>
             </a:r>
           </a:p>
@@ -14626,14 +14714,33 @@
               </a:defRPr>
             </a:pPr>
             <a:r>
-              <a:t>Find PanNET patches</a:t>
-            </a:r>
-            <a:br/>
-            <a:r>
-              <a:t>with non-PanNET</a:t>
-            </a:r>
-            <a:br/>
-            <a:r>
+              <a:rPr dirty="0"/>
+              <a:t>Find </a:t>
+            </a:r>
+            <a:r>
+              <a:rPr dirty="0" err="1"/>
+              <a:t>PanNET</a:t>
+            </a:r>
+            <a:r>
+              <a:rPr dirty="0"/>
+              <a:t> patches</a:t>
+            </a:r>
+            <a:br>
+              <a:rPr dirty="0"/>
+            </a:br>
+            <a:r>
+              <a:rPr dirty="0"/>
+              <a:t>with non-</a:t>
+            </a:r>
+            <a:r>
+              <a:rPr dirty="0" err="1"/>
+              <a:t>PanNET</a:t>
+            </a:r>
+            <a:br>
+              <a:rPr dirty="0"/>
+            </a:br>
+            <a:r>
+              <a:rPr dirty="0"/>
               <a:t>8-neighbors</a:t>
             </a:r>
           </a:p>
@@ -14647,7 +14754,7 @@
         </p:nvSpPr>
         <p:spPr>
           <a:xfrm>
-            <a:off x="4617720" y="2011680"/>
+            <a:off x="4807725" y="2700449"/>
             <a:ext cx="228600" cy="228600"/>
           </a:xfrm>
           <a:prstGeom prst="rightArrow">
@@ -14691,7 +14798,7 @@
         </p:nvSpPr>
         <p:spPr>
           <a:xfrm>
-            <a:off x="4846320" y="1463040"/>
+            <a:off x="5036325" y="2151809"/>
             <a:ext cx="2011680" cy="1645920"/>
           </a:xfrm>
           <a:prstGeom prst="roundRect">
@@ -14732,6 +14839,7 @@
               </a:defRPr>
             </a:pPr>
             <a:r>
+              <a:rPr dirty="0"/>
               <a:t>3. NNP Inclusion</a:t>
             </a:r>
           </a:p>
@@ -14744,14 +14852,21 @@
               </a:defRPr>
             </a:pPr>
             <a:r>
+              <a:rPr dirty="0"/>
               <a:t>Include non-tumor</a:t>
             </a:r>
-            <a:br/>
-            <a:r>
+            <a:br>
+              <a:rPr dirty="0"/>
+            </a:br>
+            <a:r>
+              <a:rPr dirty="0"/>
               <a:t>patches within</a:t>
             </a:r>
-            <a:br/>
-            <a:r>
+            <a:br>
+              <a:rPr dirty="0"/>
+            </a:br>
+            <a:r>
+              <a:rPr dirty="0"/>
               <a:t>r hops of border</a:t>
             </a:r>
           </a:p>
@@ -14765,7 +14880,7 @@
         </p:nvSpPr>
         <p:spPr>
           <a:xfrm>
-            <a:off x="6858000" y="2011680"/>
+            <a:off x="7048005" y="2700449"/>
             <a:ext cx="228600" cy="228600"/>
           </a:xfrm>
           <a:prstGeom prst="rightArrow">
@@ -14809,7 +14924,7 @@
         </p:nvSpPr>
         <p:spPr>
           <a:xfrm>
-            <a:off x="7086600" y="1463040"/>
+            <a:off x="7276605" y="2151809"/>
             <a:ext cx="2011680" cy="1645920"/>
           </a:xfrm>
           <a:prstGeom prst="roundRect">
@@ -14883,7 +14998,7 @@
         </p:nvSpPr>
         <p:spPr>
           <a:xfrm>
-            <a:off x="9098280" y="2011680"/>
+            <a:off x="9288285" y="2700449"/>
             <a:ext cx="228600" cy="228600"/>
           </a:xfrm>
           <a:prstGeom prst="rightArrow">
@@ -14927,7 +15042,7 @@
         </p:nvSpPr>
         <p:spPr>
           <a:xfrm>
-            <a:off x="9326880" y="1463040"/>
+            <a:off x="9516885" y="2151809"/>
             <a:ext cx="2011680" cy="1645920"/>
           </a:xfrm>
           <a:prstGeom prst="roundRect">
@@ -14995,869 +15110,13 @@
       </p:sp>
       <p:sp>
         <p:nvSpPr>
-          <p:cNvPr id="13" name="TextBox 12"/>
-          <p:cNvSpPr txBox="1"/>
-          <p:nvPr/>
-        </p:nvSpPr>
-        <p:spPr>
-          <a:xfrm>
-            <a:off x="457200" y="3474720"/>
-            <a:ext cx="4572000" cy="365760"/>
-          </a:xfrm>
-          <a:prstGeom prst="rect">
-            <a:avLst/>
-          </a:prstGeom>
-          <a:noFill/>
-        </p:spPr>
-        <p:txBody>
-          <a:bodyPr wrap="square">
-            <a:spAutoFit/>
-          </a:bodyPr>
-          <a:lstStyle/>
-          <a:p>
-            <a:pPr algn="l">
-              <a:defRPr sz="1600" b="1">
-                <a:solidFill>
-                  <a:srgbClr val="1A1A1A"/>
-                </a:solidFill>
-                <a:latin typeface="Calibri"/>
-              </a:defRPr>
-            </a:pPr>
-            <a:r>
-              <a:t>Full Graph (all edges)</a:t>
-            </a:r>
-          </a:p>
-        </p:txBody>
-      </p:sp>
-      <p:sp>
-        <p:nvSpPr>
-          <p:cNvPr id="14" name="TextBox 13"/>
-          <p:cNvSpPr txBox="1"/>
-          <p:nvPr/>
-        </p:nvSpPr>
-        <p:spPr>
-          <a:xfrm>
-            <a:off x="6400800" y="3474720"/>
-            <a:ext cx="4572000" cy="365760"/>
-          </a:xfrm>
-          <a:prstGeom prst="rect">
-            <a:avLst/>
-          </a:prstGeom>
-          <a:noFill/>
-        </p:spPr>
-        <p:txBody>
-          <a:bodyPr wrap="square">
-            <a:spAutoFit/>
-          </a:bodyPr>
-          <a:lstStyle/>
-          <a:p>
-            <a:pPr algn="l">
-              <a:defRPr sz="1600" b="1">
-                <a:solidFill>
-                  <a:srgbClr val="1A1A1A"/>
-                </a:solidFill>
-                <a:latin typeface="Calibri"/>
-              </a:defRPr>
-            </a:pPr>
-            <a:r>
-              <a:t>Bipartite Graph (thesis approach)</a:t>
-            </a:r>
-          </a:p>
-        </p:txBody>
-      </p:sp>
-      <p:sp>
-        <p:nvSpPr>
-          <p:cNvPr id="15" name="Oval 14"/>
-          <p:cNvSpPr/>
-          <p:nvPr/>
-        </p:nvSpPr>
-        <p:spPr>
-          <a:xfrm>
-            <a:off x="914400" y="4023360"/>
-            <a:ext cx="365760" cy="365760"/>
-          </a:xfrm>
-          <a:prstGeom prst="ellipse">
-            <a:avLst/>
-          </a:prstGeom>
-          <a:solidFill>
-            <a:srgbClr val="27AE60"/>
-          </a:solidFill>
-          <a:ln>
-            <a:noFill/>
-          </a:ln>
-        </p:spPr>
-        <p:style>
-          <a:lnRef idx="1">
-            <a:schemeClr val="accent1"/>
-          </a:lnRef>
-          <a:fillRef idx="3">
-            <a:schemeClr val="accent1"/>
-          </a:fillRef>
-          <a:effectRef idx="2">
-            <a:schemeClr val="accent1"/>
-          </a:effectRef>
-          <a:fontRef idx="minor">
-            <a:schemeClr val="lt1"/>
-          </a:fontRef>
-        </p:style>
-        <p:txBody>
-          <a:bodyPr wrap="none" rtlCol="0" anchor="ctr"/>
-          <a:lstStyle/>
-          <a:p>
-            <a:pPr algn="ctr">
-              <a:spcBef>
-                <a:spcPts val="0"/>
-              </a:spcBef>
-              <a:spcAft>
-                <a:spcPts val="0"/>
-              </a:spcAft>
-              <a:defRPr sz="900" b="1">
-                <a:solidFill>
-                  <a:srgbClr val="FFFFFF"/>
-                </a:solidFill>
-              </a:defRPr>
-            </a:pPr>
-            <a:r>
-              <a:t>T</a:t>
-            </a:r>
-          </a:p>
-        </p:txBody>
-      </p:sp>
-      <p:sp>
-        <p:nvSpPr>
-          <p:cNvPr id="16" name="Oval 15"/>
-          <p:cNvSpPr/>
-          <p:nvPr/>
-        </p:nvSpPr>
-        <p:spPr>
-          <a:xfrm>
-            <a:off x="1645920" y="4023360"/>
-            <a:ext cx="365760" cy="365760"/>
-          </a:xfrm>
-          <a:prstGeom prst="ellipse">
-            <a:avLst/>
-          </a:prstGeom>
-          <a:solidFill>
-            <a:srgbClr val="27AE60"/>
-          </a:solidFill>
-          <a:ln>
-            <a:noFill/>
-          </a:ln>
-        </p:spPr>
-        <p:style>
-          <a:lnRef idx="1">
-            <a:schemeClr val="accent1"/>
-          </a:lnRef>
-          <a:fillRef idx="3">
-            <a:schemeClr val="accent1"/>
-          </a:fillRef>
-          <a:effectRef idx="2">
-            <a:schemeClr val="accent1"/>
-          </a:effectRef>
-          <a:fontRef idx="minor">
-            <a:schemeClr val="lt1"/>
-          </a:fontRef>
-        </p:style>
-        <p:txBody>
-          <a:bodyPr wrap="none" rtlCol="0" anchor="ctr"/>
-          <a:lstStyle/>
-          <a:p>
-            <a:pPr algn="ctr">
-              <a:spcBef>
-                <a:spcPts val="0"/>
-              </a:spcBef>
-              <a:spcAft>
-                <a:spcPts val="0"/>
-              </a:spcAft>
-              <a:defRPr sz="900" b="1">
-                <a:solidFill>
-                  <a:srgbClr val="FFFFFF"/>
-                </a:solidFill>
-              </a:defRPr>
-            </a:pPr>
-            <a:r>
-              <a:t>T</a:t>
-            </a:r>
-          </a:p>
-        </p:txBody>
-      </p:sp>
-      <p:sp>
-        <p:nvSpPr>
-          <p:cNvPr id="17" name="Oval 16"/>
-          <p:cNvSpPr/>
-          <p:nvPr/>
-        </p:nvSpPr>
-        <p:spPr>
-          <a:xfrm>
-            <a:off x="2377440" y="4023360"/>
-            <a:ext cx="365760" cy="365760"/>
-          </a:xfrm>
-          <a:prstGeom prst="ellipse">
-            <a:avLst/>
-          </a:prstGeom>
-          <a:solidFill>
-            <a:srgbClr val="27AE60"/>
-          </a:solidFill>
-          <a:ln>
-            <a:noFill/>
-          </a:ln>
-        </p:spPr>
-        <p:style>
-          <a:lnRef idx="1">
-            <a:schemeClr val="accent1"/>
-          </a:lnRef>
-          <a:fillRef idx="3">
-            <a:schemeClr val="accent1"/>
-          </a:fillRef>
-          <a:effectRef idx="2">
-            <a:schemeClr val="accent1"/>
-          </a:effectRef>
-          <a:fontRef idx="minor">
-            <a:schemeClr val="lt1"/>
-          </a:fontRef>
-        </p:style>
-        <p:txBody>
-          <a:bodyPr wrap="none" rtlCol="0" anchor="ctr"/>
-          <a:lstStyle/>
-          <a:p>
-            <a:pPr algn="ctr">
-              <a:spcBef>
-                <a:spcPts val="0"/>
-              </a:spcBef>
-              <a:spcAft>
-                <a:spcPts val="0"/>
-              </a:spcAft>
-              <a:defRPr sz="900" b="1">
-                <a:solidFill>
-                  <a:srgbClr val="FFFFFF"/>
-                </a:solidFill>
-              </a:defRPr>
-            </a:pPr>
-            <a:r>
-              <a:t>T</a:t>
-            </a:r>
-          </a:p>
-        </p:txBody>
-      </p:sp>
-      <p:sp>
-        <p:nvSpPr>
-          <p:cNvPr id="18" name="Oval 17"/>
-          <p:cNvSpPr/>
-          <p:nvPr/>
-        </p:nvSpPr>
-        <p:spPr>
-          <a:xfrm>
-            <a:off x="914400" y="4754880"/>
-            <a:ext cx="365760" cy="365760"/>
-          </a:xfrm>
-          <a:prstGeom prst="ellipse">
-            <a:avLst/>
-          </a:prstGeom>
-          <a:solidFill>
-            <a:srgbClr val="C0392B"/>
-          </a:solidFill>
-          <a:ln>
-            <a:noFill/>
-          </a:ln>
-        </p:spPr>
-        <p:style>
-          <a:lnRef idx="1">
-            <a:schemeClr val="accent1"/>
-          </a:lnRef>
-          <a:fillRef idx="3">
-            <a:schemeClr val="accent1"/>
-          </a:fillRef>
-          <a:effectRef idx="2">
-            <a:schemeClr val="accent1"/>
-          </a:effectRef>
-          <a:fontRef idx="minor">
-            <a:schemeClr val="lt1"/>
-          </a:fontRef>
-        </p:style>
-        <p:txBody>
-          <a:bodyPr wrap="none" rtlCol="0" anchor="ctr"/>
-          <a:lstStyle/>
-          <a:p>
-            <a:pPr algn="ctr">
-              <a:spcBef>
-                <a:spcPts val="0"/>
-              </a:spcBef>
-              <a:spcAft>
-                <a:spcPts val="0"/>
-              </a:spcAft>
-              <a:defRPr sz="900" b="1">
-                <a:solidFill>
-                  <a:srgbClr val="FFFFFF"/>
-                </a:solidFill>
-              </a:defRPr>
-            </a:pPr>
-            <a:r>
-              <a:t>S</a:t>
-            </a:r>
-          </a:p>
-        </p:txBody>
-      </p:sp>
-      <p:sp>
-        <p:nvSpPr>
-          <p:cNvPr id="19" name="Oval 18"/>
-          <p:cNvSpPr/>
-          <p:nvPr/>
-        </p:nvSpPr>
-        <p:spPr>
-          <a:xfrm>
-            <a:off x="1645920" y="4754880"/>
-            <a:ext cx="365760" cy="365760"/>
-          </a:xfrm>
-          <a:prstGeom prst="ellipse">
-            <a:avLst/>
-          </a:prstGeom>
-          <a:solidFill>
-            <a:srgbClr val="C0392B"/>
-          </a:solidFill>
-          <a:ln>
-            <a:noFill/>
-          </a:ln>
-        </p:spPr>
-        <p:style>
-          <a:lnRef idx="1">
-            <a:schemeClr val="accent1"/>
-          </a:lnRef>
-          <a:fillRef idx="3">
-            <a:schemeClr val="accent1"/>
-          </a:fillRef>
-          <a:effectRef idx="2">
-            <a:schemeClr val="accent1"/>
-          </a:effectRef>
-          <a:fontRef idx="minor">
-            <a:schemeClr val="lt1"/>
-          </a:fontRef>
-        </p:style>
-        <p:txBody>
-          <a:bodyPr wrap="none" rtlCol="0" anchor="ctr"/>
-          <a:lstStyle/>
-          <a:p>
-            <a:pPr algn="ctr">
-              <a:spcBef>
-                <a:spcPts val="0"/>
-              </a:spcBef>
-              <a:spcAft>
-                <a:spcPts val="0"/>
-              </a:spcAft>
-              <a:defRPr sz="900" b="1">
-                <a:solidFill>
-                  <a:srgbClr val="FFFFFF"/>
-                </a:solidFill>
-              </a:defRPr>
-            </a:pPr>
-            <a:r>
-              <a:t>S</a:t>
-            </a:r>
-          </a:p>
-        </p:txBody>
-      </p:sp>
-      <p:sp>
-        <p:nvSpPr>
-          <p:cNvPr id="20" name="Oval 19"/>
-          <p:cNvSpPr/>
-          <p:nvPr/>
-        </p:nvSpPr>
-        <p:spPr>
-          <a:xfrm>
-            <a:off x="2377440" y="4754880"/>
-            <a:ext cx="365760" cy="365760"/>
-          </a:xfrm>
-          <a:prstGeom prst="ellipse">
-            <a:avLst/>
-          </a:prstGeom>
-          <a:solidFill>
-            <a:srgbClr val="C0392B"/>
-          </a:solidFill>
-          <a:ln>
-            <a:noFill/>
-          </a:ln>
-        </p:spPr>
-        <p:style>
-          <a:lnRef idx="1">
-            <a:schemeClr val="accent1"/>
-          </a:lnRef>
-          <a:fillRef idx="3">
-            <a:schemeClr val="accent1"/>
-          </a:fillRef>
-          <a:effectRef idx="2">
-            <a:schemeClr val="accent1"/>
-          </a:effectRef>
-          <a:fontRef idx="minor">
-            <a:schemeClr val="lt1"/>
-          </a:fontRef>
-        </p:style>
-        <p:txBody>
-          <a:bodyPr wrap="none" rtlCol="0" anchor="ctr"/>
-          <a:lstStyle/>
-          <a:p>
-            <a:pPr algn="ctr">
-              <a:spcBef>
-                <a:spcPts val="0"/>
-              </a:spcBef>
-              <a:spcAft>
-                <a:spcPts val="0"/>
-              </a:spcAft>
-              <a:defRPr sz="900" b="1">
-                <a:solidFill>
-                  <a:srgbClr val="FFFFFF"/>
-                </a:solidFill>
-              </a:defRPr>
-            </a:pPr>
-            <a:r>
-              <a:t>S</a:t>
-            </a:r>
-          </a:p>
-        </p:txBody>
-      </p:sp>
-      <p:sp>
-        <p:nvSpPr>
-          <p:cNvPr id="21" name="TextBox 20"/>
-          <p:cNvSpPr txBox="1"/>
-          <p:nvPr/>
-        </p:nvSpPr>
-        <p:spPr>
-          <a:xfrm>
-            <a:off x="731520" y="5303520"/>
-            <a:ext cx="3200400" cy="731520"/>
-          </a:xfrm>
-          <a:prstGeom prst="rect">
-            <a:avLst/>
-          </a:prstGeom>
-          <a:noFill/>
-        </p:spPr>
-        <p:txBody>
-          <a:bodyPr wrap="square">
-            <a:spAutoFit/>
-          </a:bodyPr>
-          <a:lstStyle/>
-          <a:p>
-            <a:pPr algn="l">
-              <a:defRPr sz="1100" b="0">
-                <a:solidFill>
-                  <a:srgbClr val="C0392B"/>
-                </a:solidFill>
-                <a:latin typeface="Calibri"/>
-              </a:defRPr>
-            </a:pPr>
-            <a:r>
-              <a:t>All edges: T↔T, S↔S, T↔S</a:t>
-            </a:r>
-            <a:br/>
-            <a:r>
-              <a:t>Noisy — wastes capacity on</a:t>
-            </a:r>
-            <a:br/>
-            <a:r>
-              <a:t>homogeneous interactions</a:t>
-            </a:r>
-          </a:p>
-        </p:txBody>
-      </p:sp>
-      <p:sp>
-        <p:nvSpPr>
-          <p:cNvPr id="22" name="Oval 21"/>
-          <p:cNvSpPr/>
-          <p:nvPr/>
-        </p:nvSpPr>
-        <p:spPr>
-          <a:xfrm>
-            <a:off x="6858000" y="4023360"/>
-            <a:ext cx="365760" cy="365760"/>
-          </a:xfrm>
-          <a:prstGeom prst="ellipse">
-            <a:avLst/>
-          </a:prstGeom>
-          <a:solidFill>
-            <a:srgbClr val="27AE60"/>
-          </a:solidFill>
-          <a:ln>
-            <a:noFill/>
-          </a:ln>
-        </p:spPr>
-        <p:style>
-          <a:lnRef idx="1">
-            <a:schemeClr val="accent1"/>
-          </a:lnRef>
-          <a:fillRef idx="3">
-            <a:schemeClr val="accent1"/>
-          </a:fillRef>
-          <a:effectRef idx="2">
-            <a:schemeClr val="accent1"/>
-          </a:effectRef>
-          <a:fontRef idx="minor">
-            <a:schemeClr val="lt1"/>
-          </a:fontRef>
-        </p:style>
-        <p:txBody>
-          <a:bodyPr wrap="none" rtlCol="0" anchor="ctr"/>
-          <a:lstStyle/>
-          <a:p>
-            <a:pPr algn="ctr">
-              <a:spcBef>
-                <a:spcPts val="0"/>
-              </a:spcBef>
-              <a:spcAft>
-                <a:spcPts val="0"/>
-              </a:spcAft>
-              <a:defRPr sz="900" b="1">
-                <a:solidFill>
-                  <a:srgbClr val="FFFFFF"/>
-                </a:solidFill>
-              </a:defRPr>
-            </a:pPr>
-            <a:r>
-              <a:t>T</a:t>
-            </a:r>
-          </a:p>
-        </p:txBody>
-      </p:sp>
-      <p:sp>
-        <p:nvSpPr>
-          <p:cNvPr id="23" name="Oval 22"/>
-          <p:cNvSpPr/>
-          <p:nvPr/>
-        </p:nvSpPr>
-        <p:spPr>
-          <a:xfrm>
-            <a:off x="7589520" y="4023360"/>
-            <a:ext cx="365760" cy="365760"/>
-          </a:xfrm>
-          <a:prstGeom prst="ellipse">
-            <a:avLst/>
-          </a:prstGeom>
-          <a:solidFill>
-            <a:srgbClr val="27AE60"/>
-          </a:solidFill>
-          <a:ln>
-            <a:noFill/>
-          </a:ln>
-        </p:spPr>
-        <p:style>
-          <a:lnRef idx="1">
-            <a:schemeClr val="accent1"/>
-          </a:lnRef>
-          <a:fillRef idx="3">
-            <a:schemeClr val="accent1"/>
-          </a:fillRef>
-          <a:effectRef idx="2">
-            <a:schemeClr val="accent1"/>
-          </a:effectRef>
-          <a:fontRef idx="minor">
-            <a:schemeClr val="lt1"/>
-          </a:fontRef>
-        </p:style>
-        <p:txBody>
-          <a:bodyPr wrap="none" rtlCol="0" anchor="ctr"/>
-          <a:lstStyle/>
-          <a:p>
-            <a:pPr algn="ctr">
-              <a:spcBef>
-                <a:spcPts val="0"/>
-              </a:spcBef>
-              <a:spcAft>
-                <a:spcPts val="0"/>
-              </a:spcAft>
-              <a:defRPr sz="900" b="1">
-                <a:solidFill>
-                  <a:srgbClr val="FFFFFF"/>
-                </a:solidFill>
-              </a:defRPr>
-            </a:pPr>
-            <a:r>
-              <a:t>T</a:t>
-            </a:r>
-          </a:p>
-        </p:txBody>
-      </p:sp>
-      <p:sp>
-        <p:nvSpPr>
-          <p:cNvPr id="24" name="Oval 23"/>
-          <p:cNvSpPr/>
-          <p:nvPr/>
-        </p:nvSpPr>
-        <p:spPr>
-          <a:xfrm>
-            <a:off x="8321040" y="4023360"/>
-            <a:ext cx="365760" cy="365760"/>
-          </a:xfrm>
-          <a:prstGeom prst="ellipse">
-            <a:avLst/>
-          </a:prstGeom>
-          <a:solidFill>
-            <a:srgbClr val="27AE60"/>
-          </a:solidFill>
-          <a:ln>
-            <a:noFill/>
-          </a:ln>
-        </p:spPr>
-        <p:style>
-          <a:lnRef idx="1">
-            <a:schemeClr val="accent1"/>
-          </a:lnRef>
-          <a:fillRef idx="3">
-            <a:schemeClr val="accent1"/>
-          </a:fillRef>
-          <a:effectRef idx="2">
-            <a:schemeClr val="accent1"/>
-          </a:effectRef>
-          <a:fontRef idx="minor">
-            <a:schemeClr val="lt1"/>
-          </a:fontRef>
-        </p:style>
-        <p:txBody>
-          <a:bodyPr wrap="none" rtlCol="0" anchor="ctr"/>
-          <a:lstStyle/>
-          <a:p>
-            <a:pPr algn="ctr">
-              <a:spcBef>
-                <a:spcPts val="0"/>
-              </a:spcBef>
-              <a:spcAft>
-                <a:spcPts val="0"/>
-              </a:spcAft>
-              <a:defRPr sz="900" b="1">
-                <a:solidFill>
-                  <a:srgbClr val="FFFFFF"/>
-                </a:solidFill>
-              </a:defRPr>
-            </a:pPr>
-            <a:r>
-              <a:t>T</a:t>
-            </a:r>
-          </a:p>
-        </p:txBody>
-      </p:sp>
-      <p:sp>
-        <p:nvSpPr>
-          <p:cNvPr id="25" name="Oval 24"/>
-          <p:cNvSpPr/>
-          <p:nvPr/>
-        </p:nvSpPr>
-        <p:spPr>
-          <a:xfrm>
-            <a:off x="6858000" y="4754880"/>
-            <a:ext cx="365760" cy="365760"/>
-          </a:xfrm>
-          <a:prstGeom prst="ellipse">
-            <a:avLst/>
-          </a:prstGeom>
-          <a:solidFill>
-            <a:srgbClr val="C0392B"/>
-          </a:solidFill>
-          <a:ln>
-            <a:noFill/>
-          </a:ln>
-        </p:spPr>
-        <p:style>
-          <a:lnRef idx="1">
-            <a:schemeClr val="accent1"/>
-          </a:lnRef>
-          <a:fillRef idx="3">
-            <a:schemeClr val="accent1"/>
-          </a:fillRef>
-          <a:effectRef idx="2">
-            <a:schemeClr val="accent1"/>
-          </a:effectRef>
-          <a:fontRef idx="minor">
-            <a:schemeClr val="lt1"/>
-          </a:fontRef>
-        </p:style>
-        <p:txBody>
-          <a:bodyPr wrap="none" rtlCol="0" anchor="ctr"/>
-          <a:lstStyle/>
-          <a:p>
-            <a:pPr algn="ctr">
-              <a:spcBef>
-                <a:spcPts val="0"/>
-              </a:spcBef>
-              <a:spcAft>
-                <a:spcPts val="0"/>
-              </a:spcAft>
-              <a:defRPr sz="900" b="1">
-                <a:solidFill>
-                  <a:srgbClr val="FFFFFF"/>
-                </a:solidFill>
-              </a:defRPr>
-            </a:pPr>
-            <a:r>
-              <a:t>S</a:t>
-            </a:r>
-          </a:p>
-        </p:txBody>
-      </p:sp>
-      <p:sp>
-        <p:nvSpPr>
-          <p:cNvPr id="26" name="Oval 25"/>
-          <p:cNvSpPr/>
-          <p:nvPr/>
-        </p:nvSpPr>
-        <p:spPr>
-          <a:xfrm>
-            <a:off x="7589520" y="4754880"/>
-            <a:ext cx="365760" cy="365760"/>
-          </a:xfrm>
-          <a:prstGeom prst="ellipse">
-            <a:avLst/>
-          </a:prstGeom>
-          <a:solidFill>
-            <a:srgbClr val="C0392B"/>
-          </a:solidFill>
-          <a:ln>
-            <a:noFill/>
-          </a:ln>
-        </p:spPr>
-        <p:style>
-          <a:lnRef idx="1">
-            <a:schemeClr val="accent1"/>
-          </a:lnRef>
-          <a:fillRef idx="3">
-            <a:schemeClr val="accent1"/>
-          </a:fillRef>
-          <a:effectRef idx="2">
-            <a:schemeClr val="accent1"/>
-          </a:effectRef>
-          <a:fontRef idx="minor">
-            <a:schemeClr val="lt1"/>
-          </a:fontRef>
-        </p:style>
-        <p:txBody>
-          <a:bodyPr wrap="none" rtlCol="0" anchor="ctr"/>
-          <a:lstStyle/>
-          <a:p>
-            <a:pPr algn="ctr">
-              <a:spcBef>
-                <a:spcPts val="0"/>
-              </a:spcBef>
-              <a:spcAft>
-                <a:spcPts val="0"/>
-              </a:spcAft>
-              <a:defRPr sz="900" b="1">
-                <a:solidFill>
-                  <a:srgbClr val="FFFFFF"/>
-                </a:solidFill>
-              </a:defRPr>
-            </a:pPr>
-            <a:r>
-              <a:t>S</a:t>
-            </a:r>
-          </a:p>
-        </p:txBody>
-      </p:sp>
-      <p:sp>
-        <p:nvSpPr>
-          <p:cNvPr id="27" name="Oval 26"/>
-          <p:cNvSpPr/>
-          <p:nvPr/>
-        </p:nvSpPr>
-        <p:spPr>
-          <a:xfrm>
-            <a:off x="8321040" y="4754880"/>
-            <a:ext cx="365760" cy="365760"/>
-          </a:xfrm>
-          <a:prstGeom prst="ellipse">
-            <a:avLst/>
-          </a:prstGeom>
-          <a:solidFill>
-            <a:srgbClr val="C0392B"/>
-          </a:solidFill>
-          <a:ln>
-            <a:noFill/>
-          </a:ln>
-        </p:spPr>
-        <p:style>
-          <a:lnRef idx="1">
-            <a:schemeClr val="accent1"/>
-          </a:lnRef>
-          <a:fillRef idx="3">
-            <a:schemeClr val="accent1"/>
-          </a:fillRef>
-          <a:effectRef idx="2">
-            <a:schemeClr val="accent1"/>
-          </a:effectRef>
-          <a:fontRef idx="minor">
-            <a:schemeClr val="lt1"/>
-          </a:fontRef>
-        </p:style>
-        <p:txBody>
-          <a:bodyPr wrap="none" rtlCol="0" anchor="ctr"/>
-          <a:lstStyle/>
-          <a:p>
-            <a:pPr algn="ctr">
-              <a:spcBef>
-                <a:spcPts val="0"/>
-              </a:spcBef>
-              <a:spcAft>
-                <a:spcPts val="0"/>
-              </a:spcAft>
-              <a:defRPr sz="900" b="1">
-                <a:solidFill>
-                  <a:srgbClr val="FFFFFF"/>
-                </a:solidFill>
-              </a:defRPr>
-            </a:pPr>
-            <a:r>
-              <a:t>S</a:t>
-            </a:r>
-          </a:p>
-        </p:txBody>
-      </p:sp>
-      <p:sp>
-        <p:nvSpPr>
-          <p:cNvPr id="28" name="TextBox 27"/>
-          <p:cNvSpPr txBox="1"/>
-          <p:nvPr/>
-        </p:nvSpPr>
-        <p:spPr>
-          <a:xfrm>
-            <a:off x="6675120" y="5303520"/>
-            <a:ext cx="3200400" cy="731520"/>
-          </a:xfrm>
-          <a:prstGeom prst="rect">
-            <a:avLst/>
-          </a:prstGeom>
-          <a:noFill/>
-        </p:spPr>
-        <p:txBody>
-          <a:bodyPr wrap="square">
-            <a:spAutoFit/>
-          </a:bodyPr>
-          <a:lstStyle/>
-          <a:p>
-            <a:pPr algn="l">
-              <a:defRPr sz="1100" b="0">
-                <a:solidFill>
-                  <a:srgbClr val="27AE60"/>
-                </a:solidFill>
-                <a:latin typeface="Calibri"/>
-              </a:defRPr>
-            </a:pPr>
-            <a:r>
-              <a:t>Only T↔S edges</a:t>
-            </a:r>
-            <a:br/>
-            <a:r>
-              <a:t>Forces learning at the</a:t>
-            </a:r>
-            <a:br/>
-            <a:r>
-              <a:t>tumor–NNP interface</a:t>
-            </a:r>
-          </a:p>
-        </p:txBody>
-      </p:sp>
-      <p:sp>
-        <p:nvSpPr>
           <p:cNvPr id="29" name="Rounded Rectangle 28"/>
           <p:cNvSpPr/>
           <p:nvPr/>
         </p:nvSpPr>
         <p:spPr>
           <a:xfrm>
-            <a:off x="457200" y="5943600"/>
+            <a:off x="472440" y="5035138"/>
             <a:ext cx="11247120" cy="640080"/>
           </a:xfrm>
           <a:prstGeom prst="roundRect">
@@ -19848,7 +19107,7 @@
         </p:nvSpPr>
         <p:spPr>
           <a:xfrm>
-            <a:off x="2743200" y="5029200"/>
+            <a:off x="2966484" y="4553713"/>
             <a:ext cx="228600" cy="228600"/>
           </a:xfrm>
           <a:prstGeom prst="ellipse">
@@ -19892,7 +19151,7 @@
         </p:nvSpPr>
         <p:spPr>
           <a:xfrm>
-            <a:off x="3017520" y="5029200"/>
+            <a:off x="3240804" y="4553713"/>
             <a:ext cx="1828800" cy="274320"/>
           </a:xfrm>
           <a:prstGeom prst="rect">
@@ -19928,7 +19187,7 @@
         </p:nvSpPr>
         <p:spPr>
           <a:xfrm>
-            <a:off x="4572000" y="5029200"/>
+            <a:off x="4795284" y="4553713"/>
             <a:ext cx="228600" cy="228600"/>
           </a:xfrm>
           <a:prstGeom prst="ellipse">
@@ -19972,7 +19231,7 @@
         </p:nvSpPr>
         <p:spPr>
           <a:xfrm>
-            <a:off x="4846320" y="5029200"/>
+            <a:off x="5069604" y="4553713"/>
             <a:ext cx="1828800" cy="274320"/>
           </a:xfrm>
           <a:prstGeom prst="rect">
@@ -20008,7 +19267,7 @@
         </p:nvSpPr>
         <p:spPr>
           <a:xfrm>
-            <a:off x="6858000" y="5029200"/>
+            <a:off x="7081284" y="4553713"/>
             <a:ext cx="228600" cy="228600"/>
           </a:xfrm>
           <a:prstGeom prst="ellipse">
@@ -20052,7 +19311,7 @@
         </p:nvSpPr>
         <p:spPr>
           <a:xfrm>
-            <a:off x="7132320" y="5029200"/>
+            <a:off x="7355604" y="4553713"/>
             <a:ext cx="1828800" cy="274320"/>
           </a:xfrm>
           <a:prstGeom prst="rect">
@@ -20082,49 +19341,13 @@
       </p:sp>
       <p:sp>
         <p:nvSpPr>
-          <p:cNvPr id="98" name="TextBox 97"/>
-          <p:cNvSpPr txBox="1"/>
-          <p:nvPr/>
-        </p:nvSpPr>
-        <p:spPr>
-          <a:xfrm>
-            <a:off x="457200" y="5486400"/>
-            <a:ext cx="10972800" cy="365760"/>
-          </a:xfrm>
-          <a:prstGeom prst="rect">
-            <a:avLst/>
-          </a:prstGeom>
-          <a:noFill/>
-        </p:spPr>
-        <p:txBody>
-          <a:bodyPr wrap="square">
-            <a:spAutoFit/>
-          </a:bodyPr>
-          <a:lstStyle/>
-          <a:p>
-            <a:pPr algn="ctr">
-              <a:defRPr sz="1300" b="0">
-                <a:solidFill>
-                  <a:srgbClr val="555566"/>
-                </a:solidFill>
-                <a:latin typeface="Calibri"/>
-              </a:defRPr>
-            </a:pPr>
-            <a:r>
-              <a:t>Distance metric: Chebyshev (L∞) = max(|Δx|, |Δy|) / patch_size</a:t>
-            </a:r>
-          </a:p>
-        </p:txBody>
-      </p:sp>
-      <p:sp>
-        <p:nvSpPr>
           <p:cNvPr id="99" name="Rounded Rectangle 98"/>
           <p:cNvSpPr/>
           <p:nvPr/>
         </p:nvSpPr>
         <p:spPr>
           <a:xfrm>
-            <a:off x="457200" y="5943600"/>
+            <a:off x="472440" y="5263116"/>
             <a:ext cx="11247120" cy="640080"/>
           </a:xfrm>
           <a:prstGeom prst="roundRect">
@@ -20165,7 +19388,8 @@
               </a:defRPr>
             </a:pPr>
             <a:r>
-              <a:t>Thesis finding: Larger radius r consistently improves performance. r=3 is optimal (Table 5.5)</a:t>
+              <a:rPr dirty="0"/>
+              <a:t>Thesis finding: r=3 is optimal (Table 5.5)</a:t>
             </a:r>
           </a:p>
         </p:txBody>
@@ -20288,20 +19512,30 @@
               </a:defRPr>
             </a:pPr>
             <a:r>
+              <a:rPr dirty="0"/>
               <a:t>Frozen</a:t>
             </a:r>
-            <a:br/>
-            <a:r>
+            <a:br>
+              <a:rPr dirty="0"/>
+            </a:br>
+            <a:r>
+              <a:rPr dirty="0"/>
               <a:t>Projector</a:t>
             </a:r>
           </a:p>
           <a:p>
-            <a:br/>
-            <a:r>
+            <a:br>
+              <a:rPr dirty="0"/>
+            </a:br>
+            <a:r>
+              <a:rPr dirty="0"/>
               <a:t>AE Encoder</a:t>
             </a:r>
-            <a:br/>
-            <a:r>
+            <a:br>
+              <a:rPr dirty="0"/>
+            </a:br>
+            <a:r>
+              <a:rPr dirty="0"/>
               <a:t>1280 → 256</a:t>
             </a:r>
           </a:p>

--- a/PanNET_Pipeline_Presentation.pptx
+++ b/PanNET_Pipeline_Presentation.pptx
@@ -14,9 +14,9 @@
     <p:sldId id="261" r:id="rId8"/>
     <p:sldId id="262" r:id="rId9"/>
     <p:sldId id="263" r:id="rId10"/>
-    <p:sldId id="264" r:id="rId11"/>
-    <p:sldId id="265" r:id="rId12"/>
-    <p:sldId id="267" r:id="rId13"/>
+    <p:sldId id="268" r:id="rId11"/>
+    <p:sldId id="267" r:id="rId12"/>
+    <p:sldId id="269" r:id="rId13"/>
   </p:sldIdLst>
   <p:sldSz cx="12192000" cy="6858000"/>
   <p:notesSz cx="6858000" cy="9144000"/>
@@ -3260,17 +3260,28 @@
               <a:spcBef>
                 <a:spcPts val="600"/>
               </a:spcBef>
-              <a:defRPr sz="1200" b="1">
+            </a:pPr>
+            <a:r>
+              <a:rPr sz="1200" b="1">
                 <a:solidFill>
                   <a:srgbClr val="FFFFFF"/>
                 </a:solidFill>
-              </a:defRPr>
-            </a:pPr>
-            <a:r>
+              </a:rPr>
               <a:t>Stage 1</a:t>
             </a:r>
-            <a:br/>
-            <a:r>
+            <a:br>
+              <a:rPr sz="1200" b="1">
+                <a:solidFill>
+                  <a:srgbClr val="FFFFFF"/>
+                </a:solidFill>
+              </a:rPr>
+            </a:br>
+            <a:r>
+              <a:rPr sz="1200" b="1">
+                <a:solidFill>
+                  <a:srgbClr val="FFFFFF"/>
+                </a:solidFill>
+              </a:rPr>
               <a:t>WSI → Patches</a:t>
             </a:r>
           </a:p>
@@ -3335,7 +3346,280 @@
             <a:avLst/>
           </a:prstGeom>
           <a:solidFill>
-            <a:srgbClr val="7D3C98"/>
+            <a:srgbClr val="2980B9"/>
+          </a:solidFill>
+          <a:ln>
+            <a:noFill/>
+          </a:ln>
+        </p:spPr>
+        <p:style>
+          <a:lnRef idx="1">
+            <a:schemeClr val="accent1"/>
+          </a:lnRef>
+          <a:fillRef idx="3">
+            <a:schemeClr val="accent1"/>
+          </a:fillRef>
+          <a:effectRef idx="2">
+            <a:schemeClr val="accent1"/>
+          </a:effectRef>
+          <a:fontRef idx="minor">
+            <a:schemeClr val="lt1"/>
+          </a:fontRef>
+        </p:style>
+        <p:txBody>
+          <a:bodyPr wrap="square" rtlCol="0" anchor="ctr"/>
+          <a:lstStyle/>
+          <a:p>
+            <a:pPr algn="ctr">
+              <a:spcBef>
+                <a:spcPts val="600"/>
+              </a:spcBef>
+            </a:pPr>
+            <a:r>
+              <a:rPr sz="1200" b="1">
+                <a:solidFill>
+                  <a:srgbClr val="FFFFFF"/>
+                </a:solidFill>
+              </a:rPr>
+              <a:t>Stage 2</a:t>
+            </a:r>
+            <a:br>
+              <a:rPr sz="1200" b="1">
+                <a:solidFill>
+                  <a:srgbClr val="FFFFFF"/>
+                </a:solidFill>
+              </a:rPr>
+            </a:br>
+            <a:r>
+              <a:rPr sz="1200" b="1">
+                <a:solidFill>
+                  <a:srgbClr val="FFFFFF"/>
+                </a:solidFill>
+              </a:rPr>
+              <a:t>AutoEncoder</a:t>
+            </a:r>
+          </a:p>
+        </p:txBody>
+      </p:sp>
+      <p:sp>
+        <p:nvSpPr>
+          <p:cNvPr id="8" name="Right Arrow 7"/>
+          <p:cNvSpPr/>
+          <p:nvPr/>
+        </p:nvSpPr>
+        <p:spPr>
+          <a:xfrm>
+            <a:off x="5074920" y="5120640"/>
+            <a:ext cx="320040" cy="274320"/>
+          </a:xfrm>
+          <a:prstGeom prst="rightArrow">
+            <a:avLst/>
+          </a:prstGeom>
+          <a:solidFill>
+            <a:srgbClr val="7F8C8D"/>
+          </a:solidFill>
+          <a:ln>
+            <a:noFill/>
+          </a:ln>
+        </p:spPr>
+        <p:style>
+          <a:lnRef idx="1">
+            <a:schemeClr val="accent1"/>
+          </a:lnRef>
+          <a:fillRef idx="3">
+            <a:schemeClr val="accent1"/>
+          </a:fillRef>
+          <a:effectRef idx="2">
+            <a:schemeClr val="accent1"/>
+          </a:effectRef>
+          <a:fontRef idx="minor">
+            <a:schemeClr val="lt1"/>
+          </a:fontRef>
+        </p:style>
+        <p:txBody>
+          <a:bodyPr rtlCol="0" anchor="ctr"/>
+          <a:lstStyle/>
+          <a:p>
+            <a:pPr algn="ctr"/>
+            <a:endParaRPr/>
+          </a:p>
+        </p:txBody>
+      </p:sp>
+      <p:sp>
+        <p:nvSpPr>
+          <p:cNvPr id="9" name="Rounded Rectangle 8"/>
+          <p:cNvSpPr/>
+          <p:nvPr/>
+        </p:nvSpPr>
+        <p:spPr>
+          <a:xfrm>
+            <a:off x="5394960" y="4846320"/>
+            <a:ext cx="1965960" cy="822960"/>
+          </a:xfrm>
+          <a:prstGeom prst="roundRect">
+            <a:avLst/>
+          </a:prstGeom>
+          <a:solidFill>
+            <a:srgbClr val="2980B9"/>
+          </a:solidFill>
+          <a:ln>
+            <a:noFill/>
+          </a:ln>
+        </p:spPr>
+        <p:style>
+          <a:lnRef idx="1">
+            <a:schemeClr val="accent1"/>
+          </a:lnRef>
+          <a:fillRef idx="3">
+            <a:schemeClr val="accent1"/>
+          </a:fillRef>
+          <a:effectRef idx="2">
+            <a:schemeClr val="accent1"/>
+          </a:effectRef>
+          <a:fontRef idx="minor">
+            <a:schemeClr val="lt1"/>
+          </a:fontRef>
+        </p:style>
+        <p:txBody>
+          <a:bodyPr wrap="square" rtlCol="0" anchor="ctr"/>
+          <a:lstStyle/>
+          <a:p>
+            <a:pPr algn="ctr">
+              <a:spcBef>
+                <a:spcPts val="600"/>
+              </a:spcBef>
+            </a:pPr>
+            <a:r>
+              <a:rPr sz="1200" b="1" dirty="0">
+                <a:solidFill>
+                  <a:srgbClr val="FFFFFF"/>
+                </a:solidFill>
+              </a:rPr>
+              <a:t>Stage 3</a:t>
+            </a:r>
+            <a:r>
+              <a:rPr lang="tr-TR" sz="1200" b="1" dirty="0">
+                <a:solidFill>
+                  <a:srgbClr val="FFFFFF"/>
+                </a:solidFill>
+              </a:rPr>
+              <a:t>-4</a:t>
+            </a:r>
+            <a:br>
+              <a:rPr sz="1200" b="1" dirty="0">
+                <a:solidFill>
+                  <a:srgbClr val="FFFFFF"/>
+                </a:solidFill>
+              </a:rPr>
+            </a:br>
+            <a:r>
+              <a:rPr sz="1200" b="1" dirty="0">
+                <a:solidFill>
+                  <a:srgbClr val="FFFFFF"/>
+                </a:solidFill>
+              </a:rPr>
+              <a:t>Graph Build</a:t>
+            </a:r>
+            <a:r>
+              <a:rPr lang="tr-TR" sz="1200" b="1" dirty="0">
+                <a:solidFill>
+                  <a:srgbClr val="FFFFFF"/>
+                </a:solidFill>
+              </a:rPr>
+              <a:t> - </a:t>
+            </a:r>
+            <a:r>
+              <a:rPr lang="en-US" sz="1200" b="1" dirty="0">
+                <a:solidFill>
+                  <a:srgbClr val="FFFFFF"/>
+                </a:solidFill>
+              </a:rPr>
+              <a:t>Cache (.</a:t>
+            </a:r>
+            <a:r>
+              <a:rPr lang="en-US" sz="1200" b="1" dirty="0" err="1">
+                <a:solidFill>
+                  <a:srgbClr val="FFFFFF"/>
+                </a:solidFill>
+              </a:rPr>
+              <a:t>pkl</a:t>
+            </a:r>
+            <a:r>
+              <a:rPr lang="en-US" sz="1200" b="1" dirty="0">
+                <a:solidFill>
+                  <a:srgbClr val="FFFFFF"/>
+                </a:solidFill>
+              </a:rPr>
+              <a:t>)</a:t>
+            </a:r>
+            <a:endParaRPr sz="1200" b="1" dirty="0">
+              <a:solidFill>
+                <a:srgbClr val="FFFFFF"/>
+              </a:solidFill>
+            </a:endParaRPr>
+          </a:p>
+        </p:txBody>
+      </p:sp>
+      <p:sp>
+        <p:nvSpPr>
+          <p:cNvPr id="10" name="Right Arrow 9"/>
+          <p:cNvSpPr/>
+          <p:nvPr/>
+        </p:nvSpPr>
+        <p:spPr>
+          <a:xfrm>
+            <a:off x="7326630" y="5120640"/>
+            <a:ext cx="320040" cy="274320"/>
+          </a:xfrm>
+          <a:prstGeom prst="rightArrow">
+            <a:avLst/>
+          </a:prstGeom>
+          <a:solidFill>
+            <a:srgbClr val="7F8C8D"/>
+          </a:solidFill>
+          <a:ln>
+            <a:noFill/>
+          </a:ln>
+        </p:spPr>
+        <p:style>
+          <a:lnRef idx="1">
+            <a:schemeClr val="accent1"/>
+          </a:lnRef>
+          <a:fillRef idx="3">
+            <a:schemeClr val="accent1"/>
+          </a:fillRef>
+          <a:effectRef idx="2">
+            <a:schemeClr val="accent1"/>
+          </a:effectRef>
+          <a:fontRef idx="minor">
+            <a:schemeClr val="lt1"/>
+          </a:fontRef>
+        </p:style>
+        <p:txBody>
+          <a:bodyPr rtlCol="0" anchor="ctr"/>
+          <a:lstStyle/>
+          <a:p>
+            <a:pPr algn="ctr"/>
+            <a:endParaRPr/>
+          </a:p>
+        </p:txBody>
+      </p:sp>
+      <p:sp>
+        <p:nvSpPr>
+          <p:cNvPr id="13" name="Rounded Rectangle 12"/>
+          <p:cNvSpPr/>
+          <p:nvPr/>
+        </p:nvSpPr>
+        <p:spPr>
+          <a:xfrm>
+            <a:off x="7612380" y="4846320"/>
+            <a:ext cx="1828800" cy="822960"/>
+          </a:xfrm>
+          <a:prstGeom prst="roundRect">
+            <a:avLst/>
+          </a:prstGeom>
+          <a:solidFill>
+            <a:srgbClr val="C0392B"/>
           </a:solidFill>
           <a:ln>
             <a:noFill/>
@@ -3370,319 +3654,14 @@
               </a:defRPr>
             </a:pPr>
             <a:r>
-              <a:t>Stage 2</a:t>
-            </a:r>
-            <a:br/>
-            <a:r>
-              <a:t>AutoEncoder</a:t>
-            </a:r>
-          </a:p>
-        </p:txBody>
-      </p:sp>
-      <p:sp>
-        <p:nvSpPr>
-          <p:cNvPr id="8" name="Right Arrow 7"/>
-          <p:cNvSpPr/>
-          <p:nvPr/>
-        </p:nvSpPr>
-        <p:spPr>
-          <a:xfrm>
-            <a:off x="5074920" y="5120640"/>
-            <a:ext cx="320040" cy="274320"/>
-          </a:xfrm>
-          <a:prstGeom prst="rightArrow">
-            <a:avLst/>
-          </a:prstGeom>
-          <a:solidFill>
-            <a:srgbClr val="7F8C8D"/>
-          </a:solidFill>
-          <a:ln>
-            <a:noFill/>
-          </a:ln>
-        </p:spPr>
-        <p:style>
-          <a:lnRef idx="1">
-            <a:schemeClr val="accent1"/>
-          </a:lnRef>
-          <a:fillRef idx="3">
-            <a:schemeClr val="accent1"/>
-          </a:fillRef>
-          <a:effectRef idx="2">
-            <a:schemeClr val="accent1"/>
-          </a:effectRef>
-          <a:fontRef idx="minor">
-            <a:schemeClr val="lt1"/>
-          </a:fontRef>
-        </p:style>
-        <p:txBody>
-          <a:bodyPr rtlCol="0" anchor="ctr"/>
-          <a:lstStyle/>
-          <a:p>
-            <a:pPr algn="ctr"/>
-            <a:endParaRPr/>
-          </a:p>
-        </p:txBody>
-      </p:sp>
-      <p:sp>
-        <p:nvSpPr>
-          <p:cNvPr id="9" name="Rounded Rectangle 8"/>
-          <p:cNvSpPr/>
-          <p:nvPr/>
-        </p:nvSpPr>
-        <p:spPr>
-          <a:xfrm>
-            <a:off x="5394960" y="4846320"/>
-            <a:ext cx="1828800" cy="822960"/>
-          </a:xfrm>
-          <a:prstGeom prst="roundRect">
-            <a:avLst/>
-          </a:prstGeom>
-          <a:solidFill>
-            <a:srgbClr val="27AE60"/>
-          </a:solidFill>
-          <a:ln>
-            <a:noFill/>
-          </a:ln>
-        </p:spPr>
-        <p:style>
-          <a:lnRef idx="1">
-            <a:schemeClr val="accent1"/>
-          </a:lnRef>
-          <a:fillRef idx="3">
-            <a:schemeClr val="accent1"/>
-          </a:fillRef>
-          <a:effectRef idx="2">
-            <a:schemeClr val="accent1"/>
-          </a:effectRef>
-          <a:fontRef idx="minor">
-            <a:schemeClr val="lt1"/>
-          </a:fontRef>
-        </p:style>
-        <p:txBody>
-          <a:bodyPr wrap="square" rtlCol="0" anchor="ctr"/>
-          <a:lstStyle/>
-          <a:p>
-            <a:pPr algn="ctr">
-              <a:spcBef>
-                <a:spcPts val="600"/>
-              </a:spcBef>
-              <a:defRPr sz="1200" b="1">
-                <a:solidFill>
-                  <a:srgbClr val="FFFFFF"/>
-                </a:solidFill>
-              </a:defRPr>
-            </a:pPr>
-            <a:r>
-              <a:t>Stage 3</a:t>
-            </a:r>
-            <a:br/>
-            <a:r>
-              <a:t>Graph Build</a:t>
-            </a:r>
-          </a:p>
-        </p:txBody>
-      </p:sp>
-      <p:sp>
-        <p:nvSpPr>
-          <p:cNvPr id="10" name="Right Arrow 9"/>
-          <p:cNvSpPr/>
-          <p:nvPr/>
-        </p:nvSpPr>
-        <p:spPr>
-          <a:xfrm>
-            <a:off x="7223760" y="5120640"/>
-            <a:ext cx="320040" cy="274320"/>
-          </a:xfrm>
-          <a:prstGeom prst="rightArrow">
-            <a:avLst/>
-          </a:prstGeom>
-          <a:solidFill>
-            <a:srgbClr val="7F8C8D"/>
-          </a:solidFill>
-          <a:ln>
-            <a:noFill/>
-          </a:ln>
-        </p:spPr>
-        <p:style>
-          <a:lnRef idx="1">
-            <a:schemeClr val="accent1"/>
-          </a:lnRef>
-          <a:fillRef idx="3">
-            <a:schemeClr val="accent1"/>
-          </a:fillRef>
-          <a:effectRef idx="2">
-            <a:schemeClr val="accent1"/>
-          </a:effectRef>
-          <a:fontRef idx="minor">
-            <a:schemeClr val="lt1"/>
-          </a:fontRef>
-        </p:style>
-        <p:txBody>
-          <a:bodyPr rtlCol="0" anchor="ctr"/>
-          <a:lstStyle/>
-          <a:p>
-            <a:pPr algn="ctr"/>
-            <a:endParaRPr/>
-          </a:p>
-        </p:txBody>
-      </p:sp>
-      <p:sp>
-        <p:nvSpPr>
-          <p:cNvPr id="11" name="Rounded Rectangle 10"/>
-          <p:cNvSpPr/>
-          <p:nvPr/>
-        </p:nvSpPr>
-        <p:spPr>
-          <a:xfrm>
-            <a:off x="7543800" y="4846320"/>
-            <a:ext cx="1828800" cy="822960"/>
-          </a:xfrm>
-          <a:prstGeom prst="roundRect">
-            <a:avLst/>
-          </a:prstGeom>
-          <a:solidFill>
-            <a:srgbClr val="D35400"/>
-          </a:solidFill>
-          <a:ln>
-            <a:noFill/>
-          </a:ln>
-        </p:spPr>
-        <p:style>
-          <a:lnRef idx="1">
-            <a:schemeClr val="accent1"/>
-          </a:lnRef>
-          <a:fillRef idx="3">
-            <a:schemeClr val="accent1"/>
-          </a:fillRef>
-          <a:effectRef idx="2">
-            <a:schemeClr val="accent1"/>
-          </a:effectRef>
-          <a:fontRef idx="minor">
-            <a:schemeClr val="lt1"/>
-          </a:fontRef>
-        </p:style>
-        <p:txBody>
-          <a:bodyPr wrap="square" rtlCol="0" anchor="ctr"/>
-          <a:lstStyle/>
-          <a:p>
-            <a:pPr algn="ctr">
-              <a:spcBef>
-                <a:spcPts val="600"/>
-              </a:spcBef>
-              <a:defRPr sz="1200" b="1">
-                <a:solidFill>
-                  <a:srgbClr val="FFFFFF"/>
-                </a:solidFill>
-              </a:defRPr>
-            </a:pPr>
-            <a:r>
-              <a:t>Stage 4</a:t>
-            </a:r>
-            <a:br/>
-            <a:r>
-              <a:t>Cache (.pkl)</a:t>
-            </a:r>
-          </a:p>
-        </p:txBody>
-      </p:sp>
-      <p:sp>
-        <p:nvSpPr>
-          <p:cNvPr id="12" name="Right Arrow 11"/>
-          <p:cNvSpPr/>
-          <p:nvPr/>
-        </p:nvSpPr>
-        <p:spPr>
-          <a:xfrm>
-            <a:off x="9372600" y="5120640"/>
-            <a:ext cx="320040" cy="274320"/>
-          </a:xfrm>
-          <a:prstGeom prst="rightArrow">
-            <a:avLst/>
-          </a:prstGeom>
-          <a:solidFill>
-            <a:srgbClr val="7F8C8D"/>
-          </a:solidFill>
-          <a:ln>
-            <a:noFill/>
-          </a:ln>
-        </p:spPr>
-        <p:style>
-          <a:lnRef idx="1">
-            <a:schemeClr val="accent1"/>
-          </a:lnRef>
-          <a:fillRef idx="3">
-            <a:schemeClr val="accent1"/>
-          </a:fillRef>
-          <a:effectRef idx="2">
-            <a:schemeClr val="accent1"/>
-          </a:effectRef>
-          <a:fontRef idx="minor">
-            <a:schemeClr val="lt1"/>
-          </a:fontRef>
-        </p:style>
-        <p:txBody>
-          <a:bodyPr rtlCol="0" anchor="ctr"/>
-          <a:lstStyle/>
-          <a:p>
-            <a:pPr algn="ctr"/>
-            <a:endParaRPr/>
-          </a:p>
-        </p:txBody>
-      </p:sp>
-      <p:sp>
-        <p:nvSpPr>
-          <p:cNvPr id="13" name="Rounded Rectangle 12"/>
-          <p:cNvSpPr/>
-          <p:nvPr/>
-        </p:nvSpPr>
-        <p:spPr>
-          <a:xfrm>
-            <a:off x="9692640" y="4846320"/>
-            <a:ext cx="1828800" cy="822960"/>
-          </a:xfrm>
-          <a:prstGeom prst="roundRect">
-            <a:avLst/>
-          </a:prstGeom>
-          <a:solidFill>
-            <a:srgbClr val="C0392B"/>
-          </a:solidFill>
-          <a:ln>
-            <a:noFill/>
-          </a:ln>
-        </p:spPr>
-        <p:style>
-          <a:lnRef idx="1">
-            <a:schemeClr val="accent1"/>
-          </a:lnRef>
-          <a:fillRef idx="3">
-            <a:schemeClr val="accent1"/>
-          </a:fillRef>
-          <a:effectRef idx="2">
-            <a:schemeClr val="accent1"/>
-          </a:effectRef>
-          <a:fontRef idx="minor">
-            <a:schemeClr val="lt1"/>
-          </a:fontRef>
-        </p:style>
-        <p:txBody>
-          <a:bodyPr wrap="square" rtlCol="0" anchor="ctr"/>
-          <a:lstStyle/>
-          <a:p>
-            <a:pPr algn="ctr">
-              <a:spcBef>
-                <a:spcPts val="600"/>
-              </a:spcBef>
-              <a:defRPr sz="1200" b="1">
-                <a:solidFill>
-                  <a:srgbClr val="FFFFFF"/>
-                </a:solidFill>
-              </a:defRPr>
-            </a:pPr>
-            <a:r>
+              <a:rPr dirty="0"/>
               <a:t>Stage 5</a:t>
             </a:r>
-            <a:br/>
-            <a:r>
+            <a:br>
+              <a:rPr dirty="0"/>
+            </a:br>
+            <a:r>
+              <a:rPr dirty="0"/>
               <a:t>GIN Training</a:t>
             </a:r>
           </a:p>
@@ -3699,14 +3678,6 @@
 <file path=ppt/slides/slide10.xml><?xml version="1.0" encoding="utf-8"?>
 <p:sld xmlns:a="http://schemas.openxmlformats.org/drawingml/2006/main" xmlns:r="http://schemas.openxmlformats.org/officeDocument/2006/relationships" xmlns:p="http://schemas.openxmlformats.org/presentationml/2006/main">
   <p:cSld>
-    <p:bg>
-      <p:bgPr>
-        <a:solidFill>
-          <a:srgbClr val="FFFFFF"/>
-        </a:solidFill>
-        <a:effectLst/>
-      </p:bgPr>
-    </p:bg>
     <p:spTree>
       <p:nvGrpSpPr>
         <p:cNvPr id="1" name=""/>
@@ -3723,13 +3694,915 @@
       </p:grpSpPr>
       <p:sp>
         <p:nvSpPr>
-          <p:cNvPr id="2" name="TextBox 1"/>
+          <p:cNvPr id="20" name="Rounded Rectangle 19">
+            <a:extLst>
+              <a:ext uri="{FF2B5EF4-FFF2-40B4-BE49-F238E27FC236}">
+                <a16:creationId xmlns:a16="http://schemas.microsoft.com/office/drawing/2014/main" id="{351A5338-D39F-1D2F-DC1A-E3E9A81BF556}"/>
+              </a:ext>
+            </a:extLst>
+          </p:cNvPr>
+          <p:cNvSpPr/>
+          <p:nvPr/>
+        </p:nvSpPr>
+        <p:spPr>
+          <a:xfrm>
+            <a:off x="8179724" y="1406238"/>
+            <a:ext cx="3017520" cy="2560320"/>
+          </a:xfrm>
+          <a:prstGeom prst="roundRect">
+            <a:avLst/>
+          </a:prstGeom>
+          <a:solidFill>
+            <a:srgbClr val="F2F2F2"/>
+          </a:solidFill>
+          <a:ln w="12700">
+            <a:solidFill>
+              <a:srgbClr val="CCCCCC"/>
+            </a:solidFill>
+          </a:ln>
+        </p:spPr>
+        <p:style>
+          <a:lnRef idx="1">
+            <a:schemeClr val="accent1"/>
+          </a:lnRef>
+          <a:fillRef idx="3">
+            <a:schemeClr val="accent1"/>
+          </a:fillRef>
+          <a:effectRef idx="2">
+            <a:schemeClr val="accent1"/>
+          </a:effectRef>
+          <a:fontRef idx="minor">
+            <a:schemeClr val="lt1"/>
+          </a:fontRef>
+        </p:style>
+        <p:txBody>
+          <a:bodyPr rtlCol="0" anchor="ctr"/>
+          <a:lstStyle/>
+          <a:p>
+            <a:pPr algn="ctr"/>
+            <a:endParaRPr/>
+          </a:p>
+        </p:txBody>
+      </p:sp>
+      <p:graphicFrame>
+        <p:nvGraphicFramePr>
+          <p:cNvPr id="16" name="Table 15">
+            <a:extLst>
+              <a:ext uri="{FF2B5EF4-FFF2-40B4-BE49-F238E27FC236}">
+                <a16:creationId xmlns:a16="http://schemas.microsoft.com/office/drawing/2014/main" id="{F0073141-1196-3A47-B7DA-6CF9243DB5DC}"/>
+              </a:ext>
+            </a:extLst>
+          </p:cNvPr>
+          <p:cNvGraphicFramePr>
+            <a:graphicFrameLocks noGrp="1"/>
+          </p:cNvGraphicFramePr>
+          <p:nvPr>
+            <p:extLst>
+              <p:ext uri="{D42A27DB-BD31-4B8C-83A1-F6EECF244321}">
+                <p14:modId xmlns:p14="http://schemas.microsoft.com/office/powerpoint/2010/main" val="907113755"/>
+              </p:ext>
+            </p:extLst>
+          </p:nvPr>
+        </p:nvGraphicFramePr>
+        <p:xfrm>
+          <a:off x="124691" y="1670858"/>
+          <a:ext cx="7772400" cy="2295700"/>
+        </p:xfrm>
+        <a:graphic>
+          <a:graphicData uri="http://schemas.openxmlformats.org/drawingml/2006/table">
+            <a:tbl>
+              <a:tblPr firstRow="1" bandRow="1">
+                <a:tableStyleId>{5C22544A-7EE6-4342-B048-85BDC9FD1C3A}</a:tableStyleId>
+              </a:tblPr>
+              <a:tblGrid>
+                <a:gridCol w="1165860">
+                  <a:extLst>
+                    <a:ext uri="{9D8B030D-6E8A-4147-A177-3AD203B41FA5}">
+                      <a16:colId xmlns:a16="http://schemas.microsoft.com/office/drawing/2014/main" val="20000"/>
+                    </a:ext>
+                  </a:extLst>
+                </a:gridCol>
+                <a:gridCol w="1010412">
+                  <a:extLst>
+                    <a:ext uri="{9D8B030D-6E8A-4147-A177-3AD203B41FA5}">
+                      <a16:colId xmlns:a16="http://schemas.microsoft.com/office/drawing/2014/main" val="20001"/>
+                    </a:ext>
+                  </a:extLst>
+                </a:gridCol>
+                <a:gridCol w="1165860">
+                  <a:extLst>
+                    <a:ext uri="{9D8B030D-6E8A-4147-A177-3AD203B41FA5}">
+                      <a16:colId xmlns:a16="http://schemas.microsoft.com/office/drawing/2014/main" val="20002"/>
+                    </a:ext>
+                  </a:extLst>
+                </a:gridCol>
+                <a:gridCol w="1010412">
+                  <a:extLst>
+                    <a:ext uri="{9D8B030D-6E8A-4147-A177-3AD203B41FA5}">
+                      <a16:colId xmlns:a16="http://schemas.microsoft.com/office/drawing/2014/main" val="20003"/>
+                    </a:ext>
+                  </a:extLst>
+                </a:gridCol>
+                <a:gridCol w="3419856">
+                  <a:extLst>
+                    <a:ext uri="{9D8B030D-6E8A-4147-A177-3AD203B41FA5}">
+                      <a16:colId xmlns:a16="http://schemas.microsoft.com/office/drawing/2014/main" val="20004"/>
+                    </a:ext>
+                  </a:extLst>
+                </a:gridCol>
+              </a:tblGrid>
+              <a:tr h="361604">
+                <a:tc>
+                  <a:txBody>
+                    <a:bodyPr/>
+                    <a:lstStyle/>
+                    <a:p>
+                      <a:pPr algn="l">
+                        <a:defRPr sz="1300" b="1">
+                          <a:solidFill>
+                            <a:srgbClr val="FFFFFF"/>
+                          </a:solidFill>
+                          <a:latin typeface="Calibri"/>
+                        </a:defRPr>
+                      </a:pPr>
+                      <a:r>
+                        <a:rPr dirty="0"/>
+                        <a:t>Fold</a:t>
+                      </a:r>
+                      <a:r>
+                        <a:rPr lang="tr-TR" dirty="0"/>
+                        <a:t>t</a:t>
+                      </a:r>
+                      <a:endParaRPr dirty="0"/>
+                    </a:p>
+                  </a:txBody>
+                  <a:tcPr anchor="ctr">
+                    <a:solidFill>
+                      <a:srgbClr val="333333"/>
+                    </a:solidFill>
+                  </a:tcPr>
+                </a:tc>
+                <a:tc>
+                  <a:txBody>
+                    <a:bodyPr/>
+                    <a:lstStyle/>
+                    <a:p>
+                      <a:pPr algn="l">
+                        <a:defRPr sz="1300" b="1">
+                          <a:solidFill>
+                            <a:srgbClr val="FFFFFF"/>
+                          </a:solidFill>
+                          <a:latin typeface="Calibri"/>
+                        </a:defRPr>
+                      </a:pPr>
+                      <a:r>
+                        <a:t>Slides With</a:t>
+                      </a:r>
+                    </a:p>
+                  </a:txBody>
+                  <a:tcPr anchor="ctr">
+                    <a:solidFill>
+                      <a:srgbClr val="333333"/>
+                    </a:solidFill>
+                  </a:tcPr>
+                </a:tc>
+                <a:tc>
+                  <a:txBody>
+                    <a:bodyPr/>
+                    <a:lstStyle/>
+                    <a:p>
+                      <a:pPr algn="l">
+                        <a:defRPr sz="1300" b="1">
+                          <a:solidFill>
+                            <a:srgbClr val="FFFFFF"/>
+                          </a:solidFill>
+                          <a:latin typeface="Calibri"/>
+                        </a:defRPr>
+                      </a:pPr>
+                      <a:r>
+                        <a:rPr dirty="0"/>
+                        <a:t>Slides Without</a:t>
+                      </a:r>
+                    </a:p>
+                  </a:txBody>
+                  <a:tcPr anchor="ctr">
+                    <a:solidFill>
+                      <a:srgbClr val="333333"/>
+                    </a:solidFill>
+                  </a:tcPr>
+                </a:tc>
+                <a:tc>
+                  <a:txBody>
+                    <a:bodyPr/>
+                    <a:lstStyle/>
+                    <a:p>
+                      <a:pPr algn="l">
+                        <a:defRPr sz="1300" b="1">
+                          <a:solidFill>
+                            <a:srgbClr val="FFFFFF"/>
+                          </a:solidFill>
+                          <a:latin typeface="Calibri"/>
+                        </a:defRPr>
+                      </a:pPr>
+                      <a:r>
+                        <a:t>Patients OK</a:t>
+                      </a:r>
+                    </a:p>
+                  </a:txBody>
+                  <a:tcPr anchor="ctr">
+                    <a:solidFill>
+                      <a:srgbClr val="333333"/>
+                    </a:solidFill>
+                  </a:tcPr>
+                </a:tc>
+                <a:tc>
+                  <a:txBody>
+                    <a:bodyPr/>
+                    <a:lstStyle/>
+                    <a:p>
+                      <a:pPr algn="l">
+                        <a:defRPr sz="1300" b="1">
+                          <a:solidFill>
+                            <a:srgbClr val="FFFFFF"/>
+                          </a:solidFill>
+                          <a:latin typeface="Calibri"/>
+                        </a:defRPr>
+                      </a:pPr>
+                      <a:r>
+                        <a:t>Patients Missing</a:t>
+                      </a:r>
+                    </a:p>
+                  </a:txBody>
+                  <a:tcPr anchor="ctr">
+                    <a:solidFill>
+                      <a:srgbClr val="333333"/>
+                    </a:solidFill>
+                  </a:tcPr>
+                </a:tc>
+                <a:extLst>
+                  <a:ext uri="{0D108BD9-81ED-4DB2-BD59-A6C34878D82A}">
+                    <a16:rowId xmlns:a16="http://schemas.microsoft.com/office/drawing/2014/main" val="10000"/>
+                  </a:ext>
+                </a:extLst>
+              </a:tr>
+              <a:tr h="361604">
+                <a:tc>
+                  <a:txBody>
+                    <a:bodyPr/>
+                    <a:lstStyle/>
+                    <a:p>
+                      <a:pPr algn="l">
+                        <a:defRPr sz="1300">
+                          <a:solidFill>
+                            <a:srgbClr val="1A1A1A"/>
+                          </a:solidFill>
+                          <a:latin typeface="Calibri"/>
+                        </a:defRPr>
+                      </a:pPr>
+                      <a:r>
+                        <a:t>s1</a:t>
+                      </a:r>
+                    </a:p>
+                  </a:txBody>
+                  <a:tcPr anchor="ctr">
+                    <a:solidFill>
+                      <a:srgbClr val="FFFFFF"/>
+                    </a:solidFill>
+                  </a:tcPr>
+                </a:tc>
+                <a:tc>
+                  <a:txBody>
+                    <a:bodyPr/>
+                    <a:lstStyle/>
+                    <a:p>
+                      <a:pPr algn="l">
+                        <a:defRPr sz="1300">
+                          <a:solidFill>
+                            <a:srgbClr val="1A1A1A"/>
+                          </a:solidFill>
+                          <a:latin typeface="Calibri"/>
+                        </a:defRPr>
+                      </a:pPr>
+                      <a:r>
+                        <a:t>43</a:t>
+                      </a:r>
+                    </a:p>
+                  </a:txBody>
+                  <a:tcPr anchor="ctr">
+                    <a:solidFill>
+                      <a:srgbClr val="FFFFFF"/>
+                    </a:solidFill>
+                  </a:tcPr>
+                </a:tc>
+                <a:tc>
+                  <a:txBody>
+                    <a:bodyPr/>
+                    <a:lstStyle/>
+                    <a:p>
+                      <a:pPr algn="l">
+                        <a:defRPr sz="1300">
+                          <a:solidFill>
+                            <a:srgbClr val="1A1A1A"/>
+                          </a:solidFill>
+                          <a:latin typeface="Calibri"/>
+                        </a:defRPr>
+                      </a:pPr>
+                      <a:r>
+                        <a:rPr dirty="0"/>
+                        <a:t>17</a:t>
+                      </a:r>
+                    </a:p>
+                  </a:txBody>
+                  <a:tcPr anchor="ctr">
+                    <a:solidFill>
+                      <a:srgbClr val="FFFFFF"/>
+                    </a:solidFill>
+                  </a:tcPr>
+                </a:tc>
+                <a:tc>
+                  <a:txBody>
+                    <a:bodyPr/>
+                    <a:lstStyle/>
+                    <a:p>
+                      <a:pPr algn="l">
+                        <a:defRPr sz="1300">
+                          <a:solidFill>
+                            <a:srgbClr val="1A1A1A"/>
+                          </a:solidFill>
+                          <a:latin typeface="Calibri"/>
+                        </a:defRPr>
+                      </a:pPr>
+                      <a:r>
+                        <a:rPr dirty="0"/>
+                        <a:t>15</a:t>
+                      </a:r>
+                    </a:p>
+                  </a:txBody>
+                  <a:tcPr anchor="ctr">
+                    <a:solidFill>
+                      <a:srgbClr val="FFFFFF"/>
+                    </a:solidFill>
+                  </a:tcPr>
+                </a:tc>
+                <a:tc>
+                  <a:txBody>
+                    <a:bodyPr/>
+                    <a:lstStyle/>
+                    <a:p>
+                      <a:pPr algn="l">
+                        <a:defRPr sz="1300">
+                          <a:solidFill>
+                            <a:srgbClr val="1A1A1A"/>
+                          </a:solidFill>
+                          <a:latin typeface="Calibri"/>
+                        </a:defRPr>
+                      </a:pPr>
+                      <a:r>
+                        <a:t>6  (#32, #45, #47, #52, #68, #69)</a:t>
+                      </a:r>
+                    </a:p>
+                  </a:txBody>
+                  <a:tcPr anchor="ctr">
+                    <a:solidFill>
+                      <a:srgbClr val="FFFFFF"/>
+                    </a:solidFill>
+                  </a:tcPr>
+                </a:tc>
+                <a:extLst>
+                  <a:ext uri="{0D108BD9-81ED-4DB2-BD59-A6C34878D82A}">
+                    <a16:rowId xmlns:a16="http://schemas.microsoft.com/office/drawing/2014/main" val="10001"/>
+                  </a:ext>
+                </a:extLst>
+              </a:tr>
+              <a:tr h="361604">
+                <a:tc>
+                  <a:txBody>
+                    <a:bodyPr/>
+                    <a:lstStyle/>
+                    <a:p>
+                      <a:pPr algn="l">
+                        <a:defRPr sz="1300">
+                          <a:solidFill>
+                            <a:srgbClr val="1A1A1A"/>
+                          </a:solidFill>
+                          <a:latin typeface="Calibri"/>
+                        </a:defRPr>
+                      </a:pPr>
+                      <a:r>
+                        <a:t>s2</a:t>
+                      </a:r>
+                    </a:p>
+                  </a:txBody>
+                  <a:tcPr anchor="ctr">
+                    <a:solidFill>
+                      <a:srgbClr val="F7F7F7"/>
+                    </a:solidFill>
+                  </a:tcPr>
+                </a:tc>
+                <a:tc>
+                  <a:txBody>
+                    <a:bodyPr/>
+                    <a:lstStyle/>
+                    <a:p>
+                      <a:pPr algn="l">
+                        <a:defRPr sz="1300">
+                          <a:solidFill>
+                            <a:srgbClr val="1A1A1A"/>
+                          </a:solidFill>
+                          <a:latin typeface="Calibri"/>
+                        </a:defRPr>
+                      </a:pPr>
+                      <a:r>
+                        <a:t>38</a:t>
+                      </a:r>
+                    </a:p>
+                  </a:txBody>
+                  <a:tcPr anchor="ctr">
+                    <a:solidFill>
+                      <a:srgbClr val="F7F7F7"/>
+                    </a:solidFill>
+                  </a:tcPr>
+                </a:tc>
+                <a:tc>
+                  <a:txBody>
+                    <a:bodyPr/>
+                    <a:lstStyle/>
+                    <a:p>
+                      <a:pPr algn="l">
+                        <a:defRPr sz="1300">
+                          <a:solidFill>
+                            <a:srgbClr val="1A1A1A"/>
+                          </a:solidFill>
+                          <a:latin typeface="Calibri"/>
+                        </a:defRPr>
+                      </a:pPr>
+                      <a:r>
+                        <a:t>21</a:t>
+                      </a:r>
+                    </a:p>
+                  </a:txBody>
+                  <a:tcPr anchor="ctr">
+                    <a:solidFill>
+                      <a:srgbClr val="F7F7F7"/>
+                    </a:solidFill>
+                  </a:tcPr>
+                </a:tc>
+                <a:tc>
+                  <a:txBody>
+                    <a:bodyPr/>
+                    <a:lstStyle/>
+                    <a:p>
+                      <a:pPr algn="l">
+                        <a:defRPr sz="1300">
+                          <a:solidFill>
+                            <a:srgbClr val="1A1A1A"/>
+                          </a:solidFill>
+                          <a:latin typeface="Calibri"/>
+                        </a:defRPr>
+                      </a:pPr>
+                      <a:r>
+                        <a:rPr dirty="0"/>
+                        <a:t>13</a:t>
+                      </a:r>
+                    </a:p>
+                  </a:txBody>
+                  <a:tcPr anchor="ctr">
+                    <a:solidFill>
+                      <a:srgbClr val="F7F7F7"/>
+                    </a:solidFill>
+                  </a:tcPr>
+                </a:tc>
+                <a:tc>
+                  <a:txBody>
+                    <a:bodyPr/>
+                    <a:lstStyle/>
+                    <a:p>
+                      <a:pPr algn="l">
+                        <a:defRPr sz="1300">
+                          <a:solidFill>
+                            <a:srgbClr val="1A1A1A"/>
+                          </a:solidFill>
+                          <a:latin typeface="Calibri"/>
+                        </a:defRPr>
+                      </a:pPr>
+                      <a:r>
+                        <a:t>5  (#36, #37, #44, #57, #72)</a:t>
+                      </a:r>
+                    </a:p>
+                  </a:txBody>
+                  <a:tcPr anchor="ctr">
+                    <a:solidFill>
+                      <a:srgbClr val="F7F7F7"/>
+                    </a:solidFill>
+                  </a:tcPr>
+                </a:tc>
+                <a:extLst>
+                  <a:ext uri="{0D108BD9-81ED-4DB2-BD59-A6C34878D82A}">
+                    <a16:rowId xmlns:a16="http://schemas.microsoft.com/office/drawing/2014/main" val="10002"/>
+                  </a:ext>
+                </a:extLst>
+              </a:tr>
+              <a:tr h="361604">
+                <a:tc>
+                  <a:txBody>
+                    <a:bodyPr/>
+                    <a:lstStyle/>
+                    <a:p>
+                      <a:pPr algn="l">
+                        <a:defRPr sz="1300">
+                          <a:solidFill>
+                            <a:srgbClr val="1A1A1A"/>
+                          </a:solidFill>
+                          <a:latin typeface="Calibri"/>
+                        </a:defRPr>
+                      </a:pPr>
+                      <a:r>
+                        <a:t>s3</a:t>
+                      </a:r>
+                    </a:p>
+                  </a:txBody>
+                  <a:tcPr anchor="ctr">
+                    <a:solidFill>
+                      <a:srgbClr val="FFFFFF"/>
+                    </a:solidFill>
+                  </a:tcPr>
+                </a:tc>
+                <a:tc>
+                  <a:txBody>
+                    <a:bodyPr/>
+                    <a:lstStyle/>
+                    <a:p>
+                      <a:pPr algn="l">
+                        <a:defRPr sz="1300">
+                          <a:solidFill>
+                            <a:srgbClr val="1A1A1A"/>
+                          </a:solidFill>
+                          <a:latin typeface="Calibri"/>
+                        </a:defRPr>
+                      </a:pPr>
+                      <a:r>
+                        <a:t>39</a:t>
+                      </a:r>
+                    </a:p>
+                  </a:txBody>
+                  <a:tcPr anchor="ctr">
+                    <a:solidFill>
+                      <a:srgbClr val="FFFFFF"/>
+                    </a:solidFill>
+                  </a:tcPr>
+                </a:tc>
+                <a:tc>
+                  <a:txBody>
+                    <a:bodyPr/>
+                    <a:lstStyle/>
+                    <a:p>
+                      <a:pPr algn="l">
+                        <a:defRPr sz="1300">
+                          <a:solidFill>
+                            <a:srgbClr val="1A1A1A"/>
+                          </a:solidFill>
+                          <a:latin typeface="Calibri"/>
+                        </a:defRPr>
+                      </a:pPr>
+                      <a:r>
+                        <a:t>17</a:t>
+                      </a:r>
+                    </a:p>
+                  </a:txBody>
+                  <a:tcPr anchor="ctr">
+                    <a:solidFill>
+                      <a:srgbClr val="FFFFFF"/>
+                    </a:solidFill>
+                  </a:tcPr>
+                </a:tc>
+                <a:tc>
+                  <a:txBody>
+                    <a:bodyPr/>
+                    <a:lstStyle/>
+                    <a:p>
+                      <a:pPr algn="l">
+                        <a:defRPr sz="1300">
+                          <a:solidFill>
+                            <a:srgbClr val="1A1A1A"/>
+                          </a:solidFill>
+                          <a:latin typeface="Calibri"/>
+                        </a:defRPr>
+                      </a:pPr>
+                      <a:r>
+                        <a:t>13</a:t>
+                      </a:r>
+                    </a:p>
+                  </a:txBody>
+                  <a:tcPr anchor="ctr">
+                    <a:solidFill>
+                      <a:srgbClr val="FFFFFF"/>
+                    </a:solidFill>
+                  </a:tcPr>
+                </a:tc>
+                <a:tc>
+                  <a:txBody>
+                    <a:bodyPr/>
+                    <a:lstStyle/>
+                    <a:p>
+                      <a:pPr algn="l">
+                        <a:defRPr sz="1300">
+                          <a:solidFill>
+                            <a:srgbClr val="1A1A1A"/>
+                          </a:solidFill>
+                          <a:latin typeface="Calibri"/>
+                        </a:defRPr>
+                      </a:pPr>
+                      <a:r>
+                        <a:t>6  (#16, #25, #41, #48, #49, #70)</a:t>
+                      </a:r>
+                    </a:p>
+                  </a:txBody>
+                  <a:tcPr anchor="ctr">
+                    <a:solidFill>
+                      <a:srgbClr val="FFFFFF"/>
+                    </a:solidFill>
+                  </a:tcPr>
+                </a:tc>
+                <a:extLst>
+                  <a:ext uri="{0D108BD9-81ED-4DB2-BD59-A6C34878D82A}">
+                    <a16:rowId xmlns:a16="http://schemas.microsoft.com/office/drawing/2014/main" val="10003"/>
+                  </a:ext>
+                </a:extLst>
+              </a:tr>
+              <a:tr h="361604">
+                <a:tc>
+                  <a:txBody>
+                    <a:bodyPr/>
+                    <a:lstStyle/>
+                    <a:p>
+                      <a:pPr algn="l">
+                        <a:defRPr sz="1300">
+                          <a:solidFill>
+                            <a:srgbClr val="1A1A1A"/>
+                          </a:solidFill>
+                          <a:latin typeface="Calibri"/>
+                        </a:defRPr>
+                      </a:pPr>
+                      <a:r>
+                        <a:t>s4</a:t>
+                      </a:r>
+                    </a:p>
+                  </a:txBody>
+                  <a:tcPr anchor="ctr">
+                    <a:solidFill>
+                      <a:srgbClr val="F7F7F7"/>
+                    </a:solidFill>
+                  </a:tcPr>
+                </a:tc>
+                <a:tc>
+                  <a:txBody>
+                    <a:bodyPr/>
+                    <a:lstStyle/>
+                    <a:p>
+                      <a:pPr algn="l">
+                        <a:defRPr sz="1300">
+                          <a:solidFill>
+                            <a:srgbClr val="1A1A1A"/>
+                          </a:solidFill>
+                          <a:latin typeface="Calibri"/>
+                        </a:defRPr>
+                      </a:pPr>
+                      <a:r>
+                        <a:t>44</a:t>
+                      </a:r>
+                    </a:p>
+                  </a:txBody>
+                  <a:tcPr anchor="ctr">
+                    <a:solidFill>
+                      <a:srgbClr val="F7F7F7"/>
+                    </a:solidFill>
+                  </a:tcPr>
+                </a:tc>
+                <a:tc>
+                  <a:txBody>
+                    <a:bodyPr/>
+                    <a:lstStyle/>
+                    <a:p>
+                      <a:pPr algn="l">
+                        <a:defRPr sz="1300">
+                          <a:solidFill>
+                            <a:srgbClr val="1A1A1A"/>
+                          </a:solidFill>
+                          <a:latin typeface="Calibri"/>
+                        </a:defRPr>
+                      </a:pPr>
+                      <a:r>
+                        <a:t>13</a:t>
+                      </a:r>
+                    </a:p>
+                  </a:txBody>
+                  <a:tcPr anchor="ctr">
+                    <a:solidFill>
+                      <a:srgbClr val="F7F7F7"/>
+                    </a:solidFill>
+                  </a:tcPr>
+                </a:tc>
+                <a:tc>
+                  <a:txBody>
+                    <a:bodyPr/>
+                    <a:lstStyle/>
+                    <a:p>
+                      <a:pPr algn="l">
+                        <a:defRPr sz="1300">
+                          <a:solidFill>
+                            <a:srgbClr val="1A1A1A"/>
+                          </a:solidFill>
+                          <a:latin typeface="Calibri"/>
+                        </a:defRPr>
+                      </a:pPr>
+                      <a:r>
+                        <a:t>15</a:t>
+                      </a:r>
+                    </a:p>
+                  </a:txBody>
+                  <a:tcPr anchor="ctr">
+                    <a:solidFill>
+                      <a:srgbClr val="F7F7F7"/>
+                    </a:solidFill>
+                  </a:tcPr>
+                </a:tc>
+                <a:tc>
+                  <a:txBody>
+                    <a:bodyPr/>
+                    <a:lstStyle/>
+                    <a:p>
+                      <a:pPr algn="l">
+                        <a:defRPr sz="1300">
+                          <a:solidFill>
+                            <a:srgbClr val="1A1A1A"/>
+                          </a:solidFill>
+                          <a:latin typeface="Calibri"/>
+                        </a:defRPr>
+                      </a:pPr>
+                      <a:r>
+                        <a:t>5  (#43, #46, #59, #71, #73)</a:t>
+                      </a:r>
+                    </a:p>
+                  </a:txBody>
+                  <a:tcPr anchor="ctr">
+                    <a:solidFill>
+                      <a:srgbClr val="F7F7F7"/>
+                    </a:solidFill>
+                  </a:tcPr>
+                </a:tc>
+                <a:extLst>
+                  <a:ext uri="{0D108BD9-81ED-4DB2-BD59-A6C34878D82A}">
+                    <a16:rowId xmlns:a16="http://schemas.microsoft.com/office/drawing/2014/main" val="10004"/>
+                  </a:ext>
+                </a:extLst>
+              </a:tr>
+              <a:tr h="361604">
+                <a:tc>
+                  <a:txBody>
+                    <a:bodyPr/>
+                    <a:lstStyle/>
+                    <a:p>
+                      <a:pPr algn="l">
+                        <a:defRPr sz="1300">
+                          <a:solidFill>
+                            <a:srgbClr val="1A1A1A"/>
+                          </a:solidFill>
+                          <a:latin typeface="Calibri"/>
+                        </a:defRPr>
+                      </a:pPr>
+                      <a:r>
+                        <a:t>s5 (train only)</a:t>
+                      </a:r>
+                    </a:p>
+                  </a:txBody>
+                  <a:tcPr anchor="ctr">
+                    <a:solidFill>
+                      <a:srgbClr val="FFFFFF"/>
+                    </a:solidFill>
+                  </a:tcPr>
+                </a:tc>
+                <a:tc>
+                  <a:txBody>
+                    <a:bodyPr/>
+                    <a:lstStyle/>
+                    <a:p>
+                      <a:pPr algn="l">
+                        <a:defRPr sz="1300">
+                          <a:solidFill>
+                            <a:srgbClr val="1A1A1A"/>
+                          </a:solidFill>
+                          <a:latin typeface="Calibri"/>
+                        </a:defRPr>
+                      </a:pPr>
+                      <a:r>
+                        <a:t>20</a:t>
+                      </a:r>
+                    </a:p>
+                  </a:txBody>
+                  <a:tcPr anchor="ctr">
+                    <a:solidFill>
+                      <a:srgbClr val="FFFFFF"/>
+                    </a:solidFill>
+                  </a:tcPr>
+                </a:tc>
+                <a:tc>
+                  <a:txBody>
+                    <a:bodyPr/>
+                    <a:lstStyle/>
+                    <a:p>
+                      <a:pPr algn="l">
+                        <a:defRPr sz="1300">
+                          <a:solidFill>
+                            <a:srgbClr val="1A1A1A"/>
+                          </a:solidFill>
+                          <a:latin typeface="Calibri"/>
+                        </a:defRPr>
+                      </a:pPr>
+                      <a:r>
+                        <a:t>0</a:t>
+                      </a:r>
+                    </a:p>
+                  </a:txBody>
+                  <a:tcPr anchor="ctr">
+                    <a:solidFill>
+                      <a:srgbClr val="FFFFFF"/>
+                    </a:solidFill>
+                  </a:tcPr>
+                </a:tc>
+                <a:tc>
+                  <a:txBody>
+                    <a:bodyPr/>
+                    <a:lstStyle/>
+                    <a:p>
+                      <a:pPr algn="l">
+                        <a:defRPr sz="1300">
+                          <a:solidFill>
+                            <a:srgbClr val="1A1A1A"/>
+                          </a:solidFill>
+                          <a:latin typeface="Calibri"/>
+                        </a:defRPr>
+                      </a:pPr>
+                      <a:r>
+                        <a:t>12</a:t>
+                      </a:r>
+                    </a:p>
+                  </a:txBody>
+                  <a:tcPr anchor="ctr">
+                    <a:solidFill>
+                      <a:srgbClr val="FFFFFF"/>
+                    </a:solidFill>
+                  </a:tcPr>
+                </a:tc>
+                <a:tc>
+                  <a:txBody>
+                    <a:bodyPr/>
+                    <a:lstStyle/>
+                    <a:p>
+                      <a:pPr algn="l">
+                        <a:defRPr sz="1300">
+                          <a:solidFill>
+                            <a:srgbClr val="1A1A1A"/>
+                          </a:solidFill>
+                          <a:latin typeface="Calibri"/>
+                        </a:defRPr>
+                      </a:pPr>
+                      <a:r>
+                        <a:rPr dirty="0"/>
+                        <a:t>0</a:t>
+                      </a:r>
+                    </a:p>
+                  </a:txBody>
+                  <a:tcPr anchor="ctr">
+                    <a:solidFill>
+                      <a:srgbClr val="FFFFFF"/>
+                    </a:solidFill>
+                  </a:tcPr>
+                </a:tc>
+                <a:extLst>
+                  <a:ext uri="{0D108BD9-81ED-4DB2-BD59-A6C34878D82A}">
+                    <a16:rowId xmlns:a16="http://schemas.microsoft.com/office/drawing/2014/main" val="10005"/>
+                  </a:ext>
+                </a:extLst>
+              </a:tr>
+            </a:tbl>
+          </a:graphicData>
+        </a:graphic>
+      </p:graphicFrame>
+      <p:sp>
+        <p:nvSpPr>
+          <p:cNvPr id="17" name="TextBox 16">
+            <a:extLst>
+              <a:ext uri="{FF2B5EF4-FFF2-40B4-BE49-F238E27FC236}">
+                <a16:creationId xmlns:a16="http://schemas.microsoft.com/office/drawing/2014/main" id="{8BDB7B5C-F648-3CF3-CDA6-7FA854A72987}"/>
+              </a:ext>
+            </a:extLst>
+          </p:cNvPr>
           <p:cNvSpPr txBox="1"/>
           <p:nvPr/>
         </p:nvSpPr>
         <p:spPr>
           <a:xfrm>
-            <a:off x="457200" y="274320"/>
+            <a:off x="548640" y="365760"/>
             <a:ext cx="10972800" cy="548640"/>
           </a:xfrm>
           <a:prstGeom prst="rect">
@@ -3752,21 +4625,28 @@
               </a:defRPr>
             </a:pPr>
             <a:r>
-              <a:t>Key Insight: Why Bipartite + PanNET-Only Pooling</a:t>
-            </a:r>
-          </a:p>
-        </p:txBody>
-      </p:sp>
-      <p:sp>
-        <p:nvSpPr>
-          <p:cNvPr id="3" name="TextBox 2"/>
+              <a:rPr dirty="0"/>
+              <a:t>What We Have: Cell Composition Per Patch</a:t>
+            </a:r>
+          </a:p>
+        </p:txBody>
+      </p:sp>
+      <p:sp>
+        <p:nvSpPr>
+          <p:cNvPr id="18" name="TextBox 17">
+            <a:extLst>
+              <a:ext uri="{FF2B5EF4-FFF2-40B4-BE49-F238E27FC236}">
+                <a16:creationId xmlns:a16="http://schemas.microsoft.com/office/drawing/2014/main" id="{84F0BF6A-D8C2-9C2F-4A79-BE5436186054}"/>
+              </a:ext>
+            </a:extLst>
+          </p:cNvPr>
           <p:cNvSpPr txBox="1"/>
           <p:nvPr/>
         </p:nvSpPr>
         <p:spPr>
           <a:xfrm>
-            <a:off x="457200" y="1097280"/>
-            <a:ext cx="5029200" cy="365760"/>
+            <a:off x="8362604" y="1589118"/>
+            <a:ext cx="2651760" cy="2377440"/>
           </a:xfrm>
           <a:prstGeom prst="rect">
             <a:avLst/>
@@ -3779,8 +4659,11 @@
           </a:bodyPr>
           <a:lstStyle/>
           <a:p>
-            <a:pPr algn="l">
-              <a:defRPr sz="1800" b="1">
+            <a:pPr>
+              <a:spcAft>
+                <a:spcPts val="400"/>
+              </a:spcAft>
+              <a:defRPr sz="1300" b="1">
                 <a:solidFill>
                   <a:srgbClr val="1A1A1A"/>
                 </a:solidFill>
@@ -3788,21 +4671,158 @@
               </a:defRPr>
             </a:pPr>
             <a:r>
-              <a:t>Bipartite Message Passing (1 layer)</a:t>
-            </a:r>
-          </a:p>
-        </p:txBody>
-      </p:sp>
-      <p:sp>
-        <p:nvSpPr>
-          <p:cNvPr id="4" name="TextBox 3"/>
+              <a:rPr dirty="0"/>
+              <a:t>Each patch gets a 4-dim vector:</a:t>
+            </a:r>
+          </a:p>
+          <a:p>
+            <a:pPr>
+              <a:spcAft>
+                <a:spcPts val="400"/>
+              </a:spcAft>
+              <a:defRPr sz="600" b="0">
+                <a:solidFill>
+                  <a:srgbClr val="1A1A1A"/>
+                </a:solidFill>
+                <a:latin typeface="Calibri"/>
+              </a:defRPr>
+            </a:pPr>
+            <a:endParaRPr dirty="0"/>
+          </a:p>
+          <a:p>
+            <a:pPr>
+              <a:spcAft>
+                <a:spcPts val="400"/>
+              </a:spcAft>
+              <a:defRPr sz="1200" b="0">
+                <a:solidFill>
+                  <a:srgbClr val="444444"/>
+                </a:solidFill>
+                <a:latin typeface="Calibri"/>
+              </a:defRPr>
+            </a:pPr>
+            <a:r>
+              <a:rPr dirty="0"/>
+              <a:t>Example — immune-rich NNP patch:</a:t>
+            </a:r>
+          </a:p>
+          <a:p>
+            <a:pPr>
+              <a:spcAft>
+                <a:spcPts val="400"/>
+              </a:spcAft>
+              <a:defRPr sz="1400" b="1">
+                <a:solidFill>
+                  <a:srgbClr val="1A1A1A"/>
+                </a:solidFill>
+                <a:latin typeface="Calibri"/>
+              </a:defRPr>
+            </a:pPr>
+            <a:r>
+              <a:rPr dirty="0"/>
+              <a:t>[  2,  45,  12,  0 ]</a:t>
+            </a:r>
+          </a:p>
+          <a:p>
+            <a:pPr>
+              <a:spcAft>
+                <a:spcPts val="400"/>
+              </a:spcAft>
+              <a:defRPr sz="1100" b="0">
+                <a:solidFill>
+                  <a:srgbClr val="777777"/>
+                </a:solidFill>
+                <a:latin typeface="Calibri"/>
+              </a:defRPr>
+            </a:pPr>
+            <a:r>
+              <a:rPr dirty="0"/>
+              <a:t>  2 tumor, 45 immune, 12 other</a:t>
+            </a:r>
+          </a:p>
+          <a:p>
+            <a:pPr>
+              <a:spcAft>
+                <a:spcPts val="400"/>
+              </a:spcAft>
+              <a:defRPr sz="600" b="0">
+                <a:solidFill>
+                  <a:srgbClr val="1A1A1A"/>
+                </a:solidFill>
+                <a:latin typeface="Calibri"/>
+              </a:defRPr>
+            </a:pPr>
+            <a:endParaRPr dirty="0"/>
+          </a:p>
+          <a:p>
+            <a:pPr>
+              <a:spcAft>
+                <a:spcPts val="400"/>
+              </a:spcAft>
+              <a:defRPr sz="1200" b="0">
+                <a:solidFill>
+                  <a:srgbClr val="444444"/>
+                </a:solidFill>
+                <a:latin typeface="Calibri"/>
+              </a:defRPr>
+            </a:pPr>
+            <a:r>
+              <a:rPr dirty="0"/>
+              <a:t>Example — dense tumor patch:</a:t>
+            </a:r>
+          </a:p>
+          <a:p>
+            <a:pPr>
+              <a:spcAft>
+                <a:spcPts val="400"/>
+              </a:spcAft>
+              <a:defRPr sz="1400" b="1">
+                <a:solidFill>
+                  <a:srgbClr val="1A1A1A"/>
+                </a:solidFill>
+                <a:latin typeface="Calibri"/>
+              </a:defRPr>
+            </a:pPr>
+            <a:r>
+              <a:rPr dirty="0"/>
+              <a:t>[ 120,  3,   8,  0 ]</a:t>
+            </a:r>
+          </a:p>
+          <a:p>
+            <a:pPr>
+              <a:spcAft>
+                <a:spcPts val="400"/>
+              </a:spcAft>
+              <a:defRPr sz="1100" b="0">
+                <a:solidFill>
+                  <a:srgbClr val="777777"/>
+                </a:solidFill>
+                <a:latin typeface="Calibri"/>
+              </a:defRPr>
+            </a:pPr>
+            <a:r>
+              <a:rPr dirty="0"/>
+              <a:t>  120 tumor, 3 immune, 8 other</a:t>
+            </a:r>
+          </a:p>
+        </p:txBody>
+      </p:sp>
+      <p:sp>
+        <p:nvSpPr>
+          <p:cNvPr id="19" name="TextBox 18">
+            <a:extLst>
+              <a:ext uri="{FF2B5EF4-FFF2-40B4-BE49-F238E27FC236}">
+                <a16:creationId xmlns:a16="http://schemas.microsoft.com/office/drawing/2014/main" id="{85134B6D-84BF-A2BD-D030-05EE5B74AD8D}"/>
+              </a:ext>
+            </a:extLst>
+          </p:cNvPr>
           <p:cNvSpPr txBox="1"/>
           <p:nvPr/>
         </p:nvSpPr>
         <p:spPr>
           <a:xfrm>
-            <a:off x="731520" y="1645920"/>
-            <a:ext cx="2286000" cy="274320"/>
+            <a:off x="0" y="4265816"/>
+            <a:ext cx="10972800" cy="457200"/>
           </a:xfrm>
           <a:prstGeom prst="rect">
             <a:avLst/>
@@ -3816,1362 +4836,26 @@
           <a:lstStyle/>
           <a:p>
             <a:pPr algn="l">
-              <a:defRPr sz="1400" b="1">
-                <a:solidFill>
-                  <a:srgbClr val="555566"/>
+              <a:defRPr sz="1400" b="0">
+                <a:solidFill>
+                  <a:srgbClr val="444444"/>
                 </a:solidFill>
                 <a:latin typeface="Calibri"/>
               </a:defRPr>
             </a:pPr>
             <a:r>
-              <a:t>Before GNN:</a:t>
-            </a:r>
-          </a:p>
-        </p:txBody>
-      </p:sp>
-      <p:sp>
-        <p:nvSpPr>
-          <p:cNvPr id="5" name="Oval 4"/>
-          <p:cNvSpPr/>
-          <p:nvPr/>
-        </p:nvSpPr>
-        <p:spPr>
-          <a:xfrm>
-            <a:off x="914400" y="2103120"/>
-            <a:ext cx="457200" cy="457200"/>
-          </a:xfrm>
-          <a:prstGeom prst="ellipse">
-            <a:avLst/>
-          </a:prstGeom>
-          <a:solidFill>
-            <a:srgbClr val="27AE60"/>
-          </a:solidFill>
-          <a:ln>
-            <a:noFill/>
-          </a:ln>
-        </p:spPr>
-        <p:style>
-          <a:lnRef idx="1">
-            <a:schemeClr val="accent1"/>
-          </a:lnRef>
-          <a:fillRef idx="3">
-            <a:schemeClr val="accent1"/>
-          </a:fillRef>
-          <a:effectRef idx="2">
-            <a:schemeClr val="accent1"/>
-          </a:effectRef>
-          <a:fontRef idx="minor">
-            <a:schemeClr val="lt1"/>
-          </a:fontRef>
-        </p:style>
-        <p:txBody>
-          <a:bodyPr wrap="none" rtlCol="0" anchor="ctr"/>
-          <a:lstStyle/>
-          <a:p>
-            <a:pPr algn="ctr">
-              <a:spcBef>
-                <a:spcPts val="0"/>
-              </a:spcBef>
-              <a:spcAft>
-                <a:spcPts val="0"/>
-              </a:spcAft>
-              <a:defRPr sz="1100" b="1">
-                <a:solidFill>
-                  <a:srgbClr val="FFFFFF"/>
-                </a:solidFill>
-              </a:defRPr>
-            </a:pPr>
-            <a:r>
-              <a:t>T</a:t>
-            </a:r>
-          </a:p>
-        </p:txBody>
-      </p:sp>
-      <p:sp>
-        <p:nvSpPr>
-          <p:cNvPr id="6" name="Oval 5"/>
-          <p:cNvSpPr/>
-          <p:nvPr/>
-        </p:nvSpPr>
-        <p:spPr>
-          <a:xfrm>
-            <a:off x="1737360" y="2103120"/>
-            <a:ext cx="457200" cy="457200"/>
-          </a:xfrm>
-          <a:prstGeom prst="ellipse">
-            <a:avLst/>
-          </a:prstGeom>
-          <a:solidFill>
-            <a:srgbClr val="27AE60"/>
-          </a:solidFill>
-          <a:ln>
-            <a:noFill/>
-          </a:ln>
-        </p:spPr>
-        <p:style>
-          <a:lnRef idx="1">
-            <a:schemeClr val="accent1"/>
-          </a:lnRef>
-          <a:fillRef idx="3">
-            <a:schemeClr val="accent1"/>
-          </a:fillRef>
-          <a:effectRef idx="2">
-            <a:schemeClr val="accent1"/>
-          </a:effectRef>
-          <a:fontRef idx="minor">
-            <a:schemeClr val="lt1"/>
-          </a:fontRef>
-        </p:style>
-        <p:txBody>
-          <a:bodyPr wrap="none" rtlCol="0" anchor="ctr"/>
-          <a:lstStyle/>
-          <a:p>
-            <a:pPr algn="ctr">
-              <a:spcBef>
-                <a:spcPts val="0"/>
-              </a:spcBef>
-              <a:spcAft>
-                <a:spcPts val="0"/>
-              </a:spcAft>
-              <a:defRPr sz="1100" b="1">
-                <a:solidFill>
-                  <a:srgbClr val="FFFFFF"/>
-                </a:solidFill>
-              </a:defRPr>
-            </a:pPr>
-            <a:r>
-              <a:t>T</a:t>
-            </a:r>
-          </a:p>
-        </p:txBody>
-      </p:sp>
-      <p:sp>
-        <p:nvSpPr>
-          <p:cNvPr id="7" name="Oval 6"/>
-          <p:cNvSpPr/>
-          <p:nvPr/>
-        </p:nvSpPr>
-        <p:spPr>
-          <a:xfrm>
-            <a:off x="2560320" y="2103120"/>
-            <a:ext cx="457200" cy="457200"/>
-          </a:xfrm>
-          <a:prstGeom prst="ellipse">
-            <a:avLst/>
-          </a:prstGeom>
-          <a:solidFill>
-            <a:srgbClr val="27AE60"/>
-          </a:solidFill>
-          <a:ln>
-            <a:noFill/>
-          </a:ln>
-        </p:spPr>
-        <p:style>
-          <a:lnRef idx="1">
-            <a:schemeClr val="accent1"/>
-          </a:lnRef>
-          <a:fillRef idx="3">
-            <a:schemeClr val="accent1"/>
-          </a:fillRef>
-          <a:effectRef idx="2">
-            <a:schemeClr val="accent1"/>
-          </a:effectRef>
-          <a:fontRef idx="minor">
-            <a:schemeClr val="lt1"/>
-          </a:fontRef>
-        </p:style>
-        <p:txBody>
-          <a:bodyPr wrap="none" rtlCol="0" anchor="ctr"/>
-          <a:lstStyle/>
-          <a:p>
-            <a:pPr algn="ctr">
-              <a:spcBef>
-                <a:spcPts val="0"/>
-              </a:spcBef>
-              <a:spcAft>
-                <a:spcPts val="0"/>
-              </a:spcAft>
-              <a:defRPr sz="1100" b="1">
-                <a:solidFill>
-                  <a:srgbClr val="FFFFFF"/>
-                </a:solidFill>
-              </a:defRPr>
-            </a:pPr>
-            <a:r>
-              <a:t>T</a:t>
-            </a:r>
-          </a:p>
-        </p:txBody>
-      </p:sp>
-      <p:sp>
-        <p:nvSpPr>
-          <p:cNvPr id="8" name="Oval 7"/>
-          <p:cNvSpPr/>
-          <p:nvPr/>
-        </p:nvSpPr>
-        <p:spPr>
-          <a:xfrm>
-            <a:off x="914400" y="2926080"/>
-            <a:ext cx="457200" cy="457200"/>
-          </a:xfrm>
-          <a:prstGeom prst="ellipse">
-            <a:avLst/>
-          </a:prstGeom>
-          <a:solidFill>
-            <a:srgbClr val="C0392B"/>
-          </a:solidFill>
-          <a:ln>
-            <a:noFill/>
-          </a:ln>
-        </p:spPr>
-        <p:style>
-          <a:lnRef idx="1">
-            <a:schemeClr val="accent1"/>
-          </a:lnRef>
-          <a:fillRef idx="3">
-            <a:schemeClr val="accent1"/>
-          </a:fillRef>
-          <a:effectRef idx="2">
-            <a:schemeClr val="accent1"/>
-          </a:effectRef>
-          <a:fontRef idx="minor">
-            <a:schemeClr val="lt1"/>
-          </a:fontRef>
-        </p:style>
-        <p:txBody>
-          <a:bodyPr wrap="none" rtlCol="0" anchor="ctr"/>
-          <a:lstStyle/>
-          <a:p>
-            <a:pPr algn="ctr">
-              <a:spcBef>
-                <a:spcPts val="0"/>
-              </a:spcBef>
-              <a:spcAft>
-                <a:spcPts val="0"/>
-              </a:spcAft>
-              <a:defRPr sz="1100" b="1">
-                <a:solidFill>
-                  <a:srgbClr val="FFFFFF"/>
-                </a:solidFill>
-              </a:defRPr>
-            </a:pPr>
-            <a:r>
-              <a:t>S</a:t>
-            </a:r>
-          </a:p>
-        </p:txBody>
-      </p:sp>
-      <p:sp>
-        <p:nvSpPr>
-          <p:cNvPr id="9" name="Oval 8"/>
-          <p:cNvSpPr/>
-          <p:nvPr/>
-        </p:nvSpPr>
-        <p:spPr>
-          <a:xfrm>
-            <a:off x="1737360" y="2926080"/>
-            <a:ext cx="457200" cy="457200"/>
-          </a:xfrm>
-          <a:prstGeom prst="ellipse">
-            <a:avLst/>
-          </a:prstGeom>
-          <a:solidFill>
-            <a:srgbClr val="C0392B"/>
-          </a:solidFill>
-          <a:ln>
-            <a:noFill/>
-          </a:ln>
-        </p:spPr>
-        <p:style>
-          <a:lnRef idx="1">
-            <a:schemeClr val="accent1"/>
-          </a:lnRef>
-          <a:fillRef idx="3">
-            <a:schemeClr val="accent1"/>
-          </a:fillRef>
-          <a:effectRef idx="2">
-            <a:schemeClr val="accent1"/>
-          </a:effectRef>
-          <a:fontRef idx="minor">
-            <a:schemeClr val="lt1"/>
-          </a:fontRef>
-        </p:style>
-        <p:txBody>
-          <a:bodyPr wrap="none" rtlCol="0" anchor="ctr"/>
-          <a:lstStyle/>
-          <a:p>
-            <a:pPr algn="ctr">
-              <a:spcBef>
-                <a:spcPts val="0"/>
-              </a:spcBef>
-              <a:spcAft>
-                <a:spcPts val="0"/>
-              </a:spcAft>
-              <a:defRPr sz="1100" b="1">
-                <a:solidFill>
-                  <a:srgbClr val="FFFFFF"/>
-                </a:solidFill>
-              </a:defRPr>
-            </a:pPr>
-            <a:r>
-              <a:t>S</a:t>
-            </a:r>
-          </a:p>
-        </p:txBody>
-      </p:sp>
-      <p:sp>
-        <p:nvSpPr>
-          <p:cNvPr id="10" name="Oval 9"/>
-          <p:cNvSpPr/>
-          <p:nvPr/>
-        </p:nvSpPr>
-        <p:spPr>
-          <a:xfrm>
-            <a:off x="2560320" y="2926080"/>
-            <a:ext cx="457200" cy="457200"/>
-          </a:xfrm>
-          <a:prstGeom prst="ellipse">
-            <a:avLst/>
-          </a:prstGeom>
-          <a:solidFill>
-            <a:srgbClr val="C0392B"/>
-          </a:solidFill>
-          <a:ln>
-            <a:noFill/>
-          </a:ln>
-        </p:spPr>
-        <p:style>
-          <a:lnRef idx="1">
-            <a:schemeClr val="accent1"/>
-          </a:lnRef>
-          <a:fillRef idx="3">
-            <a:schemeClr val="accent1"/>
-          </a:fillRef>
-          <a:effectRef idx="2">
-            <a:schemeClr val="accent1"/>
-          </a:effectRef>
-          <a:fontRef idx="minor">
-            <a:schemeClr val="lt1"/>
-          </a:fontRef>
-        </p:style>
-        <p:txBody>
-          <a:bodyPr wrap="none" rtlCol="0" anchor="ctr"/>
-          <a:lstStyle/>
-          <a:p>
-            <a:pPr algn="ctr">
-              <a:spcBef>
-                <a:spcPts val="0"/>
-              </a:spcBef>
-              <a:spcAft>
-                <a:spcPts val="0"/>
-              </a:spcAft>
-              <a:defRPr sz="1100" b="1">
-                <a:solidFill>
-                  <a:srgbClr val="FFFFFF"/>
-                </a:solidFill>
-              </a:defRPr>
-            </a:pPr>
-            <a:r>
-              <a:t>S</a:t>
-            </a:r>
-          </a:p>
-        </p:txBody>
-      </p:sp>
-      <p:sp>
-        <p:nvSpPr>
-          <p:cNvPr id="11" name="TextBox 10"/>
-          <p:cNvSpPr txBox="1"/>
-          <p:nvPr/>
-        </p:nvSpPr>
-        <p:spPr>
-          <a:xfrm>
-            <a:off x="457200" y="3566160"/>
-            <a:ext cx="3200400" cy="457200"/>
-          </a:xfrm>
-          <a:prstGeom prst="rect">
-            <a:avLst/>
-          </a:prstGeom>
-          <a:noFill/>
-        </p:spPr>
-        <p:txBody>
-          <a:bodyPr wrap="square">
-            <a:spAutoFit/>
-          </a:bodyPr>
-          <a:lstStyle/>
-          <a:p>
-            <a:pPr algn="l">
-              <a:defRPr sz="1000" b="0">
-                <a:solidFill>
-                  <a:srgbClr val="555566"/>
-                </a:solidFill>
-                <a:latin typeface="Calibri"/>
-              </a:defRPr>
-            </a:pPr>
-            <a:r>
-              <a:t>T nodes: tumor features only</a:t>
-            </a:r>
-            <a:br/>
-            <a:r>
-              <a:t>S nodes: stroma features only</a:t>
-            </a:r>
-          </a:p>
-        </p:txBody>
-      </p:sp>
-      <p:sp>
-        <p:nvSpPr>
-          <p:cNvPr id="12" name="Right Arrow 11"/>
-          <p:cNvSpPr/>
-          <p:nvPr/>
-        </p:nvSpPr>
-        <p:spPr>
-          <a:xfrm>
-            <a:off x="3474720" y="2560320"/>
-            <a:ext cx="914400" cy="365760"/>
-          </a:xfrm>
-          <a:prstGeom prst="rightArrow">
-            <a:avLst/>
-          </a:prstGeom>
-          <a:solidFill>
-            <a:srgbClr val="D35400"/>
-          </a:solidFill>
-          <a:ln>
-            <a:noFill/>
-          </a:ln>
-        </p:spPr>
-        <p:style>
-          <a:lnRef idx="1">
-            <a:schemeClr val="accent1"/>
-          </a:lnRef>
-          <a:fillRef idx="3">
-            <a:schemeClr val="accent1"/>
-          </a:fillRef>
-          <a:effectRef idx="2">
-            <a:schemeClr val="accent1"/>
-          </a:effectRef>
-          <a:fontRef idx="minor">
-            <a:schemeClr val="lt1"/>
-          </a:fontRef>
-        </p:style>
-        <p:txBody>
-          <a:bodyPr rtlCol="0" anchor="ctr"/>
-          <a:lstStyle/>
-          <a:p>
-            <a:pPr algn="ctr"/>
-            <a:endParaRPr/>
-          </a:p>
-        </p:txBody>
-      </p:sp>
-      <p:sp>
-        <p:nvSpPr>
-          <p:cNvPr id="13" name="TextBox 12"/>
-          <p:cNvSpPr txBox="1"/>
-          <p:nvPr/>
-        </p:nvSpPr>
-        <p:spPr>
-          <a:xfrm>
-            <a:off x="3474720" y="2103120"/>
-            <a:ext cx="914400" cy="365760"/>
-          </a:xfrm>
-          <a:prstGeom prst="rect">
-            <a:avLst/>
-          </a:prstGeom>
-          <a:noFill/>
-        </p:spPr>
-        <p:txBody>
-          <a:bodyPr wrap="square">
-            <a:spAutoFit/>
-          </a:bodyPr>
-          <a:lstStyle/>
-          <a:p>
-            <a:pPr algn="ctr">
-              <a:defRPr sz="1100" b="1">
-                <a:solidFill>
-                  <a:srgbClr val="D35400"/>
-                </a:solidFill>
-                <a:latin typeface="Calibri"/>
-              </a:defRPr>
-            </a:pPr>
-            <a:r>
-              <a:t>GIN</a:t>
-            </a:r>
-            <a:br/>
-            <a:r>
-              <a:t>layer</a:t>
-            </a:r>
-          </a:p>
-        </p:txBody>
-      </p:sp>
-      <p:sp>
-        <p:nvSpPr>
-          <p:cNvPr id="14" name="TextBox 13"/>
-          <p:cNvSpPr txBox="1"/>
-          <p:nvPr/>
-        </p:nvSpPr>
-        <p:spPr>
-          <a:xfrm>
-            <a:off x="4754880" y="1645920"/>
-            <a:ext cx="2743200" cy="274320"/>
-          </a:xfrm>
-          <a:prstGeom prst="rect">
-            <a:avLst/>
-          </a:prstGeom>
-          <a:noFill/>
-        </p:spPr>
-        <p:txBody>
-          <a:bodyPr wrap="square">
-            <a:spAutoFit/>
-          </a:bodyPr>
-          <a:lstStyle/>
-          <a:p>
-            <a:pPr algn="l">
-              <a:defRPr sz="1400" b="1">
-                <a:solidFill>
-                  <a:srgbClr val="555566"/>
-                </a:solidFill>
-                <a:latin typeface="Calibri"/>
-              </a:defRPr>
-            </a:pPr>
-            <a:r>
-              <a:t>After GNN:</a:t>
-            </a:r>
-          </a:p>
-        </p:txBody>
-      </p:sp>
-      <p:sp>
-        <p:nvSpPr>
-          <p:cNvPr id="15" name="Oval 14"/>
-          <p:cNvSpPr/>
-          <p:nvPr/>
-        </p:nvSpPr>
-        <p:spPr>
-          <a:xfrm>
-            <a:off x="5029200" y="2103120"/>
-            <a:ext cx="457200" cy="457200"/>
-          </a:xfrm>
-          <a:prstGeom prst="ellipse">
-            <a:avLst/>
-          </a:prstGeom>
-          <a:solidFill>
-            <a:srgbClr val="27AE60"/>
-          </a:solidFill>
-          <a:ln>
-            <a:noFill/>
-          </a:ln>
-        </p:spPr>
-        <p:style>
-          <a:lnRef idx="1">
-            <a:schemeClr val="accent1"/>
-          </a:lnRef>
-          <a:fillRef idx="3">
-            <a:schemeClr val="accent1"/>
-          </a:fillRef>
-          <a:effectRef idx="2">
-            <a:schemeClr val="accent1"/>
-          </a:effectRef>
-          <a:fontRef idx="minor">
-            <a:schemeClr val="lt1"/>
-          </a:fontRef>
-        </p:style>
-        <p:txBody>
-          <a:bodyPr wrap="none" rtlCol="0" anchor="ctr"/>
-          <a:lstStyle/>
-          <a:p>
-            <a:pPr algn="ctr">
-              <a:spcBef>
-                <a:spcPts val="0"/>
-              </a:spcBef>
-              <a:spcAft>
-                <a:spcPts val="0"/>
-              </a:spcAft>
-              <a:defRPr sz="900" b="1">
-                <a:solidFill>
-                  <a:srgbClr val="FFFFFF"/>
-                </a:solidFill>
-              </a:defRPr>
-            </a:pPr>
-            <a:r>
-              <a:t>T+S</a:t>
-            </a:r>
-          </a:p>
-        </p:txBody>
-      </p:sp>
-      <p:sp>
-        <p:nvSpPr>
-          <p:cNvPr id="16" name="Oval 15"/>
-          <p:cNvSpPr/>
-          <p:nvPr/>
-        </p:nvSpPr>
-        <p:spPr>
-          <a:xfrm>
-            <a:off x="5852160" y="2103120"/>
-            <a:ext cx="457200" cy="457200"/>
-          </a:xfrm>
-          <a:prstGeom prst="ellipse">
-            <a:avLst/>
-          </a:prstGeom>
-          <a:solidFill>
-            <a:srgbClr val="27AE60"/>
-          </a:solidFill>
-          <a:ln>
-            <a:noFill/>
-          </a:ln>
-        </p:spPr>
-        <p:style>
-          <a:lnRef idx="1">
-            <a:schemeClr val="accent1"/>
-          </a:lnRef>
-          <a:fillRef idx="3">
-            <a:schemeClr val="accent1"/>
-          </a:fillRef>
-          <a:effectRef idx="2">
-            <a:schemeClr val="accent1"/>
-          </a:effectRef>
-          <a:fontRef idx="minor">
-            <a:schemeClr val="lt1"/>
-          </a:fontRef>
-        </p:style>
-        <p:txBody>
-          <a:bodyPr wrap="none" rtlCol="0" anchor="ctr"/>
-          <a:lstStyle/>
-          <a:p>
-            <a:pPr algn="ctr">
-              <a:spcBef>
-                <a:spcPts val="0"/>
-              </a:spcBef>
-              <a:spcAft>
-                <a:spcPts val="0"/>
-              </a:spcAft>
-              <a:defRPr sz="900" b="1">
-                <a:solidFill>
-                  <a:srgbClr val="FFFFFF"/>
-                </a:solidFill>
-              </a:defRPr>
-            </a:pPr>
-            <a:r>
-              <a:t>T+S</a:t>
-            </a:r>
-          </a:p>
-        </p:txBody>
-      </p:sp>
-      <p:sp>
-        <p:nvSpPr>
-          <p:cNvPr id="17" name="Oval 16"/>
-          <p:cNvSpPr/>
-          <p:nvPr/>
-        </p:nvSpPr>
-        <p:spPr>
-          <a:xfrm>
-            <a:off x="6675120" y="2103120"/>
-            <a:ext cx="457200" cy="457200"/>
-          </a:xfrm>
-          <a:prstGeom prst="ellipse">
-            <a:avLst/>
-          </a:prstGeom>
-          <a:solidFill>
-            <a:srgbClr val="27AE60"/>
-          </a:solidFill>
-          <a:ln>
-            <a:noFill/>
-          </a:ln>
-        </p:spPr>
-        <p:style>
-          <a:lnRef idx="1">
-            <a:schemeClr val="accent1"/>
-          </a:lnRef>
-          <a:fillRef idx="3">
-            <a:schemeClr val="accent1"/>
-          </a:fillRef>
-          <a:effectRef idx="2">
-            <a:schemeClr val="accent1"/>
-          </a:effectRef>
-          <a:fontRef idx="minor">
-            <a:schemeClr val="lt1"/>
-          </a:fontRef>
-        </p:style>
-        <p:txBody>
-          <a:bodyPr wrap="none" rtlCol="0" anchor="ctr"/>
-          <a:lstStyle/>
-          <a:p>
-            <a:pPr algn="ctr">
-              <a:spcBef>
-                <a:spcPts val="0"/>
-              </a:spcBef>
-              <a:spcAft>
-                <a:spcPts val="0"/>
-              </a:spcAft>
-              <a:defRPr sz="900" b="1">
-                <a:solidFill>
-                  <a:srgbClr val="FFFFFF"/>
-                </a:solidFill>
-              </a:defRPr>
-            </a:pPr>
-            <a:r>
-              <a:t>T+S</a:t>
-            </a:r>
-          </a:p>
-        </p:txBody>
-      </p:sp>
-      <p:sp>
-        <p:nvSpPr>
-          <p:cNvPr id="18" name="Oval 17"/>
-          <p:cNvSpPr/>
-          <p:nvPr/>
-        </p:nvSpPr>
-        <p:spPr>
-          <a:xfrm>
-            <a:off x="5029200" y="2926080"/>
-            <a:ext cx="457200" cy="457200"/>
-          </a:xfrm>
-          <a:prstGeom prst="ellipse">
-            <a:avLst/>
-          </a:prstGeom>
-          <a:solidFill>
-            <a:srgbClr val="C0392B"/>
-          </a:solidFill>
-          <a:ln>
-            <a:noFill/>
-          </a:ln>
-        </p:spPr>
-        <p:style>
-          <a:lnRef idx="1">
-            <a:schemeClr val="accent1"/>
-          </a:lnRef>
-          <a:fillRef idx="3">
-            <a:schemeClr val="accent1"/>
-          </a:fillRef>
-          <a:effectRef idx="2">
-            <a:schemeClr val="accent1"/>
-          </a:effectRef>
-          <a:fontRef idx="minor">
-            <a:schemeClr val="lt1"/>
-          </a:fontRef>
-        </p:style>
-        <p:txBody>
-          <a:bodyPr wrap="none" rtlCol="0" anchor="ctr"/>
-          <a:lstStyle/>
-          <a:p>
-            <a:pPr algn="ctr">
-              <a:spcBef>
-                <a:spcPts val="0"/>
-              </a:spcBef>
-              <a:spcAft>
-                <a:spcPts val="0"/>
-              </a:spcAft>
-              <a:defRPr sz="900" b="1">
-                <a:solidFill>
-                  <a:srgbClr val="FFFFFF"/>
-                </a:solidFill>
-              </a:defRPr>
-            </a:pPr>
-            <a:r>
-              <a:t>S+T</a:t>
-            </a:r>
-          </a:p>
-        </p:txBody>
-      </p:sp>
-      <p:sp>
-        <p:nvSpPr>
-          <p:cNvPr id="19" name="Oval 18"/>
-          <p:cNvSpPr/>
-          <p:nvPr/>
-        </p:nvSpPr>
-        <p:spPr>
-          <a:xfrm>
-            <a:off x="5852160" y="2926080"/>
-            <a:ext cx="457200" cy="457200"/>
-          </a:xfrm>
-          <a:prstGeom prst="ellipse">
-            <a:avLst/>
-          </a:prstGeom>
-          <a:solidFill>
-            <a:srgbClr val="C0392B"/>
-          </a:solidFill>
-          <a:ln>
-            <a:noFill/>
-          </a:ln>
-        </p:spPr>
-        <p:style>
-          <a:lnRef idx="1">
-            <a:schemeClr val="accent1"/>
-          </a:lnRef>
-          <a:fillRef idx="3">
-            <a:schemeClr val="accent1"/>
-          </a:fillRef>
-          <a:effectRef idx="2">
-            <a:schemeClr val="accent1"/>
-          </a:effectRef>
-          <a:fontRef idx="minor">
-            <a:schemeClr val="lt1"/>
-          </a:fontRef>
-        </p:style>
-        <p:txBody>
-          <a:bodyPr wrap="none" rtlCol="0" anchor="ctr"/>
-          <a:lstStyle/>
-          <a:p>
-            <a:pPr algn="ctr">
-              <a:spcBef>
-                <a:spcPts val="0"/>
-              </a:spcBef>
-              <a:spcAft>
-                <a:spcPts val="0"/>
-              </a:spcAft>
-              <a:defRPr sz="900" b="1">
-                <a:solidFill>
-                  <a:srgbClr val="FFFFFF"/>
-                </a:solidFill>
-              </a:defRPr>
-            </a:pPr>
-            <a:r>
-              <a:t>S+T</a:t>
-            </a:r>
-          </a:p>
-        </p:txBody>
-      </p:sp>
-      <p:sp>
-        <p:nvSpPr>
-          <p:cNvPr id="20" name="Oval 19"/>
-          <p:cNvSpPr/>
-          <p:nvPr/>
-        </p:nvSpPr>
-        <p:spPr>
-          <a:xfrm>
-            <a:off x="6675120" y="2926080"/>
-            <a:ext cx="457200" cy="457200"/>
-          </a:xfrm>
-          <a:prstGeom prst="ellipse">
-            <a:avLst/>
-          </a:prstGeom>
-          <a:solidFill>
-            <a:srgbClr val="C0392B"/>
-          </a:solidFill>
-          <a:ln>
-            <a:noFill/>
-          </a:ln>
-        </p:spPr>
-        <p:style>
-          <a:lnRef idx="1">
-            <a:schemeClr val="accent1"/>
-          </a:lnRef>
-          <a:fillRef idx="3">
-            <a:schemeClr val="accent1"/>
-          </a:fillRef>
-          <a:effectRef idx="2">
-            <a:schemeClr val="accent1"/>
-          </a:effectRef>
-          <a:fontRef idx="minor">
-            <a:schemeClr val="lt1"/>
-          </a:fontRef>
-        </p:style>
-        <p:txBody>
-          <a:bodyPr wrap="none" rtlCol="0" anchor="ctr"/>
-          <a:lstStyle/>
-          <a:p>
-            <a:pPr algn="ctr">
-              <a:spcBef>
-                <a:spcPts val="0"/>
-              </a:spcBef>
-              <a:spcAft>
-                <a:spcPts val="0"/>
-              </a:spcAft>
-              <a:defRPr sz="900" b="1">
-                <a:solidFill>
-                  <a:srgbClr val="FFFFFF"/>
-                </a:solidFill>
-              </a:defRPr>
-            </a:pPr>
-            <a:r>
-              <a:t>S+T</a:t>
-            </a:r>
-          </a:p>
-        </p:txBody>
-      </p:sp>
-      <p:sp>
-        <p:nvSpPr>
-          <p:cNvPr id="21" name="TextBox 20"/>
-          <p:cNvSpPr txBox="1"/>
-          <p:nvPr/>
-        </p:nvSpPr>
-        <p:spPr>
-          <a:xfrm>
-            <a:off x="4572000" y="3566160"/>
-            <a:ext cx="3200400" cy="457200"/>
-          </a:xfrm>
-          <a:prstGeom prst="rect">
-            <a:avLst/>
-          </a:prstGeom>
-          <a:noFill/>
-        </p:spPr>
-        <p:txBody>
-          <a:bodyPr wrap="square">
-            <a:spAutoFit/>
-          </a:bodyPr>
-          <a:lstStyle/>
-          <a:p>
-            <a:pPr algn="l">
-              <a:defRPr sz="1000" b="0">
-                <a:solidFill>
-                  <a:srgbClr val="555566"/>
-                </a:solidFill>
-                <a:latin typeface="Calibri"/>
-              </a:defRPr>
-            </a:pPr>
-            <a:r>
-              <a:t>T nodes: tumor + NNP context</a:t>
-            </a:r>
-            <a:br/>
-            <a:r>
-              <a:t>S nodes: stroma + tumor context</a:t>
-            </a:r>
-          </a:p>
-        </p:txBody>
-      </p:sp>
-      <p:sp>
-        <p:nvSpPr>
-          <p:cNvPr id="22" name="Right Arrow 21"/>
-          <p:cNvSpPr/>
-          <p:nvPr/>
-        </p:nvSpPr>
-        <p:spPr>
-          <a:xfrm>
-            <a:off x="7498079" y="2560320"/>
-            <a:ext cx="731520" cy="365760"/>
-          </a:xfrm>
-          <a:prstGeom prst="rightArrow">
-            <a:avLst/>
-          </a:prstGeom>
-          <a:solidFill>
-            <a:srgbClr val="D35400"/>
-          </a:solidFill>
-          <a:ln>
-            <a:noFill/>
-          </a:ln>
-        </p:spPr>
-        <p:style>
-          <a:lnRef idx="1">
-            <a:schemeClr val="accent1"/>
-          </a:lnRef>
-          <a:fillRef idx="3">
-            <a:schemeClr val="accent1"/>
-          </a:fillRef>
-          <a:effectRef idx="2">
-            <a:schemeClr val="accent1"/>
-          </a:effectRef>
-          <a:fontRef idx="minor">
-            <a:schemeClr val="lt1"/>
-          </a:fontRef>
-        </p:style>
-        <p:txBody>
-          <a:bodyPr rtlCol="0" anchor="ctr"/>
-          <a:lstStyle/>
-          <a:p>
-            <a:pPr algn="ctr"/>
-            <a:endParaRPr/>
-          </a:p>
-        </p:txBody>
-      </p:sp>
-      <p:sp>
-        <p:nvSpPr>
-          <p:cNvPr id="23" name="Rounded Rectangle 22"/>
-          <p:cNvSpPr/>
-          <p:nvPr/>
-        </p:nvSpPr>
-        <p:spPr>
-          <a:xfrm>
-            <a:off x="8412480" y="1645920"/>
-            <a:ext cx="3200400" cy="2286000"/>
-          </a:xfrm>
-          <a:prstGeom prst="roundRect">
-            <a:avLst/>
-          </a:prstGeom>
-          <a:solidFill>
-            <a:srgbClr val="F0F0F5"/>
-          </a:solidFill>
-          <a:ln w="25400">
-            <a:solidFill>
-              <a:srgbClr val="BBBBCC"/>
-            </a:solidFill>
-          </a:ln>
-        </p:spPr>
-        <p:style>
-          <a:lnRef idx="1">
-            <a:schemeClr val="accent1"/>
-          </a:lnRef>
-          <a:fillRef idx="3">
-            <a:schemeClr val="accent1"/>
-          </a:fillRef>
-          <a:effectRef idx="2">
-            <a:schemeClr val="accent1"/>
-          </a:effectRef>
-          <a:fontRef idx="minor">
-            <a:schemeClr val="lt1"/>
-          </a:fontRef>
-        </p:style>
-        <p:txBody>
-          <a:bodyPr wrap="square" rtlCol="0" anchor="ctr"/>
-          <a:lstStyle/>
-          <a:p>
-            <a:pPr algn="ctr">
-              <a:defRPr sz="1600" b="1">
-                <a:solidFill>
-                  <a:srgbClr val="27AE60"/>
-                </a:solidFill>
-              </a:defRPr>
-            </a:pPr>
-            <a:r>
-              <a:t>Pool PanNET Only</a:t>
-            </a:r>
-          </a:p>
-          <a:p>
-            <a:pPr algn="ctr">
-              <a:defRPr sz="1100">
-                <a:solidFill>
-                  <a:srgbClr val="555566"/>
-                </a:solidFill>
-              </a:defRPr>
-            </a:pPr>
-            <a:endParaRPr/>
-          </a:p>
-          <a:p>
-            <a:pPr algn="ctr">
-              <a:defRPr sz="1100">
-                <a:solidFill>
-                  <a:srgbClr val="555566"/>
-                </a:solidFill>
-              </a:defRPr>
-            </a:pPr>
-            <a:r>
-              <a:t>global_add_pool(T nodes)</a:t>
-            </a:r>
-          </a:p>
-          <a:p>
-            <a:pPr algn="ctr">
-              <a:defRPr sz="1100">
-                <a:solidFill>
-                  <a:srgbClr val="555566"/>
-                </a:solidFill>
-              </a:defRPr>
-            </a:pPr>
-            <a:endParaRPr/>
-          </a:p>
-          <a:p>
-            <a:pPr algn="ctr">
-              <a:defRPr sz="1100">
-                <a:solidFill>
-                  <a:srgbClr val="D35400"/>
-                </a:solidFill>
-              </a:defRPr>
-            </a:pPr>
-            <a:r>
-              <a:t>NNP info already absorbed</a:t>
-            </a:r>
-          </a:p>
-          <a:p>
-            <a:pPr algn="ctr">
-              <a:defRPr sz="1100">
-                <a:solidFill>
-                  <a:srgbClr val="555566"/>
-                </a:solidFill>
-              </a:defRPr>
-            </a:pPr>
-            <a:r>
-              <a:t>into T embeddings via</a:t>
-            </a:r>
-          </a:p>
-          <a:p>
-            <a:pPr algn="ctr">
-              <a:defRPr sz="1100">
-                <a:solidFill>
-                  <a:srgbClr val="555566"/>
-                </a:solidFill>
-              </a:defRPr>
-            </a:pPr>
-            <a:r>
-              <a:t>message passing.</a:t>
-            </a:r>
-          </a:p>
-          <a:p>
-            <a:pPr algn="ctr">
-              <a:defRPr sz="1100">
-                <a:solidFill>
-                  <a:srgbClr val="555566"/>
-                </a:solidFill>
-              </a:defRPr>
-            </a:pPr>
-            <a:endParaRPr/>
-          </a:p>
-          <a:p>
-            <a:pPr algn="ctr">
-              <a:defRPr sz="1100">
-                <a:solidFill>
-                  <a:srgbClr val="555566"/>
-                </a:solidFill>
-              </a:defRPr>
-            </a:pPr>
-            <a:r>
-              <a:t>Pooling S nodes would</a:t>
-            </a:r>
-          </a:p>
-          <a:p>
-            <a:pPr algn="ctr">
-              <a:defRPr sz="1100">
-                <a:solidFill>
-                  <a:srgbClr val="D35400"/>
-                </a:solidFill>
-              </a:defRPr>
-            </a:pPr>
-            <a:r>
-              <a:t>DILUTE the tumor signal.</a:t>
-            </a:r>
-          </a:p>
-        </p:txBody>
-      </p:sp>
-      <p:sp>
-        <p:nvSpPr>
-          <p:cNvPr id="24" name="Rounded Rectangle 23"/>
-          <p:cNvSpPr/>
-          <p:nvPr/>
-        </p:nvSpPr>
-        <p:spPr>
-          <a:xfrm>
-            <a:off x="457200" y="4572000"/>
-            <a:ext cx="3474720" cy="1828800"/>
-          </a:xfrm>
-          <a:prstGeom prst="roundRect">
-            <a:avLst/>
-          </a:prstGeom>
-          <a:solidFill>
-            <a:srgbClr val="F0F0F5"/>
-          </a:solidFill>
-          <a:ln w="25400">
-            <a:solidFill>
-              <a:srgbClr val="BBBBCC"/>
-            </a:solidFill>
-          </a:ln>
-        </p:spPr>
-        <p:style>
-          <a:lnRef idx="1">
-            <a:schemeClr val="accent1"/>
-          </a:lnRef>
-          <a:fillRef idx="3">
-            <a:schemeClr val="accent1"/>
-          </a:fillRef>
-          <a:effectRef idx="2">
-            <a:schemeClr val="accent1"/>
-          </a:effectRef>
-          <a:fontRef idx="minor">
-            <a:schemeClr val="lt1"/>
-          </a:fontRef>
-        </p:style>
-        <p:txBody>
-          <a:bodyPr wrap="square" rtlCol="0" anchor="ctr"/>
-          <a:lstStyle/>
-          <a:p>
-            <a:pPr algn="ctr">
-              <a:defRPr sz="1400" b="1">
-                <a:solidFill>
-                  <a:srgbClr val="1A1A1A"/>
-                </a:solidFill>
-              </a:defRPr>
-            </a:pPr>
-            <a:r>
-              <a:t>MIL (no graph)</a:t>
-            </a:r>
-          </a:p>
-          <a:p>
-            <a:pPr algn="ctr">
-              <a:defRPr sz="1100">
-                <a:solidFill>
-                  <a:srgbClr val="555566"/>
-                </a:solidFill>
-              </a:defRPr>
-            </a:pPr>
-            <a:r>
-              <a:t>Treats patches independently</a:t>
-            </a:r>
-            <a:br/>
-            <a:r>
-              <a:t>Loses spatial relationships</a:t>
-            </a:r>
-          </a:p>
-          <a:p>
-            <a:pPr algn="ctr">
-              <a:defRPr sz="1800" b="1">
-                <a:solidFill>
-                  <a:srgbClr val="C0392B"/>
-                </a:solidFill>
-              </a:defRPr>
-            </a:pPr>
-            <a:r>
-              <a:t>~63% F1</a:t>
-            </a:r>
-          </a:p>
-        </p:txBody>
-      </p:sp>
-      <p:sp>
-        <p:nvSpPr>
-          <p:cNvPr id="25" name="Rounded Rectangle 24"/>
-          <p:cNvSpPr/>
-          <p:nvPr/>
-        </p:nvSpPr>
-        <p:spPr>
-          <a:xfrm>
-            <a:off x="4389120" y="4572000"/>
-            <a:ext cx="3474720" cy="1828800"/>
-          </a:xfrm>
-          <a:prstGeom prst="roundRect">
-            <a:avLst/>
-          </a:prstGeom>
-          <a:solidFill>
-            <a:srgbClr val="F0F0F5"/>
-          </a:solidFill>
-          <a:ln w="25400">
-            <a:solidFill>
-              <a:srgbClr val="BBBBCC"/>
-            </a:solidFill>
-          </a:ln>
-        </p:spPr>
-        <p:style>
-          <a:lnRef idx="1">
-            <a:schemeClr val="accent1"/>
-          </a:lnRef>
-          <a:fillRef idx="3">
-            <a:schemeClr val="accent1"/>
-          </a:fillRef>
-          <a:effectRef idx="2">
-            <a:schemeClr val="accent1"/>
-          </a:effectRef>
-          <a:fontRef idx="minor">
-            <a:schemeClr val="lt1"/>
-          </a:fontRef>
-        </p:style>
-        <p:txBody>
-          <a:bodyPr wrap="square" rtlCol="0" anchor="ctr"/>
-          <a:lstStyle/>
-          <a:p>
-            <a:pPr algn="ctr">
-              <a:defRPr sz="1400" b="1">
-                <a:solidFill>
-                  <a:srgbClr val="1A1A1A"/>
-                </a:solidFill>
-              </a:defRPr>
-            </a:pPr>
-            <a:r>
-              <a:t>Full Graph GNN</a:t>
-            </a:r>
-          </a:p>
-          <a:p>
-            <a:pPr algn="ctr">
-              <a:defRPr sz="1100">
-                <a:solidFill>
-                  <a:srgbClr val="555566"/>
-                </a:solidFill>
-              </a:defRPr>
-            </a:pPr>
-            <a:r>
-              <a:t>All edges (T↔T, S↔S, T↔S)</a:t>
-            </a:r>
-            <a:br/>
-            <a:r>
-              <a:t>Wastes capacity on noise</a:t>
-            </a:r>
-          </a:p>
-          <a:p>
-            <a:pPr algn="ctr">
-              <a:defRPr sz="1800" b="1">
-                <a:solidFill>
-                  <a:srgbClr val="D35400"/>
-                </a:solidFill>
-              </a:defRPr>
-            </a:pPr>
-            <a:r>
-              <a:t>~67% F1</a:t>
-            </a:r>
-          </a:p>
-        </p:txBody>
-      </p:sp>
-      <p:sp>
-        <p:nvSpPr>
-          <p:cNvPr id="26" name="Rounded Rectangle 25"/>
-          <p:cNvSpPr/>
-          <p:nvPr/>
-        </p:nvSpPr>
-        <p:spPr>
-          <a:xfrm>
-            <a:off x="8321040" y="4572000"/>
-            <a:ext cx="3474720" cy="1828800"/>
-          </a:xfrm>
-          <a:prstGeom prst="roundRect">
-            <a:avLst/>
-          </a:prstGeom>
-          <a:solidFill>
-            <a:srgbClr val="F0F0F5"/>
-          </a:solidFill>
-          <a:ln w="25400">
-            <a:solidFill>
-              <a:srgbClr val="BBBBCC"/>
-            </a:solidFill>
-          </a:ln>
-        </p:spPr>
-        <p:style>
-          <a:lnRef idx="1">
-            <a:schemeClr val="accent1"/>
-          </a:lnRef>
-          <a:fillRef idx="3">
-            <a:schemeClr val="accent1"/>
-          </a:fillRef>
-          <a:effectRef idx="2">
-            <a:schemeClr val="accent1"/>
-          </a:effectRef>
-          <a:fontRef idx="minor">
-            <a:schemeClr val="lt1"/>
-          </a:fontRef>
-        </p:style>
-        <p:txBody>
-          <a:bodyPr wrap="square" rtlCol="0" anchor="ctr"/>
-          <a:lstStyle/>
-          <a:p>
-            <a:pPr algn="ctr">
-              <a:defRPr sz="1400" b="1">
-                <a:solidFill>
-                  <a:srgbClr val="1A1A1A"/>
-                </a:solidFill>
-              </a:defRPr>
-            </a:pPr>
-            <a:r>
-              <a:t>Bipartite GNN</a:t>
-            </a:r>
-          </a:p>
-          <a:p>
-            <a:pPr algn="ctr">
-              <a:defRPr sz="1100">
-                <a:solidFill>
-                  <a:srgbClr val="555566"/>
-                </a:solidFill>
-              </a:defRPr>
-            </a:pPr>
-            <a:r>
-              <a:t>Only T↔S edges</a:t>
-            </a:r>
-            <a:br/>
-            <a:r>
-              <a:t>Focused on interface</a:t>
-            </a:r>
-          </a:p>
-          <a:p>
-            <a:pPr algn="ctr">
-              <a:defRPr sz="1800" b="1">
-                <a:solidFill>
-                  <a:srgbClr val="27AE60"/>
-                </a:solidFill>
-              </a:defRPr>
-            </a:pPr>
-            <a:r>
-              <a:t>70.7% F1</a:t>
+              <a:rPr dirty="0"/>
+              <a:t>Coverage: 184 / 252 slides (73%), from 51 / 73 patients. Missing slides get zero-filled vectors.</a:t>
             </a:r>
           </a:p>
         </p:txBody>
       </p:sp>
     </p:spTree>
+    <p:extLst>
+      <p:ext uri="{BB962C8B-B14F-4D97-AF65-F5344CB8AC3E}">
+        <p14:creationId xmlns:p14="http://schemas.microsoft.com/office/powerpoint/2010/main" val="1156644632"/>
+      </p:ext>
+    </p:extLst>
   </p:cSld>
   <p:clrMapOvr>
     <a:masterClrMapping/>
@@ -5182,14 +4866,6 @@
 <file path=ppt/slides/slide11.xml><?xml version="1.0" encoding="utf-8"?>
 <p:sld xmlns:a="http://schemas.openxmlformats.org/drawingml/2006/main" xmlns:r="http://schemas.openxmlformats.org/officeDocument/2006/relationships" xmlns:p="http://schemas.openxmlformats.org/presentationml/2006/main">
   <p:cSld>
-    <p:bg>
-      <p:bgPr>
-        <a:solidFill>
-          <a:srgbClr val="FFFFFF"/>
-        </a:solidFill>
-        <a:effectLst/>
-      </p:bgPr>
-    </p:bg>
     <p:spTree>
       <p:nvGrpSpPr>
         <p:cNvPr id="1" name=""/>
@@ -5206,14 +4882,20 @@
       </p:grpSpPr>
       <p:sp>
         <p:nvSpPr>
-          <p:cNvPr id="2" name="TextBox 1"/>
+          <p:cNvPr id="3" name="TextBox 2">
+            <a:extLst>
+              <a:ext uri="{FF2B5EF4-FFF2-40B4-BE49-F238E27FC236}">
+                <a16:creationId xmlns:a16="http://schemas.microsoft.com/office/drawing/2014/main" id="{2F56A81D-5057-0C08-589C-F13A2F5AE174}"/>
+              </a:ext>
+            </a:extLst>
+          </p:cNvPr>
           <p:cNvSpPr txBox="1"/>
           <p:nvPr/>
         </p:nvSpPr>
         <p:spPr>
           <a:xfrm>
-            <a:off x="457200" y="274320"/>
-            <a:ext cx="10972800" cy="548640"/>
+            <a:off x="315883" y="178242"/>
+            <a:ext cx="10972800" cy="523220"/>
           </a:xfrm>
           <a:prstGeom prst="rect">
             <a:avLst/>
@@ -5235,21 +4917,303 @@
               </a:defRPr>
             </a:pPr>
             <a:r>
-              <a:t>Results: Thesis Performance Summary</a:t>
-            </a:r>
-          </a:p>
-        </p:txBody>
-      </p:sp>
-      <p:sp>
-        <p:nvSpPr>
-          <p:cNvPr id="3" name="TextBox 2"/>
+              <a:rPr dirty="0"/>
+              <a:t>Gate: Per-Edge Message Modulation</a:t>
+            </a:r>
+          </a:p>
+        </p:txBody>
+      </p:sp>
+      <p:sp>
+        <p:nvSpPr>
+          <p:cNvPr id="4" name="Rounded Rectangle 3">
+            <a:extLst>
+              <a:ext uri="{FF2B5EF4-FFF2-40B4-BE49-F238E27FC236}">
+                <a16:creationId xmlns:a16="http://schemas.microsoft.com/office/drawing/2014/main" id="{DF8AB1B7-44BD-BCA8-1237-766198908FE7}"/>
+              </a:ext>
+            </a:extLst>
+          </p:cNvPr>
+          <p:cNvSpPr/>
+          <p:nvPr/>
+        </p:nvSpPr>
+        <p:spPr>
+          <a:xfrm>
+            <a:off x="731520" y="2560320"/>
+            <a:ext cx="1463040" cy="1280160"/>
+          </a:xfrm>
+          <a:prstGeom prst="roundRect">
+            <a:avLst/>
+          </a:prstGeom>
+          <a:solidFill>
+            <a:srgbClr val="FCE4E4"/>
+          </a:solidFill>
+          <a:ln w="12700">
+            <a:solidFill>
+              <a:srgbClr val="C0392B"/>
+            </a:solidFill>
+          </a:ln>
+        </p:spPr>
+        <p:style>
+          <a:lnRef idx="1">
+            <a:schemeClr val="accent1"/>
+          </a:lnRef>
+          <a:fillRef idx="3">
+            <a:schemeClr val="accent1"/>
+          </a:fillRef>
+          <a:effectRef idx="2">
+            <a:schemeClr val="accent1"/>
+          </a:effectRef>
+          <a:fontRef idx="minor">
+            <a:schemeClr val="lt1"/>
+          </a:fontRef>
+        </p:style>
+        <p:txBody>
+          <a:bodyPr rtlCol="0" anchor="ctr"/>
+          <a:lstStyle/>
+          <a:p>
+            <a:pPr algn="ctr">
+              <a:defRPr sz="1100" b="1">
+                <a:latin typeface="Calibri"/>
+              </a:defRPr>
+            </a:pPr>
+            <a:r>
+              <a:rPr dirty="0">
+                <a:solidFill>
+                  <a:schemeClr val="tx1"/>
+                </a:solidFill>
+              </a:rPr>
+              <a:t>Tumor patch (v)</a:t>
+            </a:r>
+          </a:p>
+          <a:p>
+            <a:pPr algn="ctr">
+              <a:defRPr sz="1000">
+                <a:solidFill>
+                  <a:srgbClr val="777777"/>
+                </a:solidFill>
+                <a:latin typeface="Calibri"/>
+              </a:defRPr>
+            </a:pPr>
+            <a:r>
+              <a:rPr dirty="0"/>
+              <a:t>h(v) = 256-dim</a:t>
+            </a:r>
+          </a:p>
+          <a:p>
+            <a:pPr algn="ctr">
+              <a:defRPr sz="1000">
+                <a:solidFill>
+                  <a:srgbClr val="C0392B"/>
+                </a:solidFill>
+                <a:latin typeface="Calibri"/>
+              </a:defRPr>
+            </a:pPr>
+            <a:r>
+              <a:rPr dirty="0"/>
+              <a:t>cell(v) = [120, 3, 8, 0]</a:t>
+            </a:r>
+          </a:p>
+        </p:txBody>
+      </p:sp>
+      <p:sp>
+        <p:nvSpPr>
+          <p:cNvPr id="5" name="Rounded Rectangle 4">
+            <a:extLst>
+              <a:ext uri="{FF2B5EF4-FFF2-40B4-BE49-F238E27FC236}">
+                <a16:creationId xmlns:a16="http://schemas.microsoft.com/office/drawing/2014/main" id="{D517C1C5-CD0E-75CE-5414-769F9DC5C569}"/>
+              </a:ext>
+            </a:extLst>
+          </p:cNvPr>
+          <p:cNvSpPr/>
+          <p:nvPr/>
+        </p:nvSpPr>
+        <p:spPr>
+          <a:xfrm>
+            <a:off x="731520" y="914400"/>
+            <a:ext cx="1463040" cy="1280160"/>
+          </a:xfrm>
+          <a:prstGeom prst="roundRect">
+            <a:avLst/>
+          </a:prstGeom>
+          <a:solidFill>
+            <a:srgbClr val="E0EEF7"/>
+          </a:solidFill>
+          <a:ln w="12700">
+            <a:solidFill>
+              <a:srgbClr val="2980B9"/>
+            </a:solidFill>
+          </a:ln>
+        </p:spPr>
+        <p:style>
+          <a:lnRef idx="1">
+            <a:schemeClr val="accent1"/>
+          </a:lnRef>
+          <a:fillRef idx="3">
+            <a:schemeClr val="accent1"/>
+          </a:fillRef>
+          <a:effectRef idx="2">
+            <a:schemeClr val="accent1"/>
+          </a:effectRef>
+          <a:fontRef idx="minor">
+            <a:schemeClr val="lt1"/>
+          </a:fontRef>
+        </p:style>
+        <p:txBody>
+          <a:bodyPr rtlCol="0" anchor="ctr"/>
+          <a:lstStyle/>
+          <a:p>
+            <a:pPr algn="ctr">
+              <a:defRPr sz="1100" b="1">
+                <a:latin typeface="Calibri"/>
+              </a:defRPr>
+            </a:pPr>
+            <a:r>
+              <a:rPr dirty="0">
+                <a:solidFill>
+                  <a:schemeClr val="tx1"/>
+                </a:solidFill>
+              </a:rPr>
+              <a:t>NNP patch (u)</a:t>
+            </a:r>
+          </a:p>
+          <a:p>
+            <a:pPr algn="ctr">
+              <a:defRPr sz="1000">
+                <a:solidFill>
+                  <a:srgbClr val="777777"/>
+                </a:solidFill>
+                <a:latin typeface="Calibri"/>
+              </a:defRPr>
+            </a:pPr>
+            <a:r>
+              <a:rPr dirty="0"/>
+              <a:t>h(u) = 256-dim</a:t>
+            </a:r>
+          </a:p>
+          <a:p>
+            <a:pPr algn="ctr">
+              <a:defRPr sz="1000">
+                <a:solidFill>
+                  <a:srgbClr val="2980B9"/>
+                </a:solidFill>
+                <a:latin typeface="Calibri"/>
+              </a:defRPr>
+            </a:pPr>
+            <a:r>
+              <a:rPr dirty="0"/>
+              <a:t>cell(u) = [2, 45, 12, 0]</a:t>
+            </a:r>
+          </a:p>
+        </p:txBody>
+      </p:sp>
+      <p:cxnSp>
+        <p:nvCxnSpPr>
+          <p:cNvPr id="6" name="Connector 4">
+            <a:extLst>
+              <a:ext uri="{FF2B5EF4-FFF2-40B4-BE49-F238E27FC236}">
+                <a16:creationId xmlns:a16="http://schemas.microsoft.com/office/drawing/2014/main" id="{E95F4896-C775-A729-FB89-B81DE1474357}"/>
+              </a:ext>
+            </a:extLst>
+          </p:cNvPr>
+          <p:cNvCxnSpPr/>
+          <p:nvPr/>
+        </p:nvCxnSpPr>
+        <p:spPr>
+          <a:xfrm>
+            <a:off x="1463040" y="2194560"/>
+            <a:ext cx="0" cy="365760"/>
+          </a:xfrm>
+          <a:prstGeom prst="line">
+            <a:avLst/>
+          </a:prstGeom>
+          <a:ln w="25400">
+            <a:solidFill>
+              <a:srgbClr val="1A1A1A"/>
+            </a:solidFill>
+          </a:ln>
+        </p:spPr>
+        <p:style>
+          <a:lnRef idx="2">
+            <a:schemeClr val="accent1"/>
+          </a:lnRef>
+          <a:fillRef idx="0">
+            <a:schemeClr val="accent1"/>
+          </a:fillRef>
+          <a:effectRef idx="1">
+            <a:schemeClr val="accent1"/>
+          </a:effectRef>
+          <a:fontRef idx="minor">
+            <a:schemeClr val="tx1"/>
+          </a:fontRef>
+        </p:style>
+      </p:cxnSp>
+      <p:sp>
+        <p:nvSpPr>
+          <p:cNvPr id="7" name="Rounded Rectangle 6">
+            <a:extLst>
+              <a:ext uri="{FF2B5EF4-FFF2-40B4-BE49-F238E27FC236}">
+                <a16:creationId xmlns:a16="http://schemas.microsoft.com/office/drawing/2014/main" id="{BCB52538-24EA-D635-8325-3E9679A2064F}"/>
+              </a:ext>
+            </a:extLst>
+          </p:cNvPr>
+          <p:cNvSpPr/>
+          <p:nvPr/>
+        </p:nvSpPr>
+        <p:spPr>
+          <a:xfrm>
+            <a:off x="2926080" y="914400"/>
+            <a:ext cx="3840480" cy="1005840"/>
+          </a:xfrm>
+          <a:prstGeom prst="roundRect">
+            <a:avLst/>
+          </a:prstGeom>
+          <a:solidFill>
+            <a:srgbClr val="F2F2F2"/>
+          </a:solidFill>
+          <a:ln w="12700">
+            <a:solidFill>
+              <a:srgbClr val="CCCCCC"/>
+            </a:solidFill>
+          </a:ln>
+        </p:spPr>
+        <p:style>
+          <a:lnRef idx="1">
+            <a:schemeClr val="accent1"/>
+          </a:lnRef>
+          <a:fillRef idx="3">
+            <a:schemeClr val="accent1"/>
+          </a:fillRef>
+          <a:effectRef idx="2">
+            <a:schemeClr val="accent1"/>
+          </a:effectRef>
+          <a:fontRef idx="minor">
+            <a:schemeClr val="lt1"/>
+          </a:fontRef>
+        </p:style>
+        <p:txBody>
+          <a:bodyPr rtlCol="0" anchor="ctr"/>
+          <a:lstStyle/>
+          <a:p>
+            <a:pPr algn="ctr"/>
+            <a:endParaRPr/>
+          </a:p>
+        </p:txBody>
+      </p:sp>
+      <p:sp>
+        <p:nvSpPr>
+          <p:cNvPr id="8" name="TextBox 7">
+            <a:extLst>
+              <a:ext uri="{FF2B5EF4-FFF2-40B4-BE49-F238E27FC236}">
+                <a16:creationId xmlns:a16="http://schemas.microsoft.com/office/drawing/2014/main" id="{47838F1D-B7EA-4A2D-9F27-4D09A67A8903}"/>
+              </a:ext>
+            </a:extLst>
+          </p:cNvPr>
           <p:cNvSpPr txBox="1"/>
           <p:nvPr/>
         </p:nvSpPr>
         <p:spPr>
           <a:xfrm>
-            <a:off x="914400" y="1097280"/>
-            <a:ext cx="2286000" cy="411480"/>
+            <a:off x="3063240" y="960120"/>
+            <a:ext cx="3566160" cy="914400"/>
           </a:xfrm>
           <a:prstGeom prst="rect">
             <a:avLst/>
@@ -5262,30 +5226,130 @@
           </a:bodyPr>
           <a:lstStyle/>
           <a:p>
-            <a:pPr algn="ctr">
+            <a:pPr>
+              <a:spcAft>
+                <a:spcPts val="400"/>
+              </a:spcAft>
               <a:defRPr sz="1200" b="1">
                 <a:solidFill>
-                  <a:srgbClr val="D35400"/>
+                  <a:srgbClr val="1A1A1A"/>
                 </a:solidFill>
                 <a:latin typeface="Calibri"/>
               </a:defRPr>
             </a:pPr>
             <a:r>
-              <a:t>Model</a:t>
-            </a:r>
-          </a:p>
-        </p:txBody>
-      </p:sp>
-      <p:sp>
-        <p:nvSpPr>
-          <p:cNvPr id="4" name="TextBox 3"/>
+              <a:rPr dirty="0"/>
+              <a:t>Step 1: Concatenate cell compositions</a:t>
+            </a:r>
+          </a:p>
+          <a:p>
+            <a:pPr>
+              <a:spcAft>
+                <a:spcPts val="400"/>
+              </a:spcAft>
+              <a:defRPr sz="1200" b="0">
+                <a:solidFill>
+                  <a:srgbClr val="444444"/>
+                </a:solidFill>
+                <a:latin typeface="Calibri"/>
+              </a:defRPr>
+            </a:pPr>
+            <a:r>
+              <a:rPr dirty="0" err="1"/>
+              <a:t>cell_pair</a:t>
+            </a:r>
+            <a:r>
+              <a:rPr dirty="0"/>
+              <a:t> = [ cell(u) || cell(v) ]</a:t>
+            </a:r>
+          </a:p>
+          <a:p>
+            <a:pPr>
+              <a:spcAft>
+                <a:spcPts val="400"/>
+              </a:spcAft>
+              <a:defRPr sz="1100" b="0">
+                <a:solidFill>
+                  <a:srgbClr val="777777"/>
+                </a:solidFill>
+                <a:latin typeface="Calibri"/>
+              </a:defRPr>
+            </a:pPr>
+            <a:r>
+              <a:rPr dirty="0"/>
+              <a:t>= [ 2, 45, 12, 0,  120, 3, 8, 0 ]      (8-dim vector)</a:t>
+            </a:r>
+          </a:p>
+        </p:txBody>
+      </p:sp>
+      <p:sp>
+        <p:nvSpPr>
+          <p:cNvPr id="9" name="Rounded Rectangle 8">
+            <a:extLst>
+              <a:ext uri="{FF2B5EF4-FFF2-40B4-BE49-F238E27FC236}">
+                <a16:creationId xmlns:a16="http://schemas.microsoft.com/office/drawing/2014/main" id="{8E3BC8F6-3834-FE8F-5BC6-CD9F32A727C8}"/>
+              </a:ext>
+            </a:extLst>
+          </p:cNvPr>
+          <p:cNvSpPr/>
+          <p:nvPr/>
+        </p:nvSpPr>
+        <p:spPr>
+          <a:xfrm>
+            <a:off x="2926080" y="2103120"/>
+            <a:ext cx="3840480" cy="1188720"/>
+          </a:xfrm>
+          <a:prstGeom prst="roundRect">
+            <a:avLst/>
+          </a:prstGeom>
+          <a:solidFill>
+            <a:srgbClr val="FDF2E9"/>
+          </a:solidFill>
+          <a:ln w="12700">
+            <a:solidFill>
+              <a:srgbClr val="E67E22"/>
+            </a:solidFill>
+          </a:ln>
+        </p:spPr>
+        <p:style>
+          <a:lnRef idx="1">
+            <a:schemeClr val="accent1"/>
+          </a:lnRef>
+          <a:fillRef idx="3">
+            <a:schemeClr val="accent1"/>
+          </a:fillRef>
+          <a:effectRef idx="2">
+            <a:schemeClr val="accent1"/>
+          </a:effectRef>
+          <a:fontRef idx="minor">
+            <a:schemeClr val="lt1"/>
+          </a:fontRef>
+        </p:style>
+        <p:txBody>
+          <a:bodyPr rtlCol="0" anchor="ctr"/>
+          <a:lstStyle/>
+          <a:p>
+            <a:pPr algn="ctr"/>
+            <a:endParaRPr/>
+          </a:p>
+        </p:txBody>
+      </p:sp>
+      <p:sp>
+        <p:nvSpPr>
+          <p:cNvPr id="10" name="TextBox 9">
+            <a:extLst>
+              <a:ext uri="{FF2B5EF4-FFF2-40B4-BE49-F238E27FC236}">
+                <a16:creationId xmlns:a16="http://schemas.microsoft.com/office/drawing/2014/main" id="{C698C06C-0312-F3AB-FD71-91D13A536444}"/>
+              </a:ext>
+            </a:extLst>
+          </p:cNvPr>
           <p:cNvSpPr txBox="1"/>
           <p:nvPr/>
         </p:nvSpPr>
         <p:spPr>
           <a:xfrm>
-            <a:off x="3200400" y="1097280"/>
-            <a:ext cx="731520" cy="411480"/>
+            <a:off x="3063240" y="2148840"/>
+            <a:ext cx="3566160" cy="1097280"/>
           </a:xfrm>
           <a:prstGeom prst="rect">
             <a:avLst/>
@@ -5298,30 +5362,159 @@
           </a:bodyPr>
           <a:lstStyle/>
           <a:p>
-            <a:pPr algn="ctr">
+            <a:pPr>
+              <a:spcAft>
+                <a:spcPts val="400"/>
+              </a:spcAft>
               <a:defRPr sz="1200" b="1">
                 <a:solidFill>
-                  <a:srgbClr val="D35400"/>
+                  <a:srgbClr val="1A1A1A"/>
                 </a:solidFill>
                 <a:latin typeface="Calibri"/>
               </a:defRPr>
             </a:pPr>
             <a:r>
-              <a:t>Loss</a:t>
-            </a:r>
-          </a:p>
-        </p:txBody>
-      </p:sp>
-      <p:sp>
-        <p:nvSpPr>
-          <p:cNvPr id="5" name="TextBox 4"/>
+              <a:rPr dirty="0"/>
+              <a:t>Step 2: Compute gate (learned)</a:t>
+            </a:r>
+          </a:p>
+          <a:p>
+            <a:pPr>
+              <a:spcAft>
+                <a:spcPts val="400"/>
+              </a:spcAft>
+              <a:defRPr sz="1200" b="0">
+                <a:solidFill>
+                  <a:srgbClr val="444444"/>
+                </a:solidFill>
+                <a:latin typeface="Calibri"/>
+              </a:defRPr>
+            </a:pPr>
+            <a:r>
+              <a:rPr dirty="0"/>
+              <a:t>gate = sigmoid( MLP( </a:t>
+            </a:r>
+            <a:r>
+              <a:rPr dirty="0" err="1"/>
+              <a:t>cell_pair</a:t>
+            </a:r>
+            <a:r>
+              <a:rPr dirty="0"/>
+              <a:t> ) )</a:t>
+            </a:r>
+          </a:p>
+          <a:p>
+            <a:pPr>
+              <a:spcAft>
+                <a:spcPts val="400"/>
+              </a:spcAft>
+              <a:defRPr sz="1000" b="0">
+                <a:solidFill>
+                  <a:srgbClr val="777777"/>
+                </a:solidFill>
+                <a:latin typeface="Calibri"/>
+              </a:defRPr>
+            </a:pPr>
+            <a:r>
+              <a:rPr dirty="0"/>
+              <a:t>MLP: Linear(8, 256) -&gt; </a:t>
+            </a:r>
+            <a:r>
+              <a:rPr dirty="0" err="1"/>
+              <a:t>ReLU</a:t>
+            </a:r>
+            <a:r>
+              <a:rPr dirty="0"/>
+              <a:t> -&gt; Linear(256, 256) -&gt; Sigmoid</a:t>
+            </a:r>
+          </a:p>
+          <a:p>
+            <a:pPr>
+              <a:spcAft>
+                <a:spcPts val="400"/>
+              </a:spcAft>
+              <a:defRPr sz="1100" b="0">
+                <a:solidFill>
+                  <a:srgbClr val="777777"/>
+                </a:solidFill>
+                <a:latin typeface="Calibri"/>
+              </a:defRPr>
+            </a:pPr>
+            <a:r>
+              <a:rPr dirty="0"/>
+              <a:t>= 256 values, each in [0, 1]  (per-channel on/off)</a:t>
+            </a:r>
+          </a:p>
+        </p:txBody>
+      </p:sp>
+      <p:sp>
+        <p:nvSpPr>
+          <p:cNvPr id="11" name="Rounded Rectangle 10">
+            <a:extLst>
+              <a:ext uri="{FF2B5EF4-FFF2-40B4-BE49-F238E27FC236}">
+                <a16:creationId xmlns:a16="http://schemas.microsoft.com/office/drawing/2014/main" id="{DF0B3D58-0DC0-BA21-A68D-11DC6106D1BB}"/>
+              </a:ext>
+            </a:extLst>
+          </p:cNvPr>
+          <p:cNvSpPr/>
+          <p:nvPr/>
+        </p:nvSpPr>
+        <p:spPr>
+          <a:xfrm>
+            <a:off x="2926080" y="3474720"/>
+            <a:ext cx="3840480" cy="1005840"/>
+          </a:xfrm>
+          <a:prstGeom prst="roundRect">
+            <a:avLst/>
+          </a:prstGeom>
+          <a:solidFill>
+            <a:srgbClr val="F2F2F2"/>
+          </a:solidFill>
+          <a:ln w="12700">
+            <a:solidFill>
+              <a:srgbClr val="CCCCCC"/>
+            </a:solidFill>
+          </a:ln>
+        </p:spPr>
+        <p:style>
+          <a:lnRef idx="1">
+            <a:schemeClr val="accent1"/>
+          </a:lnRef>
+          <a:fillRef idx="3">
+            <a:schemeClr val="accent1"/>
+          </a:fillRef>
+          <a:effectRef idx="2">
+            <a:schemeClr val="accent1"/>
+          </a:effectRef>
+          <a:fontRef idx="minor">
+            <a:schemeClr val="lt1"/>
+          </a:fontRef>
+        </p:style>
+        <p:txBody>
+          <a:bodyPr rtlCol="0" anchor="ctr"/>
+          <a:lstStyle/>
+          <a:p>
+            <a:pPr algn="ctr"/>
+            <a:endParaRPr/>
+          </a:p>
+        </p:txBody>
+      </p:sp>
+      <p:sp>
+        <p:nvSpPr>
+          <p:cNvPr id="12" name="TextBox 11">
+            <a:extLst>
+              <a:ext uri="{FF2B5EF4-FFF2-40B4-BE49-F238E27FC236}">
+                <a16:creationId xmlns:a16="http://schemas.microsoft.com/office/drawing/2014/main" id="{48E98F33-DE3C-CDEA-18FC-F95E17EAD557}"/>
+              </a:ext>
+            </a:extLst>
+          </p:cNvPr>
           <p:cNvSpPr txBox="1"/>
           <p:nvPr/>
         </p:nvSpPr>
         <p:spPr>
           <a:xfrm>
-            <a:off x="3931920" y="1097280"/>
-            <a:ext cx="1097280" cy="411480"/>
+            <a:off x="3063240" y="3520440"/>
+            <a:ext cx="3566160" cy="914400"/>
           </a:xfrm>
           <a:prstGeom prst="rect">
             <a:avLst/>
@@ -5334,30 +5527,126 @@
           </a:bodyPr>
           <a:lstStyle/>
           <a:p>
-            <a:pPr algn="ctr">
+            <a:pPr>
+              <a:spcAft>
+                <a:spcPts val="400"/>
+              </a:spcAft>
               <a:defRPr sz="1200" b="1">
                 <a:solidFill>
-                  <a:srgbClr val="D35400"/>
+                  <a:srgbClr val="1A1A1A"/>
                 </a:solidFill>
                 <a:latin typeface="Calibri"/>
               </a:defRPr>
             </a:pPr>
             <a:r>
-              <a:t>IPS-A F1</a:t>
-            </a:r>
-          </a:p>
-        </p:txBody>
-      </p:sp>
-      <p:sp>
-        <p:nvSpPr>
-          <p:cNvPr id="6" name="TextBox 5"/>
+              <a:rPr dirty="0"/>
+              <a:t>Step 3: Gate the message</a:t>
+            </a:r>
+          </a:p>
+          <a:p>
+            <a:pPr>
+              <a:spcAft>
+                <a:spcPts val="400"/>
+              </a:spcAft>
+              <a:defRPr sz="1200" b="0">
+                <a:solidFill>
+                  <a:srgbClr val="444444"/>
+                </a:solidFill>
+                <a:latin typeface="Calibri"/>
+              </a:defRPr>
+            </a:pPr>
+            <a:r>
+              <a:rPr dirty="0"/>
+              <a:t>msg = Linear( h(u) ) * gate</a:t>
+            </a:r>
+          </a:p>
+          <a:p>
+            <a:pPr>
+              <a:spcAft>
+                <a:spcPts val="400"/>
+              </a:spcAft>
+              <a:defRPr sz="1100" b="0">
+                <a:solidFill>
+                  <a:srgbClr val="777777"/>
+                </a:solidFill>
+                <a:latin typeface="Calibri"/>
+              </a:defRPr>
+            </a:pPr>
+            <a:r>
+              <a:rPr dirty="0"/>
+              <a:t>Element-wise: 256-dim message modulated by 256-dim gate</a:t>
+            </a:r>
+          </a:p>
+        </p:txBody>
+      </p:sp>
+      <p:sp>
+        <p:nvSpPr>
+          <p:cNvPr id="13" name="Rounded Rectangle 12">
+            <a:extLst>
+              <a:ext uri="{FF2B5EF4-FFF2-40B4-BE49-F238E27FC236}">
+                <a16:creationId xmlns:a16="http://schemas.microsoft.com/office/drawing/2014/main" id="{9F291B7C-ED02-5399-0815-FBE444DD456D}"/>
+              </a:ext>
+            </a:extLst>
+          </p:cNvPr>
+          <p:cNvSpPr/>
+          <p:nvPr/>
+        </p:nvSpPr>
+        <p:spPr>
+          <a:xfrm>
+            <a:off x="2926080" y="4663440"/>
+            <a:ext cx="3840480" cy="1188720"/>
+          </a:xfrm>
+          <a:prstGeom prst="roundRect">
+            <a:avLst/>
+          </a:prstGeom>
+          <a:solidFill>
+            <a:srgbClr val="F2F2F2"/>
+          </a:solidFill>
+          <a:ln w="12700">
+            <a:solidFill>
+              <a:srgbClr val="CCCCCC"/>
+            </a:solidFill>
+          </a:ln>
+        </p:spPr>
+        <p:style>
+          <a:lnRef idx="1">
+            <a:schemeClr val="accent1"/>
+          </a:lnRef>
+          <a:fillRef idx="3">
+            <a:schemeClr val="accent1"/>
+          </a:fillRef>
+          <a:effectRef idx="2">
+            <a:schemeClr val="accent1"/>
+          </a:effectRef>
+          <a:fontRef idx="minor">
+            <a:schemeClr val="lt1"/>
+          </a:fontRef>
+        </p:style>
+        <p:txBody>
+          <a:bodyPr rtlCol="0" anchor="ctr"/>
+          <a:lstStyle/>
+          <a:p>
+            <a:pPr algn="ctr"/>
+            <a:endParaRPr/>
+          </a:p>
+        </p:txBody>
+      </p:sp>
+      <p:sp>
+        <p:nvSpPr>
+          <p:cNvPr id="14" name="TextBox 13">
+            <a:extLst>
+              <a:ext uri="{FF2B5EF4-FFF2-40B4-BE49-F238E27FC236}">
+                <a16:creationId xmlns:a16="http://schemas.microsoft.com/office/drawing/2014/main" id="{375DA660-6654-0168-C503-5C2BF463C869}"/>
+              </a:ext>
+            </a:extLst>
+          </p:cNvPr>
           <p:cNvSpPr txBox="1"/>
           <p:nvPr/>
         </p:nvSpPr>
         <p:spPr>
           <a:xfrm>
-            <a:off x="5029200" y="1097280"/>
-            <a:ext cx="1097280" cy="411480"/>
+            <a:off x="3063240" y="4709160"/>
+            <a:ext cx="3566160" cy="748923"/>
           </a:xfrm>
           <a:prstGeom prst="rect">
             <a:avLst/>
@@ -5370,30 +5659,151 @@
           </a:bodyPr>
           <a:lstStyle/>
           <a:p>
-            <a:pPr algn="ctr">
+            <a:pPr>
+              <a:spcAft>
+                <a:spcPts val="400"/>
+              </a:spcAft>
               <a:defRPr sz="1200" b="1">
                 <a:solidFill>
-                  <a:srgbClr val="D35400"/>
+                  <a:srgbClr val="1A1A1A"/>
                 </a:solidFill>
                 <a:latin typeface="Calibri"/>
               </a:defRPr>
             </a:pPr>
             <a:r>
-              <a:t>IPS-B F1</a:t>
-            </a:r>
-          </a:p>
-        </p:txBody>
-      </p:sp>
-      <p:sp>
-        <p:nvSpPr>
-          <p:cNvPr id="7" name="TextBox 6"/>
+              <a:rPr dirty="0"/>
+              <a:t>Step 4: Aggregate all neighbors + Update</a:t>
+            </a:r>
+          </a:p>
+          <a:p>
+            <a:pPr>
+              <a:spcAft>
+                <a:spcPts val="400"/>
+              </a:spcAft>
+              <a:defRPr sz="1200" b="0">
+                <a:solidFill>
+                  <a:srgbClr val="444444"/>
+                </a:solidFill>
+                <a:latin typeface="Calibri"/>
+              </a:defRPr>
+            </a:pPr>
+            <a:r>
+              <a:rPr dirty="0" err="1"/>
+              <a:t>agg</a:t>
+            </a:r>
+            <a:r>
+              <a:rPr dirty="0"/>
+              <a:t> = SUM[ gated messages from all neighbors ]</a:t>
+            </a:r>
+            <a:endParaRPr lang="en-TR" dirty="0"/>
+          </a:p>
+          <a:p>
+            <a:pPr>
+              <a:spcAft>
+                <a:spcPts val="400"/>
+              </a:spcAft>
+              <a:defRPr sz="1200" b="0">
+                <a:solidFill>
+                  <a:srgbClr val="444444"/>
+                </a:solidFill>
+                <a:latin typeface="Calibri"/>
+              </a:defRPr>
+            </a:pPr>
+            <a:r>
+              <a:rPr lang="en-US" dirty="0" err="1"/>
+              <a:t>new_h</a:t>
+            </a:r>
+            <a:r>
+              <a:rPr lang="en-US" dirty="0"/>
+              <a:t>(v) = </a:t>
+            </a:r>
+            <a:r>
+              <a:rPr lang="en-US" dirty="0" err="1"/>
+              <a:t>MLP_update</a:t>
+            </a:r>
+            <a:r>
+              <a:rPr lang="en-US" dirty="0"/>
+              <a:t>( [ h(v) || </a:t>
+            </a:r>
+            <a:r>
+              <a:rPr lang="en-US" dirty="0" err="1"/>
+              <a:t>agg</a:t>
+            </a:r>
+            <a:r>
+              <a:rPr lang="en-US" dirty="0"/>
+              <a:t> ] ) + h(v)</a:t>
+            </a:r>
+          </a:p>
+        </p:txBody>
+      </p:sp>
+      <p:sp>
+        <p:nvSpPr>
+          <p:cNvPr id="15" name="Rounded Rectangle 14">
+            <a:extLst>
+              <a:ext uri="{FF2B5EF4-FFF2-40B4-BE49-F238E27FC236}">
+                <a16:creationId xmlns:a16="http://schemas.microsoft.com/office/drawing/2014/main" id="{D2D6EE5A-AE5D-4C59-CBA1-D1F65F37E78B}"/>
+              </a:ext>
+            </a:extLst>
+          </p:cNvPr>
+          <p:cNvSpPr/>
+          <p:nvPr/>
+        </p:nvSpPr>
+        <p:spPr>
+          <a:xfrm>
+            <a:off x="7248698" y="1305098"/>
+            <a:ext cx="3308465" cy="1778924"/>
+          </a:xfrm>
+          <a:prstGeom prst="roundRect">
+            <a:avLst/>
+          </a:prstGeom>
+          <a:solidFill>
+            <a:srgbClr val="F2F2F2"/>
+          </a:solidFill>
+          <a:ln w="12700">
+            <a:solidFill>
+              <a:srgbClr val="CCCCCC"/>
+            </a:solidFill>
+          </a:ln>
+        </p:spPr>
+        <p:style>
+          <a:lnRef idx="1">
+            <a:schemeClr val="accent1"/>
+          </a:lnRef>
+          <a:fillRef idx="3">
+            <a:schemeClr val="accent1"/>
+          </a:fillRef>
+          <a:effectRef idx="2">
+            <a:schemeClr val="accent1"/>
+          </a:effectRef>
+          <a:fontRef idx="minor">
+            <a:schemeClr val="lt1"/>
+          </a:fontRef>
+        </p:style>
+        <p:txBody>
+          <a:bodyPr rtlCol="0" anchor="ctr"/>
+          <a:lstStyle/>
+          <a:p>
+            <a:pPr algn="ctr"/>
+            <a:endParaRPr/>
+          </a:p>
+        </p:txBody>
+      </p:sp>
+      <p:sp>
+        <p:nvSpPr>
+          <p:cNvPr id="16" name="TextBox 15">
+            <a:extLst>
+              <a:ext uri="{FF2B5EF4-FFF2-40B4-BE49-F238E27FC236}">
+                <a16:creationId xmlns:a16="http://schemas.microsoft.com/office/drawing/2014/main" id="{0EE8B825-546B-83B1-F1AF-0A800795BF53}"/>
+              </a:ext>
+            </a:extLst>
+          </p:cNvPr>
           <p:cNvSpPr txBox="1"/>
           <p:nvPr/>
         </p:nvSpPr>
         <p:spPr>
           <a:xfrm>
-            <a:off x="6126480" y="1097280"/>
-            <a:ext cx="1097280" cy="411480"/>
+            <a:off x="7498080" y="1417320"/>
+            <a:ext cx="4023360" cy="1174681"/>
           </a:xfrm>
           <a:prstGeom prst="rect">
             <a:avLst/>
@@ -5406,2001 +5816,95 @@
           </a:bodyPr>
           <a:lstStyle/>
           <a:p>
-            <a:pPr algn="ctr">
-              <a:defRPr sz="1200" b="1">
-                <a:solidFill>
-                  <a:srgbClr val="D35400"/>
+            <a:pPr>
+              <a:spcAft>
+                <a:spcPts val="400"/>
+              </a:spcAft>
+              <a:defRPr sz="800" b="0">
+                <a:solidFill>
+                  <a:srgbClr val="1A1A1A"/>
                 </a:solidFill>
                 <a:latin typeface="Calibri"/>
               </a:defRPr>
             </a:pPr>
-            <a:r>
-              <a:t>IPS-C F1</a:t>
-            </a:r>
-          </a:p>
-        </p:txBody>
-      </p:sp>
-      <p:sp>
-        <p:nvSpPr>
-          <p:cNvPr id="8" name="TextBox 7"/>
-          <p:cNvSpPr txBox="1"/>
-          <p:nvPr/>
-        </p:nvSpPr>
-        <p:spPr>
-          <a:xfrm>
-            <a:off x="7223760" y="1097280"/>
-            <a:ext cx="1371600" cy="411480"/>
-          </a:xfrm>
-          <a:prstGeom prst="rect">
-            <a:avLst/>
-          </a:prstGeom>
-          <a:noFill/>
-        </p:spPr>
-        <p:txBody>
-          <a:bodyPr wrap="square">
-            <a:spAutoFit/>
-          </a:bodyPr>
-          <a:lstStyle/>
-          <a:p>
-            <a:pPr algn="ctr">
-              <a:defRPr sz="1200" b="1">
-                <a:solidFill>
-                  <a:srgbClr val="D35400"/>
+            <a:endParaRPr dirty="0"/>
+          </a:p>
+          <a:p>
+            <a:pPr>
+              <a:spcAft>
+                <a:spcPts val="400"/>
+              </a:spcAft>
+              <a:defRPr sz="1300" b="1">
+                <a:solidFill>
+                  <a:srgbClr val="1A1A1A"/>
                 </a:solidFill>
                 <a:latin typeface="Calibri"/>
               </a:defRPr>
             </a:pPr>
             <a:r>
-              <a:t>Macro F1</a:t>
-            </a:r>
-          </a:p>
-        </p:txBody>
-      </p:sp>
-      <p:sp>
-        <p:nvSpPr>
-          <p:cNvPr id="9" name="TextBox 8"/>
-          <p:cNvSpPr txBox="1"/>
-          <p:nvPr/>
-        </p:nvSpPr>
-        <p:spPr>
-          <a:xfrm>
-            <a:off x="8595360" y="1097280"/>
-            <a:ext cx="1097280" cy="411480"/>
-          </a:xfrm>
-          <a:prstGeom prst="rect">
-            <a:avLst/>
-          </a:prstGeom>
-          <a:noFill/>
-        </p:spPr>
-        <p:txBody>
-          <a:bodyPr wrap="square">
-            <a:spAutoFit/>
-          </a:bodyPr>
-          <a:lstStyle/>
-          <a:p>
-            <a:pPr algn="ctr">
-              <a:defRPr sz="1200" b="1">
-                <a:solidFill>
-                  <a:srgbClr val="D35400"/>
+              <a:rPr dirty="0"/>
+              <a:t>Key difference from base GIN:</a:t>
+            </a:r>
+          </a:p>
+          <a:p>
+            <a:pPr>
+              <a:spcAft>
+                <a:spcPts val="400"/>
+              </a:spcAft>
+              <a:defRPr sz="1200" b="0">
+                <a:solidFill>
+                  <a:srgbClr val="444444"/>
                 </a:solidFill>
                 <a:latin typeface="Calibri"/>
               </a:defRPr>
             </a:pPr>
             <a:r>
-              <a:t>QWK</a:t>
-            </a:r>
-          </a:p>
-        </p:txBody>
-      </p:sp>
-      <p:sp>
-        <p:nvSpPr>
-          <p:cNvPr id="10" name="TextBox 9"/>
-          <p:cNvSpPr txBox="1"/>
-          <p:nvPr/>
-        </p:nvSpPr>
-        <p:spPr>
-          <a:xfrm>
-            <a:off x="914400" y="1508760"/>
-            <a:ext cx="2286000" cy="411480"/>
-          </a:xfrm>
-          <a:prstGeom prst="rect">
-            <a:avLst/>
-          </a:prstGeom>
-          <a:noFill/>
-        </p:spPr>
-        <p:txBody>
-          <a:bodyPr wrap="square">
-            <a:spAutoFit/>
-          </a:bodyPr>
-          <a:lstStyle/>
-          <a:p>
-            <a:pPr algn="l">
-              <a:defRPr sz="1200" b="1">
-                <a:solidFill>
-                  <a:srgbClr val="7F8C8D"/>
+              <a:rPr dirty="0"/>
+              <a:t>Base GIN: all neighbors weighted equally.</a:t>
+            </a:r>
+          </a:p>
+          <a:p>
+            <a:pPr>
+              <a:spcAft>
+                <a:spcPts val="400"/>
+              </a:spcAft>
+              <a:defRPr sz="1200" b="0">
+                <a:solidFill>
+                  <a:srgbClr val="444444"/>
                 </a:solidFill>
                 <a:latin typeface="Calibri"/>
               </a:defRPr>
             </a:pPr>
             <a:r>
-              <a:t>DeepSets</a:t>
-            </a:r>
-          </a:p>
-        </p:txBody>
-      </p:sp>
-      <p:sp>
-        <p:nvSpPr>
-          <p:cNvPr id="11" name="TextBox 10"/>
-          <p:cNvSpPr txBox="1"/>
-          <p:nvPr/>
-        </p:nvSpPr>
-        <p:spPr>
-          <a:xfrm>
-            <a:off x="3200400" y="1508760"/>
-            <a:ext cx="731520" cy="411480"/>
-          </a:xfrm>
-          <a:prstGeom prst="rect">
-            <a:avLst/>
-          </a:prstGeom>
-          <a:noFill/>
-        </p:spPr>
-        <p:txBody>
-          <a:bodyPr wrap="square">
-            <a:spAutoFit/>
-          </a:bodyPr>
-          <a:lstStyle/>
-          <a:p>
-            <a:pPr algn="ctr">
+              <a:rPr dirty="0"/>
+              <a:t>Gate GIN: neighbors weighted by their</a:t>
+            </a:r>
+          </a:p>
+          <a:p>
+            <a:pPr>
+              <a:spcAft>
+                <a:spcPts val="400"/>
+              </a:spcAft>
               <a:defRPr sz="1200" b="0">
                 <a:solidFill>
-                  <a:srgbClr val="7F8C8D"/>
+                  <a:srgbClr val="444444"/>
                 </a:solidFill>
                 <a:latin typeface="Calibri"/>
               </a:defRPr>
             </a:pPr>
             <a:r>
-              <a:t>REG</a:t>
-            </a:r>
-          </a:p>
-        </p:txBody>
-      </p:sp>
-      <p:sp>
-        <p:nvSpPr>
-          <p:cNvPr id="12" name="TextBox 11"/>
-          <p:cNvSpPr txBox="1"/>
-          <p:nvPr/>
-        </p:nvSpPr>
-        <p:spPr>
-          <a:xfrm>
-            <a:off x="3931920" y="1508760"/>
-            <a:ext cx="1097280" cy="411480"/>
-          </a:xfrm>
-          <a:prstGeom prst="rect">
-            <a:avLst/>
-          </a:prstGeom>
-          <a:noFill/>
-        </p:spPr>
-        <p:txBody>
-          <a:bodyPr wrap="square">
-            <a:spAutoFit/>
-          </a:bodyPr>
-          <a:lstStyle/>
-          <a:p>
-            <a:pPr algn="ctr">
-              <a:defRPr sz="1200" b="0">
-                <a:solidFill>
-                  <a:srgbClr val="7F8C8D"/>
-                </a:solidFill>
-                <a:latin typeface="Calibri"/>
-              </a:defRPr>
-            </a:pPr>
-            <a:r>
-              <a:t>47.3</a:t>
-            </a:r>
-          </a:p>
-        </p:txBody>
-      </p:sp>
-      <p:sp>
-        <p:nvSpPr>
-          <p:cNvPr id="13" name="TextBox 12"/>
-          <p:cNvSpPr txBox="1"/>
-          <p:nvPr/>
-        </p:nvSpPr>
-        <p:spPr>
-          <a:xfrm>
-            <a:off x="5029200" y="1508760"/>
-            <a:ext cx="1097280" cy="411480"/>
-          </a:xfrm>
-          <a:prstGeom prst="rect">
-            <a:avLst/>
-          </a:prstGeom>
-          <a:noFill/>
-        </p:spPr>
-        <p:txBody>
-          <a:bodyPr wrap="square">
-            <a:spAutoFit/>
-          </a:bodyPr>
-          <a:lstStyle/>
-          <a:p>
-            <a:pPr algn="ctr">
-              <a:defRPr sz="1200" b="0">
-                <a:solidFill>
-                  <a:srgbClr val="7F8C8D"/>
-                </a:solidFill>
-                <a:latin typeface="Calibri"/>
-              </a:defRPr>
-            </a:pPr>
-            <a:r>
-              <a:t>65.0</a:t>
-            </a:r>
-          </a:p>
-        </p:txBody>
-      </p:sp>
-      <p:sp>
-        <p:nvSpPr>
-          <p:cNvPr id="14" name="TextBox 13"/>
-          <p:cNvSpPr txBox="1"/>
-          <p:nvPr/>
-        </p:nvSpPr>
-        <p:spPr>
-          <a:xfrm>
-            <a:off x="6126480" y="1508760"/>
-            <a:ext cx="1097280" cy="411480"/>
-          </a:xfrm>
-          <a:prstGeom prst="rect">
-            <a:avLst/>
-          </a:prstGeom>
-          <a:noFill/>
-        </p:spPr>
-        <p:txBody>
-          <a:bodyPr wrap="square">
-            <a:spAutoFit/>
-          </a:bodyPr>
-          <a:lstStyle/>
-          <a:p>
-            <a:pPr algn="ctr">
-              <a:defRPr sz="1200" b="0">
-                <a:solidFill>
-                  <a:srgbClr val="7F8C8D"/>
-                </a:solidFill>
-                <a:latin typeface="Calibri"/>
-              </a:defRPr>
-            </a:pPr>
-            <a:r>
-              <a:t>77.1</a:t>
-            </a:r>
-          </a:p>
-        </p:txBody>
-      </p:sp>
-      <p:sp>
-        <p:nvSpPr>
-          <p:cNvPr id="15" name="TextBox 14"/>
-          <p:cNvSpPr txBox="1"/>
-          <p:nvPr/>
-        </p:nvSpPr>
-        <p:spPr>
-          <a:xfrm>
-            <a:off x="7223760" y="1508760"/>
-            <a:ext cx="1371600" cy="411480"/>
-          </a:xfrm>
-          <a:prstGeom prst="rect">
-            <a:avLst/>
-          </a:prstGeom>
-          <a:noFill/>
-        </p:spPr>
-        <p:txBody>
-          <a:bodyPr wrap="square">
-            <a:spAutoFit/>
-          </a:bodyPr>
-          <a:lstStyle/>
-          <a:p>
-            <a:pPr algn="ctr">
-              <a:defRPr sz="1200" b="0">
-                <a:solidFill>
-                  <a:srgbClr val="7F8C8D"/>
-                </a:solidFill>
-                <a:latin typeface="Calibri"/>
-              </a:defRPr>
-            </a:pPr>
-            <a:r>
-              <a:t>63.1</a:t>
-            </a:r>
-          </a:p>
-        </p:txBody>
-      </p:sp>
-      <p:sp>
-        <p:nvSpPr>
-          <p:cNvPr id="16" name="TextBox 15"/>
-          <p:cNvSpPr txBox="1"/>
-          <p:nvPr/>
-        </p:nvSpPr>
-        <p:spPr>
-          <a:xfrm>
-            <a:off x="8595360" y="1508760"/>
-            <a:ext cx="1097280" cy="411480"/>
-          </a:xfrm>
-          <a:prstGeom prst="rect">
-            <a:avLst/>
-          </a:prstGeom>
-          <a:noFill/>
-        </p:spPr>
-        <p:txBody>
-          <a:bodyPr wrap="square">
-            <a:spAutoFit/>
-          </a:bodyPr>
-          <a:lstStyle/>
-          <a:p>
-            <a:pPr algn="ctr">
-              <a:defRPr sz="1200" b="0">
-                <a:solidFill>
-                  <a:srgbClr val="7F8C8D"/>
-                </a:solidFill>
-                <a:latin typeface="Calibri"/>
-              </a:defRPr>
-            </a:pPr>
-            <a:r>
-              <a:t>54.1</a:t>
-            </a:r>
-          </a:p>
-        </p:txBody>
-      </p:sp>
-      <p:sp>
-        <p:nvSpPr>
-          <p:cNvPr id="17" name="TextBox 16"/>
-          <p:cNvSpPr txBox="1"/>
-          <p:nvPr/>
-        </p:nvSpPr>
-        <p:spPr>
-          <a:xfrm>
-            <a:off x="914400" y="1920240"/>
-            <a:ext cx="2286000" cy="411480"/>
-          </a:xfrm>
-          <a:prstGeom prst="rect">
-            <a:avLst/>
-          </a:prstGeom>
-          <a:noFill/>
-        </p:spPr>
-        <p:txBody>
-          <a:bodyPr wrap="square">
-            <a:spAutoFit/>
-          </a:bodyPr>
-          <a:lstStyle/>
-          <a:p>
-            <a:pPr algn="l">
-              <a:defRPr sz="1200" b="1">
-                <a:solidFill>
-                  <a:srgbClr val="7F8C8D"/>
-                </a:solidFill>
-                <a:latin typeface="Calibri"/>
-              </a:defRPr>
-            </a:pPr>
-            <a:r>
-              <a:t>CLAM</a:t>
-            </a:r>
-          </a:p>
-        </p:txBody>
-      </p:sp>
-      <p:sp>
-        <p:nvSpPr>
-          <p:cNvPr id="18" name="TextBox 17"/>
-          <p:cNvSpPr txBox="1"/>
-          <p:nvPr/>
-        </p:nvSpPr>
-        <p:spPr>
-          <a:xfrm>
-            <a:off x="3200400" y="1920240"/>
-            <a:ext cx="731520" cy="411480"/>
-          </a:xfrm>
-          <a:prstGeom prst="rect">
-            <a:avLst/>
-          </a:prstGeom>
-          <a:noFill/>
-        </p:spPr>
-        <p:txBody>
-          <a:bodyPr wrap="square">
-            <a:spAutoFit/>
-          </a:bodyPr>
-          <a:lstStyle/>
-          <a:p>
-            <a:pPr algn="ctr">
-              <a:defRPr sz="1200" b="0">
-                <a:solidFill>
-                  <a:srgbClr val="7F8C8D"/>
-                </a:solidFill>
-                <a:latin typeface="Calibri"/>
-              </a:defRPr>
-            </a:pPr>
-            <a:r>
-              <a:t>CLS</a:t>
-            </a:r>
-          </a:p>
-        </p:txBody>
-      </p:sp>
-      <p:sp>
-        <p:nvSpPr>
-          <p:cNvPr id="19" name="TextBox 18"/>
-          <p:cNvSpPr txBox="1"/>
-          <p:nvPr/>
-        </p:nvSpPr>
-        <p:spPr>
-          <a:xfrm>
-            <a:off x="3931920" y="1920240"/>
-            <a:ext cx="1097280" cy="411480"/>
-          </a:xfrm>
-          <a:prstGeom prst="rect">
-            <a:avLst/>
-          </a:prstGeom>
-          <a:noFill/>
-        </p:spPr>
-        <p:txBody>
-          <a:bodyPr wrap="square">
-            <a:spAutoFit/>
-          </a:bodyPr>
-          <a:lstStyle/>
-          <a:p>
-            <a:pPr algn="ctr">
-              <a:defRPr sz="1200" b="0">
-                <a:solidFill>
-                  <a:srgbClr val="7F8C8D"/>
-                </a:solidFill>
-                <a:latin typeface="Calibri"/>
-              </a:defRPr>
-            </a:pPr>
-            <a:r>
-              <a:t>35.3</a:t>
-            </a:r>
-          </a:p>
-        </p:txBody>
-      </p:sp>
-      <p:sp>
-        <p:nvSpPr>
-          <p:cNvPr id="20" name="TextBox 19"/>
-          <p:cNvSpPr txBox="1"/>
-          <p:nvPr/>
-        </p:nvSpPr>
-        <p:spPr>
-          <a:xfrm>
-            <a:off x="5029200" y="1920240"/>
-            <a:ext cx="1097280" cy="411480"/>
-          </a:xfrm>
-          <a:prstGeom prst="rect">
-            <a:avLst/>
-          </a:prstGeom>
-          <a:noFill/>
-        </p:spPr>
-        <p:txBody>
-          <a:bodyPr wrap="square">
-            <a:spAutoFit/>
-          </a:bodyPr>
-          <a:lstStyle/>
-          <a:p>
-            <a:pPr algn="ctr">
-              <a:defRPr sz="1200" b="0">
-                <a:solidFill>
-                  <a:srgbClr val="7F8C8D"/>
-                </a:solidFill>
-                <a:latin typeface="Calibri"/>
-              </a:defRPr>
-            </a:pPr>
-            <a:r>
-              <a:t>41.0</a:t>
-            </a:r>
-          </a:p>
-        </p:txBody>
-      </p:sp>
-      <p:sp>
-        <p:nvSpPr>
-          <p:cNvPr id="21" name="TextBox 20"/>
-          <p:cNvSpPr txBox="1"/>
-          <p:nvPr/>
-        </p:nvSpPr>
-        <p:spPr>
-          <a:xfrm>
-            <a:off x="6126480" y="1920240"/>
-            <a:ext cx="1097280" cy="411480"/>
-          </a:xfrm>
-          <a:prstGeom prst="rect">
-            <a:avLst/>
-          </a:prstGeom>
-          <a:noFill/>
-        </p:spPr>
-        <p:txBody>
-          <a:bodyPr wrap="square">
-            <a:spAutoFit/>
-          </a:bodyPr>
-          <a:lstStyle/>
-          <a:p>
-            <a:pPr algn="ctr">
-              <a:defRPr sz="1200" b="0">
-                <a:solidFill>
-                  <a:srgbClr val="7F8C8D"/>
-                </a:solidFill>
-                <a:latin typeface="Calibri"/>
-              </a:defRPr>
-            </a:pPr>
-            <a:r>
-              <a:t>67.8</a:t>
-            </a:r>
-          </a:p>
-        </p:txBody>
-      </p:sp>
-      <p:sp>
-        <p:nvSpPr>
-          <p:cNvPr id="22" name="TextBox 21"/>
-          <p:cNvSpPr txBox="1"/>
-          <p:nvPr/>
-        </p:nvSpPr>
-        <p:spPr>
-          <a:xfrm>
-            <a:off x="7223760" y="1920240"/>
-            <a:ext cx="1371600" cy="411480"/>
-          </a:xfrm>
-          <a:prstGeom prst="rect">
-            <a:avLst/>
-          </a:prstGeom>
-          <a:noFill/>
-        </p:spPr>
-        <p:txBody>
-          <a:bodyPr wrap="square">
-            <a:spAutoFit/>
-          </a:bodyPr>
-          <a:lstStyle/>
-          <a:p>
-            <a:pPr algn="ctr">
-              <a:defRPr sz="1200" b="0">
-                <a:solidFill>
-                  <a:srgbClr val="7F8C8D"/>
-                </a:solidFill>
-                <a:latin typeface="Calibri"/>
-              </a:defRPr>
-            </a:pPr>
-            <a:r>
-              <a:t>48.0</a:t>
-            </a:r>
-          </a:p>
-        </p:txBody>
-      </p:sp>
-      <p:sp>
-        <p:nvSpPr>
-          <p:cNvPr id="23" name="TextBox 22"/>
-          <p:cNvSpPr txBox="1"/>
-          <p:nvPr/>
-        </p:nvSpPr>
-        <p:spPr>
-          <a:xfrm>
-            <a:off x="8595360" y="1920240"/>
-            <a:ext cx="1097280" cy="411480"/>
-          </a:xfrm>
-          <a:prstGeom prst="rect">
-            <a:avLst/>
-          </a:prstGeom>
-          <a:noFill/>
-        </p:spPr>
-        <p:txBody>
-          <a:bodyPr wrap="square">
-            <a:spAutoFit/>
-          </a:bodyPr>
-          <a:lstStyle/>
-          <a:p>
-            <a:pPr algn="ctr">
-              <a:defRPr sz="1200" b="0">
-                <a:solidFill>
-                  <a:srgbClr val="7F8C8D"/>
-                </a:solidFill>
-                <a:latin typeface="Calibri"/>
-              </a:defRPr>
-            </a:pPr>
-            <a:r>
-              <a:t>37.0</a:t>
-            </a:r>
-          </a:p>
-        </p:txBody>
-      </p:sp>
-      <p:sp>
-        <p:nvSpPr>
-          <p:cNvPr id="24" name="TextBox 23"/>
-          <p:cNvSpPr txBox="1"/>
-          <p:nvPr/>
-        </p:nvSpPr>
-        <p:spPr>
-          <a:xfrm>
-            <a:off x="914400" y="2331720"/>
-            <a:ext cx="2286000" cy="411480"/>
-          </a:xfrm>
-          <a:prstGeom prst="rect">
-            <a:avLst/>
-          </a:prstGeom>
-          <a:noFill/>
-        </p:spPr>
-        <p:txBody>
-          <a:bodyPr wrap="square">
-            <a:spAutoFit/>
-          </a:bodyPr>
-          <a:lstStyle/>
-          <a:p>
-            <a:pPr algn="l">
-              <a:defRPr sz="1200" b="1">
-                <a:solidFill>
-                  <a:srgbClr val="7F8C8D"/>
-                </a:solidFill>
-                <a:latin typeface="Calibri"/>
-              </a:defRPr>
-            </a:pPr>
-            <a:r>
-              <a:t>AB-MIL</a:t>
-            </a:r>
-          </a:p>
-        </p:txBody>
-      </p:sp>
-      <p:sp>
-        <p:nvSpPr>
-          <p:cNvPr id="25" name="TextBox 24"/>
-          <p:cNvSpPr txBox="1"/>
-          <p:nvPr/>
-        </p:nvSpPr>
-        <p:spPr>
-          <a:xfrm>
-            <a:off x="3200400" y="2331720"/>
-            <a:ext cx="731520" cy="411480"/>
-          </a:xfrm>
-          <a:prstGeom prst="rect">
-            <a:avLst/>
-          </a:prstGeom>
-          <a:noFill/>
-        </p:spPr>
-        <p:txBody>
-          <a:bodyPr wrap="square">
-            <a:spAutoFit/>
-          </a:bodyPr>
-          <a:lstStyle/>
-          <a:p>
-            <a:pPr algn="ctr">
-              <a:defRPr sz="1200" b="0">
-                <a:solidFill>
-                  <a:srgbClr val="7F8C8D"/>
-                </a:solidFill>
-                <a:latin typeface="Calibri"/>
-              </a:defRPr>
-            </a:pPr>
-            <a:r>
-              <a:t>REG</a:t>
-            </a:r>
-          </a:p>
-        </p:txBody>
-      </p:sp>
-      <p:sp>
-        <p:nvSpPr>
-          <p:cNvPr id="26" name="TextBox 25"/>
-          <p:cNvSpPr txBox="1"/>
-          <p:nvPr/>
-        </p:nvSpPr>
-        <p:spPr>
-          <a:xfrm>
-            <a:off x="3931920" y="2331720"/>
-            <a:ext cx="1097280" cy="411480"/>
-          </a:xfrm>
-          <a:prstGeom prst="rect">
-            <a:avLst/>
-          </a:prstGeom>
-          <a:noFill/>
-        </p:spPr>
-        <p:txBody>
-          <a:bodyPr wrap="square">
-            <a:spAutoFit/>
-          </a:bodyPr>
-          <a:lstStyle/>
-          <a:p>
-            <a:pPr algn="ctr">
-              <a:defRPr sz="1200" b="0">
-                <a:solidFill>
-                  <a:srgbClr val="7F8C8D"/>
-                </a:solidFill>
-                <a:latin typeface="Calibri"/>
-              </a:defRPr>
-            </a:pPr>
-            <a:r>
-              <a:t>48.2</a:t>
-            </a:r>
-          </a:p>
-        </p:txBody>
-      </p:sp>
-      <p:sp>
-        <p:nvSpPr>
-          <p:cNvPr id="27" name="TextBox 26"/>
-          <p:cNvSpPr txBox="1"/>
-          <p:nvPr/>
-        </p:nvSpPr>
-        <p:spPr>
-          <a:xfrm>
-            <a:off x="5029200" y="2331720"/>
-            <a:ext cx="1097280" cy="411480"/>
-          </a:xfrm>
-          <a:prstGeom prst="rect">
-            <a:avLst/>
-          </a:prstGeom>
-          <a:noFill/>
-        </p:spPr>
-        <p:txBody>
-          <a:bodyPr wrap="square">
-            <a:spAutoFit/>
-          </a:bodyPr>
-          <a:lstStyle/>
-          <a:p>
-            <a:pPr algn="ctr">
-              <a:defRPr sz="1200" b="0">
-                <a:solidFill>
-                  <a:srgbClr val="7F8C8D"/>
-                </a:solidFill>
-                <a:latin typeface="Calibri"/>
-              </a:defRPr>
-            </a:pPr>
-            <a:r>
-              <a:t>63.4</a:t>
-            </a:r>
-          </a:p>
-        </p:txBody>
-      </p:sp>
-      <p:sp>
-        <p:nvSpPr>
-          <p:cNvPr id="28" name="TextBox 27"/>
-          <p:cNvSpPr txBox="1"/>
-          <p:nvPr/>
-        </p:nvSpPr>
-        <p:spPr>
-          <a:xfrm>
-            <a:off x="6126480" y="2331720"/>
-            <a:ext cx="1097280" cy="411480"/>
-          </a:xfrm>
-          <a:prstGeom prst="rect">
-            <a:avLst/>
-          </a:prstGeom>
-          <a:noFill/>
-        </p:spPr>
-        <p:txBody>
-          <a:bodyPr wrap="square">
-            <a:spAutoFit/>
-          </a:bodyPr>
-          <a:lstStyle/>
-          <a:p>
-            <a:pPr algn="ctr">
-              <a:defRPr sz="1200" b="0">
-                <a:solidFill>
-                  <a:srgbClr val="7F8C8D"/>
-                </a:solidFill>
-                <a:latin typeface="Calibri"/>
-              </a:defRPr>
-            </a:pPr>
-            <a:r>
-              <a:t>78.1</a:t>
-            </a:r>
-          </a:p>
-        </p:txBody>
-      </p:sp>
-      <p:sp>
-        <p:nvSpPr>
-          <p:cNvPr id="29" name="TextBox 28"/>
-          <p:cNvSpPr txBox="1"/>
-          <p:nvPr/>
-        </p:nvSpPr>
-        <p:spPr>
-          <a:xfrm>
-            <a:off x="7223760" y="2331720"/>
-            <a:ext cx="1371600" cy="411480"/>
-          </a:xfrm>
-          <a:prstGeom prst="rect">
-            <a:avLst/>
-          </a:prstGeom>
-          <a:noFill/>
-        </p:spPr>
-        <p:txBody>
-          <a:bodyPr wrap="square">
-            <a:spAutoFit/>
-          </a:bodyPr>
-          <a:lstStyle/>
-          <a:p>
-            <a:pPr algn="ctr">
-              <a:defRPr sz="1200" b="0">
-                <a:solidFill>
-                  <a:srgbClr val="7F8C8D"/>
-                </a:solidFill>
-                <a:latin typeface="Calibri"/>
-              </a:defRPr>
-            </a:pPr>
-            <a:r>
-              <a:t>63.2</a:t>
-            </a:r>
-          </a:p>
-        </p:txBody>
-      </p:sp>
-      <p:sp>
-        <p:nvSpPr>
-          <p:cNvPr id="30" name="TextBox 29"/>
-          <p:cNvSpPr txBox="1"/>
-          <p:nvPr/>
-        </p:nvSpPr>
-        <p:spPr>
-          <a:xfrm>
-            <a:off x="8595360" y="2331720"/>
-            <a:ext cx="1097280" cy="411480"/>
-          </a:xfrm>
-          <a:prstGeom prst="rect">
-            <a:avLst/>
-          </a:prstGeom>
-          <a:noFill/>
-        </p:spPr>
-        <p:txBody>
-          <a:bodyPr wrap="square">
-            <a:spAutoFit/>
-          </a:bodyPr>
-          <a:lstStyle/>
-          <a:p>
-            <a:pPr algn="ctr">
-              <a:defRPr sz="1200" b="0">
-                <a:solidFill>
-                  <a:srgbClr val="7F8C8D"/>
-                </a:solidFill>
-                <a:latin typeface="Calibri"/>
-              </a:defRPr>
-            </a:pPr>
-            <a:r>
-              <a:t>55.5</a:t>
-            </a:r>
-          </a:p>
-        </p:txBody>
-      </p:sp>
-      <p:sp>
-        <p:nvSpPr>
-          <p:cNvPr id="31" name="TextBox 30"/>
-          <p:cNvSpPr txBox="1"/>
-          <p:nvPr/>
-        </p:nvSpPr>
-        <p:spPr>
-          <a:xfrm>
-            <a:off x="914400" y="2743200"/>
-            <a:ext cx="2286000" cy="411480"/>
-          </a:xfrm>
-          <a:prstGeom prst="rect">
-            <a:avLst/>
-          </a:prstGeom>
-          <a:noFill/>
-        </p:spPr>
-        <p:txBody>
-          <a:bodyPr wrap="square">
-            <a:spAutoFit/>
-          </a:bodyPr>
-          <a:lstStyle/>
-          <a:p>
-            <a:pPr algn="l">
-              <a:defRPr sz="1200" b="1">
-                <a:solidFill>
-                  <a:srgbClr val="7F8C8D"/>
-                </a:solidFill>
-                <a:latin typeface="Calibri"/>
-              </a:defRPr>
-            </a:pPr>
-            <a:r>
-              <a:t>Patch-GCN (1L)</a:t>
-            </a:r>
-          </a:p>
-        </p:txBody>
-      </p:sp>
-      <p:sp>
-        <p:nvSpPr>
-          <p:cNvPr id="32" name="TextBox 31"/>
-          <p:cNvSpPr txBox="1"/>
-          <p:nvPr/>
-        </p:nvSpPr>
-        <p:spPr>
-          <a:xfrm>
-            <a:off x="3200400" y="2743200"/>
-            <a:ext cx="731520" cy="411480"/>
-          </a:xfrm>
-          <a:prstGeom prst="rect">
-            <a:avLst/>
-          </a:prstGeom>
-          <a:noFill/>
-        </p:spPr>
-        <p:txBody>
-          <a:bodyPr wrap="square">
-            <a:spAutoFit/>
-          </a:bodyPr>
-          <a:lstStyle/>
-          <a:p>
-            <a:pPr algn="ctr">
-              <a:defRPr sz="1200" b="0">
-                <a:solidFill>
-                  <a:srgbClr val="7F8C8D"/>
-                </a:solidFill>
-                <a:latin typeface="Calibri"/>
-              </a:defRPr>
-            </a:pPr>
-            <a:r>
-              <a:t>REG</a:t>
-            </a:r>
-          </a:p>
-        </p:txBody>
-      </p:sp>
-      <p:sp>
-        <p:nvSpPr>
-          <p:cNvPr id="33" name="TextBox 32"/>
-          <p:cNvSpPr txBox="1"/>
-          <p:nvPr/>
-        </p:nvSpPr>
-        <p:spPr>
-          <a:xfrm>
-            <a:off x="3931920" y="2743200"/>
-            <a:ext cx="1097280" cy="411480"/>
-          </a:xfrm>
-          <a:prstGeom prst="rect">
-            <a:avLst/>
-          </a:prstGeom>
-          <a:noFill/>
-        </p:spPr>
-        <p:txBody>
-          <a:bodyPr wrap="square">
-            <a:spAutoFit/>
-          </a:bodyPr>
-          <a:lstStyle/>
-          <a:p>
-            <a:pPr algn="ctr">
-              <a:defRPr sz="1200" b="0">
-                <a:solidFill>
-                  <a:srgbClr val="7F8C8D"/>
-                </a:solidFill>
-                <a:latin typeface="Calibri"/>
-              </a:defRPr>
-            </a:pPr>
-            <a:r>
-              <a:t>41.1</a:t>
-            </a:r>
-          </a:p>
-        </p:txBody>
-      </p:sp>
-      <p:sp>
-        <p:nvSpPr>
-          <p:cNvPr id="34" name="TextBox 33"/>
-          <p:cNvSpPr txBox="1"/>
-          <p:nvPr/>
-        </p:nvSpPr>
-        <p:spPr>
-          <a:xfrm>
-            <a:off x="5029200" y="2743200"/>
-            <a:ext cx="1097280" cy="411480"/>
-          </a:xfrm>
-          <a:prstGeom prst="rect">
-            <a:avLst/>
-          </a:prstGeom>
-          <a:noFill/>
-        </p:spPr>
-        <p:txBody>
-          <a:bodyPr wrap="square">
-            <a:spAutoFit/>
-          </a:bodyPr>
-          <a:lstStyle/>
-          <a:p>
-            <a:pPr algn="ctr">
-              <a:defRPr sz="1200" b="0">
-                <a:solidFill>
-                  <a:srgbClr val="7F8C8D"/>
-                </a:solidFill>
-                <a:latin typeface="Calibri"/>
-              </a:defRPr>
-            </a:pPr>
-            <a:r>
-              <a:t>65.1</a:t>
-            </a:r>
-          </a:p>
-        </p:txBody>
-      </p:sp>
-      <p:sp>
-        <p:nvSpPr>
-          <p:cNvPr id="35" name="TextBox 34"/>
-          <p:cNvSpPr txBox="1"/>
-          <p:nvPr/>
-        </p:nvSpPr>
-        <p:spPr>
-          <a:xfrm>
-            <a:off x="6126480" y="2743200"/>
-            <a:ext cx="1097280" cy="411480"/>
-          </a:xfrm>
-          <a:prstGeom prst="rect">
-            <a:avLst/>
-          </a:prstGeom>
-          <a:noFill/>
-        </p:spPr>
-        <p:txBody>
-          <a:bodyPr wrap="square">
-            <a:spAutoFit/>
-          </a:bodyPr>
-          <a:lstStyle/>
-          <a:p>
-            <a:pPr algn="ctr">
-              <a:defRPr sz="1200" b="0">
-                <a:solidFill>
-                  <a:srgbClr val="7F8C8D"/>
-                </a:solidFill>
-                <a:latin typeface="Calibri"/>
-              </a:defRPr>
-            </a:pPr>
-            <a:r>
-              <a:t>77.9</a:t>
-            </a:r>
-          </a:p>
-        </p:txBody>
-      </p:sp>
-      <p:sp>
-        <p:nvSpPr>
-          <p:cNvPr id="36" name="TextBox 35"/>
-          <p:cNvSpPr txBox="1"/>
-          <p:nvPr/>
-        </p:nvSpPr>
-        <p:spPr>
-          <a:xfrm>
-            <a:off x="7223760" y="2743200"/>
-            <a:ext cx="1371600" cy="411480"/>
-          </a:xfrm>
-          <a:prstGeom prst="rect">
-            <a:avLst/>
-          </a:prstGeom>
-          <a:noFill/>
-        </p:spPr>
-        <p:txBody>
-          <a:bodyPr wrap="square">
-            <a:spAutoFit/>
-          </a:bodyPr>
-          <a:lstStyle/>
-          <a:p>
-            <a:pPr algn="ctr">
-              <a:defRPr sz="1200" b="0">
-                <a:solidFill>
-                  <a:srgbClr val="7F8C8D"/>
-                </a:solidFill>
-                <a:latin typeface="Calibri"/>
-              </a:defRPr>
-            </a:pPr>
-            <a:r>
-              <a:t>61.4</a:t>
-            </a:r>
-          </a:p>
-        </p:txBody>
-      </p:sp>
-      <p:sp>
-        <p:nvSpPr>
-          <p:cNvPr id="37" name="TextBox 36"/>
-          <p:cNvSpPr txBox="1"/>
-          <p:nvPr/>
-        </p:nvSpPr>
-        <p:spPr>
-          <a:xfrm>
-            <a:off x="8595360" y="2743200"/>
-            <a:ext cx="1097280" cy="411480"/>
-          </a:xfrm>
-          <a:prstGeom prst="rect">
-            <a:avLst/>
-          </a:prstGeom>
-          <a:noFill/>
-        </p:spPr>
-        <p:txBody>
-          <a:bodyPr wrap="square">
-            <a:spAutoFit/>
-          </a:bodyPr>
-          <a:lstStyle/>
-          <a:p>
-            <a:pPr algn="ctr">
-              <a:defRPr sz="1200" b="0">
-                <a:solidFill>
-                  <a:srgbClr val="7F8C8D"/>
-                </a:solidFill>
-                <a:latin typeface="Calibri"/>
-              </a:defRPr>
-            </a:pPr>
-            <a:r>
-              <a:t>50.7</a:t>
-            </a:r>
-          </a:p>
-        </p:txBody>
-      </p:sp>
-      <p:sp>
-        <p:nvSpPr>
-          <p:cNvPr id="38" name="TextBox 37"/>
-          <p:cNvSpPr txBox="1"/>
-          <p:nvPr/>
-        </p:nvSpPr>
-        <p:spPr>
-          <a:xfrm>
-            <a:off x="914400" y="3154680"/>
-            <a:ext cx="2286000" cy="411480"/>
-          </a:xfrm>
-          <a:prstGeom prst="rect">
-            <a:avLst/>
-          </a:prstGeom>
-          <a:noFill/>
-        </p:spPr>
-        <p:txBody>
-          <a:bodyPr wrap="square">
-            <a:spAutoFit/>
-          </a:bodyPr>
-          <a:lstStyle/>
-          <a:p>
-            <a:pPr algn="l">
-              <a:defRPr sz="1200" b="1">
-                <a:solidFill>
-                  <a:srgbClr val="D35400"/>
-                </a:solidFill>
-                <a:latin typeface="Calibri"/>
-              </a:defRPr>
-            </a:pPr>
-            <a:r>
-              <a:t>Context-Aware MIL</a:t>
-            </a:r>
-          </a:p>
-        </p:txBody>
-      </p:sp>
-      <p:sp>
-        <p:nvSpPr>
-          <p:cNvPr id="39" name="TextBox 38"/>
-          <p:cNvSpPr txBox="1"/>
-          <p:nvPr/>
-        </p:nvSpPr>
-        <p:spPr>
-          <a:xfrm>
-            <a:off x="3200400" y="3154680"/>
-            <a:ext cx="731520" cy="411480"/>
-          </a:xfrm>
-          <a:prstGeom prst="rect">
-            <a:avLst/>
-          </a:prstGeom>
-          <a:noFill/>
-        </p:spPr>
-        <p:txBody>
-          <a:bodyPr wrap="square">
-            <a:spAutoFit/>
-          </a:bodyPr>
-          <a:lstStyle/>
-          <a:p>
-            <a:pPr algn="ctr">
-              <a:defRPr sz="1200" b="0">
-                <a:solidFill>
-                  <a:srgbClr val="D35400"/>
-                </a:solidFill>
-                <a:latin typeface="Calibri"/>
-              </a:defRPr>
-            </a:pPr>
-            <a:r>
-              <a:t>REG</a:t>
-            </a:r>
-          </a:p>
-        </p:txBody>
-      </p:sp>
-      <p:sp>
-        <p:nvSpPr>
-          <p:cNvPr id="40" name="TextBox 39"/>
-          <p:cNvSpPr txBox="1"/>
-          <p:nvPr/>
-        </p:nvSpPr>
-        <p:spPr>
-          <a:xfrm>
-            <a:off x="3931920" y="3154680"/>
-            <a:ext cx="1097280" cy="411480"/>
-          </a:xfrm>
-          <a:prstGeom prst="rect">
-            <a:avLst/>
-          </a:prstGeom>
-          <a:noFill/>
-        </p:spPr>
-        <p:txBody>
-          <a:bodyPr wrap="square">
-            <a:spAutoFit/>
-          </a:bodyPr>
-          <a:lstStyle/>
-          <a:p>
-            <a:pPr algn="ctr">
-              <a:defRPr sz="1200" b="0">
-                <a:solidFill>
-                  <a:srgbClr val="D35400"/>
-                </a:solidFill>
-                <a:latin typeface="Calibri"/>
-              </a:defRPr>
-            </a:pPr>
-            <a:r>
-              <a:t>47.1</a:t>
-            </a:r>
-          </a:p>
-        </p:txBody>
-      </p:sp>
-      <p:sp>
-        <p:nvSpPr>
-          <p:cNvPr id="41" name="TextBox 40"/>
-          <p:cNvSpPr txBox="1"/>
-          <p:nvPr/>
-        </p:nvSpPr>
-        <p:spPr>
-          <a:xfrm>
-            <a:off x="5029200" y="3154680"/>
-            <a:ext cx="1097280" cy="411480"/>
-          </a:xfrm>
-          <a:prstGeom prst="rect">
-            <a:avLst/>
-          </a:prstGeom>
-          <a:noFill/>
-        </p:spPr>
-        <p:txBody>
-          <a:bodyPr wrap="square">
-            <a:spAutoFit/>
-          </a:bodyPr>
-          <a:lstStyle/>
-          <a:p>
-            <a:pPr algn="ctr">
-              <a:defRPr sz="1200" b="0">
-                <a:solidFill>
-                  <a:srgbClr val="D35400"/>
-                </a:solidFill>
-                <a:latin typeface="Calibri"/>
-              </a:defRPr>
-            </a:pPr>
-            <a:r>
-              <a:t>62.7</a:t>
-            </a:r>
-          </a:p>
-        </p:txBody>
-      </p:sp>
-      <p:sp>
-        <p:nvSpPr>
-          <p:cNvPr id="42" name="TextBox 41"/>
-          <p:cNvSpPr txBox="1"/>
-          <p:nvPr/>
-        </p:nvSpPr>
-        <p:spPr>
-          <a:xfrm>
-            <a:off x="6126480" y="3154680"/>
-            <a:ext cx="1097280" cy="411480"/>
-          </a:xfrm>
-          <a:prstGeom prst="rect">
-            <a:avLst/>
-          </a:prstGeom>
-          <a:noFill/>
-        </p:spPr>
-        <p:txBody>
-          <a:bodyPr wrap="square">
-            <a:spAutoFit/>
-          </a:bodyPr>
-          <a:lstStyle/>
-          <a:p>
-            <a:pPr algn="ctr">
-              <a:defRPr sz="1200" b="0">
-                <a:solidFill>
-                  <a:srgbClr val="D35400"/>
-                </a:solidFill>
-                <a:latin typeface="Calibri"/>
-              </a:defRPr>
-            </a:pPr>
-            <a:r>
-              <a:t>80.1</a:t>
-            </a:r>
-          </a:p>
-        </p:txBody>
-      </p:sp>
-      <p:sp>
-        <p:nvSpPr>
-          <p:cNvPr id="43" name="TextBox 42"/>
-          <p:cNvSpPr txBox="1"/>
-          <p:nvPr/>
-        </p:nvSpPr>
-        <p:spPr>
-          <a:xfrm>
-            <a:off x="7223760" y="3154680"/>
-            <a:ext cx="1371600" cy="411480"/>
-          </a:xfrm>
-          <a:prstGeom prst="rect">
-            <a:avLst/>
-          </a:prstGeom>
-          <a:noFill/>
-        </p:spPr>
-        <p:txBody>
-          <a:bodyPr wrap="square">
-            <a:spAutoFit/>
-          </a:bodyPr>
-          <a:lstStyle/>
-          <a:p>
-            <a:pPr algn="ctr">
-              <a:defRPr sz="1200" b="0">
-                <a:solidFill>
-                  <a:srgbClr val="D35400"/>
-                </a:solidFill>
-                <a:latin typeface="Calibri"/>
-              </a:defRPr>
-            </a:pPr>
-            <a:r>
-              <a:t>63.3</a:t>
-            </a:r>
-          </a:p>
-        </p:txBody>
-      </p:sp>
-      <p:sp>
-        <p:nvSpPr>
-          <p:cNvPr id="44" name="TextBox 43"/>
-          <p:cNvSpPr txBox="1"/>
-          <p:nvPr/>
-        </p:nvSpPr>
-        <p:spPr>
-          <a:xfrm>
-            <a:off x="8595360" y="3154680"/>
-            <a:ext cx="1097280" cy="411480"/>
-          </a:xfrm>
-          <a:prstGeom prst="rect">
-            <a:avLst/>
-          </a:prstGeom>
-          <a:noFill/>
-        </p:spPr>
-        <p:txBody>
-          <a:bodyPr wrap="square">
-            <a:spAutoFit/>
-          </a:bodyPr>
-          <a:lstStyle/>
-          <a:p>
-            <a:pPr algn="ctr">
-              <a:defRPr sz="1200" b="0">
-                <a:solidFill>
-                  <a:srgbClr val="D35400"/>
-                </a:solidFill>
-                <a:latin typeface="Calibri"/>
-              </a:defRPr>
-            </a:pPr>
-            <a:r>
-              <a:t>62.9</a:t>
-            </a:r>
-          </a:p>
-        </p:txBody>
-      </p:sp>
-      <p:sp>
-        <p:nvSpPr>
-          <p:cNvPr id="45" name="TextBox 44"/>
-          <p:cNvSpPr txBox="1"/>
-          <p:nvPr/>
-        </p:nvSpPr>
-        <p:spPr>
-          <a:xfrm>
-            <a:off x="914400" y="3566160"/>
-            <a:ext cx="2286000" cy="411480"/>
-          </a:xfrm>
-          <a:prstGeom prst="rect">
-            <a:avLst/>
-          </a:prstGeom>
-          <a:noFill/>
-        </p:spPr>
-        <p:txBody>
-          <a:bodyPr wrap="square">
-            <a:spAutoFit/>
-          </a:bodyPr>
-          <a:lstStyle/>
-          <a:p>
-            <a:pPr algn="l">
-              <a:defRPr sz="1200" b="1">
-                <a:solidFill>
-                  <a:srgbClr val="27AE60"/>
-                </a:solidFill>
-                <a:latin typeface="Calibri"/>
-              </a:defRPr>
-            </a:pPr>
-            <a:r>
-              <a:t>Bipartite GIN (ours)</a:t>
-            </a:r>
-          </a:p>
-        </p:txBody>
-      </p:sp>
-      <p:sp>
-        <p:nvSpPr>
-          <p:cNvPr id="46" name="TextBox 45"/>
-          <p:cNvSpPr txBox="1"/>
-          <p:nvPr/>
-        </p:nvSpPr>
-        <p:spPr>
-          <a:xfrm>
-            <a:off x="3200400" y="3566160"/>
-            <a:ext cx="731520" cy="411480"/>
-          </a:xfrm>
-          <a:prstGeom prst="rect">
-            <a:avLst/>
-          </a:prstGeom>
-          <a:noFill/>
-        </p:spPr>
-        <p:txBody>
-          <a:bodyPr wrap="square">
-            <a:spAutoFit/>
-          </a:bodyPr>
-          <a:lstStyle/>
-          <a:p>
-            <a:pPr algn="ctr">
-              <a:defRPr sz="1200" b="1">
-                <a:solidFill>
-                  <a:srgbClr val="27AE60"/>
-                </a:solidFill>
-                <a:latin typeface="Calibri"/>
-              </a:defRPr>
-            </a:pPr>
-            <a:r>
-              <a:t>REG</a:t>
-            </a:r>
-          </a:p>
-        </p:txBody>
-      </p:sp>
-      <p:sp>
-        <p:nvSpPr>
-          <p:cNvPr id="47" name="TextBox 46"/>
-          <p:cNvSpPr txBox="1"/>
-          <p:nvPr/>
-        </p:nvSpPr>
-        <p:spPr>
-          <a:xfrm>
-            <a:off x="3931920" y="3566160"/>
-            <a:ext cx="1097280" cy="411480"/>
-          </a:xfrm>
-          <a:prstGeom prst="rect">
-            <a:avLst/>
-          </a:prstGeom>
-          <a:noFill/>
-        </p:spPr>
-        <p:txBody>
-          <a:bodyPr wrap="square">
-            <a:spAutoFit/>
-          </a:bodyPr>
-          <a:lstStyle/>
-          <a:p>
-            <a:pPr algn="ctr">
-              <a:defRPr sz="1200" b="1">
-                <a:solidFill>
-                  <a:srgbClr val="27AE60"/>
-                </a:solidFill>
-                <a:latin typeface="Calibri"/>
-              </a:defRPr>
-            </a:pPr>
-            <a:r>
-              <a:t>61.0</a:t>
-            </a:r>
-          </a:p>
-        </p:txBody>
-      </p:sp>
-      <p:sp>
-        <p:nvSpPr>
-          <p:cNvPr id="48" name="TextBox 47"/>
-          <p:cNvSpPr txBox="1"/>
-          <p:nvPr/>
-        </p:nvSpPr>
-        <p:spPr>
-          <a:xfrm>
-            <a:off x="5029200" y="3566160"/>
-            <a:ext cx="1097280" cy="411480"/>
-          </a:xfrm>
-          <a:prstGeom prst="rect">
-            <a:avLst/>
-          </a:prstGeom>
-          <a:noFill/>
-        </p:spPr>
-        <p:txBody>
-          <a:bodyPr wrap="square">
-            <a:spAutoFit/>
-          </a:bodyPr>
-          <a:lstStyle/>
-          <a:p>
-            <a:pPr algn="ctr">
-              <a:defRPr sz="1200" b="1">
-                <a:solidFill>
-                  <a:srgbClr val="27AE60"/>
-                </a:solidFill>
-                <a:latin typeface="Calibri"/>
-              </a:defRPr>
-            </a:pPr>
-            <a:r>
-              <a:t>67.0</a:t>
-            </a:r>
-          </a:p>
-        </p:txBody>
-      </p:sp>
-      <p:sp>
-        <p:nvSpPr>
-          <p:cNvPr id="49" name="TextBox 48"/>
-          <p:cNvSpPr txBox="1"/>
-          <p:nvPr/>
-        </p:nvSpPr>
-        <p:spPr>
-          <a:xfrm>
-            <a:off x="6126480" y="3566160"/>
-            <a:ext cx="1097280" cy="411480"/>
-          </a:xfrm>
-          <a:prstGeom prst="rect">
-            <a:avLst/>
-          </a:prstGeom>
-          <a:noFill/>
-        </p:spPr>
-        <p:txBody>
-          <a:bodyPr wrap="square">
-            <a:spAutoFit/>
-          </a:bodyPr>
-          <a:lstStyle/>
-          <a:p>
-            <a:pPr algn="ctr">
-              <a:defRPr sz="1200" b="1">
-                <a:solidFill>
-                  <a:srgbClr val="27AE60"/>
-                </a:solidFill>
-                <a:latin typeface="Calibri"/>
-              </a:defRPr>
-            </a:pPr>
-            <a:r>
-              <a:t>84.2</a:t>
-            </a:r>
-          </a:p>
-        </p:txBody>
-      </p:sp>
-      <p:sp>
-        <p:nvSpPr>
-          <p:cNvPr id="50" name="TextBox 49"/>
-          <p:cNvSpPr txBox="1"/>
-          <p:nvPr/>
-        </p:nvSpPr>
-        <p:spPr>
-          <a:xfrm>
-            <a:off x="7223760" y="3566160"/>
-            <a:ext cx="1371600" cy="411480"/>
-          </a:xfrm>
-          <a:prstGeom prst="rect">
-            <a:avLst/>
-          </a:prstGeom>
-          <a:noFill/>
-        </p:spPr>
-        <p:txBody>
-          <a:bodyPr wrap="square">
-            <a:spAutoFit/>
-          </a:bodyPr>
-          <a:lstStyle/>
-          <a:p>
-            <a:pPr algn="ctr">
-              <a:defRPr sz="1200" b="1">
-                <a:solidFill>
-                  <a:srgbClr val="27AE60"/>
-                </a:solidFill>
-                <a:latin typeface="Calibri"/>
-              </a:defRPr>
-            </a:pPr>
-            <a:r>
-              <a:t>70.7</a:t>
-            </a:r>
-          </a:p>
-        </p:txBody>
-      </p:sp>
-      <p:sp>
-        <p:nvSpPr>
-          <p:cNvPr id="51" name="TextBox 50"/>
-          <p:cNvSpPr txBox="1"/>
-          <p:nvPr/>
-        </p:nvSpPr>
-        <p:spPr>
-          <a:xfrm>
-            <a:off x="8595360" y="3566160"/>
-            <a:ext cx="1097280" cy="411480"/>
-          </a:xfrm>
-          <a:prstGeom prst="rect">
-            <a:avLst/>
-          </a:prstGeom>
-          <a:noFill/>
-        </p:spPr>
-        <p:txBody>
-          <a:bodyPr wrap="square">
-            <a:spAutoFit/>
-          </a:bodyPr>
-          <a:lstStyle/>
-          <a:p>
-            <a:pPr algn="ctr">
-              <a:defRPr sz="1200" b="1">
-                <a:solidFill>
-                  <a:srgbClr val="27AE60"/>
-                </a:solidFill>
-                <a:latin typeface="Calibri"/>
-              </a:defRPr>
-            </a:pPr>
-            <a:r>
-              <a:t>69.1</a:t>
-            </a:r>
-          </a:p>
-        </p:txBody>
-      </p:sp>
-      <p:sp>
-        <p:nvSpPr>
-          <p:cNvPr id="52" name="TextBox 51"/>
-          <p:cNvSpPr txBox="1"/>
-          <p:nvPr/>
-        </p:nvSpPr>
-        <p:spPr>
-          <a:xfrm>
-            <a:off x="457200" y="4114800"/>
-            <a:ext cx="10972800" cy="457200"/>
-          </a:xfrm>
-          <a:prstGeom prst="rect">
-            <a:avLst/>
-          </a:prstGeom>
-          <a:noFill/>
-        </p:spPr>
-        <p:txBody>
-          <a:bodyPr wrap="square">
-            <a:spAutoFit/>
-          </a:bodyPr>
-          <a:lstStyle/>
-          <a:p>
-            <a:pPr algn="l">
-              <a:defRPr sz="2000" b="1">
-                <a:solidFill>
-                  <a:srgbClr val="1A1A1A"/>
-                </a:solidFill>
-                <a:latin typeface="Calibri"/>
-              </a:defRPr>
-            </a:pPr>
-            <a:r>
-              <a:t>Key Ablation Findings</a:t>
-            </a:r>
-          </a:p>
-        </p:txBody>
-      </p:sp>
-      <p:sp>
-        <p:nvSpPr>
-          <p:cNvPr id="53" name="TextBox 52"/>
-          <p:cNvSpPr txBox="1"/>
-          <p:nvPr/>
-        </p:nvSpPr>
-        <p:spPr>
-          <a:xfrm>
-            <a:off x="731520" y="4572000"/>
-            <a:ext cx="3200400" cy="365760"/>
-          </a:xfrm>
-          <a:prstGeom prst="rect">
-            <a:avLst/>
-          </a:prstGeom>
-          <a:noFill/>
-        </p:spPr>
-        <p:txBody>
-          <a:bodyPr wrap="square">
-            <a:spAutoFit/>
-          </a:bodyPr>
-          <a:lstStyle/>
-          <a:p>
-            <a:pPr algn="l">
-              <a:defRPr sz="1300" b="1">
-                <a:solidFill>
-                  <a:srgbClr val="27AE60"/>
-                </a:solidFill>
-                <a:latin typeface="Calibri"/>
-              </a:defRPr>
-            </a:pPr>
-            <a:r>
-              <a:t>Bipartite &gt; Full Graph</a:t>
-            </a:r>
-          </a:p>
-        </p:txBody>
-      </p:sp>
-      <p:sp>
-        <p:nvSpPr>
-          <p:cNvPr id="54" name="TextBox 53"/>
-          <p:cNvSpPr txBox="1"/>
-          <p:nvPr/>
-        </p:nvSpPr>
-        <p:spPr>
-          <a:xfrm>
-            <a:off x="4114800" y="4572000"/>
-            <a:ext cx="7315200" cy="365760"/>
-          </a:xfrm>
-          <a:prstGeom prst="rect">
-            <a:avLst/>
-          </a:prstGeom>
-          <a:noFill/>
-        </p:spPr>
-        <p:txBody>
-          <a:bodyPr wrap="square">
-            <a:spAutoFit/>
-          </a:bodyPr>
-          <a:lstStyle/>
-          <a:p>
-            <a:pPr algn="l">
-              <a:defRPr sz="1200" b="0">
-                <a:solidFill>
-                  <a:srgbClr val="555566"/>
-                </a:solidFill>
-                <a:latin typeface="Calibri"/>
-              </a:defRPr>
-            </a:pPr>
-            <a:r>
-              <a:t>T↔S only edges outperform all-edges graphs at every radius</a:t>
-            </a:r>
-          </a:p>
-        </p:txBody>
-      </p:sp>
-      <p:sp>
-        <p:nvSpPr>
-          <p:cNvPr id="55" name="TextBox 54"/>
-          <p:cNvSpPr txBox="1"/>
-          <p:nvPr/>
-        </p:nvSpPr>
-        <p:spPr>
-          <a:xfrm>
-            <a:off x="731520" y="5029200"/>
-            <a:ext cx="3200400" cy="365760"/>
-          </a:xfrm>
-          <a:prstGeom prst="rect">
-            <a:avLst/>
-          </a:prstGeom>
-          <a:noFill/>
-        </p:spPr>
-        <p:txBody>
-          <a:bodyPr wrap="square">
-            <a:spAutoFit/>
-          </a:bodyPr>
-          <a:lstStyle/>
-          <a:p>
-            <a:pPr algn="l">
-              <a:defRPr sz="1300" b="1">
-                <a:solidFill>
-                  <a:srgbClr val="27AE60"/>
-                </a:solidFill>
-                <a:latin typeface="Calibri"/>
-              </a:defRPr>
-            </a:pPr>
-            <a:r>
-              <a:t>Regression &gt; Classification</a:t>
-            </a:r>
-          </a:p>
-        </p:txBody>
-      </p:sp>
-      <p:sp>
-        <p:nvSpPr>
-          <p:cNvPr id="56" name="TextBox 55"/>
-          <p:cNvSpPr txBox="1"/>
-          <p:nvPr/>
-        </p:nvSpPr>
-        <p:spPr>
-          <a:xfrm>
-            <a:off x="4114800" y="5029200"/>
-            <a:ext cx="7315200" cy="365760"/>
-          </a:xfrm>
-          <a:prstGeom prst="rect">
-            <a:avLst/>
-          </a:prstGeom>
-          <a:noFill/>
-        </p:spPr>
-        <p:txBody>
-          <a:bodyPr wrap="square">
-            <a:spAutoFit/>
-          </a:bodyPr>
-          <a:lstStyle/>
-          <a:p>
-            <a:pPr algn="l">
-              <a:defRPr sz="1200" b="0">
-                <a:solidFill>
-                  <a:srgbClr val="555566"/>
-                </a:solidFill>
-                <a:latin typeface="Calibri"/>
-              </a:defRPr>
-            </a:pPr>
-            <a:r>
-              <a:t>Huber loss &gt;&gt; cross-entropy for ordinal grading</a:t>
-            </a:r>
-          </a:p>
-        </p:txBody>
-      </p:sp>
-      <p:sp>
-        <p:nvSpPr>
-          <p:cNvPr id="57" name="TextBox 56"/>
-          <p:cNvSpPr txBox="1"/>
-          <p:nvPr/>
-        </p:nvSpPr>
-        <p:spPr>
-          <a:xfrm>
-            <a:off x="731520" y="5486400"/>
-            <a:ext cx="3200400" cy="365760"/>
-          </a:xfrm>
-          <a:prstGeom prst="rect">
-            <a:avLst/>
-          </a:prstGeom>
-          <a:noFill/>
-        </p:spPr>
-        <p:txBody>
-          <a:bodyPr wrap="square">
-            <a:spAutoFit/>
-          </a:bodyPr>
-          <a:lstStyle/>
-          <a:p>
-            <a:pPr algn="l">
-              <a:defRPr sz="1300" b="1">
-                <a:solidFill>
-                  <a:srgbClr val="D35400"/>
-                </a:solidFill>
-                <a:latin typeface="Calibri"/>
-              </a:defRPr>
-            </a:pPr>
-            <a:r>
-              <a:t>1 layer &gt; 2-3 layers</a:t>
-            </a:r>
-          </a:p>
-        </p:txBody>
-      </p:sp>
-      <p:sp>
-        <p:nvSpPr>
-          <p:cNvPr id="58" name="TextBox 57"/>
-          <p:cNvSpPr txBox="1"/>
-          <p:nvPr/>
-        </p:nvSpPr>
-        <p:spPr>
-          <a:xfrm>
-            <a:off x="4114800" y="5486400"/>
-            <a:ext cx="7315200" cy="365760"/>
-          </a:xfrm>
-          <a:prstGeom prst="rect">
-            <a:avLst/>
-          </a:prstGeom>
-          <a:noFill/>
-        </p:spPr>
-        <p:txBody>
-          <a:bodyPr wrap="square">
-            <a:spAutoFit/>
-          </a:bodyPr>
-          <a:lstStyle/>
-          <a:p>
-            <a:pPr algn="l">
-              <a:defRPr sz="1200" b="0">
-                <a:solidFill>
-                  <a:srgbClr val="555566"/>
-                </a:solidFill>
-                <a:latin typeface="Calibri"/>
-              </a:defRPr>
-            </a:pPr>
-            <a:r>
-              <a:t>Deeper GNNs over-smooth at larger radii</a:t>
-            </a:r>
-          </a:p>
-        </p:txBody>
-      </p:sp>
-      <p:sp>
-        <p:nvSpPr>
-          <p:cNvPr id="59" name="TextBox 58"/>
-          <p:cNvSpPr txBox="1"/>
-          <p:nvPr/>
-        </p:nvSpPr>
-        <p:spPr>
-          <a:xfrm>
-            <a:off x="731520" y="5943600"/>
-            <a:ext cx="3200400" cy="365760"/>
-          </a:xfrm>
-          <a:prstGeom prst="rect">
-            <a:avLst/>
-          </a:prstGeom>
-          <a:noFill/>
-        </p:spPr>
-        <p:txBody>
-          <a:bodyPr wrap="square">
-            <a:spAutoFit/>
-          </a:bodyPr>
-          <a:lstStyle/>
-          <a:p>
-            <a:pPr algn="l">
-              <a:defRPr sz="1300" b="1">
-                <a:solidFill>
-                  <a:srgbClr val="27AE60"/>
-                </a:solidFill>
-                <a:latin typeface="Calibri"/>
-              </a:defRPr>
-            </a:pPr>
-            <a:r>
-              <a:t>r=3 &gt; r=2 &gt; r=1</a:t>
-            </a:r>
-          </a:p>
-        </p:txBody>
-      </p:sp>
-      <p:sp>
-        <p:nvSpPr>
-          <p:cNvPr id="60" name="TextBox 59"/>
-          <p:cNvSpPr txBox="1"/>
-          <p:nvPr/>
-        </p:nvSpPr>
-        <p:spPr>
-          <a:xfrm>
-            <a:off x="4114800" y="5943600"/>
-            <a:ext cx="7315200" cy="365760"/>
-          </a:xfrm>
-          <a:prstGeom prst="rect">
-            <a:avLst/>
-          </a:prstGeom>
-          <a:noFill/>
-        </p:spPr>
-        <p:txBody>
-          <a:bodyPr wrap="square">
-            <a:spAutoFit/>
-          </a:bodyPr>
-          <a:lstStyle/>
-          <a:p>
-            <a:pPr algn="l">
-              <a:defRPr sz="1200" b="0">
-                <a:solidFill>
-                  <a:srgbClr val="555566"/>
-                </a:solidFill>
-                <a:latin typeface="Calibri"/>
-              </a:defRPr>
-            </a:pPr>
-            <a:r>
-              <a:t>More spatial context consistently helps</a:t>
-            </a:r>
-          </a:p>
-        </p:txBody>
-      </p:sp>
-      <p:sp>
-        <p:nvSpPr>
-          <p:cNvPr id="61" name="TextBox 60"/>
-          <p:cNvSpPr txBox="1"/>
-          <p:nvPr/>
-        </p:nvSpPr>
-        <p:spPr>
-          <a:xfrm>
-            <a:off x="731520" y="6400800"/>
-            <a:ext cx="3200400" cy="365760"/>
-          </a:xfrm>
-          <a:prstGeom prst="rect">
-            <a:avLst/>
-          </a:prstGeom>
-          <a:noFill/>
-        </p:spPr>
-        <p:txBody>
-          <a:bodyPr wrap="square">
-            <a:spAutoFit/>
-          </a:bodyPr>
-          <a:lstStyle/>
-          <a:p>
-            <a:pPr algn="l">
-              <a:defRPr sz="1300" b="1">
-                <a:solidFill>
-                  <a:srgbClr val="7F8C8D"/>
-                </a:solidFill>
-                <a:latin typeface="Calibri"/>
-              </a:defRPr>
-            </a:pPr>
-            <a:r>
-              <a:t>GIN ≈ GATv2</a:t>
-            </a:r>
-          </a:p>
-        </p:txBody>
-      </p:sp>
-      <p:sp>
-        <p:nvSpPr>
-          <p:cNvPr id="62" name="TextBox 61"/>
-          <p:cNvSpPr txBox="1"/>
-          <p:nvPr/>
-        </p:nvSpPr>
-        <p:spPr>
-          <a:xfrm>
-            <a:off x="4114800" y="6400800"/>
-            <a:ext cx="7315200" cy="365760"/>
-          </a:xfrm>
-          <a:prstGeom prst="rect">
-            <a:avLst/>
-          </a:prstGeom>
-          <a:noFill/>
-        </p:spPr>
-        <p:txBody>
-          <a:bodyPr wrap="square">
-            <a:spAutoFit/>
-          </a:bodyPr>
-          <a:lstStyle/>
-          <a:p>
-            <a:pPr algn="l">
-              <a:defRPr sz="1200" b="0">
-                <a:solidFill>
-                  <a:srgbClr val="555566"/>
-                </a:solidFill>
-                <a:latin typeface="Calibri"/>
-              </a:defRPr>
-            </a:pPr>
-            <a:r>
-              <a:t>Sum aggregation matches attention; simpler is better</a:t>
+              <a:rPr dirty="0"/>
+              <a:t>cell composition relative to the target</a:t>
             </a:r>
           </a:p>
         </p:txBody>
       </p:sp>
     </p:spTree>
+    <p:extLst>
+      <p:ext uri="{BB962C8B-B14F-4D97-AF65-F5344CB8AC3E}">
+        <p14:creationId xmlns:p14="http://schemas.microsoft.com/office/powerpoint/2010/main" val="2412493766"/>
+      </p:ext>
+    </p:extLst>
   </p:cSld>
   <p:clrMapOvr>
     <a:masterClrMapping/>
@@ -7411,14 +5915,6 @@
 <file path=ppt/slides/slide12.xml><?xml version="1.0" encoding="utf-8"?>
 <p:sld xmlns:a="http://schemas.openxmlformats.org/drawingml/2006/main" xmlns:r="http://schemas.openxmlformats.org/officeDocument/2006/relationships" xmlns:p="http://schemas.openxmlformats.org/presentationml/2006/main">
   <p:cSld>
-    <p:bg>
-      <p:bgPr>
-        <a:solidFill>
-          <a:srgbClr val="FFFFFF"/>
-        </a:solidFill>
-        <a:effectLst/>
-      </p:bgPr>
-    </p:bg>
     <p:spTree>
       <p:nvGrpSpPr>
         <p:cNvPr id="1" name=""/>
@@ -7435,13 +5931,19 @@
       </p:grpSpPr>
       <p:sp>
         <p:nvSpPr>
-          <p:cNvPr id="2" name="TextBox 1"/>
+          <p:cNvPr id="2" name="TextBox 1">
+            <a:extLst>
+              <a:ext uri="{FF2B5EF4-FFF2-40B4-BE49-F238E27FC236}">
+                <a16:creationId xmlns:a16="http://schemas.microsoft.com/office/drawing/2014/main" id="{37C892F7-03CE-BD69-2C77-316290DC30EB}"/>
+              </a:ext>
+            </a:extLst>
+          </p:cNvPr>
           <p:cNvSpPr txBox="1"/>
           <p:nvPr/>
         </p:nvSpPr>
         <p:spPr>
           <a:xfrm>
-            <a:off x="457200" y="274320"/>
+            <a:off x="548640" y="365760"/>
             <a:ext cx="10972800" cy="548640"/>
           </a:xfrm>
           <a:prstGeom prst="rect">
@@ -7464,1268 +5966,825 @@
               </a:defRPr>
             </a:pPr>
             <a:r>
-              <a:t>Patient-Level IPS Prediction Pipeline</a:t>
-            </a:r>
-          </a:p>
-        </p:txBody>
-      </p:sp>
-      <p:sp>
-        <p:nvSpPr>
-          <p:cNvPr id="3" name="Rounded Rectangle 2"/>
-          <p:cNvSpPr/>
-          <p:nvPr/>
-        </p:nvSpPr>
-        <p:spPr>
-          <a:xfrm>
-            <a:off x="457200" y="1371600"/>
-            <a:ext cx="1828800" cy="914400"/>
-          </a:xfrm>
-          <a:prstGeom prst="roundRect">
-            <a:avLst/>
-          </a:prstGeom>
-          <a:solidFill>
-            <a:srgbClr val="F0F0F5"/>
-          </a:solidFill>
-          <a:ln w="25400">
-            <a:solidFill>
-              <a:srgbClr val="BBBBCC"/>
-            </a:solidFill>
-          </a:ln>
-        </p:spPr>
-        <p:style>
-          <a:lnRef idx="1">
-            <a:schemeClr val="accent1"/>
-          </a:lnRef>
-          <a:fillRef idx="3">
-            <a:schemeClr val="accent1"/>
-          </a:fillRef>
-          <a:effectRef idx="2">
-            <a:schemeClr val="accent1"/>
-          </a:effectRef>
-          <a:fontRef idx="minor">
-            <a:schemeClr val="lt1"/>
-          </a:fontRef>
-        </p:style>
-        <p:txBody>
-          <a:bodyPr rtlCol="0" anchor="ctr"/>
-          <a:lstStyle/>
-          <a:p>
-            <a:pPr algn="ctr">
-              <a:defRPr sz="1400" b="1">
-                <a:solidFill>
-                  <a:srgbClr val="2980B9"/>
-                </a:solidFill>
-              </a:defRPr>
-            </a:pPr>
-            <a:r>
-              <a:t>Slide 1</a:t>
-            </a:r>
-          </a:p>
-        </p:txBody>
-      </p:sp>
-      <p:sp>
-        <p:nvSpPr>
-          <p:cNvPr id="4" name="Right Arrow 3"/>
-          <p:cNvSpPr/>
-          <p:nvPr/>
-        </p:nvSpPr>
-        <p:spPr>
-          <a:xfrm>
-            <a:off x="2377440" y="1645920"/>
-            <a:ext cx="457200" cy="274320"/>
-          </a:xfrm>
-          <a:prstGeom prst="rightArrow">
-            <a:avLst/>
-          </a:prstGeom>
-          <a:solidFill>
-            <a:srgbClr val="7F8C8D"/>
-          </a:solidFill>
-          <a:ln>
-            <a:noFill/>
-          </a:ln>
-        </p:spPr>
-        <p:style>
-          <a:lnRef idx="1">
-            <a:schemeClr val="accent1"/>
-          </a:lnRef>
-          <a:fillRef idx="3">
-            <a:schemeClr val="accent1"/>
-          </a:fillRef>
-          <a:effectRef idx="2">
-            <a:schemeClr val="accent1"/>
-          </a:effectRef>
-          <a:fontRef idx="minor">
-            <a:schemeClr val="lt1"/>
-          </a:fontRef>
-        </p:style>
-        <p:txBody>
-          <a:bodyPr rtlCol="0" anchor="ctr"/>
-          <a:lstStyle/>
-          <a:p>
-            <a:pPr algn="ctr"/>
-            <a:endParaRPr/>
-          </a:p>
-        </p:txBody>
-      </p:sp>
-      <p:sp>
-        <p:nvSpPr>
-          <p:cNvPr id="5" name="Rounded Rectangle 4"/>
-          <p:cNvSpPr/>
-          <p:nvPr/>
-        </p:nvSpPr>
-        <p:spPr>
-          <a:xfrm>
-            <a:off x="3017520" y="1371600"/>
-            <a:ext cx="1645920" cy="914400"/>
-          </a:xfrm>
-          <a:prstGeom prst="roundRect">
-            <a:avLst/>
-          </a:prstGeom>
-          <a:solidFill>
-            <a:srgbClr val="F0F0F5"/>
-          </a:solidFill>
-          <a:ln w="25400">
-            <a:solidFill>
-              <a:srgbClr val="BBBBCC"/>
-            </a:solidFill>
-          </a:ln>
-        </p:spPr>
-        <p:style>
-          <a:lnRef idx="1">
-            <a:schemeClr val="accent1"/>
-          </a:lnRef>
-          <a:fillRef idx="3">
-            <a:schemeClr val="accent1"/>
-          </a:fillRef>
-          <a:effectRef idx="2">
-            <a:schemeClr val="accent1"/>
-          </a:effectRef>
-          <a:fontRef idx="minor">
-            <a:schemeClr val="lt1"/>
-          </a:fontRef>
-        </p:style>
-        <p:txBody>
-          <a:bodyPr rtlCol="0" anchor="ctr"/>
-          <a:lstStyle/>
-          <a:p>
-            <a:pPr algn="ctr">
-              <a:defRPr sz="1200" b="1">
-                <a:solidFill>
-                  <a:srgbClr val="27AE60"/>
-                </a:solidFill>
-              </a:defRPr>
-            </a:pPr>
-            <a:r>
-              <a:t>Bipartite</a:t>
-            </a:r>
-            <a:br/>
-            <a:r>
-              <a:t>Graph</a:t>
-            </a:r>
-          </a:p>
-        </p:txBody>
-      </p:sp>
-      <p:sp>
-        <p:nvSpPr>
-          <p:cNvPr id="6" name="Right Arrow 5"/>
-          <p:cNvSpPr/>
-          <p:nvPr/>
-        </p:nvSpPr>
-        <p:spPr>
-          <a:xfrm>
-            <a:off x="4846320" y="1645920"/>
-            <a:ext cx="457200" cy="274320"/>
-          </a:xfrm>
-          <a:prstGeom prst="rightArrow">
-            <a:avLst/>
-          </a:prstGeom>
-          <a:solidFill>
-            <a:srgbClr val="7F8C8D"/>
-          </a:solidFill>
-          <a:ln>
-            <a:noFill/>
-          </a:ln>
-        </p:spPr>
-        <p:style>
-          <a:lnRef idx="1">
-            <a:schemeClr val="accent1"/>
-          </a:lnRef>
-          <a:fillRef idx="3">
-            <a:schemeClr val="accent1"/>
-          </a:fillRef>
-          <a:effectRef idx="2">
-            <a:schemeClr val="accent1"/>
-          </a:effectRef>
-          <a:fontRef idx="minor">
-            <a:schemeClr val="lt1"/>
-          </a:fontRef>
-        </p:style>
-        <p:txBody>
-          <a:bodyPr rtlCol="0" anchor="ctr"/>
-          <a:lstStyle/>
-          <a:p>
-            <a:pPr algn="ctr"/>
-            <a:endParaRPr/>
-          </a:p>
-        </p:txBody>
-      </p:sp>
-      <p:sp>
-        <p:nvSpPr>
-          <p:cNvPr id="7" name="Rounded Rectangle 6"/>
-          <p:cNvSpPr/>
-          <p:nvPr/>
-        </p:nvSpPr>
-        <p:spPr>
-          <a:xfrm>
-            <a:off x="5486400" y="1371600"/>
-            <a:ext cx="1371600" cy="914400"/>
-          </a:xfrm>
-          <a:prstGeom prst="roundRect">
-            <a:avLst/>
-          </a:prstGeom>
-          <a:solidFill>
-            <a:srgbClr val="F0F0F5"/>
-          </a:solidFill>
-          <a:ln w="25400">
-            <a:solidFill>
-              <a:srgbClr val="BBBBCC"/>
-            </a:solidFill>
-          </a:ln>
-        </p:spPr>
-        <p:style>
-          <a:lnRef idx="1">
-            <a:schemeClr val="accent1"/>
-          </a:lnRef>
-          <a:fillRef idx="3">
-            <a:schemeClr val="accent1"/>
-          </a:fillRef>
-          <a:effectRef idx="2">
-            <a:schemeClr val="accent1"/>
-          </a:effectRef>
-          <a:fontRef idx="minor">
-            <a:schemeClr val="lt1"/>
-          </a:fontRef>
-        </p:style>
-        <p:txBody>
-          <a:bodyPr rtlCol="0" anchor="ctr"/>
-          <a:lstStyle/>
-          <a:p>
-            <a:pPr algn="ctr">
-              <a:defRPr sz="1200" b="1">
-                <a:solidFill>
-                  <a:srgbClr val="C0392B"/>
-                </a:solidFill>
-              </a:defRPr>
-            </a:pPr>
-            <a:r>
-              <a:t>GIN</a:t>
-            </a:r>
-            <a:br/>
-            <a:r>
-              <a:t>Model</a:t>
-            </a:r>
-          </a:p>
-        </p:txBody>
-      </p:sp>
-      <p:sp>
-        <p:nvSpPr>
-          <p:cNvPr id="8" name="Right Arrow 7"/>
-          <p:cNvSpPr/>
-          <p:nvPr/>
-        </p:nvSpPr>
-        <p:spPr>
-          <a:xfrm>
-            <a:off x="7040880" y="1645920"/>
-            <a:ext cx="457200" cy="274320"/>
-          </a:xfrm>
-          <a:prstGeom prst="rightArrow">
-            <a:avLst/>
-          </a:prstGeom>
-          <a:solidFill>
-            <a:srgbClr val="7F8C8D"/>
-          </a:solidFill>
-          <a:ln>
-            <a:noFill/>
-          </a:ln>
-        </p:spPr>
-        <p:style>
-          <a:lnRef idx="1">
-            <a:schemeClr val="accent1"/>
-          </a:lnRef>
-          <a:fillRef idx="3">
-            <a:schemeClr val="accent1"/>
-          </a:fillRef>
-          <a:effectRef idx="2">
-            <a:schemeClr val="accent1"/>
-          </a:effectRef>
-          <a:fontRef idx="minor">
-            <a:schemeClr val="lt1"/>
-          </a:fontRef>
-        </p:style>
-        <p:txBody>
-          <a:bodyPr rtlCol="0" anchor="ctr"/>
-          <a:lstStyle/>
-          <a:p>
-            <a:pPr algn="ctr"/>
-            <a:endParaRPr/>
-          </a:p>
-        </p:txBody>
-      </p:sp>
-      <p:sp>
-        <p:nvSpPr>
-          <p:cNvPr id="9" name="Rounded Rectangle 8"/>
-          <p:cNvSpPr/>
-          <p:nvPr/>
-        </p:nvSpPr>
-        <p:spPr>
-          <a:xfrm>
-            <a:off x="7680960" y="1371600"/>
-            <a:ext cx="1371600" cy="914400"/>
-          </a:xfrm>
-          <a:prstGeom prst="roundRect">
-            <a:avLst/>
-          </a:prstGeom>
-          <a:solidFill>
-            <a:srgbClr val="F0F0F5"/>
-          </a:solidFill>
-          <a:ln w="25400">
-            <a:solidFill>
-              <a:srgbClr val="BBBBCC"/>
-            </a:solidFill>
-          </a:ln>
-        </p:spPr>
-        <p:style>
-          <a:lnRef idx="1">
-            <a:schemeClr val="accent1"/>
-          </a:lnRef>
-          <a:fillRef idx="3">
-            <a:schemeClr val="accent1"/>
-          </a:fillRef>
-          <a:effectRef idx="2">
-            <a:schemeClr val="accent1"/>
-          </a:effectRef>
-          <a:fontRef idx="minor">
-            <a:schemeClr val="lt1"/>
-          </a:fontRef>
-        </p:style>
-        <p:txBody>
-          <a:bodyPr rtlCol="0" anchor="ctr"/>
-          <a:lstStyle/>
-          <a:p>
-            <a:pPr algn="ctr">
-              <a:defRPr sz="1600" b="1">
-                <a:solidFill>
-                  <a:srgbClr val="D35400"/>
-                </a:solidFill>
-              </a:defRPr>
-            </a:pPr>
-            <a:r>
-              <a:t>Grade: 4</a:t>
-            </a:r>
-          </a:p>
-        </p:txBody>
-      </p:sp>
-      <p:sp>
-        <p:nvSpPr>
-          <p:cNvPr id="10" name="Rounded Rectangle 9"/>
-          <p:cNvSpPr/>
-          <p:nvPr/>
-        </p:nvSpPr>
-        <p:spPr>
-          <a:xfrm>
-            <a:off x="457200" y="2743200"/>
-            <a:ext cx="1828800" cy="914400"/>
-          </a:xfrm>
-          <a:prstGeom prst="roundRect">
-            <a:avLst/>
-          </a:prstGeom>
-          <a:solidFill>
-            <a:srgbClr val="F0F0F5"/>
-          </a:solidFill>
-          <a:ln w="25400">
-            <a:solidFill>
-              <a:srgbClr val="BBBBCC"/>
-            </a:solidFill>
-          </a:ln>
-        </p:spPr>
-        <p:style>
-          <a:lnRef idx="1">
-            <a:schemeClr val="accent1"/>
-          </a:lnRef>
-          <a:fillRef idx="3">
-            <a:schemeClr val="accent1"/>
-          </a:fillRef>
-          <a:effectRef idx="2">
-            <a:schemeClr val="accent1"/>
-          </a:effectRef>
-          <a:fontRef idx="minor">
-            <a:schemeClr val="lt1"/>
-          </a:fontRef>
-        </p:style>
-        <p:txBody>
-          <a:bodyPr rtlCol="0" anchor="ctr"/>
-          <a:lstStyle/>
-          <a:p>
-            <a:pPr algn="ctr">
-              <a:defRPr sz="1400" b="1">
-                <a:solidFill>
-                  <a:srgbClr val="2980B9"/>
-                </a:solidFill>
-              </a:defRPr>
-            </a:pPr>
-            <a:r>
-              <a:t>Slide 2</a:t>
-            </a:r>
-          </a:p>
-        </p:txBody>
-      </p:sp>
-      <p:sp>
-        <p:nvSpPr>
-          <p:cNvPr id="11" name="Right Arrow 10"/>
-          <p:cNvSpPr/>
-          <p:nvPr/>
-        </p:nvSpPr>
-        <p:spPr>
-          <a:xfrm>
-            <a:off x="2377440" y="3017520"/>
-            <a:ext cx="457200" cy="274320"/>
-          </a:xfrm>
-          <a:prstGeom prst="rightArrow">
-            <a:avLst/>
-          </a:prstGeom>
-          <a:solidFill>
-            <a:srgbClr val="7F8C8D"/>
-          </a:solidFill>
-          <a:ln>
-            <a:noFill/>
-          </a:ln>
-        </p:spPr>
-        <p:style>
-          <a:lnRef idx="1">
-            <a:schemeClr val="accent1"/>
-          </a:lnRef>
-          <a:fillRef idx="3">
-            <a:schemeClr val="accent1"/>
-          </a:fillRef>
-          <a:effectRef idx="2">
-            <a:schemeClr val="accent1"/>
-          </a:effectRef>
-          <a:fontRef idx="minor">
-            <a:schemeClr val="lt1"/>
-          </a:fontRef>
-        </p:style>
-        <p:txBody>
-          <a:bodyPr rtlCol="0" anchor="ctr"/>
-          <a:lstStyle/>
-          <a:p>
-            <a:pPr algn="ctr"/>
-            <a:endParaRPr/>
-          </a:p>
-        </p:txBody>
-      </p:sp>
-      <p:sp>
-        <p:nvSpPr>
-          <p:cNvPr id="12" name="Rounded Rectangle 11"/>
-          <p:cNvSpPr/>
-          <p:nvPr/>
-        </p:nvSpPr>
-        <p:spPr>
-          <a:xfrm>
-            <a:off x="3017520" y="2743200"/>
-            <a:ext cx="1645920" cy="914400"/>
-          </a:xfrm>
-          <a:prstGeom prst="roundRect">
-            <a:avLst/>
-          </a:prstGeom>
-          <a:solidFill>
-            <a:srgbClr val="F0F0F5"/>
-          </a:solidFill>
-          <a:ln w="25400">
-            <a:solidFill>
-              <a:srgbClr val="BBBBCC"/>
-            </a:solidFill>
-          </a:ln>
-        </p:spPr>
-        <p:style>
-          <a:lnRef idx="1">
-            <a:schemeClr val="accent1"/>
-          </a:lnRef>
-          <a:fillRef idx="3">
-            <a:schemeClr val="accent1"/>
-          </a:fillRef>
-          <a:effectRef idx="2">
-            <a:schemeClr val="accent1"/>
-          </a:effectRef>
-          <a:fontRef idx="minor">
-            <a:schemeClr val="lt1"/>
-          </a:fontRef>
-        </p:style>
-        <p:txBody>
-          <a:bodyPr rtlCol="0" anchor="ctr"/>
-          <a:lstStyle/>
-          <a:p>
-            <a:pPr algn="ctr">
-              <a:defRPr sz="1200" b="1">
-                <a:solidFill>
-                  <a:srgbClr val="27AE60"/>
-                </a:solidFill>
-              </a:defRPr>
-            </a:pPr>
-            <a:r>
-              <a:t>Bipartite</a:t>
-            </a:r>
-            <a:br/>
-            <a:r>
-              <a:t>Graph</a:t>
-            </a:r>
-          </a:p>
-        </p:txBody>
-      </p:sp>
-      <p:sp>
-        <p:nvSpPr>
-          <p:cNvPr id="13" name="Right Arrow 12"/>
-          <p:cNvSpPr/>
-          <p:nvPr/>
-        </p:nvSpPr>
-        <p:spPr>
-          <a:xfrm>
-            <a:off x="4846320" y="3017520"/>
-            <a:ext cx="457200" cy="274320"/>
-          </a:xfrm>
-          <a:prstGeom prst="rightArrow">
-            <a:avLst/>
-          </a:prstGeom>
-          <a:solidFill>
-            <a:srgbClr val="7F8C8D"/>
-          </a:solidFill>
-          <a:ln>
-            <a:noFill/>
-          </a:ln>
-        </p:spPr>
-        <p:style>
-          <a:lnRef idx="1">
-            <a:schemeClr val="accent1"/>
-          </a:lnRef>
-          <a:fillRef idx="3">
-            <a:schemeClr val="accent1"/>
-          </a:fillRef>
-          <a:effectRef idx="2">
-            <a:schemeClr val="accent1"/>
-          </a:effectRef>
-          <a:fontRef idx="minor">
-            <a:schemeClr val="lt1"/>
-          </a:fontRef>
-        </p:style>
-        <p:txBody>
-          <a:bodyPr rtlCol="0" anchor="ctr"/>
-          <a:lstStyle/>
-          <a:p>
-            <a:pPr algn="ctr"/>
-            <a:endParaRPr/>
-          </a:p>
-        </p:txBody>
-      </p:sp>
-      <p:sp>
-        <p:nvSpPr>
-          <p:cNvPr id="14" name="Rounded Rectangle 13"/>
-          <p:cNvSpPr/>
-          <p:nvPr/>
-        </p:nvSpPr>
-        <p:spPr>
-          <a:xfrm>
-            <a:off x="5486400" y="2743200"/>
-            <a:ext cx="1371600" cy="914400"/>
-          </a:xfrm>
-          <a:prstGeom prst="roundRect">
-            <a:avLst/>
-          </a:prstGeom>
-          <a:solidFill>
-            <a:srgbClr val="F0F0F5"/>
-          </a:solidFill>
-          <a:ln w="25400">
-            <a:solidFill>
-              <a:srgbClr val="BBBBCC"/>
-            </a:solidFill>
-          </a:ln>
-        </p:spPr>
-        <p:style>
-          <a:lnRef idx="1">
-            <a:schemeClr val="accent1"/>
-          </a:lnRef>
-          <a:fillRef idx="3">
-            <a:schemeClr val="accent1"/>
-          </a:fillRef>
-          <a:effectRef idx="2">
-            <a:schemeClr val="accent1"/>
-          </a:effectRef>
-          <a:fontRef idx="minor">
-            <a:schemeClr val="lt1"/>
-          </a:fontRef>
-        </p:style>
-        <p:txBody>
-          <a:bodyPr rtlCol="0" anchor="ctr"/>
-          <a:lstStyle/>
-          <a:p>
-            <a:pPr algn="ctr">
-              <a:defRPr sz="1200" b="1">
-                <a:solidFill>
-                  <a:srgbClr val="C0392B"/>
-                </a:solidFill>
-              </a:defRPr>
-            </a:pPr>
-            <a:r>
-              <a:t>GIN</a:t>
-            </a:r>
-            <a:br/>
-            <a:r>
-              <a:t>Model</a:t>
-            </a:r>
-          </a:p>
-        </p:txBody>
-      </p:sp>
-      <p:sp>
-        <p:nvSpPr>
-          <p:cNvPr id="15" name="Right Arrow 14"/>
-          <p:cNvSpPr/>
-          <p:nvPr/>
-        </p:nvSpPr>
-        <p:spPr>
-          <a:xfrm>
-            <a:off x="7040880" y="3017520"/>
-            <a:ext cx="457200" cy="274320"/>
-          </a:xfrm>
-          <a:prstGeom prst="rightArrow">
-            <a:avLst/>
-          </a:prstGeom>
-          <a:solidFill>
-            <a:srgbClr val="7F8C8D"/>
-          </a:solidFill>
-          <a:ln>
-            <a:noFill/>
-          </a:ln>
-        </p:spPr>
-        <p:style>
-          <a:lnRef idx="1">
-            <a:schemeClr val="accent1"/>
-          </a:lnRef>
-          <a:fillRef idx="3">
-            <a:schemeClr val="accent1"/>
-          </a:fillRef>
-          <a:effectRef idx="2">
-            <a:schemeClr val="accent1"/>
-          </a:effectRef>
-          <a:fontRef idx="minor">
-            <a:schemeClr val="lt1"/>
-          </a:fontRef>
-        </p:style>
-        <p:txBody>
-          <a:bodyPr rtlCol="0" anchor="ctr"/>
-          <a:lstStyle/>
-          <a:p>
-            <a:pPr algn="ctr"/>
-            <a:endParaRPr/>
-          </a:p>
-        </p:txBody>
-      </p:sp>
-      <p:sp>
-        <p:nvSpPr>
-          <p:cNvPr id="16" name="Rounded Rectangle 15"/>
-          <p:cNvSpPr/>
-          <p:nvPr/>
-        </p:nvSpPr>
-        <p:spPr>
-          <a:xfrm>
-            <a:off x="7680960" y="2743200"/>
-            <a:ext cx="1371600" cy="914400"/>
-          </a:xfrm>
-          <a:prstGeom prst="roundRect">
-            <a:avLst/>
-          </a:prstGeom>
-          <a:solidFill>
-            <a:srgbClr val="F0F0F5"/>
-          </a:solidFill>
-          <a:ln w="25400">
-            <a:solidFill>
-              <a:srgbClr val="BBBBCC"/>
-            </a:solidFill>
-          </a:ln>
-        </p:spPr>
-        <p:style>
-          <a:lnRef idx="1">
-            <a:schemeClr val="accent1"/>
-          </a:lnRef>
-          <a:fillRef idx="3">
-            <a:schemeClr val="accent1"/>
-          </a:fillRef>
-          <a:effectRef idx="2">
-            <a:schemeClr val="accent1"/>
-          </a:effectRef>
-          <a:fontRef idx="minor">
-            <a:schemeClr val="lt1"/>
-          </a:fontRef>
-        </p:style>
-        <p:txBody>
-          <a:bodyPr rtlCol="0" anchor="ctr"/>
-          <a:lstStyle/>
-          <a:p>
-            <a:pPr algn="ctr">
-              <a:defRPr sz="1600" b="1">
-                <a:solidFill>
-                  <a:srgbClr val="D35400"/>
-                </a:solidFill>
-              </a:defRPr>
-            </a:pPr>
-            <a:r>
-              <a:t>Grade: 3</a:t>
-            </a:r>
-          </a:p>
-        </p:txBody>
-      </p:sp>
-      <p:sp>
-        <p:nvSpPr>
-          <p:cNvPr id="17" name="Rounded Rectangle 16"/>
-          <p:cNvSpPr/>
-          <p:nvPr/>
-        </p:nvSpPr>
-        <p:spPr>
-          <a:xfrm>
-            <a:off x="457200" y="4114800"/>
-            <a:ext cx="1828800" cy="914400"/>
-          </a:xfrm>
-          <a:prstGeom prst="roundRect">
-            <a:avLst/>
-          </a:prstGeom>
-          <a:solidFill>
-            <a:srgbClr val="F0F0F5"/>
-          </a:solidFill>
-          <a:ln w="25400">
-            <a:solidFill>
-              <a:srgbClr val="BBBBCC"/>
-            </a:solidFill>
-          </a:ln>
-        </p:spPr>
-        <p:style>
-          <a:lnRef idx="1">
-            <a:schemeClr val="accent1"/>
-          </a:lnRef>
-          <a:fillRef idx="3">
-            <a:schemeClr val="accent1"/>
-          </a:fillRef>
-          <a:effectRef idx="2">
-            <a:schemeClr val="accent1"/>
-          </a:effectRef>
-          <a:fontRef idx="minor">
-            <a:schemeClr val="lt1"/>
-          </a:fontRef>
-        </p:style>
-        <p:txBody>
-          <a:bodyPr rtlCol="0" anchor="ctr"/>
-          <a:lstStyle/>
-          <a:p>
-            <a:pPr algn="ctr">
-              <a:defRPr sz="1400" b="1">
-                <a:solidFill>
-                  <a:srgbClr val="2980B9"/>
-                </a:solidFill>
-              </a:defRPr>
-            </a:pPr>
-            <a:r>
-              <a:t>Slide 3</a:t>
-            </a:r>
-          </a:p>
-        </p:txBody>
-      </p:sp>
-      <p:sp>
-        <p:nvSpPr>
-          <p:cNvPr id="18" name="Right Arrow 17"/>
-          <p:cNvSpPr/>
-          <p:nvPr/>
-        </p:nvSpPr>
-        <p:spPr>
-          <a:xfrm>
-            <a:off x="2377440" y="4389120"/>
-            <a:ext cx="457200" cy="274320"/>
-          </a:xfrm>
-          <a:prstGeom prst="rightArrow">
-            <a:avLst/>
-          </a:prstGeom>
-          <a:solidFill>
-            <a:srgbClr val="7F8C8D"/>
-          </a:solidFill>
-          <a:ln>
-            <a:noFill/>
-          </a:ln>
-        </p:spPr>
-        <p:style>
-          <a:lnRef idx="1">
-            <a:schemeClr val="accent1"/>
-          </a:lnRef>
-          <a:fillRef idx="3">
-            <a:schemeClr val="accent1"/>
-          </a:fillRef>
-          <a:effectRef idx="2">
-            <a:schemeClr val="accent1"/>
-          </a:effectRef>
-          <a:fontRef idx="minor">
-            <a:schemeClr val="lt1"/>
-          </a:fontRef>
-        </p:style>
-        <p:txBody>
-          <a:bodyPr rtlCol="0" anchor="ctr"/>
-          <a:lstStyle/>
-          <a:p>
-            <a:pPr algn="ctr"/>
-            <a:endParaRPr/>
-          </a:p>
-        </p:txBody>
-      </p:sp>
-      <p:sp>
-        <p:nvSpPr>
-          <p:cNvPr id="19" name="Rounded Rectangle 18"/>
-          <p:cNvSpPr/>
-          <p:nvPr/>
-        </p:nvSpPr>
-        <p:spPr>
-          <a:xfrm>
-            <a:off x="3017520" y="4114800"/>
-            <a:ext cx="1645920" cy="914400"/>
-          </a:xfrm>
-          <a:prstGeom prst="roundRect">
-            <a:avLst/>
-          </a:prstGeom>
-          <a:solidFill>
-            <a:srgbClr val="F0F0F5"/>
-          </a:solidFill>
-          <a:ln w="25400">
-            <a:solidFill>
-              <a:srgbClr val="BBBBCC"/>
-            </a:solidFill>
-          </a:ln>
-        </p:spPr>
-        <p:style>
-          <a:lnRef idx="1">
-            <a:schemeClr val="accent1"/>
-          </a:lnRef>
-          <a:fillRef idx="3">
-            <a:schemeClr val="accent1"/>
-          </a:fillRef>
-          <a:effectRef idx="2">
-            <a:schemeClr val="accent1"/>
-          </a:effectRef>
-          <a:fontRef idx="minor">
-            <a:schemeClr val="lt1"/>
-          </a:fontRef>
-        </p:style>
-        <p:txBody>
-          <a:bodyPr rtlCol="0" anchor="ctr"/>
-          <a:lstStyle/>
-          <a:p>
-            <a:pPr algn="ctr">
-              <a:defRPr sz="1200" b="1">
-                <a:solidFill>
-                  <a:srgbClr val="27AE60"/>
-                </a:solidFill>
-              </a:defRPr>
-            </a:pPr>
-            <a:r>
-              <a:t>Bipartite</a:t>
-            </a:r>
-            <a:br/>
-            <a:r>
-              <a:t>Graph</a:t>
-            </a:r>
-          </a:p>
-        </p:txBody>
-      </p:sp>
-      <p:sp>
-        <p:nvSpPr>
-          <p:cNvPr id="20" name="Right Arrow 19"/>
-          <p:cNvSpPr/>
-          <p:nvPr/>
-        </p:nvSpPr>
-        <p:spPr>
-          <a:xfrm>
-            <a:off x="4846320" y="4389120"/>
-            <a:ext cx="457200" cy="274320"/>
-          </a:xfrm>
-          <a:prstGeom prst="rightArrow">
-            <a:avLst/>
-          </a:prstGeom>
-          <a:solidFill>
-            <a:srgbClr val="7F8C8D"/>
-          </a:solidFill>
-          <a:ln>
-            <a:noFill/>
-          </a:ln>
-        </p:spPr>
-        <p:style>
-          <a:lnRef idx="1">
-            <a:schemeClr val="accent1"/>
-          </a:lnRef>
-          <a:fillRef idx="3">
-            <a:schemeClr val="accent1"/>
-          </a:fillRef>
-          <a:effectRef idx="2">
-            <a:schemeClr val="accent1"/>
-          </a:effectRef>
-          <a:fontRef idx="minor">
-            <a:schemeClr val="lt1"/>
-          </a:fontRef>
-        </p:style>
-        <p:txBody>
-          <a:bodyPr rtlCol="0" anchor="ctr"/>
-          <a:lstStyle/>
-          <a:p>
-            <a:pPr algn="ctr"/>
-            <a:endParaRPr/>
-          </a:p>
-        </p:txBody>
-      </p:sp>
-      <p:sp>
-        <p:nvSpPr>
-          <p:cNvPr id="21" name="Rounded Rectangle 20"/>
-          <p:cNvSpPr/>
-          <p:nvPr/>
-        </p:nvSpPr>
-        <p:spPr>
-          <a:xfrm>
-            <a:off x="5486400" y="4114800"/>
-            <a:ext cx="1371600" cy="914400"/>
-          </a:xfrm>
-          <a:prstGeom prst="roundRect">
-            <a:avLst/>
-          </a:prstGeom>
-          <a:solidFill>
-            <a:srgbClr val="F0F0F5"/>
-          </a:solidFill>
-          <a:ln w="25400">
-            <a:solidFill>
-              <a:srgbClr val="BBBBCC"/>
-            </a:solidFill>
-          </a:ln>
-        </p:spPr>
-        <p:style>
-          <a:lnRef idx="1">
-            <a:schemeClr val="accent1"/>
-          </a:lnRef>
-          <a:fillRef idx="3">
-            <a:schemeClr val="accent1"/>
-          </a:fillRef>
-          <a:effectRef idx="2">
-            <a:schemeClr val="accent1"/>
-          </a:effectRef>
-          <a:fontRef idx="minor">
-            <a:schemeClr val="lt1"/>
-          </a:fontRef>
-        </p:style>
-        <p:txBody>
-          <a:bodyPr rtlCol="0" anchor="ctr"/>
-          <a:lstStyle/>
-          <a:p>
-            <a:pPr algn="ctr">
-              <a:defRPr sz="1200" b="1">
-                <a:solidFill>
-                  <a:srgbClr val="C0392B"/>
-                </a:solidFill>
-              </a:defRPr>
-            </a:pPr>
-            <a:r>
-              <a:t>GIN</a:t>
-            </a:r>
-            <a:br/>
-            <a:r>
-              <a:t>Model</a:t>
-            </a:r>
-          </a:p>
-        </p:txBody>
-      </p:sp>
-      <p:sp>
-        <p:nvSpPr>
-          <p:cNvPr id="22" name="Right Arrow 21"/>
-          <p:cNvSpPr/>
-          <p:nvPr/>
-        </p:nvSpPr>
-        <p:spPr>
-          <a:xfrm>
-            <a:off x="7040880" y="4389120"/>
-            <a:ext cx="457200" cy="274320"/>
-          </a:xfrm>
-          <a:prstGeom prst="rightArrow">
-            <a:avLst/>
-          </a:prstGeom>
-          <a:solidFill>
-            <a:srgbClr val="7F8C8D"/>
-          </a:solidFill>
-          <a:ln>
-            <a:noFill/>
-          </a:ln>
-        </p:spPr>
-        <p:style>
-          <a:lnRef idx="1">
-            <a:schemeClr val="accent1"/>
-          </a:lnRef>
-          <a:fillRef idx="3">
-            <a:schemeClr val="accent1"/>
-          </a:fillRef>
-          <a:effectRef idx="2">
-            <a:schemeClr val="accent1"/>
-          </a:effectRef>
-          <a:fontRef idx="minor">
-            <a:schemeClr val="lt1"/>
-          </a:fontRef>
-        </p:style>
-        <p:txBody>
-          <a:bodyPr rtlCol="0" anchor="ctr"/>
-          <a:lstStyle/>
-          <a:p>
-            <a:pPr algn="ctr"/>
-            <a:endParaRPr/>
-          </a:p>
-        </p:txBody>
-      </p:sp>
-      <p:sp>
-        <p:nvSpPr>
-          <p:cNvPr id="23" name="Rounded Rectangle 22"/>
-          <p:cNvSpPr/>
-          <p:nvPr/>
-        </p:nvSpPr>
-        <p:spPr>
-          <a:xfrm>
-            <a:off x="7680960" y="4114800"/>
-            <a:ext cx="1371600" cy="914400"/>
-          </a:xfrm>
-          <a:prstGeom prst="roundRect">
-            <a:avLst/>
-          </a:prstGeom>
-          <a:solidFill>
-            <a:srgbClr val="F0F0F5"/>
-          </a:solidFill>
-          <a:ln w="25400">
-            <a:solidFill>
-              <a:srgbClr val="BBBBCC"/>
-            </a:solidFill>
-          </a:ln>
-        </p:spPr>
-        <p:style>
-          <a:lnRef idx="1">
-            <a:schemeClr val="accent1"/>
-          </a:lnRef>
-          <a:fillRef idx="3">
-            <a:schemeClr val="accent1"/>
-          </a:fillRef>
-          <a:effectRef idx="2">
-            <a:schemeClr val="accent1"/>
-          </a:effectRef>
-          <a:fontRef idx="minor">
-            <a:schemeClr val="lt1"/>
-          </a:fontRef>
-        </p:style>
-        <p:txBody>
-          <a:bodyPr rtlCol="0" anchor="ctr"/>
-          <a:lstStyle/>
-          <a:p>
-            <a:pPr algn="ctr">
-              <a:defRPr sz="1600" b="1">
-                <a:solidFill>
-                  <a:srgbClr val="D35400"/>
-                </a:solidFill>
-              </a:defRPr>
-            </a:pPr>
-            <a:r>
-              <a:t>Grade: 5</a:t>
-            </a:r>
-          </a:p>
-        </p:txBody>
-      </p:sp>
-      <p:sp>
-        <p:nvSpPr>
-          <p:cNvPr id="24" name="TextBox 23"/>
-          <p:cNvSpPr txBox="1"/>
-          <p:nvPr/>
-        </p:nvSpPr>
-        <p:spPr>
-          <a:xfrm>
-            <a:off x="9326880" y="1371600"/>
-            <a:ext cx="457200" cy="3657600"/>
-          </a:xfrm>
-          <a:prstGeom prst="rect">
-            <a:avLst/>
-          </a:prstGeom>
-          <a:noFill/>
-        </p:spPr>
-        <p:txBody>
-          <a:bodyPr wrap="square">
-            <a:spAutoFit/>
-          </a:bodyPr>
-          <a:lstStyle/>
-          <a:p>
-            <a:pPr algn="ctr">
-              <a:defRPr sz="3600" b="0">
-                <a:solidFill>
-                  <a:srgbClr val="1A1A1A"/>
-                </a:solidFill>
-                <a:latin typeface="Calibri"/>
-              </a:defRPr>
-            </a:pPr>
-            <a:r>
-              <a:t>}</a:t>
-            </a:r>
-            <a:br/>
-            <a:br/>
-            <a:r>
-              <a:t>Σ</a:t>
-            </a:r>
-          </a:p>
-        </p:txBody>
-      </p:sp>
-      <p:sp>
-        <p:nvSpPr>
-          <p:cNvPr id="25" name="Rounded Rectangle 24"/>
-          <p:cNvSpPr/>
-          <p:nvPr/>
-        </p:nvSpPr>
-        <p:spPr>
-          <a:xfrm>
-            <a:off x="9875520" y="2103120"/>
-            <a:ext cx="2011680" cy="1828800"/>
-          </a:xfrm>
-          <a:prstGeom prst="roundRect">
-            <a:avLst/>
-          </a:prstGeom>
-          <a:solidFill>
-            <a:srgbClr val="F0F0F5"/>
-          </a:solidFill>
-          <a:ln w="25400">
-            <a:solidFill>
-              <a:srgbClr val="BBBBCC"/>
-            </a:solidFill>
-          </a:ln>
-        </p:spPr>
-        <p:style>
-          <a:lnRef idx="1">
-            <a:schemeClr val="accent1"/>
-          </a:lnRef>
-          <a:fillRef idx="3">
-            <a:schemeClr val="accent1"/>
-          </a:fillRef>
-          <a:effectRef idx="2">
-            <a:schemeClr val="accent1"/>
-          </a:effectRef>
-          <a:fontRef idx="minor">
-            <a:schemeClr val="lt1"/>
-          </a:fontRef>
-        </p:style>
-        <p:txBody>
-          <a:bodyPr wrap="square" rtlCol="0" anchor="ctr"/>
-          <a:lstStyle/>
-          <a:p>
-            <a:pPr algn="ctr">
-              <a:defRPr sz="1800" b="1">
-                <a:solidFill>
-                  <a:srgbClr val="1A1A1A"/>
-                </a:solidFill>
-              </a:defRPr>
-            </a:pPr>
-            <a:r>
-              <a:t>Sum = 12</a:t>
-            </a:r>
-          </a:p>
-          <a:p>
-            <a:br/>
-            <a:r>
-              <a:t>IPS-C</a:t>
-            </a:r>
-          </a:p>
-          <a:p>
-            <a:pPr algn="ctr">
-              <a:defRPr sz="1200">
-                <a:solidFill>
-                  <a:srgbClr val="555566"/>
-                </a:solidFill>
-              </a:defRPr>
-            </a:pPr>
-            <a:r>
-              <a:t>Highly</a:t>
-            </a:r>
-            <a:br/>
-            <a:r>
-              <a:t>Infiltrative</a:t>
-            </a:r>
-          </a:p>
-        </p:txBody>
-      </p:sp>
-      <p:sp>
-        <p:nvSpPr>
-          <p:cNvPr id="26" name="TextBox 25"/>
-          <p:cNvSpPr txBox="1"/>
-          <p:nvPr/>
-        </p:nvSpPr>
-        <p:spPr>
-          <a:xfrm>
-            <a:off x="457200" y="5029200"/>
-            <a:ext cx="10972800" cy="1371600"/>
-          </a:xfrm>
-          <a:prstGeom prst="rect">
-            <a:avLst/>
-          </a:prstGeom>
-          <a:noFill/>
-        </p:spPr>
-        <p:txBody>
-          <a:bodyPr wrap="square">
-            <a:spAutoFit/>
-          </a:bodyPr>
-          <a:lstStyle/>
-          <a:p>
-            <a:pPr>
-              <a:spcAft>
-                <a:spcPts val="459"/>
-              </a:spcAft>
-              <a:defRPr sz="1300" b="0">
-                <a:solidFill>
-                  <a:srgbClr val="555566"/>
-                </a:solidFill>
-                <a:latin typeface="Calibri"/>
-              </a:defRPr>
-            </a:pPr>
-            <a:r>
-              <a:t>• Each WSI → graph → GIN → predicted grade (1-5 continuous → rounded to integer)</a:t>
-            </a:r>
-          </a:p>
-          <a:p>
-            <a:pPr>
-              <a:spcAft>
-                <a:spcPts val="459"/>
-              </a:spcAft>
-              <a:defRPr sz="1300" b="0">
-                <a:solidFill>
-                  <a:srgbClr val="555566"/>
-                </a:solidFill>
-                <a:latin typeface="Calibri"/>
-              </a:defRPr>
-            </a:pPr>
-            <a:r>
-              <a:t>• Sum 3 slide grades: [3-6] = IPS-A  |  [7-9] = IPS-B  |  [10-15] = IPS-C</a:t>
-            </a:r>
-          </a:p>
-          <a:p>
-            <a:pPr>
-              <a:spcAft>
-                <a:spcPts val="459"/>
-              </a:spcAft>
-              <a:defRPr sz="1300" b="0">
-                <a:solidFill>
-                  <a:srgbClr val="555566"/>
-                </a:solidFill>
-                <a:latin typeface="Calibri"/>
-              </a:defRPr>
-            </a:pPr>
-            <a:r>
-              <a:t>• Only patients with exactly 3 slides are evaluated (61 patients)</a:t>
-            </a:r>
-          </a:p>
-        </p:txBody>
-      </p:sp>
+              <a:t>Results: Gate vs Baseline (20 runs each, 4 folds x 5 seeds)</a:t>
+            </a:r>
+          </a:p>
+        </p:txBody>
+      </p:sp>
+      <p:graphicFrame>
+        <p:nvGraphicFramePr>
+          <p:cNvPr id="3" name="Table 2">
+            <a:extLst>
+              <a:ext uri="{FF2B5EF4-FFF2-40B4-BE49-F238E27FC236}">
+                <a16:creationId xmlns:a16="http://schemas.microsoft.com/office/drawing/2014/main" id="{D3C77A7D-AD19-7DCB-74FC-C3AF1C1E4F7D}"/>
+              </a:ext>
+            </a:extLst>
+          </p:cNvPr>
+          <p:cNvGraphicFramePr>
+            <a:graphicFrameLocks noGrp="1"/>
+          </p:cNvGraphicFramePr>
+          <p:nvPr>
+            <p:extLst>
+              <p:ext uri="{D42A27DB-BD31-4B8C-83A1-F6EECF244321}">
+                <p14:modId xmlns:p14="http://schemas.microsoft.com/office/powerpoint/2010/main" val="2573897690"/>
+              </p:ext>
+            </p:extLst>
+          </p:nvPr>
+        </p:nvGraphicFramePr>
+        <p:xfrm>
+          <a:off x="548640" y="1246909"/>
+          <a:ext cx="7040880" cy="2560320"/>
+        </p:xfrm>
+        <a:graphic>
+          <a:graphicData uri="http://schemas.openxmlformats.org/drawingml/2006/table">
+            <a:tbl>
+              <a:tblPr firstRow="1" bandRow="1">
+                <a:tableStyleId>{5C22544A-7EE6-4342-B048-85BDC9FD1C3A}</a:tableStyleId>
+              </a:tblPr>
+              <a:tblGrid>
+                <a:gridCol w="1645920">
+                  <a:extLst>
+                    <a:ext uri="{9D8B030D-6E8A-4147-A177-3AD203B41FA5}">
+                      <a16:colId xmlns:a16="http://schemas.microsoft.com/office/drawing/2014/main" val="20000"/>
+                    </a:ext>
+                  </a:extLst>
+                </a:gridCol>
+                <a:gridCol w="2011680">
+                  <a:extLst>
+                    <a:ext uri="{9D8B030D-6E8A-4147-A177-3AD203B41FA5}">
+                      <a16:colId xmlns:a16="http://schemas.microsoft.com/office/drawing/2014/main" val="20001"/>
+                    </a:ext>
+                  </a:extLst>
+                </a:gridCol>
+                <a:gridCol w="2011680">
+                  <a:extLst>
+                    <a:ext uri="{9D8B030D-6E8A-4147-A177-3AD203B41FA5}">
+                      <a16:colId xmlns:a16="http://schemas.microsoft.com/office/drawing/2014/main" val="20002"/>
+                    </a:ext>
+                  </a:extLst>
+                </a:gridCol>
+                <a:gridCol w="1371600">
+                  <a:extLst>
+                    <a:ext uri="{9D8B030D-6E8A-4147-A177-3AD203B41FA5}">
+                      <a16:colId xmlns:a16="http://schemas.microsoft.com/office/drawing/2014/main" val="20003"/>
+                    </a:ext>
+                  </a:extLst>
+                </a:gridCol>
+              </a:tblGrid>
+              <a:tr h="365760">
+                <a:tc>
+                  <a:txBody>
+                    <a:bodyPr/>
+                    <a:lstStyle/>
+                    <a:p>
+                      <a:pPr algn="l">
+                        <a:defRPr sz="1300" b="1">
+                          <a:solidFill>
+                            <a:srgbClr val="FFFFFF"/>
+                          </a:solidFill>
+                          <a:latin typeface="Calibri"/>
+                        </a:defRPr>
+                      </a:pPr>
+                      <a:r>
+                        <a:rPr dirty="0"/>
+                        <a:t>Metric</a:t>
+                      </a:r>
+                    </a:p>
+                  </a:txBody>
+                  <a:tcPr anchor="ctr">
+                    <a:solidFill>
+                      <a:srgbClr val="333333"/>
+                    </a:solidFill>
+                  </a:tcPr>
+                </a:tc>
+                <a:tc>
+                  <a:txBody>
+                    <a:bodyPr/>
+                    <a:lstStyle/>
+                    <a:p>
+                      <a:pPr algn="l">
+                        <a:defRPr sz="1300" b="1">
+                          <a:solidFill>
+                            <a:srgbClr val="FFFFFF"/>
+                          </a:solidFill>
+                          <a:latin typeface="Calibri"/>
+                        </a:defRPr>
+                      </a:pPr>
+                      <a:r>
+                        <a:t>Base GIN (none)</a:t>
+                      </a:r>
+                    </a:p>
+                  </a:txBody>
+                  <a:tcPr anchor="ctr">
+                    <a:solidFill>
+                      <a:srgbClr val="333333"/>
+                    </a:solidFill>
+                  </a:tcPr>
+                </a:tc>
+                <a:tc>
+                  <a:txBody>
+                    <a:bodyPr/>
+                    <a:lstStyle/>
+                    <a:p>
+                      <a:pPr algn="l">
+                        <a:defRPr sz="1300" b="1">
+                          <a:solidFill>
+                            <a:srgbClr val="FFFFFF"/>
+                          </a:solidFill>
+                          <a:latin typeface="Calibri"/>
+                        </a:defRPr>
+                      </a:pPr>
+                      <a:r>
+                        <a:t>Cell Gate</a:t>
+                      </a:r>
+                    </a:p>
+                  </a:txBody>
+                  <a:tcPr anchor="ctr">
+                    <a:solidFill>
+                      <a:srgbClr val="333333"/>
+                    </a:solidFill>
+                  </a:tcPr>
+                </a:tc>
+                <a:tc>
+                  <a:txBody>
+                    <a:bodyPr/>
+                    <a:lstStyle/>
+                    <a:p>
+                      <a:pPr algn="l">
+                        <a:defRPr sz="1300" b="1">
+                          <a:solidFill>
+                            <a:srgbClr val="FFFFFF"/>
+                          </a:solidFill>
+                          <a:latin typeface="Calibri"/>
+                        </a:defRPr>
+                      </a:pPr>
+                      <a:r>
+                        <a:t>Difference</a:t>
+                      </a:r>
+                    </a:p>
+                  </a:txBody>
+                  <a:tcPr anchor="ctr">
+                    <a:solidFill>
+                      <a:srgbClr val="333333"/>
+                    </a:solidFill>
+                  </a:tcPr>
+                </a:tc>
+                <a:extLst>
+                  <a:ext uri="{0D108BD9-81ED-4DB2-BD59-A6C34878D82A}">
+                    <a16:rowId xmlns:a16="http://schemas.microsoft.com/office/drawing/2014/main" val="10000"/>
+                  </a:ext>
+                </a:extLst>
+              </a:tr>
+              <a:tr h="365760">
+                <a:tc>
+                  <a:txBody>
+                    <a:bodyPr/>
+                    <a:lstStyle/>
+                    <a:p>
+                      <a:pPr algn="l">
+                        <a:defRPr sz="1300">
+                          <a:solidFill>
+                            <a:srgbClr val="1A1A1A"/>
+                          </a:solidFill>
+                          <a:latin typeface="Calibri"/>
+                        </a:defRPr>
+                      </a:pPr>
+                      <a:r>
+                        <a:t>Macro F1</a:t>
+                      </a:r>
+                    </a:p>
+                  </a:txBody>
+                  <a:tcPr anchor="ctr">
+                    <a:solidFill>
+                      <a:srgbClr val="FFFFFF"/>
+                    </a:solidFill>
+                  </a:tcPr>
+                </a:tc>
+                <a:tc>
+                  <a:txBody>
+                    <a:bodyPr/>
+                    <a:lstStyle/>
+                    <a:p>
+                      <a:pPr algn="l">
+                        <a:defRPr sz="1300">
+                          <a:solidFill>
+                            <a:srgbClr val="1A1A1A"/>
+                          </a:solidFill>
+                          <a:latin typeface="Calibri"/>
+                        </a:defRPr>
+                      </a:pPr>
+                      <a:r>
+                        <a:t>64.45 +/- 8.43</a:t>
+                      </a:r>
+                    </a:p>
+                  </a:txBody>
+                  <a:tcPr anchor="ctr">
+                    <a:solidFill>
+                      <a:srgbClr val="FFFFFF"/>
+                    </a:solidFill>
+                  </a:tcPr>
+                </a:tc>
+                <a:tc>
+                  <a:txBody>
+                    <a:bodyPr/>
+                    <a:lstStyle/>
+                    <a:p>
+                      <a:pPr algn="l">
+                        <a:defRPr sz="1300">
+                          <a:solidFill>
+                            <a:srgbClr val="1A1A1A"/>
+                          </a:solidFill>
+                          <a:latin typeface="Calibri"/>
+                        </a:defRPr>
+                      </a:pPr>
+                      <a:r>
+                        <a:t>60.32 +/- 9.51</a:t>
+                      </a:r>
+                    </a:p>
+                  </a:txBody>
+                  <a:tcPr anchor="ctr">
+                    <a:solidFill>
+                      <a:srgbClr val="FFFFFF"/>
+                    </a:solidFill>
+                  </a:tcPr>
+                </a:tc>
+                <a:tc>
+                  <a:txBody>
+                    <a:bodyPr/>
+                    <a:lstStyle/>
+                    <a:p>
+                      <a:pPr algn="l">
+                        <a:defRPr sz="1300">
+                          <a:solidFill>
+                            <a:srgbClr val="1A1A1A"/>
+                          </a:solidFill>
+                          <a:latin typeface="Calibri"/>
+                        </a:defRPr>
+                      </a:pPr>
+                      <a:r>
+                        <a:rPr dirty="0"/>
+                        <a:t>-4.13</a:t>
+                      </a:r>
+                    </a:p>
+                  </a:txBody>
+                  <a:tcPr anchor="ctr">
+                    <a:solidFill>
+                      <a:srgbClr val="FFFFFF"/>
+                    </a:solidFill>
+                  </a:tcPr>
+                </a:tc>
+                <a:extLst>
+                  <a:ext uri="{0D108BD9-81ED-4DB2-BD59-A6C34878D82A}">
+                    <a16:rowId xmlns:a16="http://schemas.microsoft.com/office/drawing/2014/main" val="10001"/>
+                  </a:ext>
+                </a:extLst>
+              </a:tr>
+              <a:tr h="365760">
+                <a:tc>
+                  <a:txBody>
+                    <a:bodyPr/>
+                    <a:lstStyle/>
+                    <a:p>
+                      <a:pPr algn="l">
+                        <a:defRPr sz="1300">
+                          <a:solidFill>
+                            <a:srgbClr val="1A1A1A"/>
+                          </a:solidFill>
+                          <a:latin typeface="Calibri"/>
+                        </a:defRPr>
+                      </a:pPr>
+                      <a:r>
+                        <a:t>Weighted F1</a:t>
+                      </a:r>
+                    </a:p>
+                  </a:txBody>
+                  <a:tcPr anchor="ctr">
+                    <a:solidFill>
+                      <a:srgbClr val="F7F7F7"/>
+                    </a:solidFill>
+                  </a:tcPr>
+                </a:tc>
+                <a:tc>
+                  <a:txBody>
+                    <a:bodyPr/>
+                    <a:lstStyle/>
+                    <a:p>
+                      <a:pPr algn="l">
+                        <a:defRPr sz="1300">
+                          <a:solidFill>
+                            <a:srgbClr val="1A1A1A"/>
+                          </a:solidFill>
+                          <a:latin typeface="Calibri"/>
+                        </a:defRPr>
+                      </a:pPr>
+                      <a:r>
+                        <a:t>68.50 +/- 7.65</a:t>
+                      </a:r>
+                    </a:p>
+                  </a:txBody>
+                  <a:tcPr anchor="ctr">
+                    <a:solidFill>
+                      <a:srgbClr val="F7F7F7"/>
+                    </a:solidFill>
+                  </a:tcPr>
+                </a:tc>
+                <a:tc>
+                  <a:txBody>
+                    <a:bodyPr/>
+                    <a:lstStyle/>
+                    <a:p>
+                      <a:pPr algn="l">
+                        <a:defRPr sz="1300">
+                          <a:solidFill>
+                            <a:srgbClr val="1A1A1A"/>
+                          </a:solidFill>
+                          <a:latin typeface="Calibri"/>
+                        </a:defRPr>
+                      </a:pPr>
+                      <a:r>
+                        <a:t>64.16 +/- 9.98</a:t>
+                      </a:r>
+                    </a:p>
+                  </a:txBody>
+                  <a:tcPr anchor="ctr">
+                    <a:solidFill>
+                      <a:srgbClr val="F7F7F7"/>
+                    </a:solidFill>
+                  </a:tcPr>
+                </a:tc>
+                <a:tc>
+                  <a:txBody>
+                    <a:bodyPr/>
+                    <a:lstStyle/>
+                    <a:p>
+                      <a:pPr algn="l">
+                        <a:defRPr sz="1300">
+                          <a:solidFill>
+                            <a:srgbClr val="1A1A1A"/>
+                          </a:solidFill>
+                          <a:latin typeface="Calibri"/>
+                        </a:defRPr>
+                      </a:pPr>
+                      <a:r>
+                        <a:t>-4.34</a:t>
+                      </a:r>
+                    </a:p>
+                  </a:txBody>
+                  <a:tcPr anchor="ctr">
+                    <a:solidFill>
+                      <a:srgbClr val="F7F7F7"/>
+                    </a:solidFill>
+                  </a:tcPr>
+                </a:tc>
+                <a:extLst>
+                  <a:ext uri="{0D108BD9-81ED-4DB2-BD59-A6C34878D82A}">
+                    <a16:rowId xmlns:a16="http://schemas.microsoft.com/office/drawing/2014/main" val="10002"/>
+                  </a:ext>
+                </a:extLst>
+              </a:tr>
+              <a:tr h="365760">
+                <a:tc>
+                  <a:txBody>
+                    <a:bodyPr/>
+                    <a:lstStyle/>
+                    <a:p>
+                      <a:pPr algn="l">
+                        <a:defRPr sz="1300">
+                          <a:solidFill>
+                            <a:srgbClr val="1A1A1A"/>
+                          </a:solidFill>
+                          <a:latin typeface="Calibri"/>
+                        </a:defRPr>
+                      </a:pPr>
+                      <a:r>
+                        <a:t>QWK</a:t>
+                      </a:r>
+                    </a:p>
+                  </a:txBody>
+                  <a:tcPr anchor="ctr">
+                    <a:solidFill>
+                      <a:srgbClr val="FFFFFF"/>
+                    </a:solidFill>
+                  </a:tcPr>
+                </a:tc>
+                <a:tc>
+                  <a:txBody>
+                    <a:bodyPr/>
+                    <a:lstStyle/>
+                    <a:p>
+                      <a:pPr algn="l">
+                        <a:defRPr sz="1300">
+                          <a:solidFill>
+                            <a:srgbClr val="1A1A1A"/>
+                          </a:solidFill>
+                          <a:latin typeface="Calibri"/>
+                        </a:defRPr>
+                      </a:pPr>
+                      <a:r>
+                        <a:t>67.86 +/- 8.59</a:t>
+                      </a:r>
+                    </a:p>
+                  </a:txBody>
+                  <a:tcPr anchor="ctr">
+                    <a:solidFill>
+                      <a:srgbClr val="FFFFFF"/>
+                    </a:solidFill>
+                  </a:tcPr>
+                </a:tc>
+                <a:tc>
+                  <a:txBody>
+                    <a:bodyPr/>
+                    <a:lstStyle/>
+                    <a:p>
+                      <a:pPr algn="l">
+                        <a:defRPr sz="1300">
+                          <a:solidFill>
+                            <a:srgbClr val="1A1A1A"/>
+                          </a:solidFill>
+                          <a:latin typeface="Calibri"/>
+                        </a:defRPr>
+                      </a:pPr>
+                      <a:r>
+                        <a:t>59.16 +/- 11.45</a:t>
+                      </a:r>
+                    </a:p>
+                  </a:txBody>
+                  <a:tcPr anchor="ctr">
+                    <a:solidFill>
+                      <a:srgbClr val="FFFFFF"/>
+                    </a:solidFill>
+                  </a:tcPr>
+                </a:tc>
+                <a:tc>
+                  <a:txBody>
+                    <a:bodyPr/>
+                    <a:lstStyle/>
+                    <a:p>
+                      <a:pPr algn="l">
+                        <a:defRPr sz="1300">
+                          <a:solidFill>
+                            <a:srgbClr val="1A1A1A"/>
+                          </a:solidFill>
+                          <a:latin typeface="Calibri"/>
+                        </a:defRPr>
+                      </a:pPr>
+                      <a:r>
+                        <a:t>-8.70</a:t>
+                      </a:r>
+                    </a:p>
+                  </a:txBody>
+                  <a:tcPr anchor="ctr">
+                    <a:solidFill>
+                      <a:srgbClr val="FFFFFF"/>
+                    </a:solidFill>
+                  </a:tcPr>
+                </a:tc>
+                <a:extLst>
+                  <a:ext uri="{0D108BD9-81ED-4DB2-BD59-A6C34878D82A}">
+                    <a16:rowId xmlns:a16="http://schemas.microsoft.com/office/drawing/2014/main" val="10003"/>
+                  </a:ext>
+                </a:extLst>
+              </a:tr>
+              <a:tr h="365760">
+                <a:tc>
+                  <a:txBody>
+                    <a:bodyPr/>
+                    <a:lstStyle/>
+                    <a:p>
+                      <a:pPr algn="l">
+                        <a:defRPr sz="1300">
+                          <a:solidFill>
+                            <a:srgbClr val="1A1A1A"/>
+                          </a:solidFill>
+                          <a:latin typeface="Calibri"/>
+                        </a:defRPr>
+                      </a:pPr>
+                      <a:r>
+                        <a:rPr dirty="0"/>
+                        <a:t>F1 IPS-</a:t>
+                      </a:r>
+                      <a:r>
+                        <a:rPr lang="tr-TR" dirty="0"/>
+                        <a:t>1</a:t>
+                      </a:r>
+                      <a:endParaRPr dirty="0"/>
+                    </a:p>
+                  </a:txBody>
+                  <a:tcPr anchor="ctr">
+                    <a:solidFill>
+                      <a:srgbClr val="F7F7F7"/>
+                    </a:solidFill>
+                  </a:tcPr>
+                </a:tc>
+                <a:tc>
+                  <a:txBody>
+                    <a:bodyPr/>
+                    <a:lstStyle/>
+                    <a:p>
+                      <a:pPr algn="l">
+                        <a:defRPr sz="1300">
+                          <a:solidFill>
+                            <a:srgbClr val="1A1A1A"/>
+                          </a:solidFill>
+                          <a:latin typeface="Calibri"/>
+                        </a:defRPr>
+                      </a:pPr>
+                      <a:r>
+                        <a:rPr dirty="0"/>
+                        <a:t>57.32 +/- 14.45</a:t>
+                      </a:r>
+                    </a:p>
+                  </a:txBody>
+                  <a:tcPr anchor="ctr">
+                    <a:solidFill>
+                      <a:srgbClr val="F7F7F7"/>
+                    </a:solidFill>
+                  </a:tcPr>
+                </a:tc>
+                <a:tc>
+                  <a:txBody>
+                    <a:bodyPr/>
+                    <a:lstStyle/>
+                    <a:p>
+                      <a:pPr algn="l">
+                        <a:defRPr sz="1300">
+                          <a:solidFill>
+                            <a:srgbClr val="1A1A1A"/>
+                          </a:solidFill>
+                          <a:latin typeface="Calibri"/>
+                        </a:defRPr>
+                      </a:pPr>
+                      <a:r>
+                        <a:t>51.37 +/- 12.47</a:t>
+                      </a:r>
+                    </a:p>
+                  </a:txBody>
+                  <a:tcPr anchor="ctr">
+                    <a:solidFill>
+                      <a:srgbClr val="F7F7F7"/>
+                    </a:solidFill>
+                  </a:tcPr>
+                </a:tc>
+                <a:tc>
+                  <a:txBody>
+                    <a:bodyPr/>
+                    <a:lstStyle/>
+                    <a:p>
+                      <a:pPr algn="l">
+                        <a:defRPr sz="1300">
+                          <a:solidFill>
+                            <a:srgbClr val="1A1A1A"/>
+                          </a:solidFill>
+                          <a:latin typeface="Calibri"/>
+                        </a:defRPr>
+                      </a:pPr>
+                      <a:r>
+                        <a:t>-5.95</a:t>
+                      </a:r>
+                    </a:p>
+                  </a:txBody>
+                  <a:tcPr anchor="ctr">
+                    <a:solidFill>
+                      <a:srgbClr val="F7F7F7"/>
+                    </a:solidFill>
+                  </a:tcPr>
+                </a:tc>
+                <a:extLst>
+                  <a:ext uri="{0D108BD9-81ED-4DB2-BD59-A6C34878D82A}">
+                    <a16:rowId xmlns:a16="http://schemas.microsoft.com/office/drawing/2014/main" val="10004"/>
+                  </a:ext>
+                </a:extLst>
+              </a:tr>
+              <a:tr h="365760">
+                <a:tc>
+                  <a:txBody>
+                    <a:bodyPr/>
+                    <a:lstStyle/>
+                    <a:p>
+                      <a:pPr algn="l">
+                        <a:defRPr sz="1300">
+                          <a:solidFill>
+                            <a:srgbClr val="1A1A1A"/>
+                          </a:solidFill>
+                          <a:latin typeface="Calibri"/>
+                        </a:defRPr>
+                      </a:pPr>
+                      <a:r>
+                        <a:rPr dirty="0"/>
+                        <a:t>F1 IPS-</a:t>
+                      </a:r>
+                      <a:r>
+                        <a:rPr lang="tr-TR" dirty="0"/>
+                        <a:t>2</a:t>
+                      </a:r>
+                      <a:endParaRPr dirty="0"/>
+                    </a:p>
+                  </a:txBody>
+                  <a:tcPr anchor="ctr">
+                    <a:solidFill>
+                      <a:srgbClr val="FFFFFF"/>
+                    </a:solidFill>
+                  </a:tcPr>
+                </a:tc>
+                <a:tc>
+                  <a:txBody>
+                    <a:bodyPr/>
+                    <a:lstStyle/>
+                    <a:p>
+                      <a:pPr algn="l">
+                        <a:defRPr sz="1300">
+                          <a:solidFill>
+                            <a:srgbClr val="1A1A1A"/>
+                          </a:solidFill>
+                          <a:latin typeface="Calibri"/>
+                        </a:defRPr>
+                      </a:pPr>
+                      <a:r>
+                        <a:t>54.95 +/- 10.50</a:t>
+                      </a:r>
+                    </a:p>
+                  </a:txBody>
+                  <a:tcPr anchor="ctr">
+                    <a:solidFill>
+                      <a:srgbClr val="FFFFFF"/>
+                    </a:solidFill>
+                  </a:tcPr>
+                </a:tc>
+                <a:tc>
+                  <a:txBody>
+                    <a:bodyPr/>
+                    <a:lstStyle/>
+                    <a:p>
+                      <a:pPr algn="l">
+                        <a:defRPr sz="1300">
+                          <a:solidFill>
+                            <a:srgbClr val="1A1A1A"/>
+                          </a:solidFill>
+                          <a:latin typeface="Calibri"/>
+                        </a:defRPr>
+                      </a:pPr>
+                      <a:r>
+                        <a:t>53.98 +/- 12.95</a:t>
+                      </a:r>
+                    </a:p>
+                  </a:txBody>
+                  <a:tcPr anchor="ctr">
+                    <a:solidFill>
+                      <a:srgbClr val="FFFFFF"/>
+                    </a:solidFill>
+                  </a:tcPr>
+                </a:tc>
+                <a:tc>
+                  <a:txBody>
+                    <a:bodyPr/>
+                    <a:lstStyle/>
+                    <a:p>
+                      <a:pPr algn="l">
+                        <a:defRPr sz="1300">
+                          <a:solidFill>
+                            <a:srgbClr val="1A1A1A"/>
+                          </a:solidFill>
+                          <a:latin typeface="Calibri"/>
+                        </a:defRPr>
+                      </a:pPr>
+                      <a:r>
+                        <a:rPr dirty="0"/>
+                        <a:t>-0.97</a:t>
+                      </a:r>
+                    </a:p>
+                  </a:txBody>
+                  <a:tcPr anchor="ctr">
+                    <a:solidFill>
+                      <a:srgbClr val="FFFFFF"/>
+                    </a:solidFill>
+                  </a:tcPr>
+                </a:tc>
+                <a:extLst>
+                  <a:ext uri="{0D108BD9-81ED-4DB2-BD59-A6C34878D82A}">
+                    <a16:rowId xmlns:a16="http://schemas.microsoft.com/office/drawing/2014/main" val="10005"/>
+                  </a:ext>
+                </a:extLst>
+              </a:tr>
+              <a:tr h="365760">
+                <a:tc>
+                  <a:txBody>
+                    <a:bodyPr/>
+                    <a:lstStyle/>
+                    <a:p>
+                      <a:pPr algn="l">
+                        <a:defRPr sz="1300">
+                          <a:solidFill>
+                            <a:srgbClr val="1A1A1A"/>
+                          </a:solidFill>
+                          <a:latin typeface="Calibri"/>
+                        </a:defRPr>
+                      </a:pPr>
+                      <a:r>
+                        <a:rPr dirty="0"/>
+                        <a:t>F1 IPS-</a:t>
+                      </a:r>
+                      <a:r>
+                        <a:rPr lang="tr-TR" dirty="0"/>
+                        <a:t>3</a:t>
+                      </a:r>
+                      <a:endParaRPr dirty="0"/>
+                    </a:p>
+                  </a:txBody>
+                  <a:tcPr anchor="ctr">
+                    <a:solidFill>
+                      <a:srgbClr val="F7F7F7"/>
+                    </a:solidFill>
+                  </a:tcPr>
+                </a:tc>
+                <a:tc>
+                  <a:txBody>
+                    <a:bodyPr/>
+                    <a:lstStyle/>
+                    <a:p>
+                      <a:pPr algn="l">
+                        <a:defRPr sz="1300">
+                          <a:solidFill>
+                            <a:srgbClr val="1A1A1A"/>
+                          </a:solidFill>
+                          <a:latin typeface="Calibri"/>
+                        </a:defRPr>
+                      </a:pPr>
+                      <a:r>
+                        <a:t>81.09 +/- 7.99</a:t>
+                      </a:r>
+                    </a:p>
+                  </a:txBody>
+                  <a:tcPr anchor="ctr">
+                    <a:solidFill>
+                      <a:srgbClr val="F7F7F7"/>
+                    </a:solidFill>
+                  </a:tcPr>
+                </a:tc>
+                <a:tc>
+                  <a:txBody>
+                    <a:bodyPr/>
+                    <a:lstStyle/>
+                    <a:p>
+                      <a:pPr algn="l">
+                        <a:defRPr sz="1300">
+                          <a:solidFill>
+                            <a:srgbClr val="1A1A1A"/>
+                          </a:solidFill>
+                          <a:latin typeface="Calibri"/>
+                        </a:defRPr>
+                      </a:pPr>
+                      <a:r>
+                        <a:t>75.62 +/- 9.95</a:t>
+                      </a:r>
+                    </a:p>
+                  </a:txBody>
+                  <a:tcPr anchor="ctr">
+                    <a:solidFill>
+                      <a:srgbClr val="F7F7F7"/>
+                    </a:solidFill>
+                  </a:tcPr>
+                </a:tc>
+                <a:tc>
+                  <a:txBody>
+                    <a:bodyPr/>
+                    <a:lstStyle/>
+                    <a:p>
+                      <a:pPr algn="l">
+                        <a:defRPr sz="1300">
+                          <a:solidFill>
+                            <a:srgbClr val="1A1A1A"/>
+                          </a:solidFill>
+                          <a:latin typeface="Calibri"/>
+                        </a:defRPr>
+                      </a:pPr>
+                      <a:r>
+                        <a:rPr dirty="0"/>
+                        <a:t>-5.47</a:t>
+                      </a:r>
+                    </a:p>
+                  </a:txBody>
+                  <a:tcPr anchor="ctr">
+                    <a:solidFill>
+                      <a:srgbClr val="F7F7F7"/>
+                    </a:solidFill>
+                  </a:tcPr>
+                </a:tc>
+                <a:extLst>
+                  <a:ext uri="{0D108BD9-81ED-4DB2-BD59-A6C34878D82A}">
+                    <a16:rowId xmlns:a16="http://schemas.microsoft.com/office/drawing/2014/main" val="10006"/>
+                  </a:ext>
+                </a:extLst>
+              </a:tr>
+            </a:tbl>
+          </a:graphicData>
+        </a:graphic>
+      </p:graphicFrame>
     </p:spTree>
+    <p:extLst>
+      <p:ext uri="{BB962C8B-B14F-4D97-AF65-F5344CB8AC3E}">
+        <p14:creationId xmlns:p14="http://schemas.microsoft.com/office/powerpoint/2010/main" val="557285703"/>
+      </p:ext>
+    </p:extLst>
   </p:cSld>
   <p:clrMapOvr>
     <a:masterClrMapping/>
@@ -9524,13 +7583,13 @@
       </p:sp>
       <p:sp>
         <p:nvSpPr>
-          <p:cNvPr id="21" name="Rounded Rectangle 20"/>
-          <p:cNvSpPr/>
-          <p:nvPr/>
-        </p:nvSpPr>
-        <p:spPr>
-          <a:xfrm>
-            <a:off x="8503920" y="2468880"/>
+          <p:cNvPr id="22" name="Rounded Rectangle 21"/>
+          <p:cNvSpPr/>
+          <p:nvPr/>
+        </p:nvSpPr>
+        <p:spPr>
+          <a:xfrm>
+            <a:off x="8503920" y="3246120"/>
             <a:ext cx="3200400" cy="640080"/>
           </a:xfrm>
           <a:prstGeom prst="roundRect">
@@ -9571,7 +7630,24 @@
               </a:defRPr>
             </a:pPr>
             <a:r>
-              <a:t>IPS-A  |  Sum ∈ [3, 6]</a:t>
+              <a:rPr dirty="0"/>
+              <a:t>IPS-</a:t>
+            </a:r>
+            <a:r>
+              <a:rPr lang="tr-TR" dirty="0"/>
+              <a:t>2</a:t>
+            </a:r>
+            <a:r>
+              <a:rPr dirty="0"/>
+              <a:t> |  Sum ∈ </a:t>
+            </a:r>
+            <a:r>
+              <a:rPr lang="en-TR" dirty="0"/>
+              <a:t>[7</a:t>
+            </a:r>
+            <a:r>
+              <a:rPr dirty="0"/>
+              <a:t>, 9]</a:t>
             </a:r>
           </a:p>
           <a:p>
@@ -9583,20 +7659,21 @@
               </a:defRPr>
             </a:pPr>
             <a:r>
-              <a:t>Non/minimally infiltrative</a:t>
-            </a:r>
-          </a:p>
-        </p:txBody>
-      </p:sp>
-      <p:sp>
-        <p:nvSpPr>
-          <p:cNvPr id="22" name="Rounded Rectangle 21"/>
-          <p:cNvSpPr/>
-          <p:nvPr/>
-        </p:nvSpPr>
-        <p:spPr>
-          <a:xfrm>
-            <a:off x="8503920" y="3246120"/>
+              <a:rPr dirty="0"/>
+              <a:t>Moderately infiltrative</a:t>
+            </a:r>
+          </a:p>
+        </p:txBody>
+      </p:sp>
+      <p:sp>
+        <p:nvSpPr>
+          <p:cNvPr id="23" name="Rounded Rectangle 22"/>
+          <p:cNvSpPr/>
+          <p:nvPr/>
+        </p:nvSpPr>
+        <p:spPr>
+          <a:xfrm>
+            <a:off x="8503920" y="4023360"/>
             <a:ext cx="3200400" cy="640080"/>
           </a:xfrm>
           <a:prstGeom prst="roundRect">
@@ -9637,7 +7714,16 @@
               </a:defRPr>
             </a:pPr>
             <a:r>
-              <a:t>IPS-B  |  Sum ∈ [7, 9]</a:t>
+              <a:rPr dirty="0"/>
+              <a:t>IPS-</a:t>
+            </a:r>
+            <a:r>
+              <a:rPr lang="tr-TR" dirty="0"/>
+              <a:t>3</a:t>
+            </a:r>
+            <a:r>
+              <a:rPr dirty="0"/>
+              <a:t>  |  Sum ∈ [10, 15]</a:t>
             </a:r>
           </a:p>
           <a:p>
@@ -9649,21 +7735,22 @@
               </a:defRPr>
             </a:pPr>
             <a:r>
-              <a:t>Moderately infiltrative</a:t>
-            </a:r>
-          </a:p>
-        </p:txBody>
-      </p:sp>
-      <p:sp>
-        <p:nvSpPr>
-          <p:cNvPr id="23" name="Rounded Rectangle 22"/>
-          <p:cNvSpPr/>
-          <p:nvPr/>
-        </p:nvSpPr>
-        <p:spPr>
-          <a:xfrm>
-            <a:off x="8503920" y="4023360"/>
-            <a:ext cx="3200400" cy="640080"/>
+              <a:rPr dirty="0"/>
+              <a:t>Highly infiltrative</a:t>
+            </a:r>
+          </a:p>
+        </p:txBody>
+      </p:sp>
+      <p:sp>
+        <p:nvSpPr>
+          <p:cNvPr id="24" name="Rounded Rectangle 23"/>
+          <p:cNvSpPr/>
+          <p:nvPr/>
+        </p:nvSpPr>
+        <p:spPr>
+          <a:xfrm>
+            <a:off x="457200" y="5029200"/>
+            <a:ext cx="11247120" cy="1097280"/>
           </a:xfrm>
           <a:prstGeom prst="roundRect">
             <a:avLst/>
@@ -9695,41 +7782,30 @@
           <a:bodyPr wrap="square" rtlCol="0" anchor="ctr"/>
           <a:lstStyle/>
           <a:p>
-            <a:pPr algn="ctr">
-              <a:defRPr sz="1400" b="1">
+            <a:pPr>
+              <a:defRPr sz="1300">
                 <a:solidFill>
                   <a:srgbClr val="1A1A1A"/>
                 </a:solidFill>
               </a:defRPr>
             </a:pPr>
             <a:r>
-              <a:t>IPS-C  |  Sum ∈ [10, 15]</a:t>
-            </a:r>
-          </a:p>
-          <a:p>
-            <a:pPr>
-              <a:defRPr sz="1100">
-                <a:solidFill>
-                  <a:srgbClr val="555566"/>
-                </a:solidFill>
-              </a:defRPr>
-            </a:pPr>
-            <a:r>
-              <a:t>Highly infiltrative</a:t>
-            </a:r>
-          </a:p>
-        </p:txBody>
-      </p:sp>
-      <p:sp>
-        <p:nvSpPr>
-          <p:cNvPr id="24" name="Rounded Rectangle 23"/>
-          <p:cNvSpPr/>
-          <p:nvPr/>
-        </p:nvSpPr>
-        <p:spPr>
-          <a:xfrm>
-            <a:off x="457200" y="5029200"/>
-            <a:ext cx="11247120" cy="1097280"/>
+              <a:rPr dirty="0"/>
+              <a:t>Infiltration is a SPATIAL property — it depends on HOW tumor interacts with surrounding tissue (NNP), not just what tumor cells look like individually. This is why GNNs are needed: they model spatial relationships between tissue patches.</a:t>
+            </a:r>
+          </a:p>
+        </p:txBody>
+      </p:sp>
+      <p:sp>
+        <p:nvSpPr>
+          <p:cNvPr id="21" name="Rounded Rectangle 20"/>
+          <p:cNvSpPr/>
+          <p:nvPr/>
+        </p:nvSpPr>
+        <p:spPr>
+          <a:xfrm>
+            <a:off x="8503920" y="2468880"/>
+            <a:ext cx="3200400" cy="640080"/>
           </a:xfrm>
           <a:prstGeom prst="roundRect">
             <a:avLst/>
@@ -9764,26 +7840,34 @@
             <a:pPr algn="ctr">
               <a:defRPr sz="1400" b="1">
                 <a:solidFill>
-                  <a:srgbClr val="D35400"/>
+                  <a:srgbClr val="1A1A1A"/>
                 </a:solidFill>
               </a:defRPr>
             </a:pPr>
             <a:r>
               <a:rPr dirty="0"/>
-              <a:t>KEY INSIGHT</a:t>
+              <a:t>IPS-</a:t>
+            </a:r>
+            <a:r>
+              <a:rPr lang="tr-TR" dirty="0"/>
+              <a:t>1</a:t>
+            </a:r>
+            <a:r>
+              <a:rPr dirty="0"/>
+              <a:t>  |  Sum ∈ [3, 6]</a:t>
             </a:r>
           </a:p>
           <a:p>
             <a:pPr>
-              <a:defRPr sz="1300">
-                <a:solidFill>
-                  <a:srgbClr val="1A1A1A"/>
+              <a:defRPr sz="1100">
+                <a:solidFill>
+                  <a:srgbClr val="555566"/>
                 </a:solidFill>
               </a:defRPr>
             </a:pPr>
             <a:r>
               <a:rPr dirty="0"/>
-              <a:t>Infiltration is a SPATIAL property — it depends on HOW tumor interacts with surrounding tissue (NNP), not just what tumor cells look like individually. This is why GNNs are needed: they model spatial relationships between tissue patches.</a:t>
+              <a:t>Non/minimally infiltrative</a:t>
             </a:r>
           </a:p>
         </p:txBody>
@@ -10723,7 +8807,7 @@
         </p:nvSpPr>
         <p:spPr>
           <a:xfrm>
-            <a:off x="6400800" y="1097280"/>
+            <a:off x="7574280" y="1097280"/>
             <a:ext cx="5029200" cy="365760"/>
           </a:xfrm>
           <a:prstGeom prst="rect">
@@ -10759,8 +8843,8 @@
         </p:nvSpPr>
         <p:spPr>
           <a:xfrm>
-            <a:off x="6400800" y="1645920"/>
-            <a:ext cx="5029200" cy="3344505"/>
+            <a:off x="7574280" y="1645920"/>
+            <a:ext cx="5029200" cy="3816429"/>
           </a:xfrm>
           <a:prstGeom prst="rect">
             <a:avLst/>
@@ -11062,6 +9146,35 @@
               <a:rPr dirty="0"/>
               <a:t>  • MAE (mean absolute error)</a:t>
             </a:r>
+            <a:endParaRPr lang="tr-TR" dirty="0"/>
+          </a:p>
+          <a:p>
+            <a:pPr>
+              <a:spcAft>
+                <a:spcPts val="439"/>
+              </a:spcAft>
+              <a:defRPr sz="1200" b="0">
+                <a:solidFill>
+                  <a:srgbClr val="555566"/>
+                </a:solidFill>
+                <a:latin typeface="Calibri"/>
+              </a:defRPr>
+            </a:pPr>
+            <a:endParaRPr lang="en-TR" dirty="0"/>
+          </a:p>
+          <a:p>
+            <a:pPr>
+              <a:spcAft>
+                <a:spcPts val="439"/>
+              </a:spcAft>
+              <a:defRPr sz="1200" b="0">
+                <a:solidFill>
+                  <a:srgbClr val="555566"/>
+                </a:solidFill>
+                <a:latin typeface="Calibri"/>
+              </a:defRPr>
+            </a:pPr>
+            <a:endParaRPr dirty="0"/>
           </a:p>
         </p:txBody>
       </p:sp>
@@ -11748,52 +9861,9 @@
               </a:defRPr>
             </a:pPr>
             <a:r>
+              <a:rPr dirty="0"/>
               <a:t>STAGE 1</a:t>
             </a:r>
-          </a:p>
-        </p:txBody>
-      </p:sp>
-      <p:sp>
-        <p:nvSpPr>
-          <p:cNvPr id="13" name="Down Arrow 12"/>
-          <p:cNvSpPr/>
-          <p:nvPr/>
-        </p:nvSpPr>
-        <p:spPr>
-          <a:xfrm>
-            <a:off x="5760720" y="2377440"/>
-            <a:ext cx="365760" cy="365760"/>
-          </a:xfrm>
-          <a:prstGeom prst="downArrow">
-            <a:avLst/>
-          </a:prstGeom>
-          <a:solidFill>
-            <a:srgbClr val="7F8C8D"/>
-          </a:solidFill>
-          <a:ln>
-            <a:noFill/>
-          </a:ln>
-        </p:spPr>
-        <p:style>
-          <a:lnRef idx="1">
-            <a:schemeClr val="accent1"/>
-          </a:lnRef>
-          <a:fillRef idx="3">
-            <a:schemeClr val="accent1"/>
-          </a:fillRef>
-          <a:effectRef idx="2">
-            <a:schemeClr val="accent1"/>
-          </a:effectRef>
-          <a:fontRef idx="minor">
-            <a:schemeClr val="lt1"/>
-          </a:fontRef>
-        </p:style>
-        <p:txBody>
-          <a:bodyPr rtlCol="0" anchor="ctr"/>
-          <a:lstStyle/>
-          <a:p>
-            <a:pPr algn="ctr"/>
-            <a:endParaRPr/>
           </a:p>
         </p:txBody>
       </p:sp>
@@ -11819,17 +9889,74 @@
           </a:bodyPr>
           <a:lstStyle/>
           <a:p>
-            <a:pPr algn="l">
+            <a:pPr>
               <a:defRPr sz="1200" b="1">
                 <a:solidFill>
-                  <a:srgbClr val="7D3C98"/>
+                  <a:srgbClr val="2980B9"/>
                 </a:solidFill>
                 <a:latin typeface="Calibri"/>
               </a:defRPr>
             </a:pPr>
             <a:r>
-              <a:t>STAGE 2 + 3</a:t>
-            </a:r>
+              <a:rPr sz="1200" b="1" dirty="0">
+                <a:solidFill>
+                  <a:srgbClr val="2980B9"/>
+                </a:solidFill>
+                <a:latin typeface="Calibri"/>
+              </a:rPr>
+              <a:t>STAGE </a:t>
+            </a:r>
+            <a:r>
+              <a:rPr lang="tr-TR" sz="1200" b="1" dirty="0">
+                <a:solidFill>
+                  <a:srgbClr val="2980B9"/>
+                </a:solidFill>
+                <a:latin typeface="Calibri"/>
+              </a:rPr>
+              <a:t> </a:t>
+            </a:r>
+            <a:r>
+              <a:rPr sz="1200" b="1" dirty="0">
+                <a:solidFill>
+                  <a:srgbClr val="2980B9"/>
+                </a:solidFill>
+                <a:latin typeface="Calibri"/>
+              </a:rPr>
+              <a:t>2 </a:t>
+            </a:r>
+            <a:r>
+              <a:rPr lang="tr-TR" sz="1200" b="1" dirty="0">
+                <a:solidFill>
+                  <a:srgbClr val="2980B9"/>
+                </a:solidFill>
+                <a:latin typeface="Calibri"/>
+              </a:rPr>
+              <a:t>-</a:t>
+            </a:r>
+            <a:r>
+              <a:rPr sz="1200" b="1" dirty="0">
+                <a:solidFill>
+                  <a:srgbClr val="2980B9"/>
+                </a:solidFill>
+                <a:latin typeface="Calibri"/>
+              </a:rPr>
+              <a:t> 3</a:t>
+            </a:r>
+            <a:r>
+              <a:rPr lang="tr-TR" sz="1200" b="1" dirty="0">
+                <a:solidFill>
+                  <a:srgbClr val="2980B9"/>
+                </a:solidFill>
+                <a:latin typeface="Calibri"/>
+              </a:rPr>
+              <a:t> - 4</a:t>
+            </a:r>
+            <a:endParaRPr sz="1200" b="1" dirty="0">
+              <a:solidFill>
+                <a:srgbClr val="2980B9"/>
+              </a:solidFill>
+              <a:latin typeface="Calibri"/>
+            </a:endParaRPr>
           </a:p>
         </p:txBody>
       </p:sp>
@@ -12388,50 +10515,6 @@
             <a:r>
               <a:t>node + edge attrs</a:t>
             </a:r>
-          </a:p>
-        </p:txBody>
-      </p:sp>
-      <p:sp>
-        <p:nvSpPr>
-          <p:cNvPr id="24" name="Down Arrow 23"/>
-          <p:cNvSpPr/>
-          <p:nvPr/>
-        </p:nvSpPr>
-        <p:spPr>
-          <a:xfrm>
-            <a:off x="5760720" y="4206240"/>
-            <a:ext cx="365760" cy="365760"/>
-          </a:xfrm>
-          <a:prstGeom prst="downArrow">
-            <a:avLst/>
-          </a:prstGeom>
-          <a:solidFill>
-            <a:srgbClr val="7F8C8D"/>
-          </a:solidFill>
-          <a:ln>
-            <a:noFill/>
-          </a:ln>
-        </p:spPr>
-        <p:style>
-          <a:lnRef idx="1">
-            <a:schemeClr val="accent1"/>
-          </a:lnRef>
-          <a:fillRef idx="3">
-            <a:schemeClr val="accent1"/>
-          </a:fillRef>
-          <a:effectRef idx="2">
-            <a:schemeClr val="accent1"/>
-          </a:effectRef>
-          <a:fontRef idx="minor">
-            <a:schemeClr val="lt1"/>
-          </a:fontRef>
-        </p:style>
-        <p:txBody>
-          <a:bodyPr rtlCol="0" anchor="ctr"/>
-          <a:lstStyle/>
-          <a:p>
-            <a:pPr algn="ctr"/>
-            <a:endParaRPr/>
           </a:p>
         </p:txBody>
       </p:sp>
@@ -16104,7 +14187,15 @@
             </a:pPr>
             <a:r>
               <a:rPr dirty="0"/>
-              <a:t>Stage 3: Graph Construction</a:t>
+              <a:t>Stage 3</a:t>
+            </a:r>
+            <a:r>
+              <a:rPr lang="tr-TR" dirty="0"/>
+              <a:t>-4</a:t>
+            </a:r>
+            <a:r>
+              <a:rPr dirty="0"/>
+              <a:t>: Graph Construction</a:t>
             </a:r>
             <a:r>
               <a:rPr lang="tr-TR" dirty="0"/>
@@ -21028,7 +19119,7 @@
         <p:spPr>
           <a:xfrm>
             <a:off x="457200" y="274320"/>
-            <a:ext cx="10972800" cy="548640"/>
+            <a:ext cx="10972800" cy="523220"/>
           </a:xfrm>
           <a:prstGeom prst="rect">
             <a:avLst/>
@@ -21050,6 +19141,11 @@
               </a:defRPr>
             </a:pPr>
             <a:r>
+              <a:rPr dirty="0">
+                <a:solidFill>
+                  <a:srgbClr val="C00000"/>
+                </a:solidFill>
+              </a:rPr>
               <a:t>Stage 5: GIN Model Architecture</a:t>
             </a:r>
           </a:p>
@@ -21063,7 +19159,7 @@
         </p:nvSpPr>
         <p:spPr>
           <a:xfrm>
-            <a:off x="274320" y="1280160"/>
+            <a:off x="829492" y="1417320"/>
             <a:ext cx="1645920" cy="1828800"/>
           </a:xfrm>
           <a:prstGeom prst="roundRect">
@@ -21104,30 +19200,58 @@
               </a:defRPr>
             </a:pPr>
             <a:r>
-              <a:rPr dirty="0"/>
+              <a:rPr dirty="0">
+                <a:solidFill>
+                  <a:schemeClr val="tx1"/>
+                </a:solidFill>
+              </a:rPr>
               <a:t>Frozen</a:t>
             </a:r>
             <a:br>
-              <a:rPr dirty="0"/>
+              <a:rPr dirty="0">
+                <a:solidFill>
+                  <a:schemeClr val="tx1"/>
+                </a:solidFill>
+              </a:rPr>
             </a:br>
             <a:r>
-              <a:rPr dirty="0"/>
+              <a:rPr dirty="0">
+                <a:solidFill>
+                  <a:schemeClr val="tx1"/>
+                </a:solidFill>
+              </a:rPr>
               <a:t>Projector</a:t>
             </a:r>
           </a:p>
           <a:p>
             <a:br>
-              <a:rPr dirty="0"/>
+              <a:rPr dirty="0">
+                <a:solidFill>
+                  <a:schemeClr val="tx1"/>
+                </a:solidFill>
+              </a:rPr>
             </a:br>
             <a:r>
-              <a:rPr dirty="0"/>
+              <a:rPr dirty="0">
+                <a:solidFill>
+                  <a:schemeClr val="tx1"/>
+                </a:solidFill>
+              </a:rPr>
               <a:t>AE Encoder</a:t>
             </a:r>
             <a:br>
-              <a:rPr dirty="0"/>
+              <a:rPr dirty="0">
+                <a:solidFill>
+                  <a:schemeClr val="tx1"/>
+                </a:solidFill>
+              </a:rPr>
             </a:br>
             <a:r>
-              <a:rPr dirty="0"/>
+              <a:rPr dirty="0">
+                <a:solidFill>
+                  <a:schemeClr val="tx1"/>
+                </a:solidFill>
+              </a:rPr>
               <a:t>1280 → 256</a:t>
             </a:r>
           </a:p>
@@ -21141,7 +19265,7 @@
         </p:nvSpPr>
         <p:spPr>
           <a:xfrm>
-            <a:off x="1920240" y="1920240"/>
+            <a:off x="2475412" y="2057400"/>
             <a:ext cx="274320" cy="228600"/>
           </a:xfrm>
           <a:prstGeom prst="rightArrow">
@@ -21185,7 +19309,7 @@
         </p:nvSpPr>
         <p:spPr>
           <a:xfrm>
-            <a:off x="2194560" y="1280160"/>
+            <a:off x="2749732" y="1417320"/>
             <a:ext cx="1371600" cy="1828800"/>
           </a:xfrm>
           <a:prstGeom prst="roundRect">
@@ -21226,20 +19350,58 @@
               </a:defRPr>
             </a:pPr>
             <a:r>
+              <a:rPr dirty="0" err="1">
+                <a:solidFill>
+                  <a:schemeClr val="tx1"/>
+                </a:solidFill>
+              </a:rPr>
               <a:t>RMSNorm</a:t>
             </a:r>
-            <a:br/>
-            <a:r>
+            <a:br>
+              <a:rPr dirty="0">
+                <a:solidFill>
+                  <a:schemeClr val="tx1"/>
+                </a:solidFill>
+              </a:rPr>
+            </a:br>
+            <a:r>
+              <a:rPr dirty="0">
+                <a:solidFill>
+                  <a:schemeClr val="tx1"/>
+                </a:solidFill>
+              </a:rPr>
               <a:t>(256)</a:t>
             </a:r>
           </a:p>
           <a:p>
-            <a:br/>
-            <a:r>
+            <a:br>
+              <a:rPr dirty="0">
+                <a:solidFill>
+                  <a:schemeClr val="tx1"/>
+                </a:solidFill>
+              </a:rPr>
+            </a:br>
+            <a:r>
+              <a:rPr dirty="0">
+                <a:solidFill>
+                  <a:schemeClr val="tx1"/>
+                </a:solidFill>
+              </a:rPr>
               <a:t>Normalize</a:t>
             </a:r>
-            <a:br/>
-            <a:r>
+            <a:br>
+              <a:rPr dirty="0">
+                <a:solidFill>
+                  <a:schemeClr val="tx1"/>
+                </a:solidFill>
+              </a:rPr>
+            </a:br>
+            <a:r>
+              <a:rPr dirty="0">
+                <a:solidFill>
+                  <a:schemeClr val="tx1"/>
+                </a:solidFill>
+              </a:rPr>
               <a:t>latent features</a:t>
             </a:r>
           </a:p>
@@ -21253,7 +19415,7 @@
         </p:nvSpPr>
         <p:spPr>
           <a:xfrm>
-            <a:off x="3566160" y="1920240"/>
+            <a:off x="4121332" y="2057400"/>
             <a:ext cx="274320" cy="228600"/>
           </a:xfrm>
           <a:prstGeom prst="rightArrow">
@@ -21297,7 +19459,7 @@
         </p:nvSpPr>
         <p:spPr>
           <a:xfrm>
-            <a:off x="3840480" y="1280160"/>
+            <a:off x="4395652" y="1417320"/>
             <a:ext cx="2011680" cy="1828800"/>
           </a:xfrm>
           <a:prstGeom prst="roundRect">
@@ -21338,20 +19500,58 @@
               </a:defRPr>
             </a:pPr>
             <a:r>
+              <a:rPr dirty="0" err="1">
+                <a:solidFill>
+                  <a:schemeClr val="tx1"/>
+                </a:solidFill>
+              </a:rPr>
               <a:t>GINConv</a:t>
             </a:r>
-            <a:br/>
-            <a:r>
+            <a:br>
+              <a:rPr dirty="0">
+                <a:solidFill>
+                  <a:schemeClr val="tx1"/>
+                </a:solidFill>
+              </a:rPr>
+            </a:br>
+            <a:r>
+              <a:rPr dirty="0">
+                <a:solidFill>
+                  <a:schemeClr val="tx1"/>
+                </a:solidFill>
+              </a:rPr>
               <a:t>+ Residual</a:t>
             </a:r>
           </a:p>
           <a:p>
-            <a:br/>
-            <a:r>
+            <a:br>
+              <a:rPr dirty="0">
+                <a:solidFill>
+                  <a:schemeClr val="tx1"/>
+                </a:solidFill>
+              </a:rPr>
+            </a:br>
+            <a:r>
+              <a:rPr dirty="0">
+                <a:solidFill>
+                  <a:schemeClr val="tx1"/>
+                </a:solidFill>
+              </a:rPr>
               <a:t>MLP: 256→256→256</a:t>
             </a:r>
-            <a:br/>
-            <a:r>
+            <a:br>
+              <a:rPr dirty="0">
+                <a:solidFill>
+                  <a:schemeClr val="tx1"/>
+                </a:solidFill>
+              </a:rPr>
+            </a:br>
+            <a:r>
+              <a:rPr dirty="0">
+                <a:solidFill>
+                  <a:schemeClr val="tx1"/>
+                </a:solidFill>
+              </a:rPr>
               <a:t>Sum aggregation</a:t>
             </a:r>
           </a:p>
@@ -21365,7 +19565,7 @@
         </p:nvSpPr>
         <p:spPr>
           <a:xfrm>
-            <a:off x="5852160" y="1920240"/>
+            <a:off x="6407332" y="2057400"/>
             <a:ext cx="274320" cy="228600"/>
           </a:xfrm>
           <a:prstGeom prst="rightArrow">
@@ -21409,8 +19609,8 @@
         </p:nvSpPr>
         <p:spPr>
           <a:xfrm>
-            <a:off x="6126480" y="1280160"/>
-            <a:ext cx="1645920" cy="1828800"/>
+            <a:off x="6681652" y="1417320"/>
+            <a:ext cx="2194560" cy="1828800"/>
           </a:xfrm>
           <a:prstGeom prst="roundRect">
             <a:avLst/>
@@ -21450,20 +19650,66 @@
               </a:defRPr>
             </a:pPr>
             <a:r>
-              <a:t>PanNET-Only</a:t>
-            </a:r>
-            <a:br/>
-            <a:r>
+              <a:rPr dirty="0" err="1">
+                <a:solidFill>
+                  <a:schemeClr val="tx1"/>
+                </a:solidFill>
+              </a:rPr>
+              <a:t>PanNET</a:t>
+            </a:r>
+            <a:r>
+              <a:rPr dirty="0">
+                <a:solidFill>
+                  <a:schemeClr val="tx1"/>
+                </a:solidFill>
+              </a:rPr>
+              <a:t>-Only</a:t>
+            </a:r>
+            <a:br>
+              <a:rPr dirty="0">
+                <a:solidFill>
+                  <a:schemeClr val="tx1"/>
+                </a:solidFill>
+              </a:rPr>
+            </a:br>
+            <a:r>
+              <a:rPr dirty="0">
+                <a:solidFill>
+                  <a:schemeClr val="tx1"/>
+                </a:solidFill>
+              </a:rPr>
               <a:t>Pooling</a:t>
             </a:r>
           </a:p>
           <a:p>
-            <a:br/>
-            <a:r>
+            <a:br>
+              <a:rPr dirty="0">
+                <a:solidFill>
+                  <a:schemeClr val="tx1"/>
+                </a:solidFill>
+              </a:rPr>
+            </a:br>
+            <a:r>
+              <a:rPr dirty="0" err="1">
+                <a:solidFill>
+                  <a:schemeClr val="tx1"/>
+                </a:solidFill>
+              </a:rPr>
               <a:t>global_add_pool</a:t>
             </a:r>
-            <a:br/>
-            <a:r>
+            <a:br>
+              <a:rPr dirty="0">
+                <a:solidFill>
+                  <a:schemeClr val="tx1"/>
+                </a:solidFill>
+              </a:rPr>
+            </a:br>
+            <a:r>
+              <a:rPr dirty="0">
+                <a:solidFill>
+                  <a:schemeClr val="tx1"/>
+                </a:solidFill>
+              </a:rPr>
               <a:t>over tumor nodes</a:t>
             </a:r>
           </a:p>
@@ -21477,7 +19723,7 @@
         </p:nvSpPr>
         <p:spPr>
           <a:xfrm>
-            <a:off x="7772400" y="1920240"/>
+            <a:off x="8944792" y="2103120"/>
             <a:ext cx="274320" cy="228600"/>
           </a:xfrm>
           <a:prstGeom prst="rightArrow">
@@ -21521,7 +19767,7 @@
         </p:nvSpPr>
         <p:spPr>
           <a:xfrm>
-            <a:off x="8046720" y="1280160"/>
+            <a:off x="9287692" y="1371600"/>
             <a:ext cx="1645920" cy="1828800"/>
           </a:xfrm>
           <a:prstGeom prst="roundRect">
@@ -21562,57 +19808,75 @@
               </a:defRPr>
             </a:pPr>
             <a:r>
+              <a:rPr dirty="0">
+                <a:solidFill>
+                  <a:schemeClr val="tx1"/>
+                </a:solidFill>
+              </a:rPr>
               <a:t>Regression</a:t>
             </a:r>
-            <a:br/>
-            <a:r>
+            <a:br>
+              <a:rPr dirty="0">
+                <a:solidFill>
+                  <a:schemeClr val="tx1"/>
+                </a:solidFill>
+              </a:rPr>
+            </a:br>
+            <a:r>
+              <a:rPr dirty="0">
+                <a:solidFill>
+                  <a:schemeClr val="tx1"/>
+                </a:solidFill>
+              </a:rPr>
               <a:t>Head</a:t>
             </a:r>
           </a:p>
           <a:p>
-            <a:br/>
-            <a:r>
+            <a:br>
+              <a:rPr dirty="0">
+                <a:solidFill>
+                  <a:schemeClr val="tx1"/>
+                </a:solidFill>
+              </a:rPr>
+            </a:br>
+            <a:r>
+              <a:rPr dirty="0">
+                <a:solidFill>
+                  <a:schemeClr val="tx1"/>
+                </a:solidFill>
+              </a:rPr>
               <a:t>256→128→1</a:t>
             </a:r>
-            <a:br/>
-            <a:r>
-              <a:t>Huber loss (δ=2)</a:t>
-            </a:r>
-          </a:p>
-        </p:txBody>
-      </p:sp>
-      <p:sp>
-        <p:nvSpPr>
-          <p:cNvPr id="12" name="TextBox 11"/>
-          <p:cNvSpPr txBox="1"/>
-          <p:nvPr/>
-        </p:nvSpPr>
-        <p:spPr>
-          <a:xfrm>
-            <a:off x="457200" y="3383280"/>
-            <a:ext cx="5486400" cy="365760"/>
-          </a:xfrm>
-          <a:prstGeom prst="rect">
-            <a:avLst/>
-          </a:prstGeom>
-          <a:noFill/>
-        </p:spPr>
-        <p:txBody>
-          <a:bodyPr wrap="square">
-            <a:spAutoFit/>
-          </a:bodyPr>
-          <a:lstStyle/>
-          <a:p>
-            <a:pPr algn="l">
-              <a:defRPr sz="1800" b="1">
-                <a:solidFill>
-                  <a:srgbClr val="1A1A1A"/>
-                </a:solidFill>
-                <a:latin typeface="Calibri"/>
-              </a:defRPr>
-            </a:pPr>
-            <a:r>
-              <a:t>GINConv Layer Detail</a:t>
+            <a:br>
+              <a:rPr dirty="0">
+                <a:solidFill>
+                  <a:schemeClr val="tx1"/>
+                </a:solidFill>
+              </a:rPr>
+            </a:br>
+            <a:r>
+              <a:rPr dirty="0">
+                <a:solidFill>
+                  <a:schemeClr val="tx1"/>
+                </a:solidFill>
+              </a:rPr>
+              <a:t>Huber loss (</a:t>
+            </a:r>
+            <a:r>
+              <a:rPr dirty="0" err="1">
+                <a:solidFill>
+                  <a:schemeClr val="tx1"/>
+                </a:solidFill>
+              </a:rPr>
+              <a:t>δ</a:t>
+            </a:r>
+            <a:r>
+              <a:rPr dirty="0">
+                <a:solidFill>
+                  <a:schemeClr val="tx1"/>
+                </a:solidFill>
+              </a:rPr>
+              <a:t>=2)</a:t>
             </a:r>
           </a:p>
         </p:txBody>
@@ -21625,8 +19889,8 @@
         </p:nvSpPr>
         <p:spPr>
           <a:xfrm>
-            <a:off x="457200" y="3840480"/>
-            <a:ext cx="5486400" cy="2743200"/>
+            <a:off x="920932" y="3545860"/>
+            <a:ext cx="5486400" cy="1692771"/>
           </a:xfrm>
           <a:prstGeom prst="rect">
             <a:avLst/>
@@ -21650,9 +19914,7 @@
                 <a:latin typeface="Calibri"/>
               </a:defRPr>
             </a:pPr>
-            <a:r>
-              <a:t>h_v^(k) = MLP( (1+ε) · h_v^(k-1) + Σ h_u^(k-1) )</a:t>
-            </a:r>
+            <a:endParaRPr dirty="0"/>
           </a:p>
           <a:p>
             <a:pPr>
@@ -21666,7 +19928,7 @@
                 <a:latin typeface="Calibri"/>
               </a:defRPr>
             </a:pPr>
-            <a:endParaRPr/>
+            <a:endParaRPr dirty="0"/>
           </a:p>
           <a:p>
             <a:pPr>
@@ -21681,7 +19943,24 @@
               </a:defRPr>
             </a:pPr>
             <a:r>
-              <a:t>MLP: Linear(256,256) → RMSNorm → ReLU → Dropout(0.4)</a:t>
+              <a:rPr dirty="0"/>
+              <a:t>MLP: Linear(256,256) → </a:t>
+            </a:r>
+            <a:r>
+              <a:rPr dirty="0" err="1"/>
+              <a:t>RMSNorm</a:t>
+            </a:r>
+            <a:r>
+              <a:rPr dirty="0"/>
+              <a:t> → </a:t>
+            </a:r>
+            <a:r>
+              <a:rPr dirty="0" err="1"/>
+              <a:t>ReLU</a:t>
+            </a:r>
+            <a:r>
+              <a:rPr dirty="0"/>
+              <a:t> → Dropout(0.4)</a:t>
             </a:r>
           </a:p>
           <a:p>
@@ -21697,8 +19976,22 @@
               </a:defRPr>
             </a:pPr>
             <a:r>
-              <a:t>      → Linear(256,256) → RMSNorm → ReLU</a:t>
-            </a:r>
+              <a:rPr dirty="0"/>
+              <a:t>      → Linear(256,256) → </a:t>
+            </a:r>
+            <a:r>
+              <a:rPr dirty="0" err="1"/>
+              <a:t>RMSNorm</a:t>
+            </a:r>
+            <a:r>
+              <a:rPr dirty="0"/>
+              <a:t> → </a:t>
+            </a:r>
+            <a:r>
+              <a:rPr dirty="0" err="1"/>
+              <a:t>ReLU</a:t>
+            </a:r>
+            <a:endParaRPr dirty="0"/>
           </a:p>
           <a:p>
             <a:pPr>
@@ -21712,7 +20005,7 @@
                 <a:latin typeface="Calibri"/>
               </a:defRPr>
             </a:pPr>
-            <a:endParaRPr/>
+            <a:endParaRPr dirty="0"/>
           </a:p>
           <a:p>
             <a:pPr>
@@ -21727,7 +20020,8 @@
               </a:defRPr>
             </a:pPr>
             <a:r>
-              <a:t>Residual: x = GINConv(dropout(x)) + x</a:t>
+              <a:rPr dirty="0"/>
+              <a:t>Why SUM (not mean/max)?</a:t>
             </a:r>
           </a:p>
           <a:p>
@@ -21742,469 +20036,9 @@
                 <a:latin typeface="Calibri"/>
               </a:defRPr>
             </a:pPr>
-            <a:endParaRPr/>
-          </a:p>
-          <a:p>
-            <a:pPr>
-              <a:spcAft>
-                <a:spcPts val="439"/>
-              </a:spcAft>
-              <a:defRPr sz="1200" b="0">
-                <a:solidFill>
-                  <a:srgbClr val="555566"/>
-                </a:solidFill>
-                <a:latin typeface="Calibri"/>
-              </a:defRPr>
-            </a:pPr>
-            <a:r>
-              <a:t>Why SUM (not mean/max)?</a:t>
-            </a:r>
-          </a:p>
-          <a:p>
-            <a:pPr>
-              <a:spcAft>
-                <a:spcPts val="439"/>
-              </a:spcAft>
-              <a:defRPr sz="1200" b="0">
-                <a:solidFill>
-                  <a:srgbClr val="555566"/>
-                </a:solidFill>
-                <a:latin typeface="Calibri"/>
-              </a:defRPr>
-            </a:pPr>
-            <a:r>
+            <a:r>
+              <a:rPr dirty="0"/>
               <a:t>  Counts tumor-NNP contact points — more invasion = more interfaces</a:t>
-            </a:r>
-          </a:p>
-        </p:txBody>
-      </p:sp>
-      <p:sp>
-        <p:nvSpPr>
-          <p:cNvPr id="14" name="TextBox 13"/>
-          <p:cNvSpPr txBox="1"/>
-          <p:nvPr/>
-        </p:nvSpPr>
-        <p:spPr>
-          <a:xfrm>
-            <a:off x="6858000" y="3383280"/>
-            <a:ext cx="4572000" cy="365760"/>
-          </a:xfrm>
-          <a:prstGeom prst="rect">
-            <a:avLst/>
-          </a:prstGeom>
-          <a:noFill/>
-        </p:spPr>
-        <p:txBody>
-          <a:bodyPr wrap="square">
-            <a:spAutoFit/>
-          </a:bodyPr>
-          <a:lstStyle/>
-          <a:p>
-            <a:pPr algn="l">
-              <a:defRPr sz="1800" b="1">
-                <a:solidFill>
-                  <a:srgbClr val="1A1A1A"/>
-                </a:solidFill>
-                <a:latin typeface="Calibri"/>
-              </a:defRPr>
-            </a:pPr>
-            <a:r>
-              <a:t>Model Parameters</a:t>
-            </a:r>
-          </a:p>
-        </p:txBody>
-      </p:sp>
-      <p:sp>
-        <p:nvSpPr>
-          <p:cNvPr id="15" name="TextBox 14"/>
-          <p:cNvSpPr txBox="1"/>
-          <p:nvPr/>
-        </p:nvSpPr>
-        <p:spPr>
-          <a:xfrm>
-            <a:off x="6858000" y="3931920"/>
-            <a:ext cx="2743200" cy="365760"/>
-          </a:xfrm>
-          <a:prstGeom prst="rect">
-            <a:avLst/>
-          </a:prstGeom>
-          <a:noFill/>
-        </p:spPr>
-        <p:txBody>
-          <a:bodyPr wrap="square">
-            <a:spAutoFit/>
-          </a:bodyPr>
-          <a:lstStyle/>
-          <a:p>
-            <a:pPr algn="l">
-              <a:defRPr sz="1300" b="0">
-                <a:solidFill>
-                  <a:srgbClr val="7D3C98"/>
-                </a:solidFill>
-                <a:latin typeface="Calibri"/>
-              </a:defRPr>
-            </a:pPr>
-            <a:r>
-              <a:t>AutoEncoder (frozen)</a:t>
-            </a:r>
-          </a:p>
-        </p:txBody>
-      </p:sp>
-      <p:sp>
-        <p:nvSpPr>
-          <p:cNvPr id="16" name="TextBox 15"/>
-          <p:cNvSpPr txBox="1"/>
-          <p:nvPr/>
-        </p:nvSpPr>
-        <p:spPr>
-          <a:xfrm>
-            <a:off x="9601200" y="3931920"/>
-            <a:ext cx="1828800" cy="365760"/>
-          </a:xfrm>
-          <a:prstGeom prst="rect">
-            <a:avLst/>
-          </a:prstGeom>
-          <a:noFill/>
-        </p:spPr>
-        <p:txBody>
-          <a:bodyPr wrap="square">
-            <a:spAutoFit/>
-          </a:bodyPr>
-          <a:lstStyle/>
-          <a:p>
-            <a:pPr algn="l">
-              <a:defRPr sz="1300" b="1">
-                <a:solidFill>
-                  <a:srgbClr val="7D3C98"/>
-                </a:solidFill>
-                <a:latin typeface="Calibri"/>
-              </a:defRPr>
-            </a:pPr>
-            <a:r>
-              <a:t>3,021,312</a:t>
-            </a:r>
-          </a:p>
-        </p:txBody>
-      </p:sp>
-      <p:sp>
-        <p:nvSpPr>
-          <p:cNvPr id="17" name="TextBox 16"/>
-          <p:cNvSpPr txBox="1"/>
-          <p:nvPr/>
-        </p:nvSpPr>
-        <p:spPr>
-          <a:xfrm>
-            <a:off x="6858000" y="4389120"/>
-            <a:ext cx="2743200" cy="365760"/>
-          </a:xfrm>
-          <a:prstGeom prst="rect">
-            <a:avLst/>
-          </a:prstGeom>
-          <a:noFill/>
-        </p:spPr>
-        <p:txBody>
-          <a:bodyPr wrap="square">
-            <a:spAutoFit/>
-          </a:bodyPr>
-          <a:lstStyle/>
-          <a:p>
-            <a:pPr algn="l">
-              <a:defRPr sz="1300" b="0">
-                <a:solidFill>
-                  <a:srgbClr val="C0392B"/>
-                </a:solidFill>
-                <a:latin typeface="Calibri"/>
-              </a:defRPr>
-            </a:pPr>
-            <a:r>
-              <a:t>GIN (1 layer)</a:t>
-            </a:r>
-          </a:p>
-        </p:txBody>
-      </p:sp>
-      <p:sp>
-        <p:nvSpPr>
-          <p:cNvPr id="18" name="TextBox 17"/>
-          <p:cNvSpPr txBox="1"/>
-          <p:nvPr/>
-        </p:nvSpPr>
-        <p:spPr>
-          <a:xfrm>
-            <a:off x="9601200" y="4389120"/>
-            <a:ext cx="1828800" cy="365760"/>
-          </a:xfrm>
-          <a:prstGeom prst="rect">
-            <a:avLst/>
-          </a:prstGeom>
-          <a:noFill/>
-        </p:spPr>
-        <p:txBody>
-          <a:bodyPr wrap="square">
-            <a:spAutoFit/>
-          </a:bodyPr>
-          <a:lstStyle/>
-          <a:p>
-            <a:pPr algn="l">
-              <a:defRPr sz="1300" b="1">
-                <a:solidFill>
-                  <a:srgbClr val="C0392B"/>
-                </a:solidFill>
-                <a:latin typeface="Calibri"/>
-              </a:defRPr>
-            </a:pPr>
-            <a:r>
-              <a:t>132,096</a:t>
-            </a:r>
-          </a:p>
-        </p:txBody>
-      </p:sp>
-      <p:sp>
-        <p:nvSpPr>
-          <p:cNvPr id="19" name="TextBox 18"/>
-          <p:cNvSpPr txBox="1"/>
-          <p:nvPr/>
-        </p:nvSpPr>
-        <p:spPr>
-          <a:xfrm>
-            <a:off x="6858000" y="4846320"/>
-            <a:ext cx="2743200" cy="365760"/>
-          </a:xfrm>
-          <a:prstGeom prst="rect">
-            <a:avLst/>
-          </a:prstGeom>
-          <a:noFill/>
-        </p:spPr>
-        <p:txBody>
-          <a:bodyPr wrap="square">
-            <a:spAutoFit/>
-          </a:bodyPr>
-          <a:lstStyle/>
-          <a:p>
-            <a:pPr algn="l">
-              <a:defRPr sz="1300" b="0">
-                <a:solidFill>
-                  <a:srgbClr val="D35400"/>
-                </a:solidFill>
-                <a:latin typeface="Calibri"/>
-              </a:defRPr>
-            </a:pPr>
-            <a:r>
-              <a:t>Regression head</a:t>
-            </a:r>
-          </a:p>
-        </p:txBody>
-      </p:sp>
-      <p:sp>
-        <p:nvSpPr>
-          <p:cNvPr id="20" name="TextBox 19"/>
-          <p:cNvSpPr txBox="1"/>
-          <p:nvPr/>
-        </p:nvSpPr>
-        <p:spPr>
-          <a:xfrm>
-            <a:off x="9601200" y="4846320"/>
-            <a:ext cx="1828800" cy="365760"/>
-          </a:xfrm>
-          <a:prstGeom prst="rect">
-            <a:avLst/>
-          </a:prstGeom>
-          <a:noFill/>
-        </p:spPr>
-        <p:txBody>
-          <a:bodyPr wrap="square">
-            <a:spAutoFit/>
-          </a:bodyPr>
-          <a:lstStyle/>
-          <a:p>
-            <a:pPr algn="l">
-              <a:defRPr sz="1300" b="1">
-                <a:solidFill>
-                  <a:srgbClr val="D35400"/>
-                </a:solidFill>
-                <a:latin typeface="Calibri"/>
-              </a:defRPr>
-            </a:pPr>
-            <a:r>
-              <a:t>33,665</a:t>
-            </a:r>
-          </a:p>
-        </p:txBody>
-      </p:sp>
-      <p:sp>
-        <p:nvSpPr>
-          <p:cNvPr id="21" name="TextBox 20"/>
-          <p:cNvSpPr txBox="1"/>
-          <p:nvPr/>
-        </p:nvSpPr>
-        <p:spPr>
-          <a:xfrm>
-            <a:off x="6858000" y="5303520"/>
-            <a:ext cx="2743200" cy="365760"/>
-          </a:xfrm>
-          <a:prstGeom prst="rect">
-            <a:avLst/>
-          </a:prstGeom>
-          <a:noFill/>
-        </p:spPr>
-        <p:txBody>
-          <a:bodyPr wrap="square">
-            <a:spAutoFit/>
-          </a:bodyPr>
-          <a:lstStyle/>
-          <a:p>
-            <a:pPr algn="l">
-              <a:defRPr sz="1300" b="0">
-                <a:solidFill>
-                  <a:srgbClr val="1A1A1A"/>
-                </a:solidFill>
-                <a:latin typeface="Calibri"/>
-              </a:defRPr>
-            </a:pPr>
-            <a:r>
-              <a:t>Total trainable</a:t>
-            </a:r>
-          </a:p>
-        </p:txBody>
-      </p:sp>
-      <p:sp>
-        <p:nvSpPr>
-          <p:cNvPr id="22" name="TextBox 21"/>
-          <p:cNvSpPr txBox="1"/>
-          <p:nvPr/>
-        </p:nvSpPr>
-        <p:spPr>
-          <a:xfrm>
-            <a:off x="9601200" y="5303520"/>
-            <a:ext cx="1828800" cy="365760"/>
-          </a:xfrm>
-          <a:prstGeom prst="rect">
-            <a:avLst/>
-          </a:prstGeom>
-          <a:noFill/>
-        </p:spPr>
-        <p:txBody>
-          <a:bodyPr wrap="square">
-            <a:spAutoFit/>
-          </a:bodyPr>
-          <a:lstStyle/>
-          <a:p>
-            <a:pPr algn="l">
-              <a:defRPr sz="1300" b="1">
-                <a:solidFill>
-                  <a:srgbClr val="1A1A1A"/>
-                </a:solidFill>
-                <a:latin typeface="Calibri"/>
-              </a:defRPr>
-            </a:pPr>
-            <a:r>
-              <a:t>165,761</a:t>
-            </a:r>
-          </a:p>
-        </p:txBody>
-      </p:sp>
-      <p:sp>
-        <p:nvSpPr>
-          <p:cNvPr id="23" name="TextBox 22"/>
-          <p:cNvSpPr txBox="1"/>
-          <p:nvPr/>
-        </p:nvSpPr>
-        <p:spPr>
-          <a:xfrm>
-            <a:off x="6858000" y="5486400"/>
-            <a:ext cx="4572000" cy="365760"/>
-          </a:xfrm>
-          <a:prstGeom prst="rect">
-            <a:avLst/>
-          </a:prstGeom>
-          <a:noFill/>
-        </p:spPr>
-        <p:txBody>
-          <a:bodyPr wrap="square">
-            <a:spAutoFit/>
-          </a:bodyPr>
-          <a:lstStyle/>
-          <a:p>
-            <a:pPr algn="l">
-              <a:defRPr sz="1400" b="1">
-                <a:solidFill>
-                  <a:srgbClr val="1A1A1A"/>
-                </a:solidFill>
-                <a:latin typeface="Calibri"/>
-              </a:defRPr>
-            </a:pPr>
-            <a:r>
-              <a:t>Training Config</a:t>
-            </a:r>
-          </a:p>
-        </p:txBody>
-      </p:sp>
-      <p:sp>
-        <p:nvSpPr>
-          <p:cNvPr id="24" name="TextBox 23"/>
-          <p:cNvSpPr txBox="1"/>
-          <p:nvPr/>
-        </p:nvSpPr>
-        <p:spPr>
-          <a:xfrm>
-            <a:off x="6858000" y="5852160"/>
-            <a:ext cx="4572000" cy="914400"/>
-          </a:xfrm>
-          <a:prstGeom prst="rect">
-            <a:avLst/>
-          </a:prstGeom>
-          <a:noFill/>
-        </p:spPr>
-        <p:txBody>
-          <a:bodyPr wrap="square">
-            <a:spAutoFit/>
-          </a:bodyPr>
-          <a:lstStyle/>
-          <a:p>
-            <a:pPr>
-              <a:spcAft>
-                <a:spcPts val="419"/>
-              </a:spcAft>
-              <a:defRPr sz="1100" b="0">
-                <a:solidFill>
-                  <a:srgbClr val="555566"/>
-                </a:solidFill>
-                <a:latin typeface="Calibri"/>
-              </a:defRPr>
-            </a:pPr>
-            <a:r>
-              <a:t>AdamW | LR: 1e-4 | WD: 1e-3 | Batch: 8</a:t>
-            </a:r>
-          </a:p>
-          <a:p>
-            <a:pPr>
-              <a:spcAft>
-                <a:spcPts val="419"/>
-              </a:spcAft>
-              <a:defRPr sz="1100" b="0">
-                <a:solidFill>
-                  <a:srgbClr val="555566"/>
-                </a:solidFill>
-                <a:latin typeface="Calibri"/>
-              </a:defRPr>
-            </a:pPr>
-            <a:r>
-              <a:t>Max 200 epochs | Early stop: patience 15</a:t>
-            </a:r>
-          </a:p>
-          <a:p>
-            <a:pPr>
-              <a:spcAft>
-                <a:spcPts val="419"/>
-              </a:spcAft>
-              <a:defRPr sz="1100" b="0">
-                <a:solidFill>
-                  <a:srgbClr val="555566"/>
-                </a:solidFill>
-                <a:latin typeface="Calibri"/>
-              </a:defRPr>
-            </a:pPr>
-            <a:r>
-              <a:t>Scheduler: ReduceLROnPlateau (0.8, pat=5)</a:t>
             </a:r>
           </a:p>
         </p:txBody>
